--- a/ai101/slides/week-11.pptx
+++ b/ai101/slides/week-11.pptx
@@ -12,6 +12,15 @@
     <p:sldId id="260" r:id="rId11"/>
     <p:sldId id="261" r:id="rId12"/>
     <p:sldId id="262" r:id="rId13"/>
+    <p:sldId id="263" r:id="rId14"/>
+    <p:sldId id="264" r:id="rId15"/>
+    <p:sldId id="265" r:id="rId16"/>
+    <p:sldId id="266" r:id="rId17"/>
+    <p:sldId id="267" r:id="rId18"/>
+    <p:sldId id="268" r:id="rId19"/>
+    <p:sldId id="269" r:id="rId20"/>
+    <p:sldId id="270" r:id="rId21"/>
+    <p:sldId id="271" r:id="rId22"/>
   </p:sldIdLst>
   <p:sldSz cx="12191695" cy="6858000" type="screen4x3"/>
   <p:notesSz cx="6858000" cy="9144000"/>
@@ -3166,6 +3175,1850 @@
 </p:sld>
 </file>
 
+<file path=ppt/slides/slide10.xml><?xml version="1.0" encoding="utf-8"?>
+<p:sld xmlns:a="http://schemas.openxmlformats.org/drawingml/2006/main" xmlns:p="http://schemas.openxmlformats.org/presentationml/2006/main" xmlns:r="http://schemas.openxmlformats.org/officeDocument/2006/relationships">
+  <p:cSld>
+    <p:bg>
+      <p:bgPr>
+        <a:solidFill>
+          <a:srgbClr val="102127"/>
+        </a:solidFill>
+        <a:effectLst/>
+      </p:bgPr>
+    </p:bg>
+    <p:spTree>
+      <p:nvGrpSpPr>
+        <p:cNvPr id="1" name=""/>
+        <p:cNvGrpSpPr/>
+        <p:nvPr/>
+      </p:nvGrpSpPr>
+      <p:grpSpPr/>
+      <p:sp>
+        <p:nvSpPr>
+          <p:cNvPr id="2" name="TextBox 1"/>
+          <p:cNvSpPr txBox="1"/>
+          <p:nvPr/>
+        </p:nvSpPr>
+        <p:spPr>
+          <a:xfrm>
+            <a:off x="502920" y="274320"/>
+            <a:ext cx="11155680" cy="731520"/>
+          </a:xfrm>
+          <a:prstGeom prst="rect">
+            <a:avLst/>
+          </a:prstGeom>
+          <a:noFill/>
+        </p:spPr>
+        <p:txBody>
+          <a:bodyPr wrap="none">
+            <a:spAutoFit/>
+          </a:bodyPr>
+          <a:lstStyle/>
+          <a:p>
+            <a:r>
+              <a:rPr sz="2600" b="1">
+                <a:solidFill>
+                  <a:srgbClr val="01AEFD"/>
+                </a:solidFill>
+              </a:rPr>
+              <a:t>Type this into script.js  (5 of 6)</a:t>
+            </a:r>
+          </a:p>
+        </p:txBody>
+      </p:sp>
+      <p:sp>
+        <p:nvSpPr>
+          <p:cNvPr id="3" name="TextBox 2"/>
+          <p:cNvSpPr txBox="1"/>
+          <p:nvPr/>
+        </p:nvSpPr>
+        <p:spPr>
+          <a:xfrm>
+            <a:off x="502920" y="1051560"/>
+            <a:ext cx="11155680" cy="5394960"/>
+          </a:xfrm>
+          <a:prstGeom prst="rect">
+            <a:avLst/>
+          </a:prstGeom>
+          <a:noFill/>
+        </p:spPr>
+        <p:txBody>
+          <a:bodyPr wrap="none">
+            <a:spAutoFit/>
+          </a:bodyPr>
+          <a:lstStyle/>
+          <a:p>
+            <a:pPr>
+              <a:spcAft>
+                <a:spcPts val="0"/>
+              </a:spcAft>
+            </a:pPr>
+            <a:r>
+              <a:rPr sz="1400">
+                <a:solidFill>
+                  <a:srgbClr val="6D8C97"/>
+                </a:solidFill>
+                <a:latin typeface="Consolas"/>
+              </a:rPr>
+              <a:t> 120  </a:t>
+            </a:r>
+            <a:r>
+              <a:rPr sz="1400">
+                <a:solidFill>
+                  <a:srgbClr val="DCECEF"/>
+                </a:solidFill>
+                <a:latin typeface="Consolas"/>
+              </a:rPr>
+              <a:t>      messages: [</a:t>
+            </a:r>
+          </a:p>
+          <a:p>
+            <a:pPr>
+              <a:spcAft>
+                <a:spcPts val="0"/>
+              </a:spcAft>
+            </a:pPr>
+            <a:r>
+              <a:rPr sz="1400">
+                <a:solidFill>
+                  <a:srgbClr val="6D8C97"/>
+                </a:solidFill>
+                <a:latin typeface="Consolas"/>
+              </a:rPr>
+              <a:t> 121  </a:t>
+            </a:r>
+            <a:r>
+              <a:rPr sz="1400">
+                <a:solidFill>
+                  <a:srgbClr val="DCECEF"/>
+                </a:solidFill>
+                <a:latin typeface="Consolas"/>
+              </a:rPr>
+              <a:t>        // Week 6: the standing instruction, read before every single reply.</a:t>
+            </a:r>
+          </a:p>
+          <a:p>
+            <a:pPr>
+              <a:spcAft>
+                <a:spcPts val="0"/>
+              </a:spcAft>
+            </a:pPr>
+            <a:r>
+              <a:rPr sz="1400">
+                <a:solidFill>
+                  <a:srgbClr val="6D8C97"/>
+                </a:solidFill>
+                <a:latin typeface="Consolas"/>
+              </a:rPr>
+              <a:t> 122  </a:t>
+            </a:r>
+            <a:r>
+              <a:rPr sz="1400">
+                <a:solidFill>
+                  <a:srgbClr val="DCECEF"/>
+                </a:solidFill>
+                <a:latin typeface="Consolas"/>
+              </a:rPr>
+              <a:t>        { role: 'system', content: personaBox.value },</a:t>
+            </a:r>
+          </a:p>
+          <a:p>
+            <a:pPr>
+              <a:spcAft>
+                <a:spcPts val="0"/>
+              </a:spcAft>
+            </a:pPr>
+            <a:r>
+              <a:rPr sz="1400">
+                <a:solidFill>
+                  <a:srgbClr val="6D8C97"/>
+                </a:solidFill>
+                <a:latin typeface="Consolas"/>
+              </a:rPr>
+              <a:t> 123  </a:t>
+            </a:r>
+            <a:r>
+              <a:rPr sz="1400">
+                <a:solidFill>
+                  <a:srgbClr val="DCECEF"/>
+                </a:solidFill>
+                <a:latin typeface="Consolas"/>
+              </a:rPr>
+              <a:t>        // Week 7: everything said so far, oldest first.</a:t>
+            </a:r>
+          </a:p>
+          <a:p>
+            <a:pPr>
+              <a:spcAft>
+                <a:spcPts val="0"/>
+              </a:spcAft>
+            </a:pPr>
+            <a:r>
+              <a:rPr sz="1400">
+                <a:solidFill>
+                  <a:srgbClr val="6D8C97"/>
+                </a:solidFill>
+                <a:latin typeface="Consolas"/>
+              </a:rPr>
+              <a:t> 124  </a:t>
+            </a:r>
+            <a:r>
+              <a:rPr sz="1400">
+                <a:solidFill>
+                  <a:srgbClr val="DCECEF"/>
+                </a:solidFill>
+                <a:latin typeface="Consolas"/>
+              </a:rPr>
+              <a:t>        ...history</a:t>
+            </a:r>
+          </a:p>
+          <a:p>
+            <a:pPr>
+              <a:spcAft>
+                <a:spcPts val="0"/>
+              </a:spcAft>
+            </a:pPr>
+            <a:r>
+              <a:rPr sz="1400">
+                <a:solidFill>
+                  <a:srgbClr val="6D8C97"/>
+                </a:solidFill>
+                <a:latin typeface="Consolas"/>
+              </a:rPr>
+              <a:t> 125  </a:t>
+            </a:r>
+            <a:r>
+              <a:rPr sz="1400">
+                <a:solidFill>
+                  <a:srgbClr val="DCECEF"/>
+                </a:solidFill>
+                <a:latin typeface="Consolas"/>
+              </a:rPr>
+              <a:t>      ]</a:t>
+            </a:r>
+          </a:p>
+          <a:p>
+            <a:pPr>
+              <a:spcAft>
+                <a:spcPts val="0"/>
+              </a:spcAft>
+            </a:pPr>
+            <a:r>
+              <a:rPr sz="1400">
+                <a:solidFill>
+                  <a:srgbClr val="6D8C97"/>
+                </a:solidFill>
+                <a:latin typeface="Consolas"/>
+              </a:rPr>
+              <a:t> 126  </a:t>
+            </a:r>
+            <a:r>
+              <a:rPr sz="1400">
+                <a:solidFill>
+                  <a:srgbClr val="DCECEF"/>
+                </a:solidFill>
+                <a:latin typeface="Consolas"/>
+              </a:rPr>
+              <a:t>    })</a:t>
+            </a:r>
+          </a:p>
+          <a:p>
+            <a:pPr>
+              <a:spcAft>
+                <a:spcPts val="0"/>
+              </a:spcAft>
+            </a:pPr>
+            <a:r>
+              <a:rPr sz="1400">
+                <a:solidFill>
+                  <a:srgbClr val="6D8C97"/>
+                </a:solidFill>
+                <a:latin typeface="Consolas"/>
+              </a:rPr>
+              <a:t> 127  </a:t>
+            </a:r>
+            <a:r>
+              <a:rPr sz="1400">
+                <a:solidFill>
+                  <a:srgbClr val="DCECEF"/>
+                </a:solidFill>
+                <a:latin typeface="Consolas"/>
+              </a:rPr>
+              <a:t>  });</a:t>
+            </a:r>
+          </a:p>
+          <a:p>
+            <a:pPr>
+              <a:spcAft>
+                <a:spcPts val="0"/>
+              </a:spcAft>
+            </a:pPr>
+            <a:r>
+              <a:rPr sz="1400">
+                <a:solidFill>
+                  <a:srgbClr val="6D8C97"/>
+                </a:solidFill>
+                <a:latin typeface="Consolas"/>
+              </a:rPr>
+              <a:t> 128  </a:t>
+            </a:r>
+            <a:r>
+              <a:rPr sz="1400">
+                <a:solidFill>
+                  <a:srgbClr val="DCECEF"/>
+                </a:solidFill>
+                <a:latin typeface="Consolas"/>
+              </a:rPr>
+              <a:t> </a:t>
+            </a:r>
+          </a:p>
+          <a:p>
+            <a:pPr>
+              <a:spcAft>
+                <a:spcPts val="0"/>
+              </a:spcAft>
+            </a:pPr>
+            <a:r>
+              <a:rPr sz="1400">
+                <a:solidFill>
+                  <a:srgbClr val="6D8C97"/>
+                </a:solidFill>
+                <a:latin typeface="Consolas"/>
+              </a:rPr>
+              <a:t> 129  </a:t>
+            </a:r>
+            <a:r>
+              <a:rPr sz="1400">
+                <a:solidFill>
+                  <a:srgbClr val="DCECEF"/>
+                </a:solidFill>
+                <a:latin typeface="Consolas"/>
+              </a:rPr>
+              <a:t>  // Week 5: fetch does NOT throw when the server says no. A 429 arrives</a:t>
+            </a:r>
+          </a:p>
+          <a:p>
+            <a:pPr>
+              <a:spcAft>
+                <a:spcPts val="0"/>
+              </a:spcAft>
+            </a:pPr>
+            <a:r>
+              <a:rPr sz="1400">
+                <a:solidFill>
+                  <a:srgbClr val="6D8C97"/>
+                </a:solidFill>
+                <a:latin typeface="Consolas"/>
+              </a:rPr>
+              <a:t> 130  </a:t>
+            </a:r>
+            <a:r>
+              <a:rPr sz="1400">
+                <a:solidFill>
+                  <a:srgbClr val="DCECEF"/>
+                </a:solidFill>
+                <a:latin typeface="Consolas"/>
+              </a:rPr>
+              <a:t>  // looking just like a success until you actually check.</a:t>
+            </a:r>
+          </a:p>
+          <a:p>
+            <a:pPr>
+              <a:spcAft>
+                <a:spcPts val="0"/>
+              </a:spcAft>
+            </a:pPr>
+            <a:r>
+              <a:rPr sz="1400">
+                <a:solidFill>
+                  <a:srgbClr val="6D8C97"/>
+                </a:solidFill>
+                <a:latin typeface="Consolas"/>
+              </a:rPr>
+              <a:t> 131  </a:t>
+            </a:r>
+            <a:r>
+              <a:rPr sz="1400">
+                <a:solidFill>
+                  <a:srgbClr val="DCECEF"/>
+                </a:solidFill>
+                <a:latin typeface="Consolas"/>
+              </a:rPr>
+              <a:t>  if (!res.ok) {</a:t>
+            </a:r>
+          </a:p>
+          <a:p>
+            <a:pPr>
+              <a:spcAft>
+                <a:spcPts val="0"/>
+              </a:spcAft>
+            </a:pPr>
+            <a:r>
+              <a:rPr sz="1400">
+                <a:solidFill>
+                  <a:srgbClr val="6D8C97"/>
+                </a:solidFill>
+                <a:latin typeface="Consolas"/>
+              </a:rPr>
+              <a:t> 132  </a:t>
+            </a:r>
+            <a:r>
+              <a:rPr sz="1400">
+                <a:solidFill>
+                  <a:srgbClr val="DCECEF"/>
+                </a:solidFill>
+                <a:latin typeface="Consolas"/>
+              </a:rPr>
+              <a:t>    const problem = await res.json();</a:t>
+            </a:r>
+          </a:p>
+          <a:p>
+            <a:pPr>
+              <a:spcAft>
+                <a:spcPts val="0"/>
+              </a:spcAft>
+            </a:pPr>
+            <a:r>
+              <a:rPr sz="1400">
+                <a:solidFill>
+                  <a:srgbClr val="6D8C97"/>
+                </a:solidFill>
+                <a:latin typeface="Consolas"/>
+              </a:rPr>
+              <a:t> 133  </a:t>
+            </a:r>
+            <a:r>
+              <a:rPr sz="1400">
+                <a:solidFill>
+                  <a:srgbClr val="DCECEF"/>
+                </a:solidFill>
+                <a:latin typeface="Consolas"/>
+              </a:rPr>
+              <a:t>    throw new Error(explain(res.status, problem));</a:t>
+            </a:r>
+          </a:p>
+          <a:p>
+            <a:pPr>
+              <a:spcAft>
+                <a:spcPts val="0"/>
+              </a:spcAft>
+            </a:pPr>
+            <a:r>
+              <a:rPr sz="1400">
+                <a:solidFill>
+                  <a:srgbClr val="6D8C97"/>
+                </a:solidFill>
+                <a:latin typeface="Consolas"/>
+              </a:rPr>
+              <a:t> 134  </a:t>
+            </a:r>
+            <a:r>
+              <a:rPr sz="1400">
+                <a:solidFill>
+                  <a:srgbClr val="DCECEF"/>
+                </a:solidFill>
+                <a:latin typeface="Consolas"/>
+              </a:rPr>
+              <a:t>  }</a:t>
+            </a:r>
+          </a:p>
+        </p:txBody>
+      </p:sp>
+    </p:spTree>
+  </p:cSld>
+  <p:clrMapOvr>
+    <a:masterClrMapping/>
+  </p:clrMapOvr>
+</p:sld>
+</file>
+
+<file path=ppt/slides/slide11.xml><?xml version="1.0" encoding="utf-8"?>
+<p:sld xmlns:a="http://schemas.openxmlformats.org/drawingml/2006/main" xmlns:p="http://schemas.openxmlformats.org/presentationml/2006/main" xmlns:r="http://schemas.openxmlformats.org/officeDocument/2006/relationships">
+  <p:cSld>
+    <p:bg>
+      <p:bgPr>
+        <a:solidFill>
+          <a:srgbClr val="102127"/>
+        </a:solidFill>
+        <a:effectLst/>
+      </p:bgPr>
+    </p:bg>
+    <p:spTree>
+      <p:nvGrpSpPr>
+        <p:cNvPr id="1" name=""/>
+        <p:cNvGrpSpPr/>
+        <p:nvPr/>
+      </p:nvGrpSpPr>
+      <p:grpSpPr/>
+      <p:sp>
+        <p:nvSpPr>
+          <p:cNvPr id="2" name="TextBox 1"/>
+          <p:cNvSpPr txBox="1"/>
+          <p:nvPr/>
+        </p:nvSpPr>
+        <p:spPr>
+          <a:xfrm>
+            <a:off x="502920" y="274320"/>
+            <a:ext cx="11155680" cy="731520"/>
+          </a:xfrm>
+          <a:prstGeom prst="rect">
+            <a:avLst/>
+          </a:prstGeom>
+          <a:noFill/>
+        </p:spPr>
+        <p:txBody>
+          <a:bodyPr wrap="none">
+            <a:spAutoFit/>
+          </a:bodyPr>
+          <a:lstStyle/>
+          <a:p>
+            <a:r>
+              <a:rPr sz="2600" b="1">
+                <a:solidFill>
+                  <a:srgbClr val="01AEFD"/>
+                </a:solidFill>
+              </a:rPr>
+              <a:t>Type this into script.js  (6 of 6)</a:t>
+            </a:r>
+          </a:p>
+        </p:txBody>
+      </p:sp>
+      <p:sp>
+        <p:nvSpPr>
+          <p:cNvPr id="3" name="TextBox 2"/>
+          <p:cNvSpPr txBox="1"/>
+          <p:nvPr/>
+        </p:nvSpPr>
+        <p:spPr>
+          <a:xfrm>
+            <a:off x="502920" y="1051560"/>
+            <a:ext cx="11155680" cy="5394960"/>
+          </a:xfrm>
+          <a:prstGeom prst="rect">
+            <a:avLst/>
+          </a:prstGeom>
+          <a:noFill/>
+        </p:spPr>
+        <p:txBody>
+          <a:bodyPr wrap="none">
+            <a:spAutoFit/>
+          </a:bodyPr>
+          <a:lstStyle/>
+          <a:p>
+            <a:pPr>
+              <a:spcAft>
+                <a:spcPts val="0"/>
+              </a:spcAft>
+            </a:pPr>
+            <a:r>
+              <a:rPr sz="1700">
+                <a:solidFill>
+                  <a:srgbClr val="6D8C97"/>
+                </a:solidFill>
+                <a:latin typeface="Consolas"/>
+              </a:rPr>
+              <a:t> 135  </a:t>
+            </a:r>
+            <a:r>
+              <a:rPr sz="1700">
+                <a:solidFill>
+                  <a:srgbClr val="DCECEF"/>
+                </a:solidFill>
+                <a:latin typeface="Consolas"/>
+              </a:rPr>
+              <a:t> </a:t>
+            </a:r>
+          </a:p>
+          <a:p>
+            <a:pPr>
+              <a:spcAft>
+                <a:spcPts val="0"/>
+              </a:spcAft>
+            </a:pPr>
+            <a:r>
+              <a:rPr sz="1700">
+                <a:solidFill>
+                  <a:srgbClr val="6D8C97"/>
+                </a:solidFill>
+                <a:latin typeface="Consolas"/>
+              </a:rPr>
+              <a:t> 136  </a:t>
+            </a:r>
+            <a:r>
+              <a:rPr sz="1700">
+                <a:solidFill>
+                  <a:srgbClr val="7FE0A0"/>
+                </a:solidFill>
+                <a:latin typeface="Consolas"/>
+              </a:rPr>
+              <a:t>  return readStream(res, onPiece);   // hand the drawing job through</a:t>
+            </a:r>
+          </a:p>
+          <a:p>
+            <a:pPr>
+              <a:spcAft>
+                <a:spcPts val="0"/>
+              </a:spcAft>
+            </a:pPr>
+            <a:r>
+              <a:rPr sz="1700">
+                <a:solidFill>
+                  <a:srgbClr val="6D8C97"/>
+                </a:solidFill>
+                <a:latin typeface="Consolas"/>
+              </a:rPr>
+              <a:t> 137  </a:t>
+            </a:r>
+            <a:r>
+              <a:rPr sz="1700">
+                <a:solidFill>
+                  <a:srgbClr val="DCECEF"/>
+                </a:solidFill>
+                <a:latin typeface="Consolas"/>
+              </a:rPr>
+              <a:t>}</a:t>
+            </a:r>
+          </a:p>
+        </p:txBody>
+      </p:sp>
+    </p:spTree>
+  </p:cSld>
+  <p:clrMapOvr>
+    <a:masterClrMapping/>
+  </p:clrMapOvr>
+</p:sld>
+</file>
+
+<file path=ppt/slides/slide12.xml><?xml version="1.0" encoding="utf-8"?>
+<p:sld xmlns:a="http://schemas.openxmlformats.org/drawingml/2006/main" xmlns:p="http://schemas.openxmlformats.org/presentationml/2006/main" xmlns:r="http://schemas.openxmlformats.org/officeDocument/2006/relationships">
+  <p:cSld>
+    <p:spTree>
+      <p:nvGrpSpPr>
+        <p:cNvPr id="1" name=""/>
+        <p:cNvGrpSpPr/>
+        <p:nvPr/>
+      </p:nvGrpSpPr>
+      <p:grpSpPr/>
+      <p:sp>
+        <p:nvSpPr>
+          <p:cNvPr id="2" name="Title 1"/>
+          <p:cNvSpPr>
+            <a:spLocks noGrp="1"/>
+          </p:cNvSpPr>
+          <p:nvPr>
+            <p:ph type="title"/>
+          </p:nvPr>
+        </p:nvSpPr>
+        <p:spPr/>
+        <p:txBody>
+          <a:bodyPr/>
+          <a:lstStyle/>
+          <a:p>
+            <a:r>
+              <a:rPr sz="3800" b="1">
+                <a:solidFill>
+                  <a:srgbClr val="1F2A37"/>
+                </a:solidFill>
+              </a:rPr>
+              <a:t>Same time. Feels faster.</a:t>
+            </a:r>
+          </a:p>
+        </p:txBody>
+      </p:sp>
+      <p:sp>
+        <p:nvSpPr>
+          <p:cNvPr id="3" name="TextBox 2"/>
+          <p:cNvSpPr txBox="1"/>
+          <p:nvPr/>
+        </p:nvSpPr>
+        <p:spPr>
+          <a:xfrm>
+            <a:off x="822960" y="1828800"/>
+            <a:ext cx="10515600" cy="4206240"/>
+          </a:xfrm>
+          <a:prstGeom prst="rect">
+            <a:avLst/>
+          </a:prstGeom>
+          <a:noFill/>
+        </p:spPr>
+        <p:txBody>
+          <a:bodyPr wrap="square">
+            <a:spAutoFit/>
+          </a:bodyPr>
+          <a:lstStyle/>
+          <a:p>
+            <a:pPr>
+              <a:spcAft>
+                <a:spcPts val="1400"/>
+              </a:spcAft>
+            </a:pPr>
+            <a:r>
+              <a:rPr sz="2400">
+                <a:solidFill>
+                  <a:srgbClr val="1F2A37"/>
+                </a:solidFill>
+              </a:rPr>
+              <a:t>• You can start reading immediately</a:t>
+            </a:r>
+          </a:p>
+          <a:p>
+            <a:pPr>
+              <a:spcAft>
+                <a:spcPts val="1400"/>
+              </a:spcAft>
+            </a:pPr>
+            <a:r>
+              <a:rPr sz="2400">
+                <a:solidFill>
+                  <a:srgbClr val="1F2A37"/>
+                </a:solidFill>
+              </a:rPr>
+              <a:t>• Feeling fast is a real engineering goal</a:t>
+            </a:r>
+          </a:p>
+        </p:txBody>
+      </p:sp>
+    </p:spTree>
+  </p:cSld>
+  <p:clrMapOvr>
+    <a:masterClrMapping/>
+  </p:clrMapOvr>
+</p:sld>
+</file>
+
+<file path=ppt/slides/slide13.xml><?xml version="1.0" encoding="utf-8"?>
+<p:sld xmlns:a="http://schemas.openxmlformats.org/drawingml/2006/main" xmlns:p="http://schemas.openxmlformats.org/presentationml/2006/main" xmlns:r="http://schemas.openxmlformats.org/officeDocument/2006/relationships">
+  <p:cSld>
+    <p:bg>
+      <p:bgPr>
+        <a:solidFill>
+          <a:srgbClr val="102127"/>
+        </a:solidFill>
+        <a:effectLst/>
+      </p:bgPr>
+    </p:bg>
+    <p:spTree>
+      <p:nvGrpSpPr>
+        <p:cNvPr id="1" name=""/>
+        <p:cNvGrpSpPr/>
+        <p:nvPr/>
+      </p:nvGrpSpPr>
+      <p:grpSpPr/>
+      <p:sp>
+        <p:nvSpPr>
+          <p:cNvPr id="2" name="TextBox 1"/>
+          <p:cNvSpPr txBox="1"/>
+          <p:nvPr/>
+        </p:nvSpPr>
+        <p:spPr>
+          <a:xfrm>
+            <a:off x="502920" y="274320"/>
+            <a:ext cx="11155680" cy="731520"/>
+          </a:xfrm>
+          <a:prstGeom prst="rect">
+            <a:avLst/>
+          </a:prstGeom>
+          <a:noFill/>
+        </p:spPr>
+        <p:txBody>
+          <a:bodyPr wrap="none">
+            <a:spAutoFit/>
+          </a:bodyPr>
+          <a:lstStyle/>
+          <a:p>
+            <a:r>
+              <a:rPr sz="2600" b="1">
+                <a:solidFill>
+                  <a:srgbClr val="01AEFD"/>
+                </a:solidFill>
+              </a:rPr>
+              <a:t>Type this into script.js  (1 of 3)</a:t>
+            </a:r>
+          </a:p>
+        </p:txBody>
+      </p:sp>
+      <p:sp>
+        <p:nvSpPr>
+          <p:cNvPr id="3" name="TextBox 2"/>
+          <p:cNvSpPr txBox="1"/>
+          <p:nvPr/>
+        </p:nvSpPr>
+        <p:spPr>
+          <a:xfrm>
+            <a:off x="502920" y="1051560"/>
+            <a:ext cx="11155680" cy="5394960"/>
+          </a:xfrm>
+          <a:prstGeom prst="rect">
+            <a:avLst/>
+          </a:prstGeom>
+          <a:noFill/>
+        </p:spPr>
+        <p:txBody>
+          <a:bodyPr wrap="none">
+            <a:spAutoFit/>
+          </a:bodyPr>
+          <a:lstStyle/>
+          <a:p>
+            <a:pPr>
+              <a:spcAft>
+                <a:spcPts val="0"/>
+              </a:spcAft>
+            </a:pPr>
+            <a:r>
+              <a:rPr sz="1400">
+                <a:solidFill>
+                  <a:srgbClr val="6D8C97"/>
+                </a:solidFill>
+                <a:latin typeface="Consolas"/>
+              </a:rPr>
+              <a:t> 143  </a:t>
+            </a:r>
+            <a:r>
+              <a:rPr sz="1400">
+                <a:solidFill>
+                  <a:srgbClr val="DCECEF"/>
+                </a:solidFill>
+                <a:latin typeface="Consolas"/>
+              </a:rPr>
+              <a:t> </a:t>
+            </a:r>
+          </a:p>
+          <a:p>
+            <a:pPr>
+              <a:spcAft>
+                <a:spcPts val="0"/>
+              </a:spcAft>
+            </a:pPr>
+            <a:r>
+              <a:rPr sz="1400">
+                <a:solidFill>
+                  <a:srgbClr val="6D8C97"/>
+                </a:solidFill>
+                <a:latin typeface="Consolas"/>
+              </a:rPr>
+              <a:t> 144  </a:t>
+            </a:r>
+            <a:r>
+              <a:rPr sz="1400">
+                <a:solidFill>
+                  <a:srgbClr val="DCECEF"/>
+                </a:solidFill>
+                <a:latin typeface="Consolas"/>
+              </a:rPr>
+              <a:t>// The browser calls this when the form is submitted.</a:t>
+            </a:r>
+          </a:p>
+          <a:p>
+            <a:pPr>
+              <a:spcAft>
+                <a:spcPts val="0"/>
+              </a:spcAft>
+            </a:pPr>
+            <a:r>
+              <a:rPr sz="1400">
+                <a:solidFill>
+                  <a:srgbClr val="6D8C97"/>
+                </a:solidFill>
+                <a:latin typeface="Consolas"/>
+              </a:rPr>
+              <a:t> 145  </a:t>
+            </a:r>
+            <a:r>
+              <a:rPr sz="1400">
+                <a:solidFill>
+                  <a:srgbClr val="DCECEF"/>
+                </a:solidFill>
+                <a:latin typeface="Consolas"/>
+              </a:rPr>
+              <a:t>composer.addEventListener('submit', async function (event) {</a:t>
+            </a:r>
+          </a:p>
+          <a:p>
+            <a:pPr>
+              <a:spcAft>
+                <a:spcPts val="0"/>
+              </a:spcAft>
+            </a:pPr>
+            <a:r>
+              <a:rPr sz="1400">
+                <a:solidFill>
+                  <a:srgbClr val="6D8C97"/>
+                </a:solidFill>
+                <a:latin typeface="Consolas"/>
+              </a:rPr>
+              <a:t> 146  </a:t>
+            </a:r>
+            <a:r>
+              <a:rPr sz="1400">
+                <a:solidFill>
+                  <a:srgbClr val="DCECEF"/>
+                </a:solidFill>
+                <a:latin typeface="Consolas"/>
+              </a:rPr>
+              <a:t>  event.preventDefault();</a:t>
+            </a:r>
+          </a:p>
+          <a:p>
+            <a:pPr>
+              <a:spcAft>
+                <a:spcPts val="0"/>
+              </a:spcAft>
+            </a:pPr>
+            <a:r>
+              <a:rPr sz="1400">
+                <a:solidFill>
+                  <a:srgbClr val="6D8C97"/>
+                </a:solidFill>
+                <a:latin typeface="Consolas"/>
+              </a:rPr>
+              <a:t> 147  </a:t>
+            </a:r>
+            <a:r>
+              <a:rPr sz="1400">
+                <a:solidFill>
+                  <a:srgbClr val="DCECEF"/>
+                </a:solidFill>
+                <a:latin typeface="Consolas"/>
+              </a:rPr>
+              <a:t>  const text = promptBox.value.trim();</a:t>
+            </a:r>
+          </a:p>
+          <a:p>
+            <a:pPr>
+              <a:spcAft>
+                <a:spcPts val="0"/>
+              </a:spcAft>
+            </a:pPr>
+            <a:r>
+              <a:rPr sz="1400">
+                <a:solidFill>
+                  <a:srgbClr val="6D8C97"/>
+                </a:solidFill>
+                <a:latin typeface="Consolas"/>
+              </a:rPr>
+              <a:t> 148  </a:t>
+            </a:r>
+            <a:r>
+              <a:rPr sz="1400">
+                <a:solidFill>
+                  <a:srgbClr val="DCECEF"/>
+                </a:solidFill>
+                <a:latin typeface="Consolas"/>
+              </a:rPr>
+              <a:t>  if (text === '') { return; }</a:t>
+            </a:r>
+          </a:p>
+          <a:p>
+            <a:pPr>
+              <a:spcAft>
+                <a:spcPts val="0"/>
+              </a:spcAft>
+            </a:pPr>
+            <a:r>
+              <a:rPr sz="1400">
+                <a:solidFill>
+                  <a:srgbClr val="6D8C97"/>
+                </a:solidFill>
+                <a:latin typeface="Consolas"/>
+              </a:rPr>
+              <a:t> 149  </a:t>
+            </a:r>
+            <a:r>
+              <a:rPr sz="1400">
+                <a:solidFill>
+                  <a:srgbClr val="DCECEF"/>
+                </a:solidFill>
+                <a:latin typeface="Consolas"/>
+              </a:rPr>
+              <a:t>  promptBox.value = '';</a:t>
+            </a:r>
+          </a:p>
+          <a:p>
+            <a:pPr>
+              <a:spcAft>
+                <a:spcPts val="0"/>
+              </a:spcAft>
+            </a:pPr>
+            <a:r>
+              <a:rPr sz="1400">
+                <a:solidFill>
+                  <a:srgbClr val="6D8C97"/>
+                </a:solidFill>
+                <a:latin typeface="Consolas"/>
+              </a:rPr>
+              <a:t> 150  </a:t>
+            </a:r>
+            <a:r>
+              <a:rPr sz="1400">
+                <a:solidFill>
+                  <a:srgbClr val="DCECEF"/>
+                </a:solidFill>
+                <a:latin typeface="Consolas"/>
+              </a:rPr>
+              <a:t>  addLine('you', text);</a:t>
+            </a:r>
+          </a:p>
+          <a:p>
+            <a:pPr>
+              <a:spcAft>
+                <a:spcPts val="0"/>
+              </a:spcAft>
+            </a:pPr>
+            <a:r>
+              <a:rPr sz="1400">
+                <a:solidFill>
+                  <a:srgbClr val="6D8C97"/>
+                </a:solidFill>
+                <a:latin typeface="Consolas"/>
+              </a:rPr>
+              <a:t> 151  </a:t>
+            </a:r>
+            <a:r>
+              <a:rPr sz="1400">
+                <a:solidFill>
+                  <a:srgbClr val="DCECEF"/>
+                </a:solidFill>
+                <a:latin typeface="Consolas"/>
+              </a:rPr>
+              <a:t>  history.push({ role: 'user', content: text });</a:t>
+            </a:r>
+          </a:p>
+          <a:p>
+            <a:pPr>
+              <a:spcAft>
+                <a:spcPts val="0"/>
+              </a:spcAft>
+            </a:pPr>
+            <a:r>
+              <a:rPr sz="1400">
+                <a:solidFill>
+                  <a:srgbClr val="6D8C97"/>
+                </a:solidFill>
+                <a:latin typeface="Consolas"/>
+              </a:rPr>
+              <a:t> 152  </a:t>
+            </a:r>
+            <a:r>
+              <a:rPr sz="1400">
+                <a:solidFill>
+                  <a:srgbClr val="7FE0A0"/>
+                </a:solidFill>
+                <a:latin typeface="Consolas"/>
+              </a:rPr>
+              <a:t> </a:t>
+            </a:r>
+          </a:p>
+          <a:p>
+            <a:pPr>
+              <a:spcAft>
+                <a:spcPts val="0"/>
+              </a:spcAft>
+            </a:pPr>
+            <a:r>
+              <a:rPr sz="1400">
+                <a:solidFill>
+                  <a:srgbClr val="6D8C97"/>
+                </a:solidFill>
+                <a:latin typeface="Consolas"/>
+              </a:rPr>
+              <a:t> 153  </a:t>
+            </a:r>
+            <a:r>
+              <a:rPr sz="1400">
+                <a:solidFill>
+                  <a:srgbClr val="7FE0A0"/>
+                </a:solidFill>
+                <a:latin typeface="Consolas"/>
+              </a:rPr>
+              <a:t>  const bubble = addLine('bot', '');</a:t>
+            </a:r>
+          </a:p>
+          <a:p>
+            <a:pPr>
+              <a:spcAft>
+                <a:spcPts val="0"/>
+              </a:spcAft>
+            </a:pPr>
+            <a:r>
+              <a:rPr sz="1400">
+                <a:solidFill>
+                  <a:srgbClr val="6D8C97"/>
+                </a:solidFill>
+                <a:latin typeface="Consolas"/>
+              </a:rPr>
+              <a:t> 154  </a:t>
+            </a:r>
+            <a:r>
+              <a:rPr sz="1400">
+                <a:solidFill>
+                  <a:srgbClr val="7FE0A0"/>
+                </a:solidFill>
+                <a:latin typeface="Consolas"/>
+              </a:rPr>
+              <a:t>  bubble.classList.add('writing');   // week 11: blinking cursor while it types</a:t>
+            </a:r>
+          </a:p>
+          <a:p>
+            <a:pPr>
+              <a:spcAft>
+                <a:spcPts val="0"/>
+              </a:spcAft>
+            </a:pPr>
+            <a:r>
+              <a:rPr sz="1400">
+                <a:solidFill>
+                  <a:srgbClr val="6D8C97"/>
+                </a:solidFill>
+                <a:latin typeface="Consolas"/>
+              </a:rPr>
+              <a:t> 155  </a:t>
+            </a:r>
+            <a:r>
+              <a:rPr sz="1400">
+                <a:solidFill>
+                  <a:srgbClr val="DCECEF"/>
+                </a:solidFill>
+                <a:latin typeface="Consolas"/>
+              </a:rPr>
+              <a:t>  try {</a:t>
+            </a:r>
+          </a:p>
+          <a:p>
+            <a:pPr>
+              <a:spcAft>
+                <a:spcPts val="0"/>
+              </a:spcAft>
+            </a:pPr>
+            <a:r>
+              <a:rPr sz="1400">
+                <a:solidFill>
+                  <a:srgbClr val="6D8C97"/>
+                </a:solidFill>
+                <a:latin typeface="Consolas"/>
+              </a:rPr>
+              <a:t> 156  </a:t>
+            </a:r>
+            <a:r>
+              <a:rPr sz="1400">
+                <a:solidFill>
+                  <a:srgbClr val="7FE0A0"/>
+                </a:solidFill>
+                <a:latin typeface="Consolas"/>
+              </a:rPr>
+              <a:t>    // The function we hand over runs on EVERY piece that arrives.</a:t>
+            </a:r>
+          </a:p>
+          <a:p>
+            <a:pPr>
+              <a:spcAft>
+                <a:spcPts val="0"/>
+              </a:spcAft>
+            </a:pPr>
+            <a:r>
+              <a:rPr sz="1400">
+                <a:solidFill>
+                  <a:srgbClr val="6D8C97"/>
+                </a:solidFill>
+                <a:latin typeface="Consolas"/>
+              </a:rPr>
+              <a:t> 157  </a:t>
+            </a:r>
+            <a:r>
+              <a:rPr sz="1400">
+                <a:solidFill>
+                  <a:srgbClr val="7FE0A0"/>
+                </a:solidFill>
+                <a:latin typeface="Consolas"/>
+              </a:rPr>
+              <a:t>    const reply = await askAI(function (soFar) {</a:t>
+            </a:r>
+          </a:p>
+        </p:txBody>
+      </p:sp>
+    </p:spTree>
+  </p:cSld>
+  <p:clrMapOvr>
+    <a:masterClrMapping/>
+  </p:clrMapOvr>
+</p:sld>
+</file>
+
+<file path=ppt/slides/slide14.xml><?xml version="1.0" encoding="utf-8"?>
+<p:sld xmlns:a="http://schemas.openxmlformats.org/drawingml/2006/main" xmlns:p="http://schemas.openxmlformats.org/presentationml/2006/main" xmlns:r="http://schemas.openxmlformats.org/officeDocument/2006/relationships">
+  <p:cSld>
+    <p:bg>
+      <p:bgPr>
+        <a:solidFill>
+          <a:srgbClr val="102127"/>
+        </a:solidFill>
+        <a:effectLst/>
+      </p:bgPr>
+    </p:bg>
+    <p:spTree>
+      <p:nvGrpSpPr>
+        <p:cNvPr id="1" name=""/>
+        <p:cNvGrpSpPr/>
+        <p:nvPr/>
+      </p:nvGrpSpPr>
+      <p:grpSpPr/>
+      <p:sp>
+        <p:nvSpPr>
+          <p:cNvPr id="2" name="TextBox 1"/>
+          <p:cNvSpPr txBox="1"/>
+          <p:nvPr/>
+        </p:nvSpPr>
+        <p:spPr>
+          <a:xfrm>
+            <a:off x="502920" y="274320"/>
+            <a:ext cx="11155680" cy="731520"/>
+          </a:xfrm>
+          <a:prstGeom prst="rect">
+            <a:avLst/>
+          </a:prstGeom>
+          <a:noFill/>
+        </p:spPr>
+        <p:txBody>
+          <a:bodyPr wrap="none">
+            <a:spAutoFit/>
+          </a:bodyPr>
+          <a:lstStyle/>
+          <a:p>
+            <a:r>
+              <a:rPr sz="2600" b="1">
+                <a:solidFill>
+                  <a:srgbClr val="01AEFD"/>
+                </a:solidFill>
+              </a:rPr>
+              <a:t>Type this into script.js  (2 of 3)</a:t>
+            </a:r>
+          </a:p>
+        </p:txBody>
+      </p:sp>
+      <p:sp>
+        <p:nvSpPr>
+          <p:cNvPr id="3" name="TextBox 2"/>
+          <p:cNvSpPr txBox="1"/>
+          <p:nvPr/>
+        </p:nvSpPr>
+        <p:spPr>
+          <a:xfrm>
+            <a:off x="502920" y="1051560"/>
+            <a:ext cx="11155680" cy="5394960"/>
+          </a:xfrm>
+          <a:prstGeom prst="rect">
+            <a:avLst/>
+          </a:prstGeom>
+          <a:noFill/>
+        </p:spPr>
+        <p:txBody>
+          <a:bodyPr wrap="none">
+            <a:spAutoFit/>
+          </a:bodyPr>
+          <a:lstStyle/>
+          <a:p>
+            <a:pPr>
+              <a:spcAft>
+                <a:spcPts val="0"/>
+              </a:spcAft>
+            </a:pPr>
+            <a:r>
+              <a:rPr sz="1700">
+                <a:solidFill>
+                  <a:srgbClr val="6D8C97"/>
+                </a:solidFill>
+                <a:latin typeface="Consolas"/>
+              </a:rPr>
+              <a:t> 158  </a:t>
+            </a:r>
+            <a:r>
+              <a:rPr sz="1700">
+                <a:solidFill>
+                  <a:srgbClr val="7FE0A0"/>
+                </a:solidFill>
+                <a:latin typeface="Consolas"/>
+              </a:rPr>
+              <a:t>      bubble.textContent = soFar;</a:t>
+            </a:r>
+          </a:p>
+          <a:p>
+            <a:pPr>
+              <a:spcAft>
+                <a:spcPts val="0"/>
+              </a:spcAft>
+            </a:pPr>
+            <a:r>
+              <a:rPr sz="1700">
+                <a:solidFill>
+                  <a:srgbClr val="6D8C97"/>
+                </a:solidFill>
+                <a:latin typeface="Consolas"/>
+              </a:rPr>
+              <a:t> 159  </a:t>
+            </a:r>
+            <a:r>
+              <a:rPr sz="1700">
+                <a:solidFill>
+                  <a:srgbClr val="7FE0A0"/>
+                </a:solidFill>
+                <a:latin typeface="Consolas"/>
+              </a:rPr>
+              <a:t>      chat.scrollTop = chat.scrollHeight;</a:t>
+            </a:r>
+          </a:p>
+          <a:p>
+            <a:pPr>
+              <a:spcAft>
+                <a:spcPts val="0"/>
+              </a:spcAft>
+            </a:pPr>
+            <a:r>
+              <a:rPr sz="1700">
+                <a:solidFill>
+                  <a:srgbClr val="6D8C97"/>
+                </a:solidFill>
+                <a:latin typeface="Consolas"/>
+              </a:rPr>
+              <a:t> 160  </a:t>
+            </a:r>
+            <a:r>
+              <a:rPr sz="1700">
+                <a:solidFill>
+                  <a:srgbClr val="7FE0A0"/>
+                </a:solidFill>
+                <a:latin typeface="Consolas"/>
+              </a:rPr>
+              <a:t>    });</a:t>
+            </a:r>
+          </a:p>
+          <a:p>
+            <a:pPr>
+              <a:spcAft>
+                <a:spcPts val="0"/>
+              </a:spcAft>
+            </a:pPr>
+            <a:r>
+              <a:rPr sz="1700">
+                <a:solidFill>
+                  <a:srgbClr val="6D8C97"/>
+                </a:solidFill>
+                <a:latin typeface="Consolas"/>
+              </a:rPr>
+              <a:t> 161  </a:t>
+            </a:r>
+            <a:r>
+              <a:rPr sz="1700">
+                <a:solidFill>
+                  <a:srgbClr val="7FE0A0"/>
+                </a:solidFill>
+                <a:latin typeface="Consolas"/>
+              </a:rPr>
+              <a:t>    bubble.classList.remove('writing');</a:t>
+            </a:r>
+          </a:p>
+          <a:p>
+            <a:pPr>
+              <a:spcAft>
+                <a:spcPts val="0"/>
+              </a:spcAft>
+            </a:pPr>
+            <a:r>
+              <a:rPr sz="1700">
+                <a:solidFill>
+                  <a:srgbClr val="6D8C97"/>
+                </a:solidFill>
+                <a:latin typeface="Consolas"/>
+              </a:rPr>
+              <a:t> 162  </a:t>
+            </a:r>
+            <a:r>
+              <a:rPr sz="1700">
+                <a:solidFill>
+                  <a:srgbClr val="DCECEF"/>
+                </a:solidFill>
+                <a:latin typeface="Consolas"/>
+              </a:rPr>
+              <a:t>    history.push({ role: 'assistant', content: reply });   // it said this too</a:t>
+            </a:r>
+          </a:p>
+          <a:p>
+            <a:pPr>
+              <a:spcAft>
+                <a:spcPts val="0"/>
+              </a:spcAft>
+            </a:pPr>
+            <a:r>
+              <a:rPr sz="1700">
+                <a:solidFill>
+                  <a:srgbClr val="6D8C97"/>
+                </a:solidFill>
+                <a:latin typeface="Consolas"/>
+              </a:rPr>
+              <a:t> 163  </a:t>
+            </a:r>
+            <a:r>
+              <a:rPr sz="1700">
+                <a:solidFill>
+                  <a:srgbClr val="DCECEF"/>
+                </a:solidFill>
+                <a:latin typeface="Consolas"/>
+              </a:rPr>
+              <a:t>  } catch (problem) {</a:t>
+            </a:r>
+          </a:p>
+          <a:p>
+            <a:pPr>
+              <a:spcAft>
+                <a:spcPts val="0"/>
+              </a:spcAft>
+            </a:pPr>
+            <a:r>
+              <a:rPr sz="1700">
+                <a:solidFill>
+                  <a:srgbClr val="6D8C97"/>
+                </a:solidFill>
+                <a:latin typeface="Consolas"/>
+              </a:rPr>
+              <a:t> 164  </a:t>
+            </a:r>
+            <a:r>
+              <a:rPr sz="1700">
+                <a:solidFill>
+                  <a:srgbClr val="7FE0A0"/>
+                </a:solidFill>
+                <a:latin typeface="Consolas"/>
+              </a:rPr>
+              <a:t>    bubble.remove();</a:t>
+            </a:r>
+          </a:p>
+          <a:p>
+            <a:pPr>
+              <a:spcAft>
+                <a:spcPts val="0"/>
+              </a:spcAft>
+            </a:pPr>
+            <a:r>
+              <a:rPr sz="1700">
+                <a:solidFill>
+                  <a:srgbClr val="6D8C97"/>
+                </a:solidFill>
+                <a:latin typeface="Consolas"/>
+              </a:rPr>
+              <a:t> 165  </a:t>
+            </a:r>
+            <a:r>
+              <a:rPr sz="1700">
+                <a:solidFill>
+                  <a:srgbClr val="DCECEF"/>
+                </a:solidFill>
+                <a:latin typeface="Consolas"/>
+              </a:rPr>
+              <a:t>    addLine('problem', problem.message);</a:t>
+            </a:r>
+          </a:p>
+          <a:p>
+            <a:pPr>
+              <a:spcAft>
+                <a:spcPts val="0"/>
+              </a:spcAft>
+            </a:pPr>
+            <a:r>
+              <a:rPr sz="1700">
+                <a:solidFill>
+                  <a:srgbClr val="6D8C97"/>
+                </a:solidFill>
+                <a:latin typeface="Consolas"/>
+              </a:rPr>
+              <a:t> 166  </a:t>
+            </a:r>
+            <a:r>
+              <a:rPr sz="1700">
+                <a:solidFill>
+                  <a:srgbClr val="DCECEF"/>
+                </a:solidFill>
+                <a:latin typeface="Consolas"/>
+              </a:rPr>
+              <a:t>  }</a:t>
+            </a:r>
+          </a:p>
+          <a:p>
+            <a:pPr>
+              <a:spcAft>
+                <a:spcPts val="0"/>
+              </a:spcAft>
+            </a:pPr>
+            <a:r>
+              <a:rPr sz="1700">
+                <a:solidFill>
+                  <a:srgbClr val="6D8C97"/>
+                </a:solidFill>
+                <a:latin typeface="Consolas"/>
+              </a:rPr>
+              <a:t> 167  </a:t>
+            </a:r>
+            <a:r>
+              <a:rPr sz="1700">
+                <a:solidFill>
+                  <a:srgbClr val="DCECEF"/>
+                </a:solidFill>
+                <a:latin typeface="Consolas"/>
+              </a:rPr>
+              <a:t>});</a:t>
+            </a:r>
+          </a:p>
+        </p:txBody>
+      </p:sp>
+    </p:spTree>
+  </p:cSld>
+  <p:clrMapOvr>
+    <a:masterClrMapping/>
+  </p:clrMapOvr>
+</p:sld>
+</file>
+
+<file path=ppt/slides/slide15.xml><?xml version="1.0" encoding="utf-8"?>
+<p:sld xmlns:a="http://schemas.openxmlformats.org/drawingml/2006/main" xmlns:p="http://schemas.openxmlformats.org/presentationml/2006/main" xmlns:r="http://schemas.openxmlformats.org/officeDocument/2006/relationships">
+  <p:cSld>
+    <p:bg>
+      <p:bgPr>
+        <a:solidFill>
+          <a:srgbClr val="102127"/>
+        </a:solidFill>
+        <a:effectLst/>
+      </p:bgPr>
+    </p:bg>
+    <p:spTree>
+      <p:nvGrpSpPr>
+        <p:cNvPr id="1" name=""/>
+        <p:cNvGrpSpPr/>
+        <p:nvPr/>
+      </p:nvGrpSpPr>
+      <p:grpSpPr/>
+      <p:sp>
+        <p:nvSpPr>
+          <p:cNvPr id="2" name="TextBox 1"/>
+          <p:cNvSpPr txBox="1"/>
+          <p:nvPr/>
+        </p:nvSpPr>
+        <p:spPr>
+          <a:xfrm>
+            <a:off x="502920" y="274320"/>
+            <a:ext cx="11155680" cy="731520"/>
+          </a:xfrm>
+          <a:prstGeom prst="rect">
+            <a:avLst/>
+          </a:prstGeom>
+          <a:noFill/>
+        </p:spPr>
+        <p:txBody>
+          <a:bodyPr wrap="none">
+            <a:spAutoFit/>
+          </a:bodyPr>
+          <a:lstStyle/>
+          <a:p>
+            <a:r>
+              <a:rPr sz="2600" b="1">
+                <a:solidFill>
+                  <a:srgbClr val="01AEFD"/>
+                </a:solidFill>
+              </a:rPr>
+              <a:t>Type this into style.css  (3 of 3)</a:t>
+            </a:r>
+          </a:p>
+        </p:txBody>
+      </p:sp>
+      <p:sp>
+        <p:nvSpPr>
+          <p:cNvPr id="3" name="TextBox 2"/>
+          <p:cNvSpPr txBox="1"/>
+          <p:nvPr/>
+        </p:nvSpPr>
+        <p:spPr>
+          <a:xfrm>
+            <a:off x="502920" y="1051560"/>
+            <a:ext cx="11155680" cy="5394960"/>
+          </a:xfrm>
+          <a:prstGeom prst="rect">
+            <a:avLst/>
+          </a:prstGeom>
+          <a:noFill/>
+        </p:spPr>
+        <p:txBody>
+          <a:bodyPr wrap="none">
+            <a:spAutoFit/>
+          </a:bodyPr>
+          <a:lstStyle/>
+          <a:p>
+            <a:pPr>
+              <a:spcAft>
+                <a:spcPts val="0"/>
+              </a:spcAft>
+            </a:pPr>
+            <a:r>
+              <a:rPr sz="1700">
+                <a:solidFill>
+                  <a:srgbClr val="6D8C97"/>
+                </a:solidFill>
+                <a:latin typeface="Consolas"/>
+              </a:rPr>
+              <a:t>  84  </a:t>
+            </a:r>
+            <a:r>
+              <a:rPr sz="1700">
+                <a:solidFill>
+                  <a:srgbClr val="7FE0A0"/>
+                </a:solidFill>
+                <a:latin typeface="Consolas"/>
+              </a:rPr>
+              <a:t>.bubble.writing::after {</a:t>
+            </a:r>
+          </a:p>
+          <a:p>
+            <a:pPr>
+              <a:spcAft>
+                <a:spcPts val="0"/>
+              </a:spcAft>
+            </a:pPr>
+            <a:r>
+              <a:rPr sz="1700">
+                <a:solidFill>
+                  <a:srgbClr val="6D8C97"/>
+                </a:solidFill>
+                <a:latin typeface="Consolas"/>
+              </a:rPr>
+              <a:t>  85  </a:t>
+            </a:r>
+            <a:r>
+              <a:rPr sz="1700">
+                <a:solidFill>
+                  <a:srgbClr val="7FE0A0"/>
+                </a:solidFill>
+                <a:latin typeface="Consolas"/>
+              </a:rPr>
+              <a:t>  content: "\258C";</a:t>
+            </a:r>
+          </a:p>
+          <a:p>
+            <a:pPr>
+              <a:spcAft>
+                <a:spcPts val="0"/>
+              </a:spcAft>
+            </a:pPr>
+            <a:r>
+              <a:rPr sz="1700">
+                <a:solidFill>
+                  <a:srgbClr val="6D8C97"/>
+                </a:solidFill>
+                <a:latin typeface="Consolas"/>
+              </a:rPr>
+              <a:t>  86  </a:t>
+            </a:r>
+            <a:r>
+              <a:rPr sz="1700">
+                <a:solidFill>
+                  <a:srgbClr val="7FE0A0"/>
+                </a:solidFill>
+                <a:latin typeface="Consolas"/>
+              </a:rPr>
+              <a:t>  color: #01aefd;</a:t>
+            </a:r>
+          </a:p>
+          <a:p>
+            <a:pPr>
+              <a:spcAft>
+                <a:spcPts val="0"/>
+              </a:spcAft>
+            </a:pPr>
+            <a:r>
+              <a:rPr sz="1700">
+                <a:solidFill>
+                  <a:srgbClr val="6D8C97"/>
+                </a:solidFill>
+                <a:latin typeface="Consolas"/>
+              </a:rPr>
+              <a:t>  87  </a:t>
+            </a:r>
+            <a:r>
+              <a:rPr sz="1700">
+                <a:solidFill>
+                  <a:srgbClr val="7FE0A0"/>
+                </a:solidFill>
+                <a:latin typeface="Consolas"/>
+              </a:rPr>
+              <a:t>  animation: blink 1s steps(2, start) infinite;</a:t>
+            </a:r>
+          </a:p>
+          <a:p>
+            <a:pPr>
+              <a:spcAft>
+                <a:spcPts val="0"/>
+              </a:spcAft>
+            </a:pPr>
+            <a:r>
+              <a:rPr sz="1700">
+                <a:solidFill>
+                  <a:srgbClr val="6D8C97"/>
+                </a:solidFill>
+                <a:latin typeface="Consolas"/>
+              </a:rPr>
+              <a:t>  88  </a:t>
+            </a:r>
+            <a:r>
+              <a:rPr sz="1700">
+                <a:solidFill>
+                  <a:srgbClr val="7FE0A0"/>
+                </a:solidFill>
+                <a:latin typeface="Consolas"/>
+              </a:rPr>
+              <a:t>}</a:t>
+            </a:r>
+          </a:p>
+          <a:p>
+            <a:pPr>
+              <a:spcAft>
+                <a:spcPts val="0"/>
+              </a:spcAft>
+            </a:pPr>
+            <a:r>
+              <a:rPr sz="1700">
+                <a:solidFill>
+                  <a:srgbClr val="6D8C97"/>
+                </a:solidFill>
+                <a:latin typeface="Consolas"/>
+              </a:rPr>
+              <a:t>  89  </a:t>
+            </a:r>
+            <a:r>
+              <a:rPr sz="1700">
+                <a:solidFill>
+                  <a:srgbClr val="7FE0A0"/>
+                </a:solidFill>
+                <a:latin typeface="Consolas"/>
+              </a:rPr>
+              <a:t>@keyframes blink { to { visibility: hidden; } }</a:t>
+            </a:r>
+          </a:p>
+        </p:txBody>
+      </p:sp>
+    </p:spTree>
+  </p:cSld>
+  <p:clrMapOvr>
+    <a:masterClrMapping/>
+  </p:clrMapOvr>
+</p:sld>
+</file>
+
+<file path=ppt/slides/slide16.xml><?xml version="1.0" encoding="utf-8"?>
+<p:sld xmlns:a="http://schemas.openxmlformats.org/drawingml/2006/main" xmlns:p="http://schemas.openxmlformats.org/presentationml/2006/main" xmlns:r="http://schemas.openxmlformats.org/officeDocument/2006/relationships">
+  <p:cSld>
+    <p:spTree>
+      <p:nvGrpSpPr>
+        <p:cNvPr id="1" name=""/>
+        <p:cNvGrpSpPr/>
+        <p:nvPr/>
+      </p:nvGrpSpPr>
+      <p:grpSpPr/>
+      <p:sp>
+        <p:nvSpPr>
+          <p:cNvPr id="2" name="Title 1"/>
+          <p:cNvSpPr>
+            <a:spLocks noGrp="1"/>
+          </p:cNvSpPr>
+          <p:nvPr>
+            <p:ph type="title"/>
+          </p:nvPr>
+        </p:nvSpPr>
+        <p:spPr/>
+        <p:txBody>
+          <a:bodyPr/>
+          <a:lstStyle/>
+          <a:p>
+            <a:r>
+              <a:rPr sz="3800" b="1">
+                <a:solidFill>
+                  <a:srgbClr val="1F2A37"/>
+                </a:solidFill>
+              </a:rPr>
+              <a:t>Test the sad path</a:t>
+            </a:r>
+          </a:p>
+        </p:txBody>
+      </p:sp>
+      <p:sp>
+        <p:nvSpPr>
+          <p:cNvPr id="3" name="TextBox 2"/>
+          <p:cNvSpPr txBox="1"/>
+          <p:nvPr/>
+        </p:nvSpPr>
+        <p:spPr>
+          <a:xfrm>
+            <a:off x="822960" y="1828800"/>
+            <a:ext cx="10515600" cy="4206240"/>
+          </a:xfrm>
+          <a:prstGeom prst="rect">
+            <a:avLst/>
+          </a:prstGeom>
+          <a:noFill/>
+        </p:spPr>
+        <p:txBody>
+          <a:bodyPr wrap="square">
+            <a:spAutoFit/>
+          </a:bodyPr>
+          <a:lstStyle/>
+          <a:p>
+            <a:pPr>
+              <a:spcAft>
+                <a:spcPts val="1400"/>
+              </a:spcAft>
+            </a:pPr>
+            <a:r>
+              <a:rPr sz="2800">
+                <a:solidFill>
+                  <a:srgbClr val="01AEFD"/>
+                </a:solidFill>
+              </a:rPr>
+              <a:t>Break your key and send</a:t>
+            </a:r>
+          </a:p>
+          <a:p>
+            <a:pPr>
+              <a:spcAft>
+                <a:spcPts val="1400"/>
+              </a:spcAft>
+            </a:pPr>
+            <a:r>
+              <a:rPr sz="2400">
+                <a:solidFill>
+                  <a:srgbClr val="1F2A37"/>
+                </a:solidFill>
+              </a:rPr>
+              <a:t>• Does the empty bubble get cleaned up?</a:t>
+            </a:r>
+          </a:p>
+          <a:p>
+            <a:pPr>
+              <a:spcAft>
+                <a:spcPts val="1400"/>
+              </a:spcAft>
+            </a:pPr>
+            <a:r>
+              <a:rPr sz="2400">
+                <a:solidFill>
+                  <a:srgbClr val="1F2A37"/>
+                </a:solidFill>
+              </a:rPr>
+              <a:t>• Always check what happens when it fails</a:t>
+            </a:r>
+          </a:p>
+        </p:txBody>
+      </p:sp>
+    </p:spTree>
+  </p:cSld>
+  <p:clrMapOvr>
+    <a:masterClrMapping/>
+  </p:clrMapOvr>
+</p:sld>
+</file>
+
 <file path=ppt/slides/slide2.xml><?xml version="1.0" encoding="utf-8"?>
 <p:sld xmlns:a="http://schemas.openxmlformats.org/drawingml/2006/main" xmlns:p="http://schemas.openxmlformats.org/presentationml/2006/main" xmlns:r="http://schemas.openxmlformats.org/officeDocument/2006/relationships">
   <p:cSld>
@@ -3647,6 +5500,14 @@
 <file path=ppt/slides/slide6.xml><?xml version="1.0" encoding="utf-8"?>
 <p:sld xmlns:a="http://schemas.openxmlformats.org/drawingml/2006/main" xmlns:p="http://schemas.openxmlformats.org/presentationml/2006/main" xmlns:r="http://schemas.openxmlformats.org/officeDocument/2006/relationships">
   <p:cSld>
+    <p:bg>
+      <p:bgPr>
+        <a:solidFill>
+          <a:srgbClr val="102127"/>
+        </a:solidFill>
+        <a:effectLst/>
+      </p:bgPr>
+    </p:bg>
     <p:spTree>
       <p:nvGrpSpPr>
         <p:cNvPr id="1" name=""/>
@@ -3656,40 +5517,14 @@
       <p:grpSpPr/>
       <p:sp>
         <p:nvSpPr>
-          <p:cNvPr id="2" name="Title 1"/>
-          <p:cNvSpPr>
-            <a:spLocks noGrp="1"/>
-          </p:cNvSpPr>
-          <p:nvPr>
-            <p:ph type="title"/>
-          </p:nvPr>
-        </p:nvSpPr>
-        <p:spPr/>
-        <p:txBody>
-          <a:bodyPr/>
-          <a:lstStyle/>
-          <a:p>
-            <a:r>
-              <a:rPr sz="3800" b="1">
-                <a:solidFill>
-                  <a:srgbClr val="1F2A37"/>
-                </a:solidFill>
-              </a:rPr>
-              <a:t>Same time. Feels faster.</a:t>
-            </a:r>
-          </a:p>
-        </p:txBody>
-      </p:sp>
-      <p:sp>
-        <p:nvSpPr>
-          <p:cNvPr id="3" name="TextBox 2"/>
+          <p:cNvPr id="2" name="TextBox 1"/>
           <p:cNvSpPr txBox="1"/>
           <p:nvPr/>
         </p:nvSpPr>
         <p:spPr>
           <a:xfrm>
-            <a:off x="822960" y="1828800"/>
-            <a:ext cx="10515600" cy="4206240"/>
+            <a:off x="502920" y="274320"/>
+            <a:ext cx="11155680" cy="731520"/>
           </a:xfrm>
           <a:prstGeom prst="rect">
             <a:avLst/>
@@ -3697,38 +5532,416 @@
           <a:noFill/>
         </p:spPr>
         <p:txBody>
-          <a:bodyPr wrap="square">
+          <a:bodyPr wrap="none">
             <a:spAutoFit/>
           </a:bodyPr>
           <a:lstStyle/>
           <a:p>
-            <a:pPr>
-              <a:spcAft>
-                <a:spcPts val="1400"/>
-              </a:spcAft>
-            </a:pPr>
-            <a:r>
-              <a:rPr sz="2400">
-                <a:solidFill>
-                  <a:srgbClr val="1F2A37"/>
-                </a:solidFill>
-              </a:rPr>
-              <a:t>• You can start reading immediately</a:t>
-            </a:r>
-          </a:p>
-          <a:p>
-            <a:pPr>
-              <a:spcAft>
-                <a:spcPts val="1400"/>
-              </a:spcAft>
-            </a:pPr>
-            <a:r>
-              <a:rPr sz="2400">
-                <a:solidFill>
-                  <a:srgbClr val="1F2A37"/>
-                </a:solidFill>
-              </a:rPr>
-              <a:t>• Feeling fast is a real engineering goal</a:t>
+            <a:r>
+              <a:rPr sz="2600" b="1">
+                <a:solidFill>
+                  <a:srgbClr val="01AEFD"/>
+                </a:solidFill>
+              </a:rPr>
+              <a:t>Type this into script.js  (1 of 6)</a:t>
+            </a:r>
+          </a:p>
+        </p:txBody>
+      </p:sp>
+      <p:sp>
+        <p:nvSpPr>
+          <p:cNvPr id="3" name="TextBox 2"/>
+          <p:cNvSpPr txBox="1"/>
+          <p:nvPr/>
+        </p:nvSpPr>
+        <p:spPr>
+          <a:xfrm>
+            <a:off x="502920" y="1051560"/>
+            <a:ext cx="11155680" cy="5394960"/>
+          </a:xfrm>
+          <a:prstGeom prst="rect">
+            <a:avLst/>
+          </a:prstGeom>
+          <a:noFill/>
+        </p:spPr>
+        <p:txBody>
+          <a:bodyPr wrap="none">
+            <a:spAutoFit/>
+          </a:bodyPr>
+          <a:lstStyle/>
+          <a:p>
+            <a:pPr>
+              <a:spcAft>
+                <a:spcPts val="0"/>
+              </a:spcAft>
+            </a:pPr>
+            <a:r>
+              <a:rPr sz="1400">
+                <a:solidFill>
+                  <a:srgbClr val="6D8C97"/>
+                </a:solidFill>
+                <a:latin typeface="Consolas"/>
+              </a:rPr>
+              <a:t>  68  </a:t>
+            </a:r>
+            <a:r>
+              <a:rPr sz="1400">
+                <a:solidFill>
+                  <a:srgbClr val="DCECEF"/>
+                </a:solidFill>
+                <a:latin typeface="Consolas"/>
+              </a:rPr>
+              <a:t> </a:t>
+            </a:r>
+          </a:p>
+          <a:p>
+            <a:pPr>
+              <a:spcAft>
+                <a:spcPts val="0"/>
+              </a:spcAft>
+            </a:pPr>
+            <a:r>
+              <a:rPr sz="1400">
+                <a:solidFill>
+                  <a:srgbClr val="6D8C97"/>
+                </a:solidFill>
+                <a:latin typeface="Consolas"/>
+              </a:rPr>
+              <a:t>  69  </a:t>
+            </a:r>
+            <a:r>
+              <a:rPr sz="1400">
+                <a:solidFill>
+                  <a:srgbClr val="DCECEF"/>
+                </a:solidFill>
+                <a:latin typeface="Consolas"/>
+              </a:rPr>
+              <a:t>// Week 10: with stream:true the answer arrives in pieces while it is still</a:t>
+            </a:r>
+          </a:p>
+          <a:p>
+            <a:pPr>
+              <a:spcAft>
+                <a:spcPts val="0"/>
+              </a:spcAft>
+            </a:pPr>
+            <a:r>
+              <a:rPr sz="1400">
+                <a:solidFill>
+                  <a:srgbClr val="6D8C97"/>
+                </a:solidFill>
+                <a:latin typeface="Consolas"/>
+              </a:rPr>
+              <a:t>  70  </a:t>
+            </a:r>
+            <a:r>
+              <a:rPr sz="1400">
+                <a:solidFill>
+                  <a:srgbClr val="DCECEF"/>
+                </a:solidFill>
+                <a:latin typeface="Consolas"/>
+              </a:rPr>
+              <a:t>// being written. Same words, same total time - they just start sooner.</a:t>
+            </a:r>
+          </a:p>
+          <a:p>
+            <a:pPr>
+              <a:spcAft>
+                <a:spcPts val="0"/>
+              </a:spcAft>
+            </a:pPr>
+            <a:r>
+              <a:rPr sz="1400">
+                <a:solidFill>
+                  <a:srgbClr val="6D8C97"/>
+                </a:solidFill>
+                <a:latin typeface="Consolas"/>
+              </a:rPr>
+              <a:t>  71  </a:t>
+            </a:r>
+            <a:r>
+              <a:rPr sz="1400">
+                <a:solidFill>
+                  <a:srgbClr val="DCECEF"/>
+                </a:solidFill>
+                <a:latin typeface="Consolas"/>
+              </a:rPr>
+              <a:t>//</a:t>
+            </a:r>
+          </a:p>
+          <a:p>
+            <a:pPr>
+              <a:spcAft>
+                <a:spcPts val="0"/>
+              </a:spcAft>
+            </a:pPr>
+            <a:r>
+              <a:rPr sz="1400">
+                <a:solidFill>
+                  <a:srgbClr val="6D8C97"/>
+                </a:solidFill>
+                <a:latin typeface="Consolas"/>
+              </a:rPr>
+              <a:t>  72  </a:t>
+            </a:r>
+            <a:r>
+              <a:rPr sz="1400">
+                <a:solidFill>
+                  <a:srgbClr val="7FE0A0"/>
+                </a:solidFill>
+                <a:latin typeface="Consolas"/>
+              </a:rPr>
+              <a:t>// Week 11: onPiece is a FUNCTION we are handed. Every time a bit of text</a:t>
+            </a:r>
+          </a:p>
+          <a:p>
+            <a:pPr>
+              <a:spcAft>
+                <a:spcPts val="0"/>
+              </a:spcAft>
+            </a:pPr>
+            <a:r>
+              <a:rPr sz="1400">
+                <a:solidFill>
+                  <a:srgbClr val="6D8C97"/>
+                </a:solidFill>
+                <a:latin typeface="Consolas"/>
+              </a:rPr>
+              <a:t>  73  </a:t>
+            </a:r>
+            <a:r>
+              <a:rPr sz="1400">
+                <a:solidFill>
+                  <a:srgbClr val="7FE0A0"/>
+                </a:solidFill>
+                <a:latin typeface="Consolas"/>
+              </a:rPr>
+              <a:t>// turns up we call it, and whoever gave it to us decides what to do.</a:t>
+            </a:r>
+          </a:p>
+          <a:p>
+            <a:pPr>
+              <a:spcAft>
+                <a:spcPts val="0"/>
+              </a:spcAft>
+            </a:pPr>
+            <a:r>
+              <a:rPr sz="1400">
+                <a:solidFill>
+                  <a:srgbClr val="6D8C97"/>
+                </a:solidFill>
+                <a:latin typeface="Consolas"/>
+              </a:rPr>
+              <a:t>  74  </a:t>
+            </a:r>
+            <a:r>
+              <a:rPr sz="1400">
+                <a:solidFill>
+                  <a:srgbClr val="7FE0A0"/>
+                </a:solidFill>
+                <a:latin typeface="Consolas"/>
+              </a:rPr>
+              <a:t>async function readStream(res, onPiece) {</a:t>
+            </a:r>
+          </a:p>
+          <a:p>
+            <a:pPr>
+              <a:spcAft>
+                <a:spcPts val="0"/>
+              </a:spcAft>
+            </a:pPr>
+            <a:r>
+              <a:rPr sz="1400">
+                <a:solidFill>
+                  <a:srgbClr val="6D8C97"/>
+                </a:solidFill>
+                <a:latin typeface="Consolas"/>
+              </a:rPr>
+              <a:t>  75  </a:t>
+            </a:r>
+            <a:r>
+              <a:rPr sz="1400">
+                <a:solidFill>
+                  <a:srgbClr val="DCECEF"/>
+                </a:solidFill>
+                <a:latin typeface="Consolas"/>
+              </a:rPr>
+              <a:t>  const reader = res.body.getReader();</a:t>
+            </a:r>
+          </a:p>
+          <a:p>
+            <a:pPr>
+              <a:spcAft>
+                <a:spcPts val="0"/>
+              </a:spcAft>
+            </a:pPr>
+            <a:r>
+              <a:rPr sz="1400">
+                <a:solidFill>
+                  <a:srgbClr val="6D8C97"/>
+                </a:solidFill>
+                <a:latin typeface="Consolas"/>
+              </a:rPr>
+              <a:t>  76  </a:t>
+            </a:r>
+            <a:r>
+              <a:rPr sz="1400">
+                <a:solidFill>
+                  <a:srgbClr val="DCECEF"/>
+                </a:solidFill>
+                <a:latin typeface="Consolas"/>
+              </a:rPr>
+              <a:t>  const decoder = new TextDecoder();</a:t>
+            </a:r>
+          </a:p>
+          <a:p>
+            <a:pPr>
+              <a:spcAft>
+                <a:spcPts val="0"/>
+              </a:spcAft>
+            </a:pPr>
+            <a:r>
+              <a:rPr sz="1400">
+                <a:solidFill>
+                  <a:srgbClr val="6D8C97"/>
+                </a:solidFill>
+                <a:latin typeface="Consolas"/>
+              </a:rPr>
+              <a:t>  77  </a:t>
+            </a:r>
+            <a:r>
+              <a:rPr sz="1400">
+                <a:solidFill>
+                  <a:srgbClr val="DCECEF"/>
+                </a:solidFill>
+                <a:latin typeface="Consolas"/>
+              </a:rPr>
+              <a:t>  let buffer = '';       // a piece can be cut in half mid-arrival</a:t>
+            </a:r>
+          </a:p>
+          <a:p>
+            <a:pPr>
+              <a:spcAft>
+                <a:spcPts val="0"/>
+              </a:spcAft>
+            </a:pPr>
+            <a:r>
+              <a:rPr sz="1400">
+                <a:solidFill>
+                  <a:srgbClr val="6D8C97"/>
+                </a:solidFill>
+                <a:latin typeface="Consolas"/>
+              </a:rPr>
+              <a:t>  78  </a:t>
+            </a:r>
+            <a:r>
+              <a:rPr sz="1400">
+                <a:solidFill>
+                  <a:srgbClr val="DCECEF"/>
+                </a:solidFill>
+                <a:latin typeface="Consolas"/>
+              </a:rPr>
+              <a:t>  let answer = '';</a:t>
+            </a:r>
+          </a:p>
+          <a:p>
+            <a:pPr>
+              <a:spcAft>
+                <a:spcPts val="0"/>
+              </a:spcAft>
+            </a:pPr>
+            <a:r>
+              <a:rPr sz="1400">
+                <a:solidFill>
+                  <a:srgbClr val="6D8C97"/>
+                </a:solidFill>
+                <a:latin typeface="Consolas"/>
+              </a:rPr>
+              <a:t>  79  </a:t>
+            </a:r>
+            <a:r>
+              <a:rPr sz="1400">
+                <a:solidFill>
+                  <a:srgbClr val="DCECEF"/>
+                </a:solidFill>
+                <a:latin typeface="Consolas"/>
+              </a:rPr>
+              <a:t> </a:t>
+            </a:r>
+          </a:p>
+          <a:p>
+            <a:pPr>
+              <a:spcAft>
+                <a:spcPts val="0"/>
+              </a:spcAft>
+            </a:pPr>
+            <a:r>
+              <a:rPr sz="1400">
+                <a:solidFill>
+                  <a:srgbClr val="6D8C97"/>
+                </a:solidFill>
+                <a:latin typeface="Consolas"/>
+              </a:rPr>
+              <a:t>  80  </a:t>
+            </a:r>
+            <a:r>
+              <a:rPr sz="1400">
+                <a:solidFill>
+                  <a:srgbClr val="DCECEF"/>
+                </a:solidFill>
+                <a:latin typeface="Consolas"/>
+              </a:rPr>
+              <a:t>  while (true) {</a:t>
+            </a:r>
+          </a:p>
+          <a:p>
+            <a:pPr>
+              <a:spcAft>
+                <a:spcPts val="0"/>
+              </a:spcAft>
+            </a:pPr>
+            <a:r>
+              <a:rPr sz="1400">
+                <a:solidFill>
+                  <a:srgbClr val="6D8C97"/>
+                </a:solidFill>
+                <a:latin typeface="Consolas"/>
+              </a:rPr>
+              <a:t>  81  </a:t>
+            </a:r>
+            <a:r>
+              <a:rPr sz="1400">
+                <a:solidFill>
+                  <a:srgbClr val="DCECEF"/>
+                </a:solidFill>
+                <a:latin typeface="Consolas"/>
+              </a:rPr>
+              <a:t>    const chunk = await reader.read();</a:t>
+            </a:r>
+          </a:p>
+          <a:p>
+            <a:pPr>
+              <a:spcAft>
+                <a:spcPts val="0"/>
+              </a:spcAft>
+            </a:pPr>
+            <a:r>
+              <a:rPr sz="1400">
+                <a:solidFill>
+                  <a:srgbClr val="6D8C97"/>
+                </a:solidFill>
+                <a:latin typeface="Consolas"/>
+              </a:rPr>
+              <a:t>  82  </a:t>
+            </a:r>
+            <a:r>
+              <a:rPr sz="1400">
+                <a:solidFill>
+                  <a:srgbClr val="DCECEF"/>
+                </a:solidFill>
+                <a:latin typeface="Consolas"/>
+              </a:rPr>
+              <a:t>    if (chunk.done) { break; }</a:t>
             </a:r>
           </a:p>
         </p:txBody>
@@ -3744,6 +5957,14 @@
 <file path=ppt/slides/slide7.xml><?xml version="1.0" encoding="utf-8"?>
 <p:sld xmlns:a="http://schemas.openxmlformats.org/drawingml/2006/main" xmlns:p="http://schemas.openxmlformats.org/presentationml/2006/main" xmlns:r="http://schemas.openxmlformats.org/officeDocument/2006/relationships">
   <p:cSld>
+    <p:bg>
+      <p:bgPr>
+        <a:solidFill>
+          <a:srgbClr val="102127"/>
+        </a:solidFill>
+        <a:effectLst/>
+      </p:bgPr>
+    </p:bg>
     <p:spTree>
       <p:nvGrpSpPr>
         <p:cNvPr id="1" name=""/>
@@ -3753,40 +5974,14 @@
       <p:grpSpPr/>
       <p:sp>
         <p:nvSpPr>
-          <p:cNvPr id="2" name="Title 1"/>
-          <p:cNvSpPr>
-            <a:spLocks noGrp="1"/>
-          </p:cNvSpPr>
-          <p:nvPr>
-            <p:ph type="title"/>
-          </p:nvPr>
-        </p:nvSpPr>
-        <p:spPr/>
-        <p:txBody>
-          <a:bodyPr/>
-          <a:lstStyle/>
-          <a:p>
-            <a:r>
-              <a:rPr sz="3800" b="1">
-                <a:solidFill>
-                  <a:srgbClr val="1F2A37"/>
-                </a:solidFill>
-              </a:rPr>
-              <a:t>Test the sad path</a:t>
-            </a:r>
-          </a:p>
-        </p:txBody>
-      </p:sp>
-      <p:sp>
-        <p:nvSpPr>
-          <p:cNvPr id="3" name="TextBox 2"/>
+          <p:cNvPr id="2" name="TextBox 1"/>
           <p:cNvSpPr txBox="1"/>
           <p:nvPr/>
         </p:nvSpPr>
         <p:spPr>
           <a:xfrm>
-            <a:off x="822960" y="1828800"/>
-            <a:ext cx="10515600" cy="4206240"/>
+            <a:off x="502920" y="274320"/>
+            <a:ext cx="11155680" cy="731520"/>
           </a:xfrm>
           <a:prstGeom prst="rect">
             <a:avLst/>
@@ -3794,53 +5989,1130 @@
           <a:noFill/>
         </p:spPr>
         <p:txBody>
-          <a:bodyPr wrap="square">
+          <a:bodyPr wrap="none">
             <a:spAutoFit/>
           </a:bodyPr>
           <a:lstStyle/>
           <a:p>
-            <a:pPr>
-              <a:spcAft>
-                <a:spcPts val="1400"/>
-              </a:spcAft>
-            </a:pPr>
-            <a:r>
-              <a:rPr sz="2800">
+            <a:r>
+              <a:rPr sz="2600" b="1">
                 <a:solidFill>
                   <a:srgbClr val="01AEFD"/>
                 </a:solidFill>
               </a:rPr>
-              <a:t>Break your key and send</a:t>
-            </a:r>
-          </a:p>
-          <a:p>
-            <a:pPr>
-              <a:spcAft>
-                <a:spcPts val="1400"/>
-              </a:spcAft>
-            </a:pPr>
-            <a:r>
-              <a:rPr sz="2400">
-                <a:solidFill>
-                  <a:srgbClr val="1F2A37"/>
-                </a:solidFill>
-              </a:rPr>
-              <a:t>• Does the empty bubble get cleaned up?</a:t>
-            </a:r>
-          </a:p>
-          <a:p>
-            <a:pPr>
-              <a:spcAft>
-                <a:spcPts val="1400"/>
-              </a:spcAft>
-            </a:pPr>
-            <a:r>
-              <a:rPr sz="2400">
-                <a:solidFill>
-                  <a:srgbClr val="1F2A37"/>
-                </a:solidFill>
-              </a:rPr>
-              <a:t>• Always check what happens when it fails</a:t>
+              <a:t>Type this into script.js  (2 of 6)</a:t>
+            </a:r>
+          </a:p>
+        </p:txBody>
+      </p:sp>
+      <p:sp>
+        <p:nvSpPr>
+          <p:cNvPr id="3" name="TextBox 2"/>
+          <p:cNvSpPr txBox="1"/>
+          <p:nvPr/>
+        </p:nvSpPr>
+        <p:spPr>
+          <a:xfrm>
+            <a:off x="502920" y="1051560"/>
+            <a:ext cx="11155680" cy="5394960"/>
+          </a:xfrm>
+          <a:prstGeom prst="rect">
+            <a:avLst/>
+          </a:prstGeom>
+          <a:noFill/>
+        </p:spPr>
+        <p:txBody>
+          <a:bodyPr wrap="none">
+            <a:spAutoFit/>
+          </a:bodyPr>
+          <a:lstStyle/>
+          <a:p>
+            <a:pPr>
+              <a:spcAft>
+                <a:spcPts val="0"/>
+              </a:spcAft>
+            </a:pPr>
+            <a:r>
+              <a:rPr sz="1400">
+                <a:solidFill>
+                  <a:srgbClr val="6D8C97"/>
+                </a:solidFill>
+                <a:latin typeface="Consolas"/>
+              </a:rPr>
+              <a:t>  83  </a:t>
+            </a:r>
+            <a:r>
+              <a:rPr sz="1400">
+                <a:solidFill>
+                  <a:srgbClr val="DCECEF"/>
+                </a:solidFill>
+                <a:latin typeface="Consolas"/>
+              </a:rPr>
+              <a:t>    buffer += decoder.decode(chunk.value, { stream: true });</a:t>
+            </a:r>
+          </a:p>
+          <a:p>
+            <a:pPr>
+              <a:spcAft>
+                <a:spcPts val="0"/>
+              </a:spcAft>
+            </a:pPr>
+            <a:r>
+              <a:rPr sz="1400">
+                <a:solidFill>
+                  <a:srgbClr val="6D8C97"/>
+                </a:solidFill>
+                <a:latin typeface="Consolas"/>
+              </a:rPr>
+              <a:t>  84  </a:t>
+            </a:r>
+            <a:r>
+              <a:rPr sz="1400">
+                <a:solidFill>
+                  <a:srgbClr val="DCECEF"/>
+                </a:solidFill>
+                <a:latin typeface="Consolas"/>
+              </a:rPr>
+              <a:t> </a:t>
+            </a:r>
+          </a:p>
+          <a:p>
+            <a:pPr>
+              <a:spcAft>
+                <a:spcPts val="0"/>
+              </a:spcAft>
+            </a:pPr>
+            <a:r>
+              <a:rPr sz="1400">
+                <a:solidFill>
+                  <a:srgbClr val="6D8C97"/>
+                </a:solidFill>
+                <a:latin typeface="Consolas"/>
+              </a:rPr>
+              <a:t>  85  </a:t>
+            </a:r>
+            <a:r>
+              <a:rPr sz="1400">
+                <a:solidFill>
+                  <a:srgbClr val="DCECEF"/>
+                </a:solidFill>
+                <a:latin typeface="Consolas"/>
+              </a:rPr>
+              <a:t>    // Complete pieces are separated by a blank line. Keep the last,</a:t>
+            </a:r>
+          </a:p>
+          <a:p>
+            <a:pPr>
+              <a:spcAft>
+                <a:spcPts val="0"/>
+              </a:spcAft>
+            </a:pPr>
+            <a:r>
+              <a:rPr sz="1400">
+                <a:solidFill>
+                  <a:srgbClr val="6D8C97"/>
+                </a:solidFill>
+                <a:latin typeface="Consolas"/>
+              </a:rPr>
+              <a:t>  86  </a:t>
+            </a:r>
+            <a:r>
+              <a:rPr sz="1400">
+                <a:solidFill>
+                  <a:srgbClr val="DCECEF"/>
+                </a:solidFill>
+                <a:latin typeface="Consolas"/>
+              </a:rPr>
+              <a:t>    // possibly unfinished, piece in the buffer for the next round.</a:t>
+            </a:r>
+          </a:p>
+          <a:p>
+            <a:pPr>
+              <a:spcAft>
+                <a:spcPts val="0"/>
+              </a:spcAft>
+            </a:pPr>
+            <a:r>
+              <a:rPr sz="1400">
+                <a:solidFill>
+                  <a:srgbClr val="6D8C97"/>
+                </a:solidFill>
+                <a:latin typeface="Consolas"/>
+              </a:rPr>
+              <a:t>  87  </a:t>
+            </a:r>
+            <a:r>
+              <a:rPr sz="1400">
+                <a:solidFill>
+                  <a:srgbClr val="DCECEF"/>
+                </a:solidFill>
+                <a:latin typeface="Consolas"/>
+              </a:rPr>
+              <a:t>    const parts = buffer.split('\n\n');</a:t>
+            </a:r>
+          </a:p>
+          <a:p>
+            <a:pPr>
+              <a:spcAft>
+                <a:spcPts val="0"/>
+              </a:spcAft>
+            </a:pPr>
+            <a:r>
+              <a:rPr sz="1400">
+                <a:solidFill>
+                  <a:srgbClr val="6D8C97"/>
+                </a:solidFill>
+                <a:latin typeface="Consolas"/>
+              </a:rPr>
+              <a:t>  88  </a:t>
+            </a:r>
+            <a:r>
+              <a:rPr sz="1400">
+                <a:solidFill>
+                  <a:srgbClr val="DCECEF"/>
+                </a:solidFill>
+                <a:latin typeface="Consolas"/>
+              </a:rPr>
+              <a:t>    buffer = parts.pop();</a:t>
+            </a:r>
+          </a:p>
+          <a:p>
+            <a:pPr>
+              <a:spcAft>
+                <a:spcPts val="0"/>
+              </a:spcAft>
+            </a:pPr>
+            <a:r>
+              <a:rPr sz="1400">
+                <a:solidFill>
+                  <a:srgbClr val="6D8C97"/>
+                </a:solidFill>
+                <a:latin typeface="Consolas"/>
+              </a:rPr>
+              <a:t>  89  </a:t>
+            </a:r>
+            <a:r>
+              <a:rPr sz="1400">
+                <a:solidFill>
+                  <a:srgbClr val="DCECEF"/>
+                </a:solidFill>
+                <a:latin typeface="Consolas"/>
+              </a:rPr>
+              <a:t> </a:t>
+            </a:r>
+          </a:p>
+          <a:p>
+            <a:pPr>
+              <a:spcAft>
+                <a:spcPts val="0"/>
+              </a:spcAft>
+            </a:pPr>
+            <a:r>
+              <a:rPr sz="1400">
+                <a:solidFill>
+                  <a:srgbClr val="6D8C97"/>
+                </a:solidFill>
+                <a:latin typeface="Consolas"/>
+              </a:rPr>
+              <a:t>  90  </a:t>
+            </a:r>
+            <a:r>
+              <a:rPr sz="1400">
+                <a:solidFill>
+                  <a:srgbClr val="DCECEF"/>
+                </a:solidFill>
+                <a:latin typeface="Consolas"/>
+              </a:rPr>
+              <a:t>    for (const part of parts) {</a:t>
+            </a:r>
+          </a:p>
+          <a:p>
+            <a:pPr>
+              <a:spcAft>
+                <a:spcPts val="0"/>
+              </a:spcAft>
+            </a:pPr>
+            <a:r>
+              <a:rPr sz="1400">
+                <a:solidFill>
+                  <a:srgbClr val="6D8C97"/>
+                </a:solidFill>
+                <a:latin typeface="Consolas"/>
+              </a:rPr>
+              <a:t>  91  </a:t>
+            </a:r>
+            <a:r>
+              <a:rPr sz="1400">
+                <a:solidFill>
+                  <a:srgbClr val="DCECEF"/>
+                </a:solidFill>
+                <a:latin typeface="Consolas"/>
+              </a:rPr>
+              <a:t>      const line = part.trim();</a:t>
+            </a:r>
+          </a:p>
+          <a:p>
+            <a:pPr>
+              <a:spcAft>
+                <a:spcPts val="0"/>
+              </a:spcAft>
+            </a:pPr>
+            <a:r>
+              <a:rPr sz="1400">
+                <a:solidFill>
+                  <a:srgbClr val="6D8C97"/>
+                </a:solidFill>
+                <a:latin typeface="Consolas"/>
+              </a:rPr>
+              <a:t>  92  </a:t>
+            </a:r>
+            <a:r>
+              <a:rPr sz="1400">
+                <a:solidFill>
+                  <a:srgbClr val="DCECEF"/>
+                </a:solidFill>
+                <a:latin typeface="Consolas"/>
+              </a:rPr>
+              <a:t>      if (!line.startsWith('data: ')) { continue; }</a:t>
+            </a:r>
+          </a:p>
+          <a:p>
+            <a:pPr>
+              <a:spcAft>
+                <a:spcPts val="0"/>
+              </a:spcAft>
+            </a:pPr>
+            <a:r>
+              <a:rPr sz="1400">
+                <a:solidFill>
+                  <a:srgbClr val="6D8C97"/>
+                </a:solidFill>
+                <a:latin typeface="Consolas"/>
+              </a:rPr>
+              <a:t>  93  </a:t>
+            </a:r>
+            <a:r>
+              <a:rPr sz="1400">
+                <a:solidFill>
+                  <a:srgbClr val="DCECEF"/>
+                </a:solidFill>
+                <a:latin typeface="Consolas"/>
+              </a:rPr>
+              <a:t>      const payload = line.slice(6);</a:t>
+            </a:r>
+          </a:p>
+          <a:p>
+            <a:pPr>
+              <a:spcAft>
+                <a:spcPts val="0"/>
+              </a:spcAft>
+            </a:pPr>
+            <a:r>
+              <a:rPr sz="1400">
+                <a:solidFill>
+                  <a:srgbClr val="6D8C97"/>
+                </a:solidFill>
+                <a:latin typeface="Consolas"/>
+              </a:rPr>
+              <a:t>  94  </a:t>
+            </a:r>
+            <a:r>
+              <a:rPr sz="1400">
+                <a:solidFill>
+                  <a:srgbClr val="DCECEF"/>
+                </a:solidFill>
+                <a:latin typeface="Consolas"/>
+              </a:rPr>
+              <a:t>      if (payload === '[DONE]') { continue; }</a:t>
+            </a:r>
+          </a:p>
+          <a:p>
+            <a:pPr>
+              <a:spcAft>
+                <a:spcPts val="0"/>
+              </a:spcAft>
+            </a:pPr>
+            <a:r>
+              <a:rPr sz="1400">
+                <a:solidFill>
+                  <a:srgbClr val="6D8C97"/>
+                </a:solidFill>
+                <a:latin typeface="Consolas"/>
+              </a:rPr>
+              <a:t>  95  </a:t>
+            </a:r>
+            <a:r>
+              <a:rPr sz="1400">
+                <a:solidFill>
+                  <a:srgbClr val="DCECEF"/>
+                </a:solidFill>
+                <a:latin typeface="Consolas"/>
+              </a:rPr>
+              <a:t>      const piece = JSON.parse(payload);</a:t>
+            </a:r>
+          </a:p>
+          <a:p>
+            <a:pPr>
+              <a:spcAft>
+                <a:spcPts val="0"/>
+              </a:spcAft>
+            </a:pPr>
+            <a:r>
+              <a:rPr sz="1400">
+                <a:solidFill>
+                  <a:srgbClr val="6D8C97"/>
+                </a:solidFill>
+                <a:latin typeface="Consolas"/>
+              </a:rPr>
+              <a:t>  96  </a:t>
+            </a:r>
+            <a:r>
+              <a:rPr sz="1400">
+                <a:solidFill>
+                  <a:srgbClr val="DCECEF"/>
+                </a:solidFill>
+                <a:latin typeface="Consolas"/>
+              </a:rPr>
+              <a:t>      const bit = piece.choices[0].delta.content;</a:t>
+            </a:r>
+          </a:p>
+          <a:p>
+            <a:pPr>
+              <a:spcAft>
+                <a:spcPts val="0"/>
+              </a:spcAft>
+            </a:pPr>
+            <a:r>
+              <a:rPr sz="1400">
+                <a:solidFill>
+                  <a:srgbClr val="6D8C97"/>
+                </a:solidFill>
+                <a:latin typeface="Consolas"/>
+              </a:rPr>
+              <a:t>  97  </a:t>
+            </a:r>
+            <a:r>
+              <a:rPr sz="1400">
+                <a:solidFill>
+                  <a:srgbClr val="7FE0A0"/>
+                </a:solidFill>
+                <a:latin typeface="Consolas"/>
+              </a:rPr>
+              <a:t>      if (bit) {</a:t>
+            </a:r>
+          </a:p>
+        </p:txBody>
+      </p:sp>
+    </p:spTree>
+  </p:cSld>
+  <p:clrMapOvr>
+    <a:masterClrMapping/>
+  </p:clrMapOvr>
+</p:sld>
+</file>
+
+<file path=ppt/slides/slide8.xml><?xml version="1.0" encoding="utf-8"?>
+<p:sld xmlns:a="http://schemas.openxmlformats.org/drawingml/2006/main" xmlns:p="http://schemas.openxmlformats.org/presentationml/2006/main" xmlns:r="http://schemas.openxmlformats.org/officeDocument/2006/relationships">
+  <p:cSld>
+    <p:bg>
+      <p:bgPr>
+        <a:solidFill>
+          <a:srgbClr val="102127"/>
+        </a:solidFill>
+        <a:effectLst/>
+      </p:bgPr>
+    </p:bg>
+    <p:spTree>
+      <p:nvGrpSpPr>
+        <p:cNvPr id="1" name=""/>
+        <p:cNvGrpSpPr/>
+        <p:nvPr/>
+      </p:nvGrpSpPr>
+      <p:grpSpPr/>
+      <p:sp>
+        <p:nvSpPr>
+          <p:cNvPr id="2" name="TextBox 1"/>
+          <p:cNvSpPr txBox="1"/>
+          <p:nvPr/>
+        </p:nvSpPr>
+        <p:spPr>
+          <a:xfrm>
+            <a:off x="502920" y="274320"/>
+            <a:ext cx="11155680" cy="731520"/>
+          </a:xfrm>
+          <a:prstGeom prst="rect">
+            <a:avLst/>
+          </a:prstGeom>
+          <a:noFill/>
+        </p:spPr>
+        <p:txBody>
+          <a:bodyPr wrap="none">
+            <a:spAutoFit/>
+          </a:bodyPr>
+          <a:lstStyle/>
+          <a:p>
+            <a:r>
+              <a:rPr sz="2600" b="1">
+                <a:solidFill>
+                  <a:srgbClr val="01AEFD"/>
+                </a:solidFill>
+              </a:rPr>
+              <a:t>Type this into script.js  (3 of 6)</a:t>
+            </a:r>
+          </a:p>
+        </p:txBody>
+      </p:sp>
+      <p:sp>
+        <p:nvSpPr>
+          <p:cNvPr id="3" name="TextBox 2"/>
+          <p:cNvSpPr txBox="1"/>
+          <p:nvPr/>
+        </p:nvSpPr>
+        <p:spPr>
+          <a:xfrm>
+            <a:off x="502920" y="1051560"/>
+            <a:ext cx="11155680" cy="5394960"/>
+          </a:xfrm>
+          <a:prstGeom prst="rect">
+            <a:avLst/>
+          </a:prstGeom>
+          <a:noFill/>
+        </p:spPr>
+        <p:txBody>
+          <a:bodyPr wrap="none">
+            <a:spAutoFit/>
+          </a:bodyPr>
+          <a:lstStyle/>
+          <a:p>
+            <a:pPr>
+              <a:spcAft>
+                <a:spcPts val="0"/>
+              </a:spcAft>
+            </a:pPr>
+            <a:r>
+              <a:rPr sz="1700">
+                <a:solidFill>
+                  <a:srgbClr val="6D8C97"/>
+                </a:solidFill>
+                <a:latin typeface="Consolas"/>
+              </a:rPr>
+              <a:t>  98  </a:t>
+            </a:r>
+            <a:r>
+              <a:rPr sz="1700">
+                <a:solidFill>
+                  <a:srgbClr val="7FE0A0"/>
+                </a:solidFill>
+                <a:latin typeface="Consolas"/>
+              </a:rPr>
+              <a:t>        answer += bit;</a:t>
+            </a:r>
+          </a:p>
+          <a:p>
+            <a:pPr>
+              <a:spcAft>
+                <a:spcPts val="0"/>
+              </a:spcAft>
+            </a:pPr>
+            <a:r>
+              <a:rPr sz="1700">
+                <a:solidFill>
+                  <a:srgbClr val="6D8C97"/>
+                </a:solidFill>
+                <a:latin typeface="Consolas"/>
+              </a:rPr>
+              <a:t>  99  </a:t>
+            </a:r>
+            <a:r>
+              <a:rPr sz="1700">
+                <a:solidFill>
+                  <a:srgbClr val="7FE0A0"/>
+                </a:solidFill>
+                <a:latin typeface="Consolas"/>
+              </a:rPr>
+              <a:t>        onPiece(answer);   // week 11: show it NOW, do not wait for the end</a:t>
+            </a:r>
+          </a:p>
+          <a:p>
+            <a:pPr>
+              <a:spcAft>
+                <a:spcPts val="0"/>
+              </a:spcAft>
+            </a:pPr>
+            <a:r>
+              <a:rPr sz="1700">
+                <a:solidFill>
+                  <a:srgbClr val="6D8C97"/>
+                </a:solidFill>
+                <a:latin typeface="Consolas"/>
+              </a:rPr>
+              <a:t> 100  </a:t>
+            </a:r>
+            <a:r>
+              <a:rPr sz="1700">
+                <a:solidFill>
+                  <a:srgbClr val="7FE0A0"/>
+                </a:solidFill>
+                <a:latin typeface="Consolas"/>
+              </a:rPr>
+              <a:t>      }</a:t>
+            </a:r>
+          </a:p>
+          <a:p>
+            <a:pPr>
+              <a:spcAft>
+                <a:spcPts val="0"/>
+              </a:spcAft>
+            </a:pPr>
+            <a:r>
+              <a:rPr sz="1700">
+                <a:solidFill>
+                  <a:srgbClr val="6D8C97"/>
+                </a:solidFill>
+                <a:latin typeface="Consolas"/>
+              </a:rPr>
+              <a:t> 101  </a:t>
+            </a:r>
+            <a:r>
+              <a:rPr sz="1700">
+                <a:solidFill>
+                  <a:srgbClr val="DCECEF"/>
+                </a:solidFill>
+                <a:latin typeface="Consolas"/>
+              </a:rPr>
+              <a:t>    }</a:t>
+            </a:r>
+          </a:p>
+          <a:p>
+            <a:pPr>
+              <a:spcAft>
+                <a:spcPts val="0"/>
+              </a:spcAft>
+            </a:pPr>
+            <a:r>
+              <a:rPr sz="1700">
+                <a:solidFill>
+                  <a:srgbClr val="6D8C97"/>
+                </a:solidFill>
+                <a:latin typeface="Consolas"/>
+              </a:rPr>
+              <a:t> 102  </a:t>
+            </a:r>
+            <a:r>
+              <a:rPr sz="1700">
+                <a:solidFill>
+                  <a:srgbClr val="DCECEF"/>
+                </a:solidFill>
+                <a:latin typeface="Consolas"/>
+              </a:rPr>
+              <a:t>  }</a:t>
+            </a:r>
+          </a:p>
+          <a:p>
+            <a:pPr>
+              <a:spcAft>
+                <a:spcPts val="0"/>
+              </a:spcAft>
+            </a:pPr>
+            <a:r>
+              <a:rPr sz="1700">
+                <a:solidFill>
+                  <a:srgbClr val="6D8C97"/>
+                </a:solidFill>
+                <a:latin typeface="Consolas"/>
+              </a:rPr>
+              <a:t> 103  </a:t>
+            </a:r>
+            <a:r>
+              <a:rPr sz="1700">
+                <a:solidFill>
+                  <a:srgbClr val="DCECEF"/>
+                </a:solidFill>
+                <a:latin typeface="Consolas"/>
+              </a:rPr>
+              <a:t>  return answer;</a:t>
+            </a:r>
+          </a:p>
+          <a:p>
+            <a:pPr>
+              <a:spcAft>
+                <a:spcPts val="0"/>
+              </a:spcAft>
+            </a:pPr>
+            <a:r>
+              <a:rPr sz="1700">
+                <a:solidFill>
+                  <a:srgbClr val="6D8C97"/>
+                </a:solidFill>
+                <a:latin typeface="Consolas"/>
+              </a:rPr>
+              <a:t> 104  </a:t>
+            </a:r>
+            <a:r>
+              <a:rPr sz="1700">
+                <a:solidFill>
+                  <a:srgbClr val="DCECEF"/>
+                </a:solidFill>
+                <a:latin typeface="Consolas"/>
+              </a:rPr>
+              <a:t>}</a:t>
+            </a:r>
+          </a:p>
+        </p:txBody>
+      </p:sp>
+    </p:spTree>
+  </p:cSld>
+  <p:clrMapOvr>
+    <a:masterClrMapping/>
+  </p:clrMapOvr>
+</p:sld>
+</file>
+
+<file path=ppt/slides/slide9.xml><?xml version="1.0" encoding="utf-8"?>
+<p:sld xmlns:a="http://schemas.openxmlformats.org/drawingml/2006/main" xmlns:p="http://schemas.openxmlformats.org/presentationml/2006/main" xmlns:r="http://schemas.openxmlformats.org/officeDocument/2006/relationships">
+  <p:cSld>
+    <p:bg>
+      <p:bgPr>
+        <a:solidFill>
+          <a:srgbClr val="102127"/>
+        </a:solidFill>
+        <a:effectLst/>
+      </p:bgPr>
+    </p:bg>
+    <p:spTree>
+      <p:nvGrpSpPr>
+        <p:cNvPr id="1" name=""/>
+        <p:cNvGrpSpPr/>
+        <p:nvPr/>
+      </p:nvGrpSpPr>
+      <p:grpSpPr/>
+      <p:sp>
+        <p:nvSpPr>
+          <p:cNvPr id="2" name="TextBox 1"/>
+          <p:cNvSpPr txBox="1"/>
+          <p:nvPr/>
+        </p:nvSpPr>
+        <p:spPr>
+          <a:xfrm>
+            <a:off x="502920" y="274320"/>
+            <a:ext cx="11155680" cy="731520"/>
+          </a:xfrm>
+          <a:prstGeom prst="rect">
+            <a:avLst/>
+          </a:prstGeom>
+          <a:noFill/>
+        </p:spPr>
+        <p:txBody>
+          <a:bodyPr wrap="none">
+            <a:spAutoFit/>
+          </a:bodyPr>
+          <a:lstStyle/>
+          <a:p>
+            <a:r>
+              <a:rPr sz="2600" b="1">
+                <a:solidFill>
+                  <a:srgbClr val="01AEFD"/>
+                </a:solidFill>
+              </a:rPr>
+              <a:t>Type this into script.js  (4 of 6)</a:t>
+            </a:r>
+          </a:p>
+        </p:txBody>
+      </p:sp>
+      <p:sp>
+        <p:nvSpPr>
+          <p:cNvPr id="3" name="TextBox 2"/>
+          <p:cNvSpPr txBox="1"/>
+          <p:nvPr/>
+        </p:nvSpPr>
+        <p:spPr>
+          <a:xfrm>
+            <a:off x="502920" y="1051560"/>
+            <a:ext cx="11155680" cy="5394960"/>
+          </a:xfrm>
+          <a:prstGeom prst="rect">
+            <a:avLst/>
+          </a:prstGeom>
+          <a:noFill/>
+        </p:spPr>
+        <p:txBody>
+          <a:bodyPr wrap="none">
+            <a:spAutoFit/>
+          </a:bodyPr>
+          <a:lstStyle/>
+          <a:p>
+            <a:pPr>
+              <a:spcAft>
+                <a:spcPts val="0"/>
+              </a:spcAft>
+            </a:pPr>
+            <a:r>
+              <a:rPr sz="1400">
+                <a:solidFill>
+                  <a:srgbClr val="6D8C97"/>
+                </a:solidFill>
+                <a:latin typeface="Consolas"/>
+              </a:rPr>
+              <a:t> 105  </a:t>
+            </a:r>
+            <a:r>
+              <a:rPr sz="1400">
+                <a:solidFill>
+                  <a:srgbClr val="DCECEF"/>
+                </a:solidFill>
+                <a:latin typeface="Consolas"/>
+              </a:rPr>
+              <a:t> </a:t>
+            </a:r>
+          </a:p>
+          <a:p>
+            <a:pPr>
+              <a:spcAft>
+                <a:spcPts val="0"/>
+              </a:spcAft>
+            </a:pPr>
+            <a:r>
+              <a:rPr sz="1400">
+                <a:solidFill>
+                  <a:srgbClr val="6D8C97"/>
+                </a:solidFill>
+                <a:latin typeface="Consolas"/>
+              </a:rPr>
+              <a:t> 106  </a:t>
+            </a:r>
+            <a:r>
+              <a:rPr sz="1400">
+                <a:solidFill>
+                  <a:srgbClr val="DCECEF"/>
+                </a:solidFill>
+                <a:latin typeface="Consolas"/>
+              </a:rPr>
+              <a:t>// Week 4: ask the AI a real question.</a:t>
+            </a:r>
+          </a:p>
+          <a:p>
+            <a:pPr>
+              <a:spcAft>
+                <a:spcPts val="0"/>
+              </a:spcAft>
+            </a:pPr>
+            <a:r>
+              <a:rPr sz="1400">
+                <a:solidFill>
+                  <a:srgbClr val="6D8C97"/>
+                </a:solidFill>
+                <a:latin typeface="Consolas"/>
+              </a:rPr>
+              <a:t> 107  </a:t>
+            </a:r>
+            <a:r>
+              <a:rPr sz="1400">
+                <a:solidFill>
+                  <a:srgbClr val="DCECEF"/>
+                </a:solidFill>
+                <a:latin typeface="Consolas"/>
+              </a:rPr>
+              <a:t>// A chat request is a LIST of messages. Each one says who said it.</a:t>
+            </a:r>
+          </a:p>
+          <a:p>
+            <a:pPr>
+              <a:spcAft>
+                <a:spcPts val="0"/>
+              </a:spcAft>
+            </a:pPr>
+            <a:r>
+              <a:rPr sz="1400">
+                <a:solidFill>
+                  <a:srgbClr val="6D8C97"/>
+                </a:solidFill>
+                <a:latin typeface="Consolas"/>
+              </a:rPr>
+              <a:t> 108  </a:t>
+            </a:r>
+            <a:r>
+              <a:rPr sz="1400">
+                <a:solidFill>
+                  <a:srgbClr val="7FE0A0"/>
+                </a:solidFill>
+                <a:latin typeface="Consolas"/>
+              </a:rPr>
+              <a:t>async function askAI(onPiece) {</a:t>
+            </a:r>
+          </a:p>
+          <a:p>
+            <a:pPr>
+              <a:spcAft>
+                <a:spcPts val="0"/>
+              </a:spcAft>
+            </a:pPr>
+            <a:r>
+              <a:rPr sz="1400">
+                <a:solidFill>
+                  <a:srgbClr val="6D8C97"/>
+                </a:solidFill>
+                <a:latin typeface="Consolas"/>
+              </a:rPr>
+              <a:t> 109  </a:t>
+            </a:r>
+            <a:r>
+              <a:rPr sz="1400">
+                <a:solidFill>
+                  <a:srgbClr val="DCECEF"/>
+                </a:solidFill>
+                <a:latin typeface="Consolas"/>
+              </a:rPr>
+              <a:t>  trimHistory();   // week 8: never send more than the server will read</a:t>
+            </a:r>
+          </a:p>
+          <a:p>
+            <a:pPr>
+              <a:spcAft>
+                <a:spcPts val="0"/>
+              </a:spcAft>
+            </a:pPr>
+            <a:r>
+              <a:rPr sz="1400">
+                <a:solidFill>
+                  <a:srgbClr val="6D8C97"/>
+                </a:solidFill>
+                <a:latin typeface="Consolas"/>
+              </a:rPr>
+              <a:t> 110  </a:t>
+            </a:r>
+            <a:r>
+              <a:rPr sz="1400">
+                <a:solidFill>
+                  <a:srgbClr val="DCECEF"/>
+                </a:solidFill>
+                <a:latin typeface="Consolas"/>
+              </a:rPr>
+              <a:t>  const res = await fetch(AI_BASE + '/v1/chat/completions', {</a:t>
+            </a:r>
+          </a:p>
+          <a:p>
+            <a:pPr>
+              <a:spcAft>
+                <a:spcPts val="0"/>
+              </a:spcAft>
+            </a:pPr>
+            <a:r>
+              <a:rPr sz="1400">
+                <a:solidFill>
+                  <a:srgbClr val="6D8C97"/>
+                </a:solidFill>
+                <a:latin typeface="Consolas"/>
+              </a:rPr>
+              <a:t> 111  </a:t>
+            </a:r>
+            <a:r>
+              <a:rPr sz="1400">
+                <a:solidFill>
+                  <a:srgbClr val="DCECEF"/>
+                </a:solidFill>
+                <a:latin typeface="Consolas"/>
+              </a:rPr>
+              <a:t>    method: 'POST',                       // POST = I am sending you something</a:t>
+            </a:r>
+          </a:p>
+          <a:p>
+            <a:pPr>
+              <a:spcAft>
+                <a:spcPts val="0"/>
+              </a:spcAft>
+            </a:pPr>
+            <a:r>
+              <a:rPr sz="1400">
+                <a:solidFill>
+                  <a:srgbClr val="6D8C97"/>
+                </a:solidFill>
+                <a:latin typeface="Consolas"/>
+              </a:rPr>
+              <a:t> 112  </a:t>
+            </a:r>
+            <a:r>
+              <a:rPr sz="1400">
+                <a:solidFill>
+                  <a:srgbClr val="DCECEF"/>
+                </a:solidFill>
+                <a:latin typeface="Consolas"/>
+              </a:rPr>
+              <a:t>    headers: {</a:t>
+            </a:r>
+          </a:p>
+          <a:p>
+            <a:pPr>
+              <a:spcAft>
+                <a:spcPts val="0"/>
+              </a:spcAft>
+            </a:pPr>
+            <a:r>
+              <a:rPr sz="1400">
+                <a:solidFill>
+                  <a:srgbClr val="6D8C97"/>
+                </a:solidFill>
+                <a:latin typeface="Consolas"/>
+              </a:rPr>
+              <a:t> 113  </a:t>
+            </a:r>
+            <a:r>
+              <a:rPr sz="1400">
+                <a:solidFill>
+                  <a:srgbClr val="DCECEF"/>
+                </a:solidFill>
+                <a:latin typeface="Consolas"/>
+              </a:rPr>
+              <a:t>      'Content-Type': 'application/json', // what I am sending is JSON</a:t>
+            </a:r>
+          </a:p>
+          <a:p>
+            <a:pPr>
+              <a:spcAft>
+                <a:spcPts val="0"/>
+              </a:spcAft>
+            </a:pPr>
+            <a:r>
+              <a:rPr sz="1400">
+                <a:solidFill>
+                  <a:srgbClr val="6D8C97"/>
+                </a:solidFill>
+                <a:latin typeface="Consolas"/>
+              </a:rPr>
+              <a:t> 114  </a:t>
+            </a:r>
+            <a:r>
+              <a:rPr sz="1400">
+                <a:solidFill>
+                  <a:srgbClr val="DCECEF"/>
+                </a:solidFill>
+                <a:latin typeface="Consolas"/>
+              </a:rPr>
+              <a:t>      'Authorization': 'Bearer ' + API_KEY</a:t>
+            </a:r>
+          </a:p>
+          <a:p>
+            <a:pPr>
+              <a:spcAft>
+                <a:spcPts val="0"/>
+              </a:spcAft>
+            </a:pPr>
+            <a:r>
+              <a:rPr sz="1400">
+                <a:solidFill>
+                  <a:srgbClr val="6D8C97"/>
+                </a:solidFill>
+                <a:latin typeface="Consolas"/>
+              </a:rPr>
+              <a:t> 115  </a:t>
+            </a:r>
+            <a:r>
+              <a:rPr sz="1400">
+                <a:solidFill>
+                  <a:srgbClr val="DCECEF"/>
+                </a:solidFill>
+                <a:latin typeface="Consolas"/>
+              </a:rPr>
+              <a:t>    },</a:t>
+            </a:r>
+          </a:p>
+          <a:p>
+            <a:pPr>
+              <a:spcAft>
+                <a:spcPts val="0"/>
+              </a:spcAft>
+            </a:pPr>
+            <a:r>
+              <a:rPr sz="1400">
+                <a:solidFill>
+                  <a:srgbClr val="6D8C97"/>
+                </a:solidFill>
+                <a:latin typeface="Consolas"/>
+              </a:rPr>
+              <a:t> 116  </a:t>
+            </a:r>
+            <a:r>
+              <a:rPr sz="1400">
+                <a:solidFill>
+                  <a:srgbClr val="DCECEF"/>
+                </a:solidFill>
+                <a:latin typeface="Consolas"/>
+              </a:rPr>
+              <a:t>    body: JSON.stringify({</a:t>
+            </a:r>
+          </a:p>
+          <a:p>
+            <a:pPr>
+              <a:spcAft>
+                <a:spcPts val="0"/>
+              </a:spcAft>
+            </a:pPr>
+            <a:r>
+              <a:rPr sz="1400">
+                <a:solidFill>
+                  <a:srgbClr val="6D8C97"/>
+                </a:solidFill>
+                <a:latin typeface="Consolas"/>
+              </a:rPr>
+              <a:t> 117  </a:t>
+            </a:r>
+            <a:r>
+              <a:rPr sz="1400">
+                <a:solidFill>
+                  <a:srgbClr val="DCECEF"/>
+                </a:solidFill>
+                <a:latin typeface="Consolas"/>
+              </a:rPr>
+              <a:t>      model: modelBox.value,                    // week 9: chosen on the page</a:t>
+            </a:r>
+          </a:p>
+          <a:p>
+            <a:pPr>
+              <a:spcAft>
+                <a:spcPts val="0"/>
+              </a:spcAft>
+            </a:pPr>
+            <a:r>
+              <a:rPr sz="1400">
+                <a:solidFill>
+                  <a:srgbClr val="6D8C97"/>
+                </a:solidFill>
+                <a:latin typeface="Consolas"/>
+              </a:rPr>
+              <a:t> 118  </a:t>
+            </a:r>
+            <a:r>
+              <a:rPr sz="1400">
+                <a:solidFill>
+                  <a:srgbClr val="DCECEF"/>
+                </a:solidFill>
+                <a:latin typeface="Consolas"/>
+              </a:rPr>
+              <a:t>      temperature: Number(tempBox.value),       // 0 = careful, 1.5 = wild</a:t>
+            </a:r>
+          </a:p>
+          <a:p>
+            <a:pPr>
+              <a:spcAft>
+                <a:spcPts val="0"/>
+              </a:spcAft>
+            </a:pPr>
+            <a:r>
+              <a:rPr sz="1400">
+                <a:solidFill>
+                  <a:srgbClr val="6D8C97"/>
+                </a:solidFill>
+                <a:latin typeface="Consolas"/>
+              </a:rPr>
+              <a:t> 119  </a:t>
+            </a:r>
+            <a:r>
+              <a:rPr sz="1400">
+                <a:solidFill>
+                  <a:srgbClr val="DCECEF"/>
+                </a:solidFill>
+                <a:latin typeface="Consolas"/>
+              </a:rPr>
+              <a:t>      stream: true,                             // week 10: send it in pieces</a:t>
             </a:r>
           </a:p>
         </p:txBody>

--- a/ai101/slides/week-11.pptx
+++ b/ai101/slides/week-11.pptx
@@ -3260,7 +3260,7 @@
                 </a:solidFill>
                 <a:latin typeface="Consolas"/>
               </a:rPr>
-              <a:t> 120  </a:t>
+              <a:t> 123  </a:t>
             </a:r>
             <a:r>
               <a:rPr sz="1400">
@@ -3285,7 +3285,7 @@
                 </a:solidFill>
                 <a:latin typeface="Consolas"/>
               </a:rPr>
-              <a:t> 121  </a:t>
+              <a:t> 124  </a:t>
             </a:r>
             <a:r>
               <a:rPr sz="1400">
@@ -3310,7 +3310,7 @@
                 </a:solidFill>
                 <a:latin typeface="Consolas"/>
               </a:rPr>
-              <a:t> 122  </a:t>
+              <a:t> 125  </a:t>
             </a:r>
             <a:r>
               <a:rPr sz="1400">
@@ -3335,7 +3335,7 @@
                 </a:solidFill>
                 <a:latin typeface="Consolas"/>
               </a:rPr>
-              <a:t> 123  </a:t>
+              <a:t> 126  </a:t>
             </a:r>
             <a:r>
               <a:rPr sz="1400">
@@ -3360,7 +3360,7 @@
                 </a:solidFill>
                 <a:latin typeface="Consolas"/>
               </a:rPr>
-              <a:t> 124  </a:t>
+              <a:t> 127  </a:t>
             </a:r>
             <a:r>
               <a:rPr sz="1400">
@@ -3385,7 +3385,7 @@
                 </a:solidFill>
                 <a:latin typeface="Consolas"/>
               </a:rPr>
-              <a:t> 125  </a:t>
+              <a:t> 128  </a:t>
             </a:r>
             <a:r>
               <a:rPr sz="1400">
@@ -3410,7 +3410,7 @@
                 </a:solidFill>
                 <a:latin typeface="Consolas"/>
               </a:rPr>
-              <a:t> 126  </a:t>
+              <a:t> 129  </a:t>
             </a:r>
             <a:r>
               <a:rPr sz="1400">
@@ -3435,7 +3435,7 @@
                 </a:solidFill>
                 <a:latin typeface="Consolas"/>
               </a:rPr>
-              <a:t> 127  </a:t>
+              <a:t> 130  </a:t>
             </a:r>
             <a:r>
               <a:rPr sz="1400">
@@ -3460,7 +3460,7 @@
                 </a:solidFill>
                 <a:latin typeface="Consolas"/>
               </a:rPr>
-              <a:t> 128  </a:t>
+              <a:t> 131  </a:t>
             </a:r>
             <a:r>
               <a:rPr sz="1400">
@@ -3485,7 +3485,7 @@
                 </a:solidFill>
                 <a:latin typeface="Consolas"/>
               </a:rPr>
-              <a:t> 129  </a:t>
+              <a:t> 132  </a:t>
             </a:r>
             <a:r>
               <a:rPr sz="1400">
@@ -3510,7 +3510,7 @@
                 </a:solidFill>
                 <a:latin typeface="Consolas"/>
               </a:rPr>
-              <a:t> 130  </a:t>
+              <a:t> 133  </a:t>
             </a:r>
             <a:r>
               <a:rPr sz="1400">
@@ -3535,7 +3535,7 @@
                 </a:solidFill>
                 <a:latin typeface="Consolas"/>
               </a:rPr>
-              <a:t> 131  </a:t>
+              <a:t> 134  </a:t>
             </a:r>
             <a:r>
               <a:rPr sz="1400">
@@ -3560,7 +3560,7 @@
                 </a:solidFill>
                 <a:latin typeface="Consolas"/>
               </a:rPr>
-              <a:t> 132  </a:t>
+              <a:t> 135  </a:t>
             </a:r>
             <a:r>
               <a:rPr sz="1400">
@@ -3585,7 +3585,7 @@
                 </a:solidFill>
                 <a:latin typeface="Consolas"/>
               </a:rPr>
-              <a:t> 133  </a:t>
+              <a:t> 136  </a:t>
             </a:r>
             <a:r>
               <a:rPr sz="1400">
@@ -3610,7 +3610,7 @@
                 </a:solidFill>
                 <a:latin typeface="Consolas"/>
               </a:rPr>
-              <a:t> 134  </a:t>
+              <a:t> 137  </a:t>
             </a:r>
             <a:r>
               <a:rPr sz="1400">
@@ -3717,7 +3717,7 @@
                 </a:solidFill>
                 <a:latin typeface="Consolas"/>
               </a:rPr>
-              <a:t> 135  </a:t>
+              <a:t> 138  </a:t>
             </a:r>
             <a:r>
               <a:rPr sz="1700">
@@ -3742,7 +3742,7 @@
                 </a:solidFill>
                 <a:latin typeface="Consolas"/>
               </a:rPr>
-              <a:t> 136  </a:t>
+              <a:t> 139  </a:t>
             </a:r>
             <a:r>
               <a:rPr sz="1700">
@@ -3767,7 +3767,7 @@
                 </a:solidFill>
                 <a:latin typeface="Consolas"/>
               </a:rPr>
-              <a:t> 137  </a:t>
+              <a:t> 140  </a:t>
             </a:r>
             <a:r>
               <a:rPr sz="1700">
@@ -3971,7 +3971,7 @@
                 </a:solidFill>
                 <a:latin typeface="Consolas"/>
               </a:rPr>
-              <a:t> 143  </a:t>
+              <a:t> 146  </a:t>
             </a:r>
             <a:r>
               <a:rPr sz="1400">
@@ -3996,7 +3996,7 @@
                 </a:solidFill>
                 <a:latin typeface="Consolas"/>
               </a:rPr>
-              <a:t> 144  </a:t>
+              <a:t> 147  </a:t>
             </a:r>
             <a:r>
               <a:rPr sz="1400">
@@ -4021,7 +4021,7 @@
                 </a:solidFill>
                 <a:latin typeface="Consolas"/>
               </a:rPr>
-              <a:t> 145  </a:t>
+              <a:t> 148  </a:t>
             </a:r>
             <a:r>
               <a:rPr sz="1400">
@@ -4046,7 +4046,7 @@
                 </a:solidFill>
                 <a:latin typeface="Consolas"/>
               </a:rPr>
-              <a:t> 146  </a:t>
+              <a:t> 149  </a:t>
             </a:r>
             <a:r>
               <a:rPr sz="1400">
@@ -4071,7 +4071,7 @@
                 </a:solidFill>
                 <a:latin typeface="Consolas"/>
               </a:rPr>
-              <a:t> 147  </a:t>
+              <a:t> 150  </a:t>
             </a:r>
             <a:r>
               <a:rPr sz="1400">
@@ -4096,7 +4096,7 @@
                 </a:solidFill>
                 <a:latin typeface="Consolas"/>
               </a:rPr>
-              <a:t> 148  </a:t>
+              <a:t> 151  </a:t>
             </a:r>
             <a:r>
               <a:rPr sz="1400">
@@ -4121,7 +4121,7 @@
                 </a:solidFill>
                 <a:latin typeface="Consolas"/>
               </a:rPr>
-              <a:t> 149  </a:t>
+              <a:t> 152  </a:t>
             </a:r>
             <a:r>
               <a:rPr sz="1400">
@@ -4146,7 +4146,7 @@
                 </a:solidFill>
                 <a:latin typeface="Consolas"/>
               </a:rPr>
-              <a:t> 150  </a:t>
+              <a:t> 153  </a:t>
             </a:r>
             <a:r>
               <a:rPr sz="1400">
@@ -4171,7 +4171,7 @@
                 </a:solidFill>
                 <a:latin typeface="Consolas"/>
               </a:rPr>
-              <a:t> 151  </a:t>
+              <a:t> 154  </a:t>
             </a:r>
             <a:r>
               <a:rPr sz="1400">
@@ -4196,7 +4196,7 @@
                 </a:solidFill>
                 <a:latin typeface="Consolas"/>
               </a:rPr>
-              <a:t> 152  </a:t>
+              <a:t> 155  </a:t>
             </a:r>
             <a:r>
               <a:rPr sz="1400">
@@ -4221,7 +4221,7 @@
                 </a:solidFill>
                 <a:latin typeface="Consolas"/>
               </a:rPr>
-              <a:t> 153  </a:t>
+              <a:t> 156  </a:t>
             </a:r>
             <a:r>
               <a:rPr sz="1400">
@@ -4246,7 +4246,7 @@
                 </a:solidFill>
                 <a:latin typeface="Consolas"/>
               </a:rPr>
-              <a:t> 154  </a:t>
+              <a:t> 157  </a:t>
             </a:r>
             <a:r>
               <a:rPr sz="1400">
@@ -4271,7 +4271,7 @@
                 </a:solidFill>
                 <a:latin typeface="Consolas"/>
               </a:rPr>
-              <a:t> 155  </a:t>
+              <a:t> 158  </a:t>
             </a:r>
             <a:r>
               <a:rPr sz="1400">
@@ -4296,7 +4296,7 @@
                 </a:solidFill>
                 <a:latin typeface="Consolas"/>
               </a:rPr>
-              <a:t> 156  </a:t>
+              <a:t> 159  </a:t>
             </a:r>
             <a:r>
               <a:rPr sz="1400">
@@ -4321,7 +4321,7 @@
                 </a:solidFill>
                 <a:latin typeface="Consolas"/>
               </a:rPr>
-              <a:t> 157  </a:t>
+              <a:t> 160  </a:t>
             </a:r>
             <a:r>
               <a:rPr sz="1400">
@@ -4428,7 +4428,7 @@
                 </a:solidFill>
                 <a:latin typeface="Consolas"/>
               </a:rPr>
-              <a:t> 158  </a:t>
+              <a:t> 161  </a:t>
             </a:r>
             <a:r>
               <a:rPr sz="1700">
@@ -4453,7 +4453,7 @@
                 </a:solidFill>
                 <a:latin typeface="Consolas"/>
               </a:rPr>
-              <a:t> 159  </a:t>
+              <a:t> 162  </a:t>
             </a:r>
             <a:r>
               <a:rPr sz="1700">
@@ -4478,7 +4478,7 @@
                 </a:solidFill>
                 <a:latin typeface="Consolas"/>
               </a:rPr>
-              <a:t> 160  </a:t>
+              <a:t> 163  </a:t>
             </a:r>
             <a:r>
               <a:rPr sz="1700">
@@ -4503,7 +4503,7 @@
                 </a:solidFill>
                 <a:latin typeface="Consolas"/>
               </a:rPr>
-              <a:t> 161  </a:t>
+              <a:t> 164  </a:t>
             </a:r>
             <a:r>
               <a:rPr sz="1700">
@@ -4528,7 +4528,7 @@
                 </a:solidFill>
                 <a:latin typeface="Consolas"/>
               </a:rPr>
-              <a:t> 162  </a:t>
+              <a:t> 165  </a:t>
             </a:r>
             <a:r>
               <a:rPr sz="1700">
@@ -4553,7 +4553,7 @@
                 </a:solidFill>
                 <a:latin typeface="Consolas"/>
               </a:rPr>
-              <a:t> 163  </a:t>
+              <a:t> 166  </a:t>
             </a:r>
             <a:r>
               <a:rPr sz="1700">
@@ -4578,7 +4578,7 @@
                 </a:solidFill>
                 <a:latin typeface="Consolas"/>
               </a:rPr>
-              <a:t> 164  </a:t>
+              <a:t> 167  </a:t>
             </a:r>
             <a:r>
               <a:rPr sz="1700">
@@ -4603,7 +4603,7 @@
                 </a:solidFill>
                 <a:latin typeface="Consolas"/>
               </a:rPr>
-              <a:t> 165  </a:t>
+              <a:t> 168  </a:t>
             </a:r>
             <a:r>
               <a:rPr sz="1700">
@@ -4628,7 +4628,7 @@
                 </a:solidFill>
                 <a:latin typeface="Consolas"/>
               </a:rPr>
-              <a:t> 166  </a:t>
+              <a:t> 169  </a:t>
             </a:r>
             <a:r>
               <a:rPr sz="1700">
@@ -4653,7 +4653,7 @@
                 </a:solidFill>
                 <a:latin typeface="Consolas"/>
               </a:rPr>
-              <a:t> 167  </a:t>
+              <a:t> 170  </a:t>
             </a:r>
             <a:r>
               <a:rPr sz="1700">
@@ -5582,7 +5582,7 @@
                 </a:solidFill>
                 <a:latin typeface="Consolas"/>
               </a:rPr>
-              <a:t>  68  </a:t>
+              <a:t>  71  </a:t>
             </a:r>
             <a:r>
               <a:rPr sz="1400">
@@ -5607,7 +5607,7 @@
                 </a:solidFill>
                 <a:latin typeface="Consolas"/>
               </a:rPr>
-              <a:t>  69  </a:t>
+              <a:t>  72  </a:t>
             </a:r>
             <a:r>
               <a:rPr sz="1400">
@@ -5632,7 +5632,7 @@
                 </a:solidFill>
                 <a:latin typeface="Consolas"/>
               </a:rPr>
-              <a:t>  70  </a:t>
+              <a:t>  73  </a:t>
             </a:r>
             <a:r>
               <a:rPr sz="1400">
@@ -5657,7 +5657,7 @@
                 </a:solidFill>
                 <a:latin typeface="Consolas"/>
               </a:rPr>
-              <a:t>  71  </a:t>
+              <a:t>  74  </a:t>
             </a:r>
             <a:r>
               <a:rPr sz="1400">
@@ -5682,7 +5682,7 @@
                 </a:solidFill>
                 <a:latin typeface="Consolas"/>
               </a:rPr>
-              <a:t>  72  </a:t>
+              <a:t>  75  </a:t>
             </a:r>
             <a:r>
               <a:rPr sz="1400">
@@ -5707,7 +5707,7 @@
                 </a:solidFill>
                 <a:latin typeface="Consolas"/>
               </a:rPr>
-              <a:t>  73  </a:t>
+              <a:t>  76  </a:t>
             </a:r>
             <a:r>
               <a:rPr sz="1400">
@@ -5732,7 +5732,7 @@
                 </a:solidFill>
                 <a:latin typeface="Consolas"/>
               </a:rPr>
-              <a:t>  74  </a:t>
+              <a:t>  77  </a:t>
             </a:r>
             <a:r>
               <a:rPr sz="1400">
@@ -5757,7 +5757,7 @@
                 </a:solidFill>
                 <a:latin typeface="Consolas"/>
               </a:rPr>
-              <a:t>  75  </a:t>
+              <a:t>  78  </a:t>
             </a:r>
             <a:r>
               <a:rPr sz="1400">
@@ -5782,7 +5782,7 @@
                 </a:solidFill>
                 <a:latin typeface="Consolas"/>
               </a:rPr>
-              <a:t>  76  </a:t>
+              <a:t>  79  </a:t>
             </a:r>
             <a:r>
               <a:rPr sz="1400">
@@ -5807,7 +5807,7 @@
                 </a:solidFill>
                 <a:latin typeface="Consolas"/>
               </a:rPr>
-              <a:t>  77  </a:t>
+              <a:t>  80  </a:t>
             </a:r>
             <a:r>
               <a:rPr sz="1400">
@@ -5832,7 +5832,7 @@
                 </a:solidFill>
                 <a:latin typeface="Consolas"/>
               </a:rPr>
-              <a:t>  78  </a:t>
+              <a:t>  81  </a:t>
             </a:r>
             <a:r>
               <a:rPr sz="1400">
@@ -5857,7 +5857,7 @@
                 </a:solidFill>
                 <a:latin typeface="Consolas"/>
               </a:rPr>
-              <a:t>  79  </a:t>
+              <a:t>  82  </a:t>
             </a:r>
             <a:r>
               <a:rPr sz="1400">
@@ -5882,7 +5882,7 @@
                 </a:solidFill>
                 <a:latin typeface="Consolas"/>
               </a:rPr>
-              <a:t>  80  </a:t>
+              <a:t>  83  </a:t>
             </a:r>
             <a:r>
               <a:rPr sz="1400">
@@ -5907,7 +5907,7 @@
                 </a:solidFill>
                 <a:latin typeface="Consolas"/>
               </a:rPr>
-              <a:t>  81  </a:t>
+              <a:t>  84  </a:t>
             </a:r>
             <a:r>
               <a:rPr sz="1400">
@@ -5932,7 +5932,7 @@
                 </a:solidFill>
                 <a:latin typeface="Consolas"/>
               </a:rPr>
-              <a:t>  82  </a:t>
+              <a:t>  85  </a:t>
             </a:r>
             <a:r>
               <a:rPr sz="1400">
@@ -6039,7 +6039,7 @@
                 </a:solidFill>
                 <a:latin typeface="Consolas"/>
               </a:rPr>
-              <a:t>  83  </a:t>
+              <a:t>  86  </a:t>
             </a:r>
             <a:r>
               <a:rPr sz="1400">
@@ -6064,7 +6064,7 @@
                 </a:solidFill>
                 <a:latin typeface="Consolas"/>
               </a:rPr>
-              <a:t>  84  </a:t>
+              <a:t>  87  </a:t>
             </a:r>
             <a:r>
               <a:rPr sz="1400">
@@ -6089,7 +6089,7 @@
                 </a:solidFill>
                 <a:latin typeface="Consolas"/>
               </a:rPr>
-              <a:t>  85  </a:t>
+              <a:t>  88  </a:t>
             </a:r>
             <a:r>
               <a:rPr sz="1400">
@@ -6114,7 +6114,7 @@
                 </a:solidFill>
                 <a:latin typeface="Consolas"/>
               </a:rPr>
-              <a:t>  86  </a:t>
+              <a:t>  89  </a:t>
             </a:r>
             <a:r>
               <a:rPr sz="1400">
@@ -6139,7 +6139,7 @@
                 </a:solidFill>
                 <a:latin typeface="Consolas"/>
               </a:rPr>
-              <a:t>  87  </a:t>
+              <a:t>  90  </a:t>
             </a:r>
             <a:r>
               <a:rPr sz="1400">
@@ -6164,7 +6164,7 @@
                 </a:solidFill>
                 <a:latin typeface="Consolas"/>
               </a:rPr>
-              <a:t>  88  </a:t>
+              <a:t>  91  </a:t>
             </a:r>
             <a:r>
               <a:rPr sz="1400">
@@ -6189,7 +6189,7 @@
                 </a:solidFill>
                 <a:latin typeface="Consolas"/>
               </a:rPr>
-              <a:t>  89  </a:t>
+              <a:t>  92  </a:t>
             </a:r>
             <a:r>
               <a:rPr sz="1400">
@@ -6214,7 +6214,7 @@
                 </a:solidFill>
                 <a:latin typeface="Consolas"/>
               </a:rPr>
-              <a:t>  90  </a:t>
+              <a:t>  93  </a:t>
             </a:r>
             <a:r>
               <a:rPr sz="1400">
@@ -6239,7 +6239,7 @@
                 </a:solidFill>
                 <a:latin typeface="Consolas"/>
               </a:rPr>
-              <a:t>  91  </a:t>
+              <a:t>  94  </a:t>
             </a:r>
             <a:r>
               <a:rPr sz="1400">
@@ -6264,7 +6264,7 @@
                 </a:solidFill>
                 <a:latin typeface="Consolas"/>
               </a:rPr>
-              <a:t>  92  </a:t>
+              <a:t>  95  </a:t>
             </a:r>
             <a:r>
               <a:rPr sz="1400">
@@ -6289,7 +6289,7 @@
                 </a:solidFill>
                 <a:latin typeface="Consolas"/>
               </a:rPr>
-              <a:t>  93  </a:t>
+              <a:t>  96  </a:t>
             </a:r>
             <a:r>
               <a:rPr sz="1400">
@@ -6314,7 +6314,7 @@
                 </a:solidFill>
                 <a:latin typeface="Consolas"/>
               </a:rPr>
-              <a:t>  94  </a:t>
+              <a:t>  97  </a:t>
             </a:r>
             <a:r>
               <a:rPr sz="1400">
@@ -6339,7 +6339,7 @@
                 </a:solidFill>
                 <a:latin typeface="Consolas"/>
               </a:rPr>
-              <a:t>  95  </a:t>
+              <a:t>  98  </a:t>
             </a:r>
             <a:r>
               <a:rPr sz="1400">
@@ -6364,7 +6364,7 @@
                 </a:solidFill>
                 <a:latin typeface="Consolas"/>
               </a:rPr>
-              <a:t>  96  </a:t>
+              <a:t>  99  </a:t>
             </a:r>
             <a:r>
               <a:rPr sz="1400">
@@ -6389,7 +6389,7 @@
                 </a:solidFill>
                 <a:latin typeface="Consolas"/>
               </a:rPr>
-              <a:t>  97  </a:t>
+              <a:t> 100  </a:t>
             </a:r>
             <a:r>
               <a:rPr sz="1400">
@@ -6496,7 +6496,7 @@
                 </a:solidFill>
                 <a:latin typeface="Consolas"/>
               </a:rPr>
-              <a:t>  98  </a:t>
+              <a:t> 101  </a:t>
             </a:r>
             <a:r>
               <a:rPr sz="1700">
@@ -6521,7 +6521,7 @@
                 </a:solidFill>
                 <a:latin typeface="Consolas"/>
               </a:rPr>
-              <a:t>  99  </a:t>
+              <a:t> 102  </a:t>
             </a:r>
             <a:r>
               <a:rPr sz="1700">
@@ -6546,7 +6546,7 @@
                 </a:solidFill>
                 <a:latin typeface="Consolas"/>
               </a:rPr>
-              <a:t> 100  </a:t>
+              <a:t> 103  </a:t>
             </a:r>
             <a:r>
               <a:rPr sz="1700">
@@ -6571,7 +6571,7 @@
                 </a:solidFill>
                 <a:latin typeface="Consolas"/>
               </a:rPr>
-              <a:t> 101  </a:t>
+              <a:t> 104  </a:t>
             </a:r>
             <a:r>
               <a:rPr sz="1700">
@@ -6596,7 +6596,7 @@
                 </a:solidFill>
                 <a:latin typeface="Consolas"/>
               </a:rPr>
-              <a:t> 102  </a:t>
+              <a:t> 105  </a:t>
             </a:r>
             <a:r>
               <a:rPr sz="1700">
@@ -6621,7 +6621,7 @@
                 </a:solidFill>
                 <a:latin typeface="Consolas"/>
               </a:rPr>
-              <a:t> 103  </a:t>
+              <a:t> 106  </a:t>
             </a:r>
             <a:r>
               <a:rPr sz="1700">
@@ -6646,7 +6646,7 @@
                 </a:solidFill>
                 <a:latin typeface="Consolas"/>
               </a:rPr>
-              <a:t> 104  </a:t>
+              <a:t> 107  </a:t>
             </a:r>
             <a:r>
               <a:rPr sz="1700">
@@ -6753,7 +6753,7 @@
                 </a:solidFill>
                 <a:latin typeface="Consolas"/>
               </a:rPr>
-              <a:t> 105  </a:t>
+              <a:t> 108  </a:t>
             </a:r>
             <a:r>
               <a:rPr sz="1400">
@@ -6778,7 +6778,7 @@
                 </a:solidFill>
                 <a:latin typeface="Consolas"/>
               </a:rPr>
-              <a:t> 106  </a:t>
+              <a:t> 109  </a:t>
             </a:r>
             <a:r>
               <a:rPr sz="1400">
@@ -6803,7 +6803,7 @@
                 </a:solidFill>
                 <a:latin typeface="Consolas"/>
               </a:rPr>
-              <a:t> 107  </a:t>
+              <a:t> 110  </a:t>
             </a:r>
             <a:r>
               <a:rPr sz="1400">
@@ -6828,7 +6828,7 @@
                 </a:solidFill>
                 <a:latin typeface="Consolas"/>
               </a:rPr>
-              <a:t> 108  </a:t>
+              <a:t> 111  </a:t>
             </a:r>
             <a:r>
               <a:rPr sz="1400">
@@ -6853,7 +6853,7 @@
                 </a:solidFill>
                 <a:latin typeface="Consolas"/>
               </a:rPr>
-              <a:t> 109  </a:t>
+              <a:t> 112  </a:t>
             </a:r>
             <a:r>
               <a:rPr sz="1400">
@@ -6878,7 +6878,7 @@
                 </a:solidFill>
                 <a:latin typeface="Consolas"/>
               </a:rPr>
-              <a:t> 110  </a:t>
+              <a:t> 113  </a:t>
             </a:r>
             <a:r>
               <a:rPr sz="1400">
@@ -6903,7 +6903,7 @@
                 </a:solidFill>
                 <a:latin typeface="Consolas"/>
               </a:rPr>
-              <a:t> 111  </a:t>
+              <a:t> 114  </a:t>
             </a:r>
             <a:r>
               <a:rPr sz="1400">
@@ -6928,7 +6928,7 @@
                 </a:solidFill>
                 <a:latin typeface="Consolas"/>
               </a:rPr>
-              <a:t> 112  </a:t>
+              <a:t> 115  </a:t>
             </a:r>
             <a:r>
               <a:rPr sz="1400">
@@ -6953,7 +6953,7 @@
                 </a:solidFill>
                 <a:latin typeface="Consolas"/>
               </a:rPr>
-              <a:t> 113  </a:t>
+              <a:t> 116  </a:t>
             </a:r>
             <a:r>
               <a:rPr sz="1400">
@@ -6978,7 +6978,7 @@
                 </a:solidFill>
                 <a:latin typeface="Consolas"/>
               </a:rPr>
-              <a:t> 114  </a:t>
+              <a:t> 117  </a:t>
             </a:r>
             <a:r>
               <a:rPr sz="1400">
@@ -7003,7 +7003,7 @@
                 </a:solidFill>
                 <a:latin typeface="Consolas"/>
               </a:rPr>
-              <a:t> 115  </a:t>
+              <a:t> 118  </a:t>
             </a:r>
             <a:r>
               <a:rPr sz="1400">
@@ -7028,7 +7028,7 @@
                 </a:solidFill>
                 <a:latin typeface="Consolas"/>
               </a:rPr>
-              <a:t> 116  </a:t>
+              <a:t> 119  </a:t>
             </a:r>
             <a:r>
               <a:rPr sz="1400">
@@ -7053,7 +7053,7 @@
                 </a:solidFill>
                 <a:latin typeface="Consolas"/>
               </a:rPr>
-              <a:t> 117  </a:t>
+              <a:t> 120  </a:t>
             </a:r>
             <a:r>
               <a:rPr sz="1400">
@@ -7078,7 +7078,7 @@
                 </a:solidFill>
                 <a:latin typeface="Consolas"/>
               </a:rPr>
-              <a:t> 118  </a:t>
+              <a:t> 121  </a:t>
             </a:r>
             <a:r>
               <a:rPr sz="1400">
@@ -7103,7 +7103,7 @@
                 </a:solidFill>
                 <a:latin typeface="Consolas"/>
               </a:rPr>
-              <a:t> 119  </a:t>
+              <a:t> 122  </a:t>
             </a:r>
             <a:r>
               <a:rPr sz="1400">

--- a/ai101/slides/week-11.pptx
+++ b/ai101/slides/week-11.pptx
@@ -3260,7 +3260,7 @@
                 </a:solidFill>
                 <a:latin typeface="Consolas"/>
               </a:rPr>
-              <a:t> 123  </a:t>
+              <a:t> 131  </a:t>
             </a:r>
             <a:r>
               <a:rPr sz="1400">
@@ -3285,7 +3285,7 @@
                 </a:solidFill>
                 <a:latin typeface="Consolas"/>
               </a:rPr>
-              <a:t> 124  </a:t>
+              <a:t> 132  </a:t>
             </a:r>
             <a:r>
               <a:rPr sz="1400">
@@ -3310,7 +3310,7 @@
                 </a:solidFill>
                 <a:latin typeface="Consolas"/>
               </a:rPr>
-              <a:t> 125  </a:t>
+              <a:t> 133  </a:t>
             </a:r>
             <a:r>
               <a:rPr sz="1400">
@@ -3335,7 +3335,7 @@
                 </a:solidFill>
                 <a:latin typeface="Consolas"/>
               </a:rPr>
-              <a:t> 126  </a:t>
+              <a:t> 134  </a:t>
             </a:r>
             <a:r>
               <a:rPr sz="1400">
@@ -3360,7 +3360,7 @@
                 </a:solidFill>
                 <a:latin typeface="Consolas"/>
               </a:rPr>
-              <a:t> 127  </a:t>
+              <a:t> 135  </a:t>
             </a:r>
             <a:r>
               <a:rPr sz="1400">
@@ -3385,7 +3385,7 @@
                 </a:solidFill>
                 <a:latin typeface="Consolas"/>
               </a:rPr>
-              <a:t> 128  </a:t>
+              <a:t> 136  </a:t>
             </a:r>
             <a:r>
               <a:rPr sz="1400">
@@ -3410,7 +3410,7 @@
                 </a:solidFill>
                 <a:latin typeface="Consolas"/>
               </a:rPr>
-              <a:t> 129  </a:t>
+              <a:t> 137  </a:t>
             </a:r>
             <a:r>
               <a:rPr sz="1400">
@@ -3435,7 +3435,7 @@
                 </a:solidFill>
                 <a:latin typeface="Consolas"/>
               </a:rPr>
-              <a:t> 130  </a:t>
+              <a:t> 138  </a:t>
             </a:r>
             <a:r>
               <a:rPr sz="1400">
@@ -3460,7 +3460,7 @@
                 </a:solidFill>
                 <a:latin typeface="Consolas"/>
               </a:rPr>
-              <a:t> 131  </a:t>
+              <a:t> 139  </a:t>
             </a:r>
             <a:r>
               <a:rPr sz="1400">
@@ -3485,7 +3485,7 @@
                 </a:solidFill>
                 <a:latin typeface="Consolas"/>
               </a:rPr>
-              <a:t> 132  </a:t>
+              <a:t> 140  </a:t>
             </a:r>
             <a:r>
               <a:rPr sz="1400">
@@ -3510,7 +3510,7 @@
                 </a:solidFill>
                 <a:latin typeface="Consolas"/>
               </a:rPr>
-              <a:t> 133  </a:t>
+              <a:t> 141  </a:t>
             </a:r>
             <a:r>
               <a:rPr sz="1400">
@@ -3535,7 +3535,7 @@
                 </a:solidFill>
                 <a:latin typeface="Consolas"/>
               </a:rPr>
-              <a:t> 134  </a:t>
+              <a:t> 142  </a:t>
             </a:r>
             <a:r>
               <a:rPr sz="1400">
@@ -3560,7 +3560,7 @@
                 </a:solidFill>
                 <a:latin typeface="Consolas"/>
               </a:rPr>
-              <a:t> 135  </a:t>
+              <a:t> 143  </a:t>
             </a:r>
             <a:r>
               <a:rPr sz="1400">
@@ -3585,7 +3585,7 @@
                 </a:solidFill>
                 <a:latin typeface="Consolas"/>
               </a:rPr>
-              <a:t> 136  </a:t>
+              <a:t> 144  </a:t>
             </a:r>
             <a:r>
               <a:rPr sz="1400">
@@ -3610,7 +3610,7 @@
                 </a:solidFill>
                 <a:latin typeface="Consolas"/>
               </a:rPr>
-              <a:t> 137  </a:t>
+              <a:t> 145  </a:t>
             </a:r>
             <a:r>
               <a:rPr sz="1400">
@@ -3717,7 +3717,7 @@
                 </a:solidFill>
                 <a:latin typeface="Consolas"/>
               </a:rPr>
-              <a:t> 138  </a:t>
+              <a:t> 146  </a:t>
             </a:r>
             <a:r>
               <a:rPr sz="1700">
@@ -3742,7 +3742,7 @@
                 </a:solidFill>
                 <a:latin typeface="Consolas"/>
               </a:rPr>
-              <a:t> 139  </a:t>
+              <a:t> 147  </a:t>
             </a:r>
             <a:r>
               <a:rPr sz="1700">
@@ -3767,7 +3767,7 @@
                 </a:solidFill>
                 <a:latin typeface="Consolas"/>
               </a:rPr>
-              <a:t> 140  </a:t>
+              <a:t> 148  </a:t>
             </a:r>
             <a:r>
               <a:rPr sz="1700">
@@ -3971,7 +3971,7 @@
                 </a:solidFill>
                 <a:latin typeface="Consolas"/>
               </a:rPr>
-              <a:t> 146  </a:t>
+              <a:t> 154  </a:t>
             </a:r>
             <a:r>
               <a:rPr sz="1400">
@@ -3996,7 +3996,7 @@
                 </a:solidFill>
                 <a:latin typeface="Consolas"/>
               </a:rPr>
-              <a:t> 147  </a:t>
+              <a:t> 155  </a:t>
             </a:r>
             <a:r>
               <a:rPr sz="1400">
@@ -4021,7 +4021,7 @@
                 </a:solidFill>
                 <a:latin typeface="Consolas"/>
               </a:rPr>
-              <a:t> 148  </a:t>
+              <a:t> 156  </a:t>
             </a:r>
             <a:r>
               <a:rPr sz="1400">
@@ -4046,7 +4046,7 @@
                 </a:solidFill>
                 <a:latin typeface="Consolas"/>
               </a:rPr>
-              <a:t> 149  </a:t>
+              <a:t> 157  </a:t>
             </a:r>
             <a:r>
               <a:rPr sz="1400">
@@ -4071,7 +4071,7 @@
                 </a:solidFill>
                 <a:latin typeface="Consolas"/>
               </a:rPr>
-              <a:t> 150  </a:t>
+              <a:t> 158  </a:t>
             </a:r>
             <a:r>
               <a:rPr sz="1400">
@@ -4096,7 +4096,7 @@
                 </a:solidFill>
                 <a:latin typeface="Consolas"/>
               </a:rPr>
-              <a:t> 151  </a:t>
+              <a:t> 159  </a:t>
             </a:r>
             <a:r>
               <a:rPr sz="1400">
@@ -4121,7 +4121,7 @@
                 </a:solidFill>
                 <a:latin typeface="Consolas"/>
               </a:rPr>
-              <a:t> 152  </a:t>
+              <a:t> 160  </a:t>
             </a:r>
             <a:r>
               <a:rPr sz="1400">
@@ -4146,7 +4146,7 @@
                 </a:solidFill>
                 <a:latin typeface="Consolas"/>
               </a:rPr>
-              <a:t> 153  </a:t>
+              <a:t> 161  </a:t>
             </a:r>
             <a:r>
               <a:rPr sz="1400">
@@ -4171,7 +4171,7 @@
                 </a:solidFill>
                 <a:latin typeface="Consolas"/>
               </a:rPr>
-              <a:t> 154  </a:t>
+              <a:t> 162  </a:t>
             </a:r>
             <a:r>
               <a:rPr sz="1400">
@@ -4196,7 +4196,7 @@
                 </a:solidFill>
                 <a:latin typeface="Consolas"/>
               </a:rPr>
-              <a:t> 155  </a:t>
+              <a:t> 163  </a:t>
             </a:r>
             <a:r>
               <a:rPr sz="1400">
@@ -4221,7 +4221,7 @@
                 </a:solidFill>
                 <a:latin typeface="Consolas"/>
               </a:rPr>
-              <a:t> 156  </a:t>
+              <a:t> 164  </a:t>
             </a:r>
             <a:r>
               <a:rPr sz="1400">
@@ -4246,7 +4246,7 @@
                 </a:solidFill>
                 <a:latin typeface="Consolas"/>
               </a:rPr>
-              <a:t> 157  </a:t>
+              <a:t> 165  </a:t>
             </a:r>
             <a:r>
               <a:rPr sz="1400">
@@ -4271,7 +4271,7 @@
                 </a:solidFill>
                 <a:latin typeface="Consolas"/>
               </a:rPr>
-              <a:t> 158  </a:t>
+              <a:t> 166  </a:t>
             </a:r>
             <a:r>
               <a:rPr sz="1400">
@@ -4296,7 +4296,7 @@
                 </a:solidFill>
                 <a:latin typeface="Consolas"/>
               </a:rPr>
-              <a:t> 159  </a:t>
+              <a:t> 167  </a:t>
             </a:r>
             <a:r>
               <a:rPr sz="1400">
@@ -4321,7 +4321,7 @@
                 </a:solidFill>
                 <a:latin typeface="Consolas"/>
               </a:rPr>
-              <a:t> 160  </a:t>
+              <a:t> 168  </a:t>
             </a:r>
             <a:r>
               <a:rPr sz="1400">
@@ -4422,16 +4422,16 @@
               </a:spcAft>
             </a:pPr>
             <a:r>
-              <a:rPr sz="1700">
-                <a:solidFill>
-                  <a:srgbClr val="6D8C97"/>
-                </a:solidFill>
-                <a:latin typeface="Consolas"/>
-              </a:rPr>
-              <a:t> 161  </a:t>
-            </a:r>
-            <a:r>
-              <a:rPr sz="1700">
+              <a:rPr sz="1400">
+                <a:solidFill>
+                  <a:srgbClr val="6D8C97"/>
+                </a:solidFill>
+                <a:latin typeface="Consolas"/>
+              </a:rPr>
+              <a:t> 169  </a:t>
+            </a:r>
+            <a:r>
+              <a:rPr sz="1400">
                 <a:solidFill>
                   <a:srgbClr val="7FE0A0"/>
                 </a:solidFill>
@@ -4447,16 +4447,16 @@
               </a:spcAft>
             </a:pPr>
             <a:r>
-              <a:rPr sz="1700">
-                <a:solidFill>
-                  <a:srgbClr val="6D8C97"/>
-                </a:solidFill>
-                <a:latin typeface="Consolas"/>
-              </a:rPr>
-              <a:t> 162  </a:t>
-            </a:r>
-            <a:r>
-              <a:rPr sz="1700">
+              <a:rPr sz="1400">
+                <a:solidFill>
+                  <a:srgbClr val="6D8C97"/>
+                </a:solidFill>
+                <a:latin typeface="Consolas"/>
+              </a:rPr>
+              <a:t> 170  </a:t>
+            </a:r>
+            <a:r>
+              <a:rPr sz="1400">
                 <a:solidFill>
                   <a:srgbClr val="7FE0A0"/>
                 </a:solidFill>
@@ -4472,16 +4472,16 @@
               </a:spcAft>
             </a:pPr>
             <a:r>
-              <a:rPr sz="1700">
-                <a:solidFill>
-                  <a:srgbClr val="6D8C97"/>
-                </a:solidFill>
-                <a:latin typeface="Consolas"/>
-              </a:rPr>
-              <a:t> 163  </a:t>
-            </a:r>
-            <a:r>
-              <a:rPr sz="1700">
+              <a:rPr sz="1400">
+                <a:solidFill>
+                  <a:srgbClr val="6D8C97"/>
+                </a:solidFill>
+                <a:latin typeface="Consolas"/>
+              </a:rPr>
+              <a:t> 171  </a:t>
+            </a:r>
+            <a:r>
+              <a:rPr sz="1400">
                 <a:solidFill>
                   <a:srgbClr val="7FE0A0"/>
                 </a:solidFill>
@@ -4497,16 +4497,16 @@
               </a:spcAft>
             </a:pPr>
             <a:r>
-              <a:rPr sz="1700">
-                <a:solidFill>
-                  <a:srgbClr val="6D8C97"/>
-                </a:solidFill>
-                <a:latin typeface="Consolas"/>
-              </a:rPr>
-              <a:t> 164  </a:t>
-            </a:r>
-            <a:r>
-              <a:rPr sz="1700">
+              <a:rPr sz="1400">
+                <a:solidFill>
+                  <a:srgbClr val="6D8C97"/>
+                </a:solidFill>
+                <a:latin typeface="Consolas"/>
+              </a:rPr>
+              <a:t> 172  </a:t>
+            </a:r>
+            <a:r>
+              <a:rPr sz="1400">
                 <a:solidFill>
                   <a:srgbClr val="7FE0A0"/>
                 </a:solidFill>
@@ -4522,16 +4522,16 @@
               </a:spcAft>
             </a:pPr>
             <a:r>
-              <a:rPr sz="1700">
-                <a:solidFill>
-                  <a:srgbClr val="6D8C97"/>
-                </a:solidFill>
-                <a:latin typeface="Consolas"/>
-              </a:rPr>
-              <a:t> 165  </a:t>
-            </a:r>
-            <a:r>
-              <a:rPr sz="1700">
+              <a:rPr sz="1400">
+                <a:solidFill>
+                  <a:srgbClr val="6D8C97"/>
+                </a:solidFill>
+                <a:latin typeface="Consolas"/>
+              </a:rPr>
+              <a:t> 173  </a:t>
+            </a:r>
+            <a:r>
+              <a:rPr sz="1400">
                 <a:solidFill>
                   <a:srgbClr val="DCECEF"/>
                 </a:solidFill>
@@ -4547,16 +4547,16 @@
               </a:spcAft>
             </a:pPr>
             <a:r>
-              <a:rPr sz="1700">
-                <a:solidFill>
-                  <a:srgbClr val="6D8C97"/>
-                </a:solidFill>
-                <a:latin typeface="Consolas"/>
-              </a:rPr>
-              <a:t> 166  </a:t>
-            </a:r>
-            <a:r>
-              <a:rPr sz="1700">
+              <a:rPr sz="1400">
+                <a:solidFill>
+                  <a:srgbClr val="6D8C97"/>
+                </a:solidFill>
+                <a:latin typeface="Consolas"/>
+              </a:rPr>
+              <a:t> 174  </a:t>
+            </a:r>
+            <a:r>
+              <a:rPr sz="1400">
                 <a:solidFill>
                   <a:srgbClr val="DCECEF"/>
                 </a:solidFill>
@@ -4572,16 +4572,16 @@
               </a:spcAft>
             </a:pPr>
             <a:r>
-              <a:rPr sz="1700">
-                <a:solidFill>
-                  <a:srgbClr val="6D8C97"/>
-                </a:solidFill>
-                <a:latin typeface="Consolas"/>
-              </a:rPr>
-              <a:t> 167  </a:t>
-            </a:r>
-            <a:r>
-              <a:rPr sz="1700">
+              <a:rPr sz="1400">
+                <a:solidFill>
+                  <a:srgbClr val="6D8C97"/>
+                </a:solidFill>
+                <a:latin typeface="Consolas"/>
+              </a:rPr>
+              <a:t> 175  </a:t>
+            </a:r>
+            <a:r>
+              <a:rPr sz="1400">
                 <a:solidFill>
                   <a:srgbClr val="7FE0A0"/>
                 </a:solidFill>
@@ -4597,46 +4597,171 @@
               </a:spcAft>
             </a:pPr>
             <a:r>
-              <a:rPr sz="1700">
-                <a:solidFill>
-                  <a:srgbClr val="6D8C97"/>
-                </a:solidFill>
-                <a:latin typeface="Consolas"/>
-              </a:rPr>
-              <a:t> 168  </a:t>
-            </a:r>
-            <a:r>
-              <a:rPr sz="1700">
+              <a:rPr sz="1400">
+                <a:solidFill>
+                  <a:srgbClr val="6D8C97"/>
+                </a:solidFill>
+                <a:latin typeface="Consolas"/>
+              </a:rPr>
+              <a:t> 176  </a:t>
+            </a:r>
+            <a:r>
+              <a:rPr sz="1400">
+                <a:solidFill>
+                  <a:srgbClr val="7FE0A0"/>
+                </a:solidFill>
+                <a:latin typeface="Consolas"/>
+              </a:rPr>
+              <a:t>    // 'Failed to fetch' means the request never arrived anywhere. That is</a:t>
+            </a:r>
+          </a:p>
+          <a:p>
+            <a:pPr>
+              <a:spcAft>
+                <a:spcPts val="0"/>
+              </a:spcAft>
+            </a:pPr>
+            <a:r>
+              <a:rPr sz="1400">
+                <a:solidFill>
+                  <a:srgbClr val="6D8C97"/>
+                </a:solidFill>
+                <a:latin typeface="Consolas"/>
+              </a:rPr>
+              <a:t> 177  </a:t>
+            </a:r>
+            <a:r>
+              <a:rPr sz="1400">
+                <a:solidFill>
+                  <a:srgbClr val="7FE0A0"/>
+                </a:solidFill>
+                <a:latin typeface="Consolas"/>
+              </a:rPr>
+              <a:t>    // the commonest real failure and the least helpful wording, so replace it.</a:t>
+            </a:r>
+          </a:p>
+          <a:p>
+            <a:pPr>
+              <a:spcAft>
+                <a:spcPts val="0"/>
+              </a:spcAft>
+            </a:pPr>
+            <a:r>
+              <a:rPr sz="1400">
+                <a:solidFill>
+                  <a:srgbClr val="6D8C97"/>
+                </a:solidFill>
+                <a:latin typeface="Consolas"/>
+              </a:rPr>
+              <a:t> 178  </a:t>
+            </a:r>
+            <a:r>
+              <a:rPr sz="1400">
+                <a:solidFill>
+                  <a:srgbClr val="7FE0A0"/>
+                </a:solidFill>
+                <a:latin typeface="Consolas"/>
+              </a:rPr>
+              <a:t>    const said = problem.message === 'Failed to fetch'</a:t>
+            </a:r>
+          </a:p>
+          <a:p>
+            <a:pPr>
+              <a:spcAft>
+                <a:spcPts val="0"/>
+              </a:spcAft>
+            </a:pPr>
+            <a:r>
+              <a:rPr sz="1400">
+                <a:solidFill>
+                  <a:srgbClr val="6D8C97"/>
+                </a:solidFill>
+                <a:latin typeface="Consolas"/>
+              </a:rPr>
+              <a:t> 179  </a:t>
+            </a:r>
+            <a:r>
+              <a:rPr sz="1400">
+                <a:solidFill>
+                  <a:srgbClr val="7FE0A0"/>
+                </a:solidFill>
+                <a:latin typeface="Consolas"/>
+              </a:rPr>
+              <a:t>      ? 'Could not reach the AI. Are you on the school network?'</a:t>
+            </a:r>
+          </a:p>
+          <a:p>
+            <a:pPr>
+              <a:spcAft>
+                <a:spcPts val="0"/>
+              </a:spcAft>
+            </a:pPr>
+            <a:r>
+              <a:rPr sz="1400">
+                <a:solidFill>
+                  <a:srgbClr val="6D8C97"/>
+                </a:solidFill>
+                <a:latin typeface="Consolas"/>
+              </a:rPr>
+              <a:t> 180  </a:t>
+            </a:r>
+            <a:r>
+              <a:rPr sz="1400">
+                <a:solidFill>
+                  <a:srgbClr val="7FE0A0"/>
+                </a:solidFill>
+                <a:latin typeface="Consolas"/>
+              </a:rPr>
+              <a:t>      : problem.message;</a:t>
+            </a:r>
+          </a:p>
+          <a:p>
+            <a:pPr>
+              <a:spcAft>
+                <a:spcPts val="0"/>
+              </a:spcAft>
+            </a:pPr>
+            <a:r>
+              <a:rPr sz="1400">
+                <a:solidFill>
+                  <a:srgbClr val="6D8C97"/>
+                </a:solidFill>
+                <a:latin typeface="Consolas"/>
+              </a:rPr>
+              <a:t> 181  </a:t>
+            </a:r>
+            <a:r>
+              <a:rPr sz="1400">
+                <a:solidFill>
+                  <a:srgbClr val="7FE0A0"/>
+                </a:solidFill>
+                <a:latin typeface="Consolas"/>
+              </a:rPr>
+              <a:t>    addLine('problem', said);</a:t>
+            </a:r>
+          </a:p>
+          <a:p>
+            <a:pPr>
+              <a:spcAft>
+                <a:spcPts val="0"/>
+              </a:spcAft>
+            </a:pPr>
+            <a:r>
+              <a:rPr sz="1400">
+                <a:solidFill>
+                  <a:srgbClr val="6D8C97"/>
+                </a:solidFill>
+                <a:latin typeface="Consolas"/>
+              </a:rPr>
+              <a:t> 182  </a:t>
+            </a:r>
+            <a:r>
+              <a:rPr sz="1400">
                 <a:solidFill>
                   <a:srgbClr val="DCECEF"/>
                 </a:solidFill>
                 <a:latin typeface="Consolas"/>
               </a:rPr>
-              <a:t>    addLine('problem', problem.message);</a:t>
-            </a:r>
-          </a:p>
-          <a:p>
-            <a:pPr>
-              <a:spcAft>
-                <a:spcPts val="0"/>
-              </a:spcAft>
-            </a:pPr>
-            <a:r>
-              <a:rPr sz="1700">
-                <a:solidFill>
-                  <a:srgbClr val="6D8C97"/>
-                </a:solidFill>
-                <a:latin typeface="Consolas"/>
-              </a:rPr>
-              <a:t> 169  </a:t>
-            </a:r>
-            <a:r>
-              <a:rPr sz="1700">
-                <a:solidFill>
-                  <a:srgbClr val="DCECEF"/>
-                </a:solidFill>
-                <a:latin typeface="Consolas"/>
-              </a:rPr>
               <a:t>  }</a:t>
             </a:r>
           </a:p>
@@ -4647,16 +4772,16 @@
               </a:spcAft>
             </a:pPr>
             <a:r>
-              <a:rPr sz="1700">
-                <a:solidFill>
-                  <a:srgbClr val="6D8C97"/>
-                </a:solidFill>
-                <a:latin typeface="Consolas"/>
-              </a:rPr>
-              <a:t> 170  </a:t>
-            </a:r>
-            <a:r>
-              <a:rPr sz="1700">
+              <a:rPr sz="1400">
+                <a:solidFill>
+                  <a:srgbClr val="6D8C97"/>
+                </a:solidFill>
+                <a:latin typeface="Consolas"/>
+              </a:rPr>
+              <a:t> 183  </a:t>
+            </a:r>
+            <a:r>
+              <a:rPr sz="1400">
                 <a:solidFill>
                   <a:srgbClr val="DCECEF"/>
                 </a:solidFill>
@@ -5582,7 +5707,7 @@
                 </a:solidFill>
                 <a:latin typeface="Consolas"/>
               </a:rPr>
-              <a:t>  71  </a:t>
+              <a:t>  79  </a:t>
             </a:r>
             <a:r>
               <a:rPr sz="1400">
@@ -5607,7 +5732,7 @@
                 </a:solidFill>
                 <a:latin typeface="Consolas"/>
               </a:rPr>
-              <a:t>  72  </a:t>
+              <a:t>  80  </a:t>
             </a:r>
             <a:r>
               <a:rPr sz="1400">
@@ -5632,7 +5757,7 @@
                 </a:solidFill>
                 <a:latin typeface="Consolas"/>
               </a:rPr>
-              <a:t>  73  </a:t>
+              <a:t>  81  </a:t>
             </a:r>
             <a:r>
               <a:rPr sz="1400">
@@ -5657,7 +5782,7 @@
                 </a:solidFill>
                 <a:latin typeface="Consolas"/>
               </a:rPr>
-              <a:t>  74  </a:t>
+              <a:t>  82  </a:t>
             </a:r>
             <a:r>
               <a:rPr sz="1400">
@@ -5682,7 +5807,7 @@
                 </a:solidFill>
                 <a:latin typeface="Consolas"/>
               </a:rPr>
-              <a:t>  75  </a:t>
+              <a:t>  83  </a:t>
             </a:r>
             <a:r>
               <a:rPr sz="1400">
@@ -5707,7 +5832,7 @@
                 </a:solidFill>
                 <a:latin typeface="Consolas"/>
               </a:rPr>
-              <a:t>  76  </a:t>
+              <a:t>  84  </a:t>
             </a:r>
             <a:r>
               <a:rPr sz="1400">
@@ -5732,7 +5857,7 @@
                 </a:solidFill>
                 <a:latin typeface="Consolas"/>
               </a:rPr>
-              <a:t>  77  </a:t>
+              <a:t>  85  </a:t>
             </a:r>
             <a:r>
               <a:rPr sz="1400">
@@ -5757,7 +5882,7 @@
                 </a:solidFill>
                 <a:latin typeface="Consolas"/>
               </a:rPr>
-              <a:t>  78  </a:t>
+              <a:t>  86  </a:t>
             </a:r>
             <a:r>
               <a:rPr sz="1400">
@@ -5782,7 +5907,7 @@
                 </a:solidFill>
                 <a:latin typeface="Consolas"/>
               </a:rPr>
-              <a:t>  79  </a:t>
+              <a:t>  87  </a:t>
             </a:r>
             <a:r>
               <a:rPr sz="1400">
@@ -5807,7 +5932,7 @@
                 </a:solidFill>
                 <a:latin typeface="Consolas"/>
               </a:rPr>
-              <a:t>  80  </a:t>
+              <a:t>  88  </a:t>
             </a:r>
             <a:r>
               <a:rPr sz="1400">
@@ -5832,7 +5957,7 @@
                 </a:solidFill>
                 <a:latin typeface="Consolas"/>
               </a:rPr>
-              <a:t>  81  </a:t>
+              <a:t>  89  </a:t>
             </a:r>
             <a:r>
               <a:rPr sz="1400">
@@ -5857,7 +5982,7 @@
                 </a:solidFill>
                 <a:latin typeface="Consolas"/>
               </a:rPr>
-              <a:t>  82  </a:t>
+              <a:t>  90  </a:t>
             </a:r>
             <a:r>
               <a:rPr sz="1400">
@@ -5882,7 +6007,7 @@
                 </a:solidFill>
                 <a:latin typeface="Consolas"/>
               </a:rPr>
-              <a:t>  83  </a:t>
+              <a:t>  91  </a:t>
             </a:r>
             <a:r>
               <a:rPr sz="1400">
@@ -5907,7 +6032,7 @@
                 </a:solidFill>
                 <a:latin typeface="Consolas"/>
               </a:rPr>
-              <a:t>  84  </a:t>
+              <a:t>  92  </a:t>
             </a:r>
             <a:r>
               <a:rPr sz="1400">
@@ -5932,7 +6057,7 @@
                 </a:solidFill>
                 <a:latin typeface="Consolas"/>
               </a:rPr>
-              <a:t>  85  </a:t>
+              <a:t>  93  </a:t>
             </a:r>
             <a:r>
               <a:rPr sz="1400">
@@ -6039,7 +6164,7 @@
                 </a:solidFill>
                 <a:latin typeface="Consolas"/>
               </a:rPr>
-              <a:t>  86  </a:t>
+              <a:t>  94  </a:t>
             </a:r>
             <a:r>
               <a:rPr sz="1400">
@@ -6064,7 +6189,7 @@
                 </a:solidFill>
                 <a:latin typeface="Consolas"/>
               </a:rPr>
-              <a:t>  87  </a:t>
+              <a:t>  95  </a:t>
             </a:r>
             <a:r>
               <a:rPr sz="1400">
@@ -6089,7 +6214,7 @@
                 </a:solidFill>
                 <a:latin typeface="Consolas"/>
               </a:rPr>
-              <a:t>  88  </a:t>
+              <a:t>  96  </a:t>
             </a:r>
             <a:r>
               <a:rPr sz="1400">
@@ -6114,7 +6239,7 @@
                 </a:solidFill>
                 <a:latin typeface="Consolas"/>
               </a:rPr>
-              <a:t>  89  </a:t>
+              <a:t>  97  </a:t>
             </a:r>
             <a:r>
               <a:rPr sz="1400">
@@ -6139,7 +6264,7 @@
                 </a:solidFill>
                 <a:latin typeface="Consolas"/>
               </a:rPr>
-              <a:t>  90  </a:t>
+              <a:t>  98  </a:t>
             </a:r>
             <a:r>
               <a:rPr sz="1400">
@@ -6164,7 +6289,7 @@
                 </a:solidFill>
                 <a:latin typeface="Consolas"/>
               </a:rPr>
-              <a:t>  91  </a:t>
+              <a:t>  99  </a:t>
             </a:r>
             <a:r>
               <a:rPr sz="1400">
@@ -6189,7 +6314,7 @@
                 </a:solidFill>
                 <a:latin typeface="Consolas"/>
               </a:rPr>
-              <a:t>  92  </a:t>
+              <a:t> 100  </a:t>
             </a:r>
             <a:r>
               <a:rPr sz="1400">
@@ -6214,7 +6339,7 @@
                 </a:solidFill>
                 <a:latin typeface="Consolas"/>
               </a:rPr>
-              <a:t>  93  </a:t>
+              <a:t> 101  </a:t>
             </a:r>
             <a:r>
               <a:rPr sz="1400">
@@ -6239,7 +6364,7 @@
                 </a:solidFill>
                 <a:latin typeface="Consolas"/>
               </a:rPr>
-              <a:t>  94  </a:t>
+              <a:t> 102  </a:t>
             </a:r>
             <a:r>
               <a:rPr sz="1400">
@@ -6264,7 +6389,7 @@
                 </a:solidFill>
                 <a:latin typeface="Consolas"/>
               </a:rPr>
-              <a:t>  95  </a:t>
+              <a:t> 103  </a:t>
             </a:r>
             <a:r>
               <a:rPr sz="1400">
@@ -6289,7 +6414,7 @@
                 </a:solidFill>
                 <a:latin typeface="Consolas"/>
               </a:rPr>
-              <a:t>  96  </a:t>
+              <a:t> 104  </a:t>
             </a:r>
             <a:r>
               <a:rPr sz="1400">
@@ -6314,7 +6439,7 @@
                 </a:solidFill>
                 <a:latin typeface="Consolas"/>
               </a:rPr>
-              <a:t>  97  </a:t>
+              <a:t> 105  </a:t>
             </a:r>
             <a:r>
               <a:rPr sz="1400">
@@ -6339,7 +6464,7 @@
                 </a:solidFill>
                 <a:latin typeface="Consolas"/>
               </a:rPr>
-              <a:t>  98  </a:t>
+              <a:t> 106  </a:t>
             </a:r>
             <a:r>
               <a:rPr sz="1400">
@@ -6364,7 +6489,7 @@
                 </a:solidFill>
                 <a:latin typeface="Consolas"/>
               </a:rPr>
-              <a:t>  99  </a:t>
+              <a:t> 107  </a:t>
             </a:r>
             <a:r>
               <a:rPr sz="1400">
@@ -6389,7 +6514,7 @@
                 </a:solidFill>
                 <a:latin typeface="Consolas"/>
               </a:rPr>
-              <a:t> 100  </a:t>
+              <a:t> 108  </a:t>
             </a:r>
             <a:r>
               <a:rPr sz="1400">
@@ -6496,7 +6621,7 @@
                 </a:solidFill>
                 <a:latin typeface="Consolas"/>
               </a:rPr>
-              <a:t> 101  </a:t>
+              <a:t> 109  </a:t>
             </a:r>
             <a:r>
               <a:rPr sz="1700">
@@ -6521,7 +6646,7 @@
                 </a:solidFill>
                 <a:latin typeface="Consolas"/>
               </a:rPr>
-              <a:t> 102  </a:t>
+              <a:t> 110  </a:t>
             </a:r>
             <a:r>
               <a:rPr sz="1700">
@@ -6546,7 +6671,7 @@
                 </a:solidFill>
                 <a:latin typeface="Consolas"/>
               </a:rPr>
-              <a:t> 103  </a:t>
+              <a:t> 111  </a:t>
             </a:r>
             <a:r>
               <a:rPr sz="1700">
@@ -6571,7 +6696,7 @@
                 </a:solidFill>
                 <a:latin typeface="Consolas"/>
               </a:rPr>
-              <a:t> 104  </a:t>
+              <a:t> 112  </a:t>
             </a:r>
             <a:r>
               <a:rPr sz="1700">
@@ -6596,7 +6721,7 @@
                 </a:solidFill>
                 <a:latin typeface="Consolas"/>
               </a:rPr>
-              <a:t> 105  </a:t>
+              <a:t> 113  </a:t>
             </a:r>
             <a:r>
               <a:rPr sz="1700">
@@ -6621,7 +6746,7 @@
                 </a:solidFill>
                 <a:latin typeface="Consolas"/>
               </a:rPr>
-              <a:t> 106  </a:t>
+              <a:t> 114  </a:t>
             </a:r>
             <a:r>
               <a:rPr sz="1700">
@@ -6646,7 +6771,7 @@
                 </a:solidFill>
                 <a:latin typeface="Consolas"/>
               </a:rPr>
-              <a:t> 107  </a:t>
+              <a:t> 115  </a:t>
             </a:r>
             <a:r>
               <a:rPr sz="1700">
@@ -6753,7 +6878,7 @@
                 </a:solidFill>
                 <a:latin typeface="Consolas"/>
               </a:rPr>
-              <a:t> 108  </a:t>
+              <a:t> 116  </a:t>
             </a:r>
             <a:r>
               <a:rPr sz="1400">
@@ -6778,7 +6903,7 @@
                 </a:solidFill>
                 <a:latin typeface="Consolas"/>
               </a:rPr>
-              <a:t> 109  </a:t>
+              <a:t> 117  </a:t>
             </a:r>
             <a:r>
               <a:rPr sz="1400">
@@ -6803,7 +6928,7 @@
                 </a:solidFill>
                 <a:latin typeface="Consolas"/>
               </a:rPr>
-              <a:t> 110  </a:t>
+              <a:t> 118  </a:t>
             </a:r>
             <a:r>
               <a:rPr sz="1400">
@@ -6828,7 +6953,7 @@
                 </a:solidFill>
                 <a:latin typeface="Consolas"/>
               </a:rPr>
-              <a:t> 111  </a:t>
+              <a:t> 119  </a:t>
             </a:r>
             <a:r>
               <a:rPr sz="1400">
@@ -6853,7 +6978,7 @@
                 </a:solidFill>
                 <a:latin typeface="Consolas"/>
               </a:rPr>
-              <a:t> 112  </a:t>
+              <a:t> 120  </a:t>
             </a:r>
             <a:r>
               <a:rPr sz="1400">
@@ -6878,7 +7003,7 @@
                 </a:solidFill>
                 <a:latin typeface="Consolas"/>
               </a:rPr>
-              <a:t> 113  </a:t>
+              <a:t> 121  </a:t>
             </a:r>
             <a:r>
               <a:rPr sz="1400">
@@ -6903,7 +7028,7 @@
                 </a:solidFill>
                 <a:latin typeface="Consolas"/>
               </a:rPr>
-              <a:t> 114  </a:t>
+              <a:t> 122  </a:t>
             </a:r>
             <a:r>
               <a:rPr sz="1400">
@@ -6928,7 +7053,7 @@
                 </a:solidFill>
                 <a:latin typeface="Consolas"/>
               </a:rPr>
-              <a:t> 115  </a:t>
+              <a:t> 123  </a:t>
             </a:r>
             <a:r>
               <a:rPr sz="1400">
@@ -6953,7 +7078,7 @@
                 </a:solidFill>
                 <a:latin typeface="Consolas"/>
               </a:rPr>
-              <a:t> 116  </a:t>
+              <a:t> 124  </a:t>
             </a:r>
             <a:r>
               <a:rPr sz="1400">
@@ -6978,7 +7103,7 @@
                 </a:solidFill>
                 <a:latin typeface="Consolas"/>
               </a:rPr>
-              <a:t> 117  </a:t>
+              <a:t> 125  </a:t>
             </a:r>
             <a:r>
               <a:rPr sz="1400">
@@ -7003,7 +7128,7 @@
                 </a:solidFill>
                 <a:latin typeface="Consolas"/>
               </a:rPr>
-              <a:t> 118  </a:t>
+              <a:t> 126  </a:t>
             </a:r>
             <a:r>
               <a:rPr sz="1400">
@@ -7028,7 +7153,7 @@
                 </a:solidFill>
                 <a:latin typeface="Consolas"/>
               </a:rPr>
-              <a:t> 119  </a:t>
+              <a:t> 127  </a:t>
             </a:r>
             <a:r>
               <a:rPr sz="1400">
@@ -7053,7 +7178,7 @@
                 </a:solidFill>
                 <a:latin typeface="Consolas"/>
               </a:rPr>
-              <a:t> 120  </a:t>
+              <a:t> 128  </a:t>
             </a:r>
             <a:r>
               <a:rPr sz="1400">
@@ -7078,7 +7203,7 @@
                 </a:solidFill>
                 <a:latin typeface="Consolas"/>
               </a:rPr>
-              <a:t> 121  </a:t>
+              <a:t> 129  </a:t>
             </a:r>
             <a:r>
               <a:rPr sz="1400">
@@ -7103,7 +7228,7 @@
                 </a:solidFill>
                 <a:latin typeface="Consolas"/>
               </a:rPr>
-              <a:t> 122  </a:t>
+              <a:t> 130  </a:t>
             </a:r>
             <a:r>
               <a:rPr sz="1400">

--- a/ai101/slides/week-11.pptx
+++ b/ai101/slides/week-11.pptx
@@ -4683,7 +4683,7 @@
             <a:r>
               <a:rPr sz="1400">
                 <a:solidFill>
-                  <a:srgbClr val="7FE0A0"/>
+                  <a:srgbClr val="DCECEF"/>
                 </a:solidFill>
                 <a:latin typeface="Consolas"/>
               </a:rPr>

--- a/ai101/slides/week-11.pptx
+++ b/ai101/slides/week-11.pptx
@@ -3742,6 +3742,31 @@
                 </a:solidFill>
                 <a:latin typeface="Consolas"/>
               </a:rPr>
+              <a:t>   -  </a:t>
+            </a:r>
+            <a:r>
+              <a:rPr sz="1700" strike="sngStrike">
+                <a:solidFill>
+                  <a:srgbClr val="F3928B"/>
+                </a:solidFill>
+                <a:latin typeface="Consolas"/>
+              </a:rPr>
+              <a:t>  return readStream(res);   // week 10: no more res.json() - it arrives in bits</a:t>
+            </a:r>
+          </a:p>
+          <a:p>
+            <a:pPr>
+              <a:spcAft>
+                <a:spcPts val="0"/>
+              </a:spcAft>
+            </a:pPr>
+            <a:r>
+              <a:rPr sz="1700">
+                <a:solidFill>
+                  <a:srgbClr val="6D8C97"/>
+                </a:solidFill>
+                <a:latin typeface="Consolas"/>
+              </a:rPr>
               <a:t> 147  </a:t>
             </a:r>
             <a:r>
@@ -4196,6 +4221,31 @@
                 </a:solidFill>
                 <a:latin typeface="Consolas"/>
               </a:rPr>
+              <a:t>   -  </a:t>
+            </a:r>
+            <a:r>
+              <a:rPr sz="1400" strike="sngStrike">
+                <a:solidFill>
+                  <a:srgbClr val="F3928B"/>
+                </a:solidFill>
+                <a:latin typeface="Consolas"/>
+              </a:rPr>
+              <a:t>  const waiting = addLine('bot', 'thinking...');</a:t>
+            </a:r>
+          </a:p>
+          <a:p>
+            <a:pPr>
+              <a:spcAft>
+                <a:spcPts val="0"/>
+              </a:spcAft>
+            </a:pPr>
+            <a:r>
+              <a:rPr sz="1400">
+                <a:solidFill>
+                  <a:srgbClr val="6D8C97"/>
+                </a:solidFill>
+                <a:latin typeface="Consolas"/>
+              </a:rPr>
               <a:t> 163  </a:t>
             </a:r>
             <a:r>
@@ -4281,6 +4331,81 @@
                 <a:latin typeface="Consolas"/>
               </a:rPr>
               <a:t>  try {</a:t>
+            </a:r>
+          </a:p>
+          <a:p>
+            <a:pPr>
+              <a:spcAft>
+                <a:spcPts val="0"/>
+              </a:spcAft>
+            </a:pPr>
+            <a:r>
+              <a:rPr sz="1400">
+                <a:solidFill>
+                  <a:srgbClr val="6D8C97"/>
+                </a:solidFill>
+                <a:latin typeface="Consolas"/>
+              </a:rPr>
+              <a:t>   -  </a:t>
+            </a:r>
+            <a:r>
+              <a:rPr sz="1400" strike="sngStrike">
+                <a:solidFill>
+                  <a:srgbClr val="F3928B"/>
+                </a:solidFill>
+                <a:latin typeface="Consolas"/>
+              </a:rPr>
+              <a:t>    const reply = await askAI();</a:t>
+            </a:r>
+          </a:p>
+          <a:p>
+            <a:pPr>
+              <a:spcAft>
+                <a:spcPts val="0"/>
+              </a:spcAft>
+            </a:pPr>
+            <a:r>
+              <a:rPr sz="1400">
+                <a:solidFill>
+                  <a:srgbClr val="6D8C97"/>
+                </a:solidFill>
+                <a:latin typeface="Consolas"/>
+              </a:rPr>
+              <a:t>   -  </a:t>
+            </a:r>
+            <a:r>
+              <a:rPr sz="1400" strike="sngStrike">
+                <a:solidFill>
+                  <a:srgbClr val="F3928B"/>
+                </a:solidFill>
+                <a:latin typeface="Consolas"/>
+              </a:rPr>
+              <a:t>    waiting.remove();</a:t>
+            </a:r>
+          </a:p>
+          <a:p>
+            <a:pPr>
+              <a:spcAft>
+                <a:spcPts val="0"/>
+              </a:spcAft>
+            </a:pPr>
+            <a:r>
+              <a:rPr sz="1400">
+                <a:solidFill>
+                  <a:srgbClr val="6D8C97"/>
+                </a:solidFill>
+                <a:latin typeface="Consolas"/>
+              </a:rPr>
+              <a:t>   -  </a:t>
+            </a:r>
+            <a:r>
+              <a:rPr sz="1400" strike="sngStrike">
+                <a:solidFill>
+                  <a:srgbClr val="F3928B"/>
+                </a:solidFill>
+                <a:latin typeface="Consolas"/>
+              </a:rPr>
+              <a:t>    addLine('bot', reply);</a:t>
             </a:r>
           </a:p>
           <a:p>
@@ -4578,6 +4703,56 @@
                 </a:solidFill>
                 <a:latin typeface="Consolas"/>
               </a:rPr>
+              <a:t>   -  </a:t>
+            </a:r>
+            <a:r>
+              <a:rPr sz="1400" strike="sngStrike">
+                <a:solidFill>
+                  <a:srgbClr val="F3928B"/>
+                </a:solidFill>
+                <a:latin typeface="Consolas"/>
+              </a:rPr>
+              <a:t>    waiting.remove();</a:t>
+            </a:r>
+          </a:p>
+          <a:p>
+            <a:pPr>
+              <a:spcAft>
+                <a:spcPts val="0"/>
+              </a:spcAft>
+            </a:pPr>
+            <a:r>
+              <a:rPr sz="1400">
+                <a:solidFill>
+                  <a:srgbClr val="6D8C97"/>
+                </a:solidFill>
+                <a:latin typeface="Consolas"/>
+              </a:rPr>
+              <a:t>   -  </a:t>
+            </a:r>
+            <a:r>
+              <a:rPr sz="1400" strike="sngStrike">
+                <a:solidFill>
+                  <a:srgbClr val="F3928B"/>
+                </a:solidFill>
+                <a:latin typeface="Consolas"/>
+              </a:rPr>
+              <a:t>    addLine('problem', problem.message === 'Failed to fetch'</a:t>
+            </a:r>
+          </a:p>
+          <a:p>
+            <a:pPr>
+              <a:spcAft>
+                <a:spcPts val="0"/>
+              </a:spcAft>
+            </a:pPr>
+            <a:r>
+              <a:rPr sz="1400">
+                <a:solidFill>
+                  <a:srgbClr val="6D8C97"/>
+                </a:solidFill>
+                <a:latin typeface="Consolas"/>
+              </a:rPr>
               <a:t> 175  </a:t>
             </a:r>
             <a:r>
@@ -4688,6 +4863,31 @@
                 <a:latin typeface="Consolas"/>
               </a:rPr>
               <a:t>      ? 'Could not reach the AI. Are you on the school network?'</a:t>
+            </a:r>
+          </a:p>
+          <a:p>
+            <a:pPr>
+              <a:spcAft>
+                <a:spcPts val="0"/>
+              </a:spcAft>
+            </a:pPr>
+            <a:r>
+              <a:rPr sz="1400">
+                <a:solidFill>
+                  <a:srgbClr val="6D8C97"/>
+                </a:solidFill>
+                <a:latin typeface="Consolas"/>
+              </a:rPr>
+              <a:t>   -  </a:t>
+            </a:r>
+            <a:r>
+              <a:rPr sz="1400" strike="sngStrike">
+                <a:solidFill>
+                  <a:srgbClr val="F3928B"/>
+                </a:solidFill>
+                <a:latin typeface="Consolas"/>
+              </a:rPr>
+              <a:t>      : problem.message);</a:t>
             </a:r>
           </a:p>
           <a:p>
@@ -5807,6 +6007,106 @@
                 </a:solidFill>
                 <a:latin typeface="Consolas"/>
               </a:rPr>
+              <a:t>   -  </a:t>
+            </a:r>
+            <a:r>
+              <a:rPr sz="1400" strike="sngStrike">
+                <a:solidFill>
+                  <a:srgbClr val="F3928B"/>
+                </a:solidFill>
+                <a:latin typeface="Consolas"/>
+              </a:rPr>
+              <a:t>// The pieces look like this, one per line:</a:t>
+            </a:r>
+          </a:p>
+          <a:p>
+            <a:pPr>
+              <a:spcAft>
+                <a:spcPts val="0"/>
+              </a:spcAft>
+            </a:pPr>
+            <a:r>
+              <a:rPr sz="1400">
+                <a:solidFill>
+                  <a:srgbClr val="6D8C97"/>
+                </a:solidFill>
+                <a:latin typeface="Consolas"/>
+              </a:rPr>
+              <a:t>   -  </a:t>
+            </a:r>
+            <a:r>
+              <a:rPr sz="1400" strike="sngStrike">
+                <a:solidFill>
+                  <a:srgbClr val="F3928B"/>
+                </a:solidFill>
+                <a:latin typeface="Consolas"/>
+              </a:rPr>
+              <a:t>//   data: {"choices":[{"delta":{"content":"Hel"}}]}</a:t>
+            </a:r>
+          </a:p>
+          <a:p>
+            <a:pPr>
+              <a:spcAft>
+                <a:spcPts val="0"/>
+              </a:spcAft>
+            </a:pPr>
+            <a:r>
+              <a:rPr sz="1400">
+                <a:solidFill>
+                  <a:srgbClr val="6D8C97"/>
+                </a:solidFill>
+                <a:latin typeface="Consolas"/>
+              </a:rPr>
+              <a:t>   -  </a:t>
+            </a:r>
+            <a:r>
+              <a:rPr sz="1400" strike="sngStrike">
+                <a:solidFill>
+                  <a:srgbClr val="F3928B"/>
+                </a:solidFill>
+                <a:latin typeface="Consolas"/>
+              </a:rPr>
+              <a:t>//   data: [DONE]</a:t>
+            </a:r>
+          </a:p>
+          <a:p>
+            <a:pPr>
+              <a:spcAft>
+                <a:spcPts val="0"/>
+              </a:spcAft>
+            </a:pPr>
+            <a:r>
+              <a:rPr sz="1400">
+                <a:solidFill>
+                  <a:srgbClr val="6D8C97"/>
+                </a:solidFill>
+                <a:latin typeface="Consolas"/>
+              </a:rPr>
+              <a:t>   -  </a:t>
+            </a:r>
+            <a:r>
+              <a:rPr sz="1400" strike="sngStrike">
+                <a:solidFill>
+                  <a:srgbClr val="F3928B"/>
+                </a:solidFill>
+                <a:latin typeface="Consolas"/>
+              </a:rPr>
+              <a:t>async function readStream(res) {</a:t>
+            </a:r>
+          </a:p>
+          <a:p>
+            <a:pPr>
+              <a:spcAft>
+                <a:spcPts val="0"/>
+              </a:spcAft>
+            </a:pPr>
+            <a:r>
+              <a:rPr sz="1400">
+                <a:solidFill>
+                  <a:srgbClr val="6D8C97"/>
+                </a:solidFill>
+                <a:latin typeface="Consolas"/>
+              </a:rPr>
               <a:t>  83  </a:t>
             </a:r>
             <a:r>
@@ -6514,6 +6814,31 @@
                 </a:solidFill>
                 <a:latin typeface="Consolas"/>
               </a:rPr>
+              <a:t>   -  </a:t>
+            </a:r>
+            <a:r>
+              <a:rPr sz="1400" strike="sngStrike">
+                <a:solidFill>
+                  <a:srgbClr val="F3928B"/>
+                </a:solidFill>
+                <a:latin typeface="Consolas"/>
+              </a:rPr>
+              <a:t>      if (bit) { answer += bit; }</a:t>
+            </a:r>
+          </a:p>
+          <a:p>
+            <a:pPr>
+              <a:spcAft>
+                <a:spcPts val="0"/>
+              </a:spcAft>
+            </a:pPr>
+            <a:r>
+              <a:rPr sz="1400">
+                <a:solidFill>
+                  <a:srgbClr val="6D8C97"/>
+                </a:solidFill>
+                <a:latin typeface="Consolas"/>
+              </a:rPr>
               <a:t> 108  </a:t>
             </a:r>
             <a:r>
@@ -6938,6 +7263,31 @@
                 <a:latin typeface="Consolas"/>
               </a:rPr>
               <a:t>// A chat request is a LIST of messages. Each one says who said it.</a:t>
+            </a:r>
+          </a:p>
+          <a:p>
+            <a:pPr>
+              <a:spcAft>
+                <a:spcPts val="0"/>
+              </a:spcAft>
+            </a:pPr>
+            <a:r>
+              <a:rPr sz="1400">
+                <a:solidFill>
+                  <a:srgbClr val="6D8C97"/>
+                </a:solidFill>
+                <a:latin typeface="Consolas"/>
+              </a:rPr>
+              <a:t>   -  </a:t>
+            </a:r>
+            <a:r>
+              <a:rPr sz="1400" strike="sngStrike">
+                <a:solidFill>
+                  <a:srgbClr val="F3928B"/>
+                </a:solidFill>
+                <a:latin typeface="Consolas"/>
+              </a:rPr>
+              <a:t>async function askAI() {</a:t>
             </a:r>
           </a:p>
           <a:p>

--- a/ai101/slides/week-11.pptx
+++ b/ai101/slides/week-11.pptx
@@ -13294,12 +13294,27 @@
               </a:spcAft>
             </a:pPr>
             <a:r>
+              <a:rPr sz="2800">
+                <a:solidFill>
+                  <a:srgbClr val="01AEFD"/>
+                </a:solidFill>
+              </a:rPr>
+              <a:t>bubble.classList.add('writing');</a:t>
+            </a:r>
+          </a:p>
+          <a:p>
+            <a:pPr>
+              <a:spcAft>
+                <a:spcPts val="1400"/>
+              </a:spcAft>
+            </a:pPr>
+            <a:r>
               <a:rPr sz="2400">
                 <a:solidFill>
                   <a:srgbClr val="1F2A37"/>
                 </a:solidFill>
               </a:rPr>
-              <a:t>• Add or remove ONE class without touching the others.</a:t>
+              <a:t>• Adds or removes ONE class without touching the others.</a:t>
             </a:r>
           </a:p>
           <a:p>
@@ -13314,7 +13329,22 @@
                   <a:srgbClr val="1F2A37"/>
                 </a:solidFill>
               </a:rPr>
-              <a:t>• .add('writing') switches a style on; .remove('writing') switches it off.</a:t>
+              <a:t>• .className (week 7) replaced the whole thing; classList edits just one.</a:t>
+            </a:r>
+          </a:p>
+          <a:p>
+            <a:pPr>
+              <a:spcAft>
+                <a:spcPts val="1400"/>
+              </a:spcAft>
+            </a:pPr>
+            <a:r>
+              <a:rPr sz="2400">
+                <a:solidFill>
+                  <a:srgbClr val="1F2A37"/>
+                </a:solidFill>
+              </a:rPr>
+              <a:t>• .add('writing') switches the blinking cursor on; .remove('writing') off.</a:t>
             </a:r>
           </a:p>
         </p:txBody>
@@ -24293,12 +24323,27 @@
               </a:spcAft>
             </a:pPr>
             <a:r>
+              <a:rPr sz="2800">
+                <a:solidFill>
+                  <a:srgbClr val="01AEFD"/>
+                </a:solidFill>
+              </a:rPr>
+              <a:t>content: "\258C";</a:t>
+            </a:r>
+          </a:p>
+          <a:p>
+            <a:pPr>
+              <a:spcAft>
+                <a:spcPts val="1400"/>
+              </a:spcAft>
+            </a:pPr>
+            <a:r>
               <a:rPr sz="2400">
                 <a:solidFill>
                   <a:srgbClr val="1F2A37"/>
                 </a:solidFill>
               </a:rPr>
-              <a:t>• Fills a ::before / ::after with text.</a:t>
+              <a:t>• Fills a ::after with text - here a block character used as a cursor.</a:t>
             </a:r>
           </a:p>
           <a:p>
@@ -24313,7 +24358,22 @@
                   <a:srgbClr val="1F2A37"/>
                 </a:solidFill>
               </a:rPr>
-              <a:t>• Here a block character "\258C" becomes the typing cursor.</a:t>
+              <a:t>• It is the one property that puts text on the page from CSS, not HTML.</a:t>
+            </a:r>
+          </a:p>
+          <a:p>
+            <a:pPr>
+              <a:spcAft>
+                <a:spcPts val="1400"/>
+              </a:spcAft>
+            </a:pPr>
+            <a:r>
+              <a:rPr sz="2400">
+                <a:solidFill>
+                  <a:srgbClr val="1F2A37"/>
+                </a:solidFill>
+              </a:rPr>
+              <a:t>• Pairs with animation (next) to make that cursor blink.</a:t>
             </a:r>
           </a:p>
         </p:txBody>
@@ -24778,12 +24838,57 @@
               </a:spcAft>
             </a:pPr>
             <a:r>
+              <a:rPr sz="2800">
+                <a:solidFill>
+                  <a:srgbClr val="01AEFD"/>
+                </a:solidFill>
+              </a:rPr>
+              <a:t>animation: blink 1s steps(2, start) infinite;</a:t>
+            </a:r>
+          </a:p>
+          <a:p>
+            <a:pPr>
+              <a:spcAft>
+                <a:spcPts val="1400"/>
+              </a:spcAft>
+            </a:pPr>
+            <a:r>
               <a:rPr sz="2400">
                 <a:solidFill>
                   <a:srgbClr val="1F2A37"/>
                 </a:solidFill>
               </a:rPr>
-              <a:t>• Runs a keyframes animation: its name, how long, the timing, how many times.</a:t>
+              <a:t>• Plays a keyframes animation: its name, how long, the timing, how often.</a:t>
+            </a:r>
+          </a:p>
+          <a:p>
+            <a:pPr>
+              <a:spcAft>
+                <a:spcPts val="1400"/>
+              </a:spcAft>
+            </a:pPr>
+            <a:r>
+              <a:rPr sz="2400">
+                <a:solidFill>
+                  <a:srgbClr val="1F2A37"/>
+                </a:solidFill>
+              </a:rPr>
+              <a:t>• The keyframes say WHAT changes; animation says how to play it.</a:t>
+            </a:r>
+          </a:p>
+          <a:p>
+            <a:pPr>
+              <a:spcAft>
+                <a:spcPts val="1400"/>
+              </a:spcAft>
+            </a:pPr>
+            <a:r>
+              <a:rPr sz="2400">
+                <a:solidFill>
+                  <a:srgbClr val="1F2A37"/>
+                </a:solidFill>
+              </a:rPr>
+              <a:t>• 'blink 1s ... infinite' fades the cursor over and over.</a:t>
             </a:r>
           </a:p>
         </p:txBody>
@@ -25475,12 +25580,57 @@
               </a:spcAft>
             </a:pPr>
             <a:r>
+              <a:rPr sz="2800">
+                <a:solidFill>
+                  <a:srgbClr val="01AEFD"/>
+                </a:solidFill>
+              </a:rPr>
+              <a:t>to { visibility: hidden; }</a:t>
+            </a:r>
+          </a:p>
+          <a:p>
+            <a:pPr>
+              <a:spcAft>
+                <a:spcPts val="1400"/>
+              </a:spcAft>
+            </a:pPr>
+            <a:r>
               <a:rPr sz="2400">
                 <a:solidFill>
                   <a:srgbClr val="1F2A37"/>
                 </a:solidFill>
               </a:rPr>
-              <a:t>• Hides the element but keeps its space - so the blinking cursor does not shift the text.</a:t>
+              <a:t>• Hides the element but KEEPS its space.</a:t>
+            </a:r>
+          </a:p>
+          <a:p>
+            <a:pPr>
+              <a:spcAft>
+                <a:spcPts val="1400"/>
+              </a:spcAft>
+            </a:pPr>
+            <a:r>
+              <a:rPr sz="2400">
+                <a:solidFill>
+                  <a:srgbClr val="1F2A37"/>
+                </a:solidFill>
+              </a:rPr>
+              <a:t>• So the blinking cursor vanishes without the text jumping around.</a:t>
+            </a:r>
+          </a:p>
+          <a:p>
+            <a:pPr>
+              <a:spcAft>
+                <a:spcPts val="1400"/>
+              </a:spcAft>
+            </a:pPr>
+            <a:r>
+              <a:rPr sz="2400">
+                <a:solidFill>
+                  <a:srgbClr val="1F2A37"/>
+                </a:solidFill>
+              </a:rPr>
+              <a:t>• Different from removing it (.remove, week 5), which collapses the gap.</a:t>
             </a:r>
           </a:p>
         </p:txBody>

--- a/ai101/slides/week-11.pptx
+++ b/ai101/slides/week-11.pptx
@@ -25514,7 +25514,7 @@
                   <a:srgbClr val="1F2A37"/>
                 </a:solidFill>
               </a:rPr>
-              <a:t>visibility: hidden</a:t>
+              <a:t>visibility</a:t>
             </a:r>
           </a:p>
         </p:txBody>

--- a/ai101/slides/week-11.pptx
+++ b/ai101/slides/week-11.pptx
@@ -59,6 +59,10 @@
     <p:sldId id="307" r:id="rId58"/>
     <p:sldId id="308" r:id="rId59"/>
     <p:sldId id="309" r:id="rId60"/>
+    <p:sldId id="310" r:id="rId61"/>
+    <p:sldId id="311" r:id="rId62"/>
+    <p:sldId id="312" r:id="rId63"/>
+    <p:sldId id="313" r:id="rId64"/>
   </p:sldIdLst>
   <p:sldSz cx="12191695" cy="6858000" type="screen4x3"/>
   <p:notesSz cx="6858000" cy="9144000"/>
@@ -13363,7 +13367,7 @@
     <p:bg>
       <p:bgPr>
         <a:solidFill>
-          <a:srgbClr val="102127"/>
+          <a:srgbClr val="F4F8FB"/>
         </a:solidFill>
         <a:effectLst/>
       </p:bgPr>
@@ -13383,8 +13387,8 @@
         </p:nvSpPr>
         <p:spPr>
           <a:xfrm>
-            <a:off x="502920" y="274320"/>
-            <a:ext cx="11155680" cy="548640"/>
+            <a:off x="822960" y="365760"/>
+            <a:ext cx="7315200" cy="365760"/>
           </a:xfrm>
           <a:prstGeom prst="rect">
             <a:avLst/>
@@ -13398,12 +13402,12 @@
           <a:lstStyle/>
           <a:p>
             <a:r>
-              <a:rPr sz="2200" b="1">
+              <a:rPr sz="1400" b="1">
                 <a:solidFill>
                   <a:srgbClr val="01AEFD"/>
                 </a:solidFill>
               </a:rPr>
-              <a:t>Type this into script.js   -   line 165</a:t>
+              <a:t>ON THE PAGE</a:t>
             </a:r>
           </a:p>
         </p:txBody>
@@ -13416,8 +13420,8 @@
         </p:nvSpPr>
         <p:spPr>
           <a:xfrm>
-            <a:off x="502920" y="960120"/>
-            <a:ext cx="11155680" cy="4297680"/>
+            <a:off x="822960" y="658368"/>
+            <a:ext cx="10515600" cy="731520"/>
           </a:xfrm>
           <a:prstGeom prst="rect">
             <a:avLst/>
@@ -13430,317 +13434,511 @@
           </a:bodyPr>
           <a:lstStyle/>
           <a:p>
-            <a:pPr>
-              <a:spcAft>
-                <a:spcPts val="0"/>
-              </a:spcAft>
-            </a:pPr>
-            <a:r>
-              <a:rPr sz="1300">
-                <a:solidFill>
-                  <a:srgbClr val="6D8C97"/>
-                </a:solidFill>
-                <a:latin typeface="Consolas"/>
-              </a:rPr>
-              <a:t> 154  </a:t>
-            </a:r>
-            <a:r>
-              <a:rPr sz="1300">
-                <a:solidFill>
-                  <a:srgbClr val="6D8C97"/>
-                </a:solidFill>
-                <a:latin typeface="Consolas"/>
-              </a:rPr>
-              <a:t> </a:t>
-            </a:r>
-          </a:p>
-          <a:p>
-            <a:pPr>
-              <a:spcAft>
-                <a:spcPts val="0"/>
-              </a:spcAft>
-            </a:pPr>
-            <a:r>
-              <a:rPr sz="1300">
-                <a:solidFill>
-                  <a:srgbClr val="6D8C97"/>
-                </a:solidFill>
-                <a:latin typeface="Consolas"/>
-              </a:rPr>
-              <a:t> 155  </a:t>
-            </a:r>
-            <a:r>
-              <a:rPr sz="1300">
-                <a:solidFill>
-                  <a:srgbClr val="6D8C97"/>
-                </a:solidFill>
-                <a:latin typeface="Consolas"/>
-              </a:rPr>
-              <a:t>// The browser calls this when the form is submitted.</a:t>
-            </a:r>
-          </a:p>
-          <a:p>
-            <a:pPr>
-              <a:spcAft>
-                <a:spcPts val="0"/>
-              </a:spcAft>
-            </a:pPr>
-            <a:r>
-              <a:rPr sz="1300">
-                <a:solidFill>
-                  <a:srgbClr val="6D8C97"/>
-                </a:solidFill>
-                <a:latin typeface="Consolas"/>
-              </a:rPr>
-              <a:t> 156  </a:t>
-            </a:r>
-            <a:r>
-              <a:rPr sz="1300">
-                <a:solidFill>
-                  <a:srgbClr val="6D8C97"/>
-                </a:solidFill>
-                <a:latin typeface="Consolas"/>
-              </a:rPr>
-              <a:t>composer.addEventListener('submit', async function (event) {</a:t>
-            </a:r>
-          </a:p>
-          <a:p>
-            <a:pPr>
-              <a:spcAft>
-                <a:spcPts val="0"/>
-              </a:spcAft>
-            </a:pPr>
-            <a:r>
-              <a:rPr sz="1300">
-                <a:solidFill>
-                  <a:srgbClr val="6D8C97"/>
-                </a:solidFill>
-                <a:latin typeface="Consolas"/>
-              </a:rPr>
-              <a:t> 157  </a:t>
-            </a:r>
-            <a:r>
-              <a:rPr sz="1300">
-                <a:solidFill>
-                  <a:srgbClr val="6D8C97"/>
-                </a:solidFill>
-                <a:latin typeface="Consolas"/>
-              </a:rPr>
-              <a:t>  event.preventDefault();</a:t>
-            </a:r>
-          </a:p>
-          <a:p>
-            <a:pPr>
-              <a:spcAft>
-                <a:spcPts val="0"/>
-              </a:spcAft>
-            </a:pPr>
-            <a:r>
-              <a:rPr sz="1300">
-                <a:solidFill>
-                  <a:srgbClr val="6D8C97"/>
-                </a:solidFill>
-                <a:latin typeface="Consolas"/>
-              </a:rPr>
-              <a:t> 158  </a:t>
-            </a:r>
-            <a:r>
-              <a:rPr sz="1300">
-                <a:solidFill>
-                  <a:srgbClr val="6D8C97"/>
-                </a:solidFill>
-                <a:latin typeface="Consolas"/>
-              </a:rPr>
-              <a:t>  const text = promptBox.value.trim();</a:t>
-            </a:r>
-          </a:p>
-          <a:p>
-            <a:pPr>
-              <a:spcAft>
-                <a:spcPts val="0"/>
-              </a:spcAft>
-            </a:pPr>
-            <a:r>
-              <a:rPr sz="1300">
-                <a:solidFill>
-                  <a:srgbClr val="6D8C97"/>
-                </a:solidFill>
-                <a:latin typeface="Consolas"/>
-              </a:rPr>
-              <a:t> 159  </a:t>
-            </a:r>
-            <a:r>
-              <a:rPr sz="1300">
-                <a:solidFill>
-                  <a:srgbClr val="6D8C97"/>
-                </a:solidFill>
-                <a:latin typeface="Consolas"/>
-              </a:rPr>
-              <a:t>  if (text === '') { return; }</a:t>
-            </a:r>
-          </a:p>
-          <a:p>
-            <a:pPr>
-              <a:spcAft>
-                <a:spcPts val="0"/>
-              </a:spcAft>
-            </a:pPr>
-            <a:r>
-              <a:rPr sz="1300">
-                <a:solidFill>
-                  <a:srgbClr val="6D8C97"/>
-                </a:solidFill>
-                <a:latin typeface="Consolas"/>
-              </a:rPr>
-              <a:t> 160  </a:t>
-            </a:r>
-            <a:r>
-              <a:rPr sz="1300">
-                <a:solidFill>
-                  <a:srgbClr val="6D8C97"/>
-                </a:solidFill>
-                <a:latin typeface="Consolas"/>
-              </a:rPr>
-              <a:t>  promptBox.value = '';</a:t>
-            </a:r>
-          </a:p>
-          <a:p>
-            <a:pPr>
-              <a:spcAft>
-                <a:spcPts val="0"/>
-              </a:spcAft>
-            </a:pPr>
-            <a:r>
-              <a:rPr sz="1300">
-                <a:solidFill>
-                  <a:srgbClr val="6D8C97"/>
-                </a:solidFill>
-                <a:latin typeface="Consolas"/>
-              </a:rPr>
-              <a:t> 161  </a:t>
-            </a:r>
-            <a:r>
-              <a:rPr sz="1300">
-                <a:solidFill>
-                  <a:srgbClr val="6D8C97"/>
-                </a:solidFill>
-                <a:latin typeface="Consolas"/>
-              </a:rPr>
-              <a:t>  addLine('you', text);</a:t>
-            </a:r>
-          </a:p>
-          <a:p>
-            <a:pPr>
-              <a:spcAft>
-                <a:spcPts val="0"/>
-              </a:spcAft>
-            </a:pPr>
-            <a:r>
-              <a:rPr sz="1300">
-                <a:solidFill>
-                  <a:srgbClr val="6D8C97"/>
-                </a:solidFill>
-                <a:latin typeface="Consolas"/>
-              </a:rPr>
-              <a:t> 162  </a:t>
-            </a:r>
-            <a:r>
-              <a:rPr sz="1300">
-                <a:solidFill>
-                  <a:srgbClr val="6D8C97"/>
-                </a:solidFill>
-                <a:latin typeface="Consolas"/>
-              </a:rPr>
-              <a:t>  history.push({ role: 'user', content: text });</a:t>
-            </a:r>
-          </a:p>
-          <a:p>
-            <a:pPr>
-              <a:spcAft>
-                <a:spcPts val="0"/>
-              </a:spcAft>
-            </a:pPr>
-            <a:r>
-              <a:rPr sz="1300">
-                <a:solidFill>
-                  <a:srgbClr val="6D8C97"/>
-                </a:solidFill>
-                <a:latin typeface="Consolas"/>
-              </a:rPr>
-              <a:t> 163  </a:t>
-            </a:r>
-            <a:r>
-              <a:rPr sz="1300">
-                <a:solidFill>
-                  <a:srgbClr val="6D8C97"/>
-                </a:solidFill>
-                <a:latin typeface="Consolas"/>
-              </a:rPr>
-              <a:t> </a:t>
-            </a:r>
-          </a:p>
-          <a:p>
-            <a:pPr>
-              <a:spcAft>
-                <a:spcPts val="0"/>
-              </a:spcAft>
-            </a:pPr>
-            <a:r>
-              <a:rPr sz="1300">
-                <a:solidFill>
-                  <a:srgbClr val="6D8C97"/>
-                </a:solidFill>
-                <a:latin typeface="Consolas"/>
-              </a:rPr>
-              <a:t> 164  </a:t>
-            </a:r>
-            <a:r>
-              <a:rPr sz="1300">
-                <a:solidFill>
-                  <a:srgbClr val="6D8C97"/>
-                </a:solidFill>
-                <a:latin typeface="Consolas"/>
-              </a:rPr>
-              <a:t>  const bubble = addLine('bot', '');</a:t>
-            </a:r>
-          </a:p>
-          <a:p>
-            <a:pPr>
-              <a:spcAft>
-                <a:spcPts val="0"/>
-              </a:spcAft>
-            </a:pPr>
-            <a:r>
-              <a:rPr sz="1300">
-                <a:solidFill>
-                  <a:srgbClr val="6D8C97"/>
-                </a:solidFill>
-                <a:latin typeface="Consolas"/>
-              </a:rPr>
-              <a:t> 165  </a:t>
-            </a:r>
-            <a:r>
-              <a:rPr sz="1300">
-                <a:solidFill>
-                  <a:srgbClr val="7FE0A0"/>
-                </a:solidFill>
-                <a:latin typeface="Consolas"/>
-              </a:rPr>
-              <a:t>  bubble.classList.add('writing');   // week 11: blinking cursor while it types</a:t>
+            <a:r>
+              <a:rPr sz="3200" b="1">
+                <a:solidFill>
+                  <a:srgbClr val="1F2A37"/>
+                </a:solidFill>
+              </a:rPr>
+              <a:t>.classList</a:t>
             </a:r>
           </a:p>
         </p:txBody>
       </p:sp>
       <p:sp>
         <p:nvSpPr>
-          <p:cNvPr id="4" name="TextBox 3"/>
+          <p:cNvPr id="4" name="Rounded Rectangle 3"/>
+          <p:cNvSpPr/>
+          <p:nvPr/>
+        </p:nvSpPr>
+        <p:spPr>
+          <a:xfrm>
+            <a:off x="3454237" y="1641896"/>
+            <a:ext cx="5249387" cy="3918021"/>
+          </a:xfrm>
+          <a:prstGeom prst="roundRect">
+            <a:avLst/>
+          </a:prstGeom>
+          <a:solidFill>
+            <a:srgbClr val="0F1F27"/>
+          </a:solidFill>
+          <a:ln>
+            <a:noFill/>
+          </a:ln>
+          <a:effectLst/>
+        </p:spPr>
+        <p:style>
+          <a:lnRef idx="1">
+            <a:schemeClr val="accent1"/>
+          </a:lnRef>
+          <a:fillRef idx="3">
+            <a:schemeClr val="accent1"/>
+          </a:fillRef>
+          <a:effectRef idx="2">
+            <a:schemeClr val="accent1"/>
+          </a:effectRef>
+          <a:fontRef idx="minor">
+            <a:schemeClr val="lt1"/>
+          </a:fontRef>
+        </p:style>
+        <p:txBody>
+          <a:bodyPr rtlCol="0" anchor="ctr"/>
+          <a:lstStyle/>
+          <a:p>
+            <a:pPr algn="ctr"/>
+          </a:p>
+        </p:txBody>
+      </p:sp>
+      <p:sp>
+        <p:nvSpPr>
+          <p:cNvPr id="5" name="Rounded Rectangle 4"/>
+          <p:cNvSpPr/>
+          <p:nvPr/>
+        </p:nvSpPr>
+        <p:spPr>
+          <a:xfrm>
+            <a:off x="3606393" y="2022287"/>
+            <a:ext cx="4945075" cy="437448"/>
+          </a:xfrm>
+          <a:prstGeom prst="roundRect">
+            <a:avLst/>
+          </a:prstGeom>
+          <a:solidFill>
+            <a:srgbClr val="16303A"/>
+          </a:solidFill>
+          <a:ln>
+            <a:noFill/>
+          </a:ln>
+          <a:effectLst/>
+        </p:spPr>
+        <p:style>
+          <a:lnRef idx="1">
+            <a:schemeClr val="accent1"/>
+          </a:lnRef>
+          <a:fillRef idx="3">
+            <a:schemeClr val="accent1"/>
+          </a:fillRef>
+          <a:effectRef idx="2">
+            <a:schemeClr val="accent1"/>
+          </a:effectRef>
+          <a:fontRef idx="minor">
+            <a:schemeClr val="lt1"/>
+          </a:fontRef>
+        </p:style>
+        <p:txBody>
+          <a:bodyPr rtlCol="0" anchor="ctr"/>
+          <a:lstStyle/>
+          <a:p>
+            <a:pPr algn="ctr"/>
+          </a:p>
+        </p:txBody>
+      </p:sp>
+      <p:sp>
+        <p:nvSpPr>
+          <p:cNvPr id="6" name="Rounded Rectangle 5"/>
+          <p:cNvSpPr/>
+          <p:nvPr/>
+        </p:nvSpPr>
+        <p:spPr>
+          <a:xfrm>
+            <a:off x="3720510" y="2155423"/>
+            <a:ext cx="1426463" cy="190195"/>
+          </a:xfrm>
+          <a:prstGeom prst="roundRect">
+            <a:avLst/>
+          </a:prstGeom>
+          <a:solidFill>
+            <a:srgbClr val="4A6B78"/>
+          </a:solidFill>
+          <a:ln>
+            <a:noFill/>
+          </a:ln>
+          <a:effectLst/>
+        </p:spPr>
+        <p:style>
+          <a:lnRef idx="1">
+            <a:schemeClr val="accent1"/>
+          </a:lnRef>
+          <a:fillRef idx="3">
+            <a:schemeClr val="accent1"/>
+          </a:fillRef>
+          <a:effectRef idx="2">
+            <a:schemeClr val="accent1"/>
+          </a:effectRef>
+          <a:fontRef idx="minor">
+            <a:schemeClr val="lt1"/>
+          </a:fontRef>
+        </p:style>
+        <p:txBody>
+          <a:bodyPr rtlCol="0" anchor="ctr"/>
+          <a:lstStyle/>
+          <a:p>
+            <a:pPr algn="ctr"/>
+          </a:p>
+        </p:txBody>
+      </p:sp>
+      <p:sp>
+        <p:nvSpPr>
+          <p:cNvPr id="7" name="Rounded Rectangle 6"/>
+          <p:cNvSpPr/>
+          <p:nvPr/>
+        </p:nvSpPr>
+        <p:spPr>
+          <a:xfrm>
+            <a:off x="3606393" y="2554833"/>
+            <a:ext cx="4945075" cy="1806854"/>
+          </a:xfrm>
+          <a:prstGeom prst="roundRect">
+            <a:avLst/>
+          </a:prstGeom>
+          <a:solidFill>
+            <a:srgbClr val="0B171D"/>
+          </a:solidFill>
+          <a:ln>
+            <a:noFill/>
+          </a:ln>
+          <a:effectLst/>
+        </p:spPr>
+        <p:style>
+          <a:lnRef idx="1">
+            <a:schemeClr val="accent1"/>
+          </a:lnRef>
+          <a:fillRef idx="3">
+            <a:schemeClr val="accent1"/>
+          </a:fillRef>
+          <a:effectRef idx="2">
+            <a:schemeClr val="accent1"/>
+          </a:effectRef>
+          <a:fontRef idx="minor">
+            <a:schemeClr val="lt1"/>
+          </a:fontRef>
+        </p:style>
+        <p:txBody>
+          <a:bodyPr rtlCol="0" anchor="ctr"/>
+          <a:lstStyle/>
+          <a:p>
+            <a:pPr algn="ctr"/>
+          </a:p>
+        </p:txBody>
+      </p:sp>
+      <p:sp>
+        <p:nvSpPr>
+          <p:cNvPr id="8" name="Rounded Rectangle 7"/>
+          <p:cNvSpPr/>
+          <p:nvPr/>
+        </p:nvSpPr>
+        <p:spPr>
+          <a:xfrm>
+            <a:off x="3720510" y="2668950"/>
+            <a:ext cx="2852927" cy="399409"/>
+          </a:xfrm>
+          <a:prstGeom prst="roundRect">
+            <a:avLst/>
+          </a:prstGeom>
+          <a:solidFill>
+            <a:srgbClr val="1B3540"/>
+          </a:solidFill>
+          <a:ln>
+            <a:noFill/>
+          </a:ln>
+          <a:effectLst/>
+        </p:spPr>
+        <p:style>
+          <a:lnRef idx="1">
+            <a:schemeClr val="accent1"/>
+          </a:lnRef>
+          <a:fillRef idx="3">
+            <a:schemeClr val="accent1"/>
+          </a:fillRef>
+          <a:effectRef idx="2">
+            <a:schemeClr val="accent1"/>
+          </a:effectRef>
+          <a:fontRef idx="minor">
+            <a:schemeClr val="lt1"/>
+          </a:fontRef>
+        </p:style>
+        <p:txBody>
+          <a:bodyPr rtlCol="0" anchor="ctr"/>
+          <a:lstStyle/>
+          <a:p>
+            <a:pPr algn="ctr"/>
+          </a:p>
+        </p:txBody>
+      </p:sp>
+      <p:sp>
+        <p:nvSpPr>
+          <p:cNvPr id="9" name="Rounded Rectangle 8"/>
+          <p:cNvSpPr/>
+          <p:nvPr/>
+        </p:nvSpPr>
+        <p:spPr>
+          <a:xfrm>
+            <a:off x="5584423" y="3182477"/>
+            <a:ext cx="2852927" cy="399409"/>
+          </a:xfrm>
+          <a:prstGeom prst="roundRect">
+            <a:avLst/>
+          </a:prstGeom>
+          <a:solidFill>
+            <a:srgbClr val="123A32"/>
+          </a:solidFill>
+          <a:ln>
+            <a:noFill/>
+          </a:ln>
+          <a:effectLst/>
+        </p:spPr>
+        <p:style>
+          <a:lnRef idx="1">
+            <a:schemeClr val="accent1"/>
+          </a:lnRef>
+          <a:fillRef idx="3">
+            <a:schemeClr val="accent1"/>
+          </a:fillRef>
+          <a:effectRef idx="2">
+            <a:schemeClr val="accent1"/>
+          </a:effectRef>
+          <a:fontRef idx="minor">
+            <a:schemeClr val="lt1"/>
+          </a:fontRef>
+        </p:style>
+        <p:txBody>
+          <a:bodyPr rtlCol="0" anchor="ctr"/>
+          <a:lstStyle/>
+          <a:p>
+            <a:pPr algn="ctr"/>
+          </a:p>
+        </p:txBody>
+      </p:sp>
+      <p:sp>
+        <p:nvSpPr>
+          <p:cNvPr id="10" name="Rounded Rectangle 9"/>
+          <p:cNvSpPr/>
+          <p:nvPr/>
+        </p:nvSpPr>
+        <p:spPr>
+          <a:xfrm>
+            <a:off x="3720510" y="3696004"/>
+            <a:ext cx="3138220" cy="399409"/>
+          </a:xfrm>
+          <a:prstGeom prst="roundRect">
+            <a:avLst/>
+          </a:prstGeom>
+          <a:solidFill>
+            <a:srgbClr val="1B3540"/>
+          </a:solidFill>
+          <a:ln>
+            <a:noFill/>
+          </a:ln>
+          <a:effectLst/>
+        </p:spPr>
+        <p:style>
+          <a:lnRef idx="1">
+            <a:schemeClr val="accent1"/>
+          </a:lnRef>
+          <a:fillRef idx="3">
+            <a:schemeClr val="accent1"/>
+          </a:fillRef>
+          <a:effectRef idx="2">
+            <a:schemeClr val="accent1"/>
+          </a:effectRef>
+          <a:fontRef idx="minor">
+            <a:schemeClr val="lt1"/>
+          </a:fontRef>
+        </p:style>
+        <p:txBody>
+          <a:bodyPr rtlCol="0" anchor="ctr"/>
+          <a:lstStyle/>
+          <a:p>
+            <a:pPr algn="ctr"/>
+          </a:p>
+        </p:txBody>
+      </p:sp>
+      <p:sp>
+        <p:nvSpPr>
+          <p:cNvPr id="11" name="Rounded Rectangle 10"/>
+          <p:cNvSpPr/>
+          <p:nvPr/>
+        </p:nvSpPr>
+        <p:spPr>
+          <a:xfrm>
+            <a:off x="3701491" y="4856195"/>
+            <a:ext cx="3899001" cy="323331"/>
+          </a:xfrm>
+          <a:prstGeom prst="roundRect">
+            <a:avLst/>
+          </a:prstGeom>
+          <a:solidFill>
+            <a:srgbClr val="16303A"/>
+          </a:solidFill>
+          <a:ln>
+            <a:noFill/>
+          </a:ln>
+          <a:effectLst/>
+        </p:spPr>
+        <p:style>
+          <a:lnRef idx="1">
+            <a:schemeClr val="accent1"/>
+          </a:lnRef>
+          <a:fillRef idx="3">
+            <a:schemeClr val="accent1"/>
+          </a:fillRef>
+          <a:effectRef idx="2">
+            <a:schemeClr val="accent1"/>
+          </a:effectRef>
+          <a:fontRef idx="minor">
+            <a:schemeClr val="lt1"/>
+          </a:fontRef>
+        </p:style>
+        <p:txBody>
+          <a:bodyPr rtlCol="0" anchor="ctr"/>
+          <a:lstStyle/>
+          <a:p>
+            <a:pPr algn="ctr"/>
+          </a:p>
+        </p:txBody>
+      </p:sp>
+      <p:sp>
+        <p:nvSpPr>
+          <p:cNvPr id="12" name="Rounded Rectangle 11"/>
+          <p:cNvSpPr/>
+          <p:nvPr/>
+        </p:nvSpPr>
+        <p:spPr>
+          <a:xfrm>
+            <a:off x="7695590" y="4856195"/>
+            <a:ext cx="779800" cy="323331"/>
+          </a:xfrm>
+          <a:prstGeom prst="roundRect">
+            <a:avLst/>
+          </a:prstGeom>
+          <a:solidFill>
+            <a:srgbClr val="01AEFD"/>
+          </a:solidFill>
+          <a:ln>
+            <a:noFill/>
+          </a:ln>
+          <a:effectLst/>
+        </p:spPr>
+        <p:style>
+          <a:lnRef idx="1">
+            <a:schemeClr val="accent1"/>
+          </a:lnRef>
+          <a:fillRef idx="3">
+            <a:schemeClr val="accent1"/>
+          </a:fillRef>
+          <a:effectRef idx="2">
+            <a:schemeClr val="accent1"/>
+          </a:effectRef>
+          <a:fontRef idx="minor">
+            <a:schemeClr val="lt1"/>
+          </a:fontRef>
+        </p:style>
+        <p:txBody>
+          <a:bodyPr rtlCol="0" anchor="ctr"/>
+          <a:lstStyle/>
+          <a:p>
+            <a:pPr algn="ctr"/>
+          </a:p>
+        </p:txBody>
+      </p:sp>
+      <p:sp>
+        <p:nvSpPr>
+          <p:cNvPr id="13" name="Rounded Rectangle 12"/>
+          <p:cNvSpPr/>
+          <p:nvPr/>
+        </p:nvSpPr>
+        <p:spPr>
+          <a:xfrm>
+            <a:off x="3720510" y="5407761"/>
+            <a:ext cx="1616659" cy="95097"/>
+          </a:xfrm>
+          <a:prstGeom prst="roundRect">
+            <a:avLst/>
+          </a:prstGeom>
+          <a:solidFill>
+            <a:srgbClr val="2A4550"/>
+          </a:solidFill>
+          <a:ln>
+            <a:noFill/>
+          </a:ln>
+          <a:effectLst/>
+        </p:spPr>
+        <p:style>
+          <a:lnRef idx="1">
+            <a:schemeClr val="accent1"/>
+          </a:lnRef>
+          <a:fillRef idx="3">
+            <a:schemeClr val="accent1"/>
+          </a:fillRef>
+          <a:effectRef idx="2">
+            <a:schemeClr val="accent1"/>
+          </a:effectRef>
+          <a:fontRef idx="minor">
+            <a:schemeClr val="lt1"/>
+          </a:fontRef>
+        </p:style>
+        <p:txBody>
+          <a:bodyPr rtlCol="0" anchor="ctr"/>
+          <a:lstStyle/>
+          <a:p>
+            <a:pPr algn="ctr"/>
+          </a:p>
+        </p:txBody>
+      </p:sp>
+      <p:sp>
+        <p:nvSpPr>
+          <p:cNvPr id="14" name="Rounded Rectangle 13"/>
+          <p:cNvSpPr/>
+          <p:nvPr/>
+        </p:nvSpPr>
+        <p:spPr>
+          <a:xfrm>
+            <a:off x="5546384" y="3144438"/>
+            <a:ext cx="2929006" cy="475488"/>
+          </a:xfrm>
+          <a:prstGeom prst="roundRect">
+            <a:avLst/>
+          </a:prstGeom>
+          <a:noFill/>
+          <a:ln w="44450">
+            <a:solidFill>
+              <a:srgbClr val="FFD633"/>
+            </a:solidFill>
+          </a:ln>
+          <a:effectLst/>
+        </p:spPr>
+        <p:style>
+          <a:lnRef idx="1">
+            <a:schemeClr val="accent1"/>
+          </a:lnRef>
+          <a:fillRef idx="3">
+            <a:schemeClr val="accent1"/>
+          </a:fillRef>
+          <a:effectRef idx="2">
+            <a:schemeClr val="accent1"/>
+          </a:effectRef>
+          <a:fontRef idx="minor">
+            <a:schemeClr val="lt1"/>
+          </a:fontRef>
+        </p:style>
+        <p:txBody>
+          <a:bodyPr rtlCol="0" anchor="ctr"/>
+          <a:lstStyle/>
+          <a:p>
+            <a:pPr algn="ctr"/>
+          </a:p>
+        </p:txBody>
+      </p:sp>
+      <p:sp>
+        <p:nvSpPr>
+          <p:cNvPr id="15" name="TextBox 14"/>
           <p:cNvSpPr txBox="1"/>
           <p:nvPr/>
         </p:nvSpPr>
         <p:spPr>
           <a:xfrm>
-            <a:off x="548640" y="5623560"/>
-            <a:ext cx="11064240" cy="1051560"/>
+            <a:off x="822960" y="6172200"/>
+            <a:ext cx="10515600" cy="548640"/>
           </a:xfrm>
           <a:prstGeom prst="rect">
             <a:avLst/>
@@ -13756,10 +13954,10 @@
             <a:r>
               <a:rPr sz="2000">
                 <a:solidFill>
-                  <a:srgbClr val="DCECEF"/>
-                </a:solidFill>
-              </a:rPr>
-              <a:t>classList.add gives it the 'writing' class, which CSS turns into a blinking cursor.</a:t>
+                  <a:srgbClr val="0A6299"/>
+                </a:solidFill>
+              </a:rPr>
+              <a:t>A class decides if a bubble is yours or the AI's.</a:t>
             </a:r>
           </a:p>
         </p:txBody>
@@ -13818,7 +14016,7 @@
                   <a:srgbClr val="01AEFD"/>
                 </a:solidFill>
               </a:rPr>
-              <a:t>In script.js   -   replace a line</a:t>
+              <a:t>Type this into script.js   -   line 165</a:t>
             </a:r>
           </a:p>
         </p:txBody>
@@ -14137,61 +14335,11 @@
             <a:r>
               <a:rPr sz="1300">
                 <a:solidFill>
-                  <a:srgbClr val="6D8C97"/>
+                  <a:srgbClr val="7FE0A0"/>
                 </a:solidFill>
                 <a:latin typeface="Consolas"/>
               </a:rPr>
               <a:t>  bubble.classList.add('writing');   // week 11: blinking cursor while it types</a:t>
-            </a:r>
-          </a:p>
-          <a:p>
-            <a:pPr>
-              <a:spcAft>
-                <a:spcPts val="0"/>
-              </a:spcAft>
-            </a:pPr>
-            <a:r>
-              <a:rPr sz="1300">
-                <a:solidFill>
-                  <a:srgbClr val="6D8C97"/>
-                </a:solidFill>
-                <a:latin typeface="Consolas"/>
-              </a:rPr>
-              <a:t> 166  </a:t>
-            </a:r>
-            <a:r>
-              <a:rPr sz="1300">
-                <a:solidFill>
-                  <a:srgbClr val="6D8C97"/>
-                </a:solidFill>
-                <a:latin typeface="Consolas"/>
-              </a:rPr>
-              <a:t>  try {</a:t>
-            </a:r>
-          </a:p>
-          <a:p>
-            <a:pPr>
-              <a:spcAft>
-                <a:spcPts val="0"/>
-              </a:spcAft>
-            </a:pPr>
-            <a:r>
-              <a:rPr sz="1300">
-                <a:solidFill>
-                  <a:srgbClr val="6D8C97"/>
-                </a:solidFill>
-                <a:latin typeface="Consolas"/>
-              </a:rPr>
-              <a:t> 167  </a:t>
-            </a:r>
-            <a:r>
-              <a:rPr sz="1300" strike="sngStrike">
-                <a:solidFill>
-                  <a:srgbClr val="F3928B"/>
-                </a:solidFill>
-                <a:latin typeface="Consolas"/>
-              </a:rPr>
-              <a:t>    const reply = await askAI();</a:t>
             </a:r>
           </a:p>
         </p:txBody>
@@ -14224,7 +14372,7 @@
                   <a:srgbClr val="DCECEF"/>
                 </a:solidFill>
               </a:rPr>
-              <a:t>This line changes - take the old one out; the new version is next.</a:t>
+              <a:t>classList.add gives it the 'writing' class, which CSS turns into a blinking cursor.</a:t>
             </a:r>
           </a:p>
         </p:txBody>
@@ -14656,7 +14804,7 @@
                 </a:solidFill>
                 <a:latin typeface="Consolas"/>
               </a:rPr>
-              <a:t>    waiting.remove();</a:t>
+              <a:t>    const reply = await askAI();</a:t>
             </a:r>
           </a:p>
         </p:txBody>
@@ -15121,7 +15269,7 @@
                 </a:solidFill>
                 <a:latin typeface="Consolas"/>
               </a:rPr>
-              <a:t>    addLine('bot', reply);</a:t>
+              <a:t>    waiting.remove();</a:t>
             </a:r>
           </a:p>
         </p:txBody>
@@ -15325,7 +15473,7 @@
                   <a:srgbClr val="01AEFD"/>
                 </a:solidFill>
               </a:rPr>
-              <a:t>Type this into script.js   -   line 168</a:t>
+              <a:t>In script.js   -   replace a line</a:t>
             </a:r>
           </a:p>
         </p:txBody>
@@ -15692,38 +15840,13 @@
               <a:t> 167  </a:t>
             </a:r>
             <a:r>
-              <a:rPr sz="1300">
-                <a:solidFill>
-                  <a:srgbClr val="6D8C97"/>
-                </a:solidFill>
-                <a:latin typeface="Consolas"/>
-              </a:rPr>
-              <a:t>    // The function we hand over runs on EVERY piece that arrives.</a:t>
-            </a:r>
-          </a:p>
-          <a:p>
-            <a:pPr>
-              <a:spcAft>
-                <a:spcPts val="0"/>
-              </a:spcAft>
-            </a:pPr>
-            <a:r>
-              <a:rPr sz="1300">
-                <a:solidFill>
-                  <a:srgbClr val="6D8C97"/>
-                </a:solidFill>
-                <a:latin typeface="Consolas"/>
-              </a:rPr>
-              <a:t> 168  </a:t>
-            </a:r>
-            <a:r>
-              <a:rPr sz="1300">
-                <a:solidFill>
-                  <a:srgbClr val="7FE0A0"/>
-                </a:solidFill>
-                <a:latin typeface="Consolas"/>
-              </a:rPr>
-              <a:t>    const reply = await askAI(function (soFar) {</a:t>
+              <a:rPr sz="1300" strike="sngStrike">
+                <a:solidFill>
+                  <a:srgbClr val="F3928B"/>
+                </a:solidFill>
+                <a:latin typeface="Consolas"/>
+              </a:rPr>
+              <a:t>    addLine('bot', reply);</a:t>
             </a:r>
           </a:p>
         </p:txBody>
@@ -15756,7 +15879,7 @@
                   <a:srgbClr val="DCECEF"/>
                 </a:solidFill>
               </a:rPr>
-              <a:t>Call askAI and hand it a function. This function runs on EVERY piece that arrives.</a:t>
+              <a:t>This line changes - take the old one out; the new version is next.</a:t>
             </a:r>
           </a:p>
         </p:txBody>
@@ -15815,7 +15938,7 @@
                   <a:srgbClr val="01AEFD"/>
                 </a:solidFill>
               </a:rPr>
-              <a:t>Type this into script.js   -   line 169</a:t>
+              <a:t>Type this into script.js   -   line 168</a:t>
             </a:r>
           </a:p>
         </p:txBody>
@@ -16209,36 +16332,11 @@
             <a:r>
               <a:rPr sz="1300">
                 <a:solidFill>
-                  <a:srgbClr val="6D8C97"/>
+                  <a:srgbClr val="7FE0A0"/>
                 </a:solidFill>
                 <a:latin typeface="Consolas"/>
               </a:rPr>
               <a:t>    const reply = await askAI(function (soFar) {</a:t>
-            </a:r>
-          </a:p>
-          <a:p>
-            <a:pPr>
-              <a:spcAft>
-                <a:spcPts val="0"/>
-              </a:spcAft>
-            </a:pPr>
-            <a:r>
-              <a:rPr sz="1300">
-                <a:solidFill>
-                  <a:srgbClr val="6D8C97"/>
-                </a:solidFill>
-                <a:latin typeface="Consolas"/>
-              </a:rPr>
-              <a:t> 169  </a:t>
-            </a:r>
-            <a:r>
-              <a:rPr sz="1300">
-                <a:solidFill>
-                  <a:srgbClr val="7FE0A0"/>
-                </a:solidFill>
-                <a:latin typeface="Consolas"/>
-              </a:rPr>
-              <a:t>      bubble.textContent = soFar;</a:t>
             </a:r>
           </a:p>
         </p:txBody>
@@ -16271,7 +16369,7 @@
                   <a:srgbClr val="DCECEF"/>
                 </a:solidFill>
               </a:rPr>
-              <a:t>Put the text-so-far into the bubble - it grows as pieces land.</a:t>
+              <a:t>Call askAI and hand it a function. This function runs on EVERY piece that arrives.</a:t>
             </a:r>
           </a:p>
         </p:txBody>
@@ -16330,7 +16428,7 @@
                   <a:srgbClr val="01AEFD"/>
                 </a:solidFill>
               </a:rPr>
-              <a:t>Type this into script.js   -   line 170</a:t>
+              <a:t>Type this into script.js   -   line 169</a:t>
             </a:r>
           </a:p>
         </p:txBody>
@@ -16749,36 +16847,11 @@
             <a:r>
               <a:rPr sz="1300">
                 <a:solidFill>
-                  <a:srgbClr val="6D8C97"/>
+                  <a:srgbClr val="7FE0A0"/>
                 </a:solidFill>
                 <a:latin typeface="Consolas"/>
               </a:rPr>
               <a:t>      bubble.textContent = soFar;</a:t>
-            </a:r>
-          </a:p>
-          <a:p>
-            <a:pPr>
-              <a:spcAft>
-                <a:spcPts val="0"/>
-              </a:spcAft>
-            </a:pPr>
-            <a:r>
-              <a:rPr sz="1300">
-                <a:solidFill>
-                  <a:srgbClr val="6D8C97"/>
-                </a:solidFill>
-                <a:latin typeface="Consolas"/>
-              </a:rPr>
-              <a:t> 170  </a:t>
-            </a:r>
-            <a:r>
-              <a:rPr sz="1300">
-                <a:solidFill>
-                  <a:srgbClr val="7FE0A0"/>
-                </a:solidFill>
-                <a:latin typeface="Consolas"/>
-              </a:rPr>
-              <a:t>      chat.scrollTop = chat.scrollHeight;</a:t>
             </a:r>
           </a:p>
         </p:txBody>
@@ -16811,7 +16884,7 @@
                   <a:srgbClr val="DCECEF"/>
                 </a:solidFill>
               </a:rPr>
-              <a:t>Keep scrolling to the bottom as it types.</a:t>
+              <a:t>Put the text-so-far into the bubble - it grows as pieces land.</a:t>
             </a:r>
           </a:p>
         </p:txBody>
@@ -16870,7 +16943,7 @@
                   <a:srgbClr val="01AEFD"/>
                 </a:solidFill>
               </a:rPr>
-              <a:t>Type this into script.js   -   line 171</a:t>
+              <a:t>Type this into script.js   -   line 170</a:t>
             </a:r>
           </a:p>
         </p:txBody>
@@ -17314,36 +17387,11 @@
             <a:r>
               <a:rPr sz="1300">
                 <a:solidFill>
-                  <a:srgbClr val="6D8C97"/>
+                  <a:srgbClr val="7FE0A0"/>
                 </a:solidFill>
                 <a:latin typeface="Consolas"/>
               </a:rPr>
               <a:t>      chat.scrollTop = chat.scrollHeight;</a:t>
-            </a:r>
-          </a:p>
-          <a:p>
-            <a:pPr>
-              <a:spcAft>
-                <a:spcPts val="0"/>
-              </a:spcAft>
-            </a:pPr>
-            <a:r>
-              <a:rPr sz="1300">
-                <a:solidFill>
-                  <a:srgbClr val="6D8C97"/>
-                </a:solidFill>
-                <a:latin typeface="Consolas"/>
-              </a:rPr>
-              <a:t> 171  </a:t>
-            </a:r>
-            <a:r>
-              <a:rPr sz="1300">
-                <a:solidFill>
-                  <a:srgbClr val="7FE0A0"/>
-                </a:solidFill>
-                <a:latin typeface="Consolas"/>
-              </a:rPr>
-              <a:t>    });</a:t>
             </a:r>
           </a:p>
         </p:txBody>
@@ -17376,7 +17424,7 @@
                   <a:srgbClr val="DCECEF"/>
                 </a:solidFill>
               </a:rPr>
-              <a:t>Close the function and the askAI call.</a:t>
+              <a:t>Keep scrolling to the bottom as it types.</a:t>
             </a:r>
           </a:p>
         </p:txBody>
@@ -17435,7 +17483,7 @@
                   <a:srgbClr val="01AEFD"/>
                 </a:solidFill>
               </a:rPr>
-              <a:t>Type this into script.js   -   line 172</a:t>
+              <a:t>Type this into script.js   -   line 171</a:t>
             </a:r>
           </a:p>
         </p:txBody>
@@ -17904,36 +17952,11 @@
             <a:r>
               <a:rPr sz="1300">
                 <a:solidFill>
-                  <a:srgbClr val="6D8C97"/>
+                  <a:srgbClr val="7FE0A0"/>
                 </a:solidFill>
                 <a:latin typeface="Consolas"/>
               </a:rPr>
               <a:t>    });</a:t>
-            </a:r>
-          </a:p>
-          <a:p>
-            <a:pPr>
-              <a:spcAft>
-                <a:spcPts val="0"/>
-              </a:spcAft>
-            </a:pPr>
-            <a:r>
-              <a:rPr sz="1300">
-                <a:solidFill>
-                  <a:srgbClr val="6D8C97"/>
-                </a:solidFill>
-                <a:latin typeface="Consolas"/>
-              </a:rPr>
-              <a:t> 172  </a:t>
-            </a:r>
-            <a:r>
-              <a:rPr sz="1300">
-                <a:solidFill>
-                  <a:srgbClr val="7FE0A0"/>
-                </a:solidFill>
-                <a:latin typeface="Consolas"/>
-              </a:rPr>
-              <a:t>    bubble.classList.remove('writing');</a:t>
             </a:r>
           </a:p>
         </p:txBody>
@@ -17966,7 +17989,7 @@
                   <a:srgbClr val="DCECEF"/>
                 </a:solidFill>
               </a:rPr>
-              <a:t>Once done, remove 'writing' so the cursor stops blinking.</a:t>
+              <a:t>Close the function and the askAI call.</a:t>
             </a:r>
           </a:p>
         </p:txBody>
@@ -18025,7 +18048,7 @@
                   <a:srgbClr val="01AEFD"/>
                 </a:solidFill>
               </a:rPr>
-              <a:t>In script.js   -   replace a line</a:t>
+              <a:t>Type this into script.js   -   line 172</a:t>
             </a:r>
           </a:p>
         </p:txBody>
@@ -18519,86 +18542,11 @@
             <a:r>
               <a:rPr sz="1300">
                 <a:solidFill>
-                  <a:srgbClr val="6D8C97"/>
+                  <a:srgbClr val="7FE0A0"/>
                 </a:solidFill>
                 <a:latin typeface="Consolas"/>
               </a:rPr>
               <a:t>    bubble.classList.remove('writing');</a:t>
-            </a:r>
-          </a:p>
-          <a:p>
-            <a:pPr>
-              <a:spcAft>
-                <a:spcPts val="0"/>
-              </a:spcAft>
-            </a:pPr>
-            <a:r>
-              <a:rPr sz="1300">
-                <a:solidFill>
-                  <a:srgbClr val="6D8C97"/>
-                </a:solidFill>
-                <a:latin typeface="Consolas"/>
-              </a:rPr>
-              <a:t> 173  </a:t>
-            </a:r>
-            <a:r>
-              <a:rPr sz="1300">
-                <a:solidFill>
-                  <a:srgbClr val="6D8C97"/>
-                </a:solidFill>
-                <a:latin typeface="Consolas"/>
-              </a:rPr>
-              <a:t>    history.push({ role: 'assistant', content: reply });   // it said this too</a:t>
-            </a:r>
-          </a:p>
-          <a:p>
-            <a:pPr>
-              <a:spcAft>
-                <a:spcPts val="0"/>
-              </a:spcAft>
-            </a:pPr>
-            <a:r>
-              <a:rPr sz="1300">
-                <a:solidFill>
-                  <a:srgbClr val="6D8C97"/>
-                </a:solidFill>
-                <a:latin typeface="Consolas"/>
-              </a:rPr>
-              <a:t> 174  </a:t>
-            </a:r>
-            <a:r>
-              <a:rPr sz="1300">
-                <a:solidFill>
-                  <a:srgbClr val="6D8C97"/>
-                </a:solidFill>
-                <a:latin typeface="Consolas"/>
-              </a:rPr>
-              <a:t>  } catch (problem) {</a:t>
-            </a:r>
-          </a:p>
-          <a:p>
-            <a:pPr>
-              <a:spcAft>
-                <a:spcPts val="0"/>
-              </a:spcAft>
-            </a:pPr>
-            <a:r>
-              <a:rPr sz="1300">
-                <a:solidFill>
-                  <a:srgbClr val="6D8C97"/>
-                </a:solidFill>
-                <a:latin typeface="Consolas"/>
-              </a:rPr>
-              <a:t> 175  </a:t>
-            </a:r>
-            <a:r>
-              <a:rPr sz="1300" strike="sngStrike">
-                <a:solidFill>
-                  <a:srgbClr val="F3928B"/>
-                </a:solidFill>
-                <a:latin typeface="Consolas"/>
-              </a:rPr>
-              <a:t>    waiting.remove();</a:t>
             </a:r>
           </a:p>
         </p:txBody>
@@ -18631,7 +18579,7 @@
                   <a:srgbClr val="DCECEF"/>
                 </a:solidFill>
               </a:rPr>
-              <a:t>This line changes - take the old one out; the new version is next.</a:t>
+              <a:t>Once done, remove 'writing' so the cursor stops blinking.</a:t>
             </a:r>
           </a:p>
         </p:txBody>
@@ -19263,7 +19211,7 @@
                 </a:solidFill>
                 <a:latin typeface="Consolas"/>
               </a:rPr>
-              <a:t>    addLine('problem', problem.message === 'Failed to fetch'</a:t>
+              <a:t>    waiting.remove();</a:t>
             </a:r>
           </a:p>
         </p:txBody>
@@ -19355,7 +19303,7 @@
                   <a:srgbClr val="01AEFD"/>
                 </a:solidFill>
               </a:rPr>
-              <a:t>Type this into script.js   -   line 175</a:t>
+              <a:t>In script.js   -   replace a line</a:t>
             </a:r>
           </a:p>
         </p:txBody>
@@ -19922,13 +19870,13 @@
               <a:t> 175  </a:t>
             </a:r>
             <a:r>
-              <a:rPr sz="1300">
-                <a:solidFill>
-                  <a:srgbClr val="7FE0A0"/>
-                </a:solidFill>
-                <a:latin typeface="Consolas"/>
-              </a:rPr>
-              <a:t>    bubble.remove();</a:t>
+              <a:rPr sz="1300" strike="sngStrike">
+                <a:solidFill>
+                  <a:srgbClr val="F3928B"/>
+                </a:solidFill>
+                <a:latin typeface="Consolas"/>
+              </a:rPr>
+              <a:t>    addLine('problem', problem.message === 'Failed to fetch'</a:t>
             </a:r>
           </a:p>
         </p:txBody>
@@ -19961,7 +19909,7 @@
                   <a:srgbClr val="DCECEF"/>
                 </a:solidFill>
               </a:rPr>
-              <a:t>If it failed, take the empty bubble away.</a:t>
+              <a:t>This line changes - take the old one out; the new version is next.</a:t>
             </a:r>
           </a:p>
         </p:txBody>
@@ -20020,7 +19968,7 @@
                   <a:srgbClr val="01AEFD"/>
                 </a:solidFill>
               </a:rPr>
-              <a:t>Type this into script.js   -   line 178</a:t>
+              <a:t>Type this into script.js   -   line 175</a:t>
             </a:r>
           </a:p>
         </p:txBody>
@@ -20589,86 +20537,11 @@
             <a:r>
               <a:rPr sz="1300">
                 <a:solidFill>
-                  <a:srgbClr val="6D8C97"/>
+                  <a:srgbClr val="7FE0A0"/>
                 </a:solidFill>
                 <a:latin typeface="Consolas"/>
               </a:rPr>
               <a:t>    bubble.remove();</a:t>
-            </a:r>
-          </a:p>
-          <a:p>
-            <a:pPr>
-              <a:spcAft>
-                <a:spcPts val="0"/>
-              </a:spcAft>
-            </a:pPr>
-            <a:r>
-              <a:rPr sz="1300">
-                <a:solidFill>
-                  <a:srgbClr val="6D8C97"/>
-                </a:solidFill>
-                <a:latin typeface="Consolas"/>
-              </a:rPr>
-              <a:t> 176  </a:t>
-            </a:r>
-            <a:r>
-              <a:rPr sz="1300">
-                <a:solidFill>
-                  <a:srgbClr val="6D8C97"/>
-                </a:solidFill>
-                <a:latin typeface="Consolas"/>
-              </a:rPr>
-              <a:t>    // 'Failed to fetch' means the request never arrived anywhere. That is</a:t>
-            </a:r>
-          </a:p>
-          <a:p>
-            <a:pPr>
-              <a:spcAft>
-                <a:spcPts val="0"/>
-              </a:spcAft>
-            </a:pPr>
-            <a:r>
-              <a:rPr sz="1300">
-                <a:solidFill>
-                  <a:srgbClr val="6D8C97"/>
-                </a:solidFill>
-                <a:latin typeface="Consolas"/>
-              </a:rPr>
-              <a:t> 177  </a:t>
-            </a:r>
-            <a:r>
-              <a:rPr sz="1300">
-                <a:solidFill>
-                  <a:srgbClr val="6D8C97"/>
-                </a:solidFill>
-                <a:latin typeface="Consolas"/>
-              </a:rPr>
-              <a:t>    // the commonest real failure and the least helpful wording, so replace it.</a:t>
-            </a:r>
-          </a:p>
-          <a:p>
-            <a:pPr>
-              <a:spcAft>
-                <a:spcPts val="0"/>
-              </a:spcAft>
-            </a:pPr>
-            <a:r>
-              <a:rPr sz="1300">
-                <a:solidFill>
-                  <a:srgbClr val="6D8C97"/>
-                </a:solidFill>
-                <a:latin typeface="Consolas"/>
-              </a:rPr>
-              <a:t> 178  </a:t>
-            </a:r>
-            <a:r>
-              <a:rPr sz="1300">
-                <a:solidFill>
-                  <a:srgbClr val="7FE0A0"/>
-                </a:solidFill>
-                <a:latin typeface="Consolas"/>
-              </a:rPr>
-              <a:t>    const said = problem.message === 'Failed to fetch'</a:t>
             </a:r>
           </a:p>
         </p:txBody>
@@ -20701,7 +20574,7 @@
                   <a:srgbClr val="DCECEF"/>
                 </a:solidFill>
               </a:rPr>
-              <a:t>Pick a friendly line if it was the unhelpful 'Failed to fetch' ...</a:t>
+              <a:t>If it failed, take the empty bubble away.</a:t>
             </a:r>
           </a:p>
         </p:txBody>
@@ -20760,7 +20633,7 @@
                   <a:srgbClr val="01AEFD"/>
                 </a:solidFill>
               </a:rPr>
-              <a:t>In script.js   -   replace a line</a:t>
+              <a:t>Type this into script.js   -   line 178</a:t>
             </a:r>
           </a:p>
         </p:txBody>
@@ -21404,61 +21277,11 @@
             <a:r>
               <a:rPr sz="1300">
                 <a:solidFill>
-                  <a:srgbClr val="6D8C97"/>
+                  <a:srgbClr val="7FE0A0"/>
                 </a:solidFill>
                 <a:latin typeface="Consolas"/>
               </a:rPr>
               <a:t>    const said = problem.message === 'Failed to fetch'</a:t>
-            </a:r>
-          </a:p>
-          <a:p>
-            <a:pPr>
-              <a:spcAft>
-                <a:spcPts val="0"/>
-              </a:spcAft>
-            </a:pPr>
-            <a:r>
-              <a:rPr sz="1300">
-                <a:solidFill>
-                  <a:srgbClr val="6D8C97"/>
-                </a:solidFill>
-                <a:latin typeface="Consolas"/>
-              </a:rPr>
-              <a:t> 179  </a:t>
-            </a:r>
-            <a:r>
-              <a:rPr sz="1300">
-                <a:solidFill>
-                  <a:srgbClr val="6D8C97"/>
-                </a:solidFill>
-                <a:latin typeface="Consolas"/>
-              </a:rPr>
-              <a:t>      ? 'Could not reach the AI. Are you on the school network?'</a:t>
-            </a:r>
-          </a:p>
-          <a:p>
-            <a:pPr>
-              <a:spcAft>
-                <a:spcPts val="0"/>
-              </a:spcAft>
-            </a:pPr>
-            <a:r>
-              <a:rPr sz="1300">
-                <a:solidFill>
-                  <a:srgbClr val="6D8C97"/>
-                </a:solidFill>
-                <a:latin typeface="Consolas"/>
-              </a:rPr>
-              <a:t> 180  </a:t>
-            </a:r>
-            <a:r>
-              <a:rPr sz="1300" strike="sngStrike">
-                <a:solidFill>
-                  <a:srgbClr val="F3928B"/>
-                </a:solidFill>
-                <a:latin typeface="Consolas"/>
-              </a:rPr>
-              <a:t>      : problem.message);</a:t>
             </a:r>
           </a:p>
         </p:txBody>
@@ -21491,7 +21314,7 @@
                   <a:srgbClr val="DCECEF"/>
                 </a:solidFill>
               </a:rPr>
-              <a:t>This line changes - take the old one out; the new version is next.</a:t>
+              <a:t>Pick a friendly line if it was the unhelpful 'Failed to fetch' ...</a:t>
             </a:r>
           </a:p>
         </p:txBody>
@@ -21662,7 +21485,7 @@
                   <a:srgbClr val="01AEFD"/>
                 </a:solidFill>
               </a:rPr>
-              <a:t>Type this into script.js   -   line 180</a:t>
+              <a:t>In script.js   -   replace a line</a:t>
             </a:r>
           </a:p>
         </p:txBody>
@@ -22354,13 +22177,13 @@
               <a:t> 180  </a:t>
             </a:r>
             <a:r>
-              <a:rPr sz="1300">
-                <a:solidFill>
-                  <a:srgbClr val="7FE0A0"/>
-                </a:solidFill>
-                <a:latin typeface="Consolas"/>
-              </a:rPr>
-              <a:t>      : problem.message;</a:t>
+              <a:rPr sz="1300" strike="sngStrike">
+                <a:solidFill>
+                  <a:srgbClr val="F3928B"/>
+                </a:solidFill>
+                <a:latin typeface="Consolas"/>
+              </a:rPr>
+              <a:t>      : problem.message);</a:t>
             </a:r>
           </a:p>
         </p:txBody>
@@ -22393,7 +22216,7 @@
                   <a:srgbClr val="DCECEF"/>
                 </a:solidFill>
               </a:rPr>
-              <a:t>... otherwise show the real message.</a:t>
+              <a:t>This line changes - take the old one out; the new version is next.</a:t>
             </a:r>
           </a:p>
         </p:txBody>
@@ -22452,7 +22275,7 @@
                   <a:srgbClr val="01AEFD"/>
                 </a:solidFill>
               </a:rPr>
-              <a:t>Type this into script.js   -   line 181</a:t>
+              <a:t>Type this into script.js   -   line 180</a:t>
             </a:r>
           </a:p>
         </p:txBody>
@@ -23146,36 +22969,11 @@
             <a:r>
               <a:rPr sz="1300">
                 <a:solidFill>
-                  <a:srgbClr val="6D8C97"/>
+                  <a:srgbClr val="7FE0A0"/>
                 </a:solidFill>
                 <a:latin typeface="Consolas"/>
               </a:rPr>
               <a:t>      : problem.message;</a:t>
-            </a:r>
-          </a:p>
-          <a:p>
-            <a:pPr>
-              <a:spcAft>
-                <a:spcPts val="0"/>
-              </a:spcAft>
-            </a:pPr>
-            <a:r>
-              <a:rPr sz="1300">
-                <a:solidFill>
-                  <a:srgbClr val="6D8C97"/>
-                </a:solidFill>
-                <a:latin typeface="Consolas"/>
-              </a:rPr>
-              <a:t> 181  </a:t>
-            </a:r>
-            <a:r>
-              <a:rPr sz="1300">
-                <a:solidFill>
-                  <a:srgbClr val="7FE0A0"/>
-                </a:solidFill>
-                <a:latin typeface="Consolas"/>
-              </a:rPr>
-              <a:t>    addLine('problem', said);</a:t>
             </a:r>
           </a:p>
         </p:txBody>
@@ -23208,7 +23006,7 @@
                   <a:srgbClr val="DCECEF"/>
                 </a:solidFill>
               </a:rPr>
-              <a:t>Show it as a problem bubble.</a:t>
+              <a:t>... otherwise show the real message.</a:t>
             </a:r>
           </a:p>
         </p:txBody>
@@ -23267,7 +23065,7 @@
                   <a:srgbClr val="01AEFD"/>
                 </a:solidFill>
               </a:rPr>
-              <a:t>All together in script.js</a:t>
+              <a:t>Type this into script.js   -   line 181</a:t>
             </a:r>
           </a:p>
         </p:txBody>
@@ -23311,736 +23109,686 @@
             <a:r>
               <a:rPr sz="1300">
                 <a:solidFill>
+                  <a:srgbClr val="6D8C97"/>
+                </a:solidFill>
+                <a:latin typeface="Consolas"/>
+              </a:rPr>
+              <a:t> </a:t>
+            </a:r>
+          </a:p>
+          <a:p>
+            <a:pPr>
+              <a:spcAft>
+                <a:spcPts val="0"/>
+              </a:spcAft>
+            </a:pPr>
+            <a:r>
+              <a:rPr sz="1300">
+                <a:solidFill>
+                  <a:srgbClr val="6D8C97"/>
+                </a:solidFill>
+                <a:latin typeface="Consolas"/>
+              </a:rPr>
+              <a:t> 155  </a:t>
+            </a:r>
+            <a:r>
+              <a:rPr sz="1300">
+                <a:solidFill>
+                  <a:srgbClr val="6D8C97"/>
+                </a:solidFill>
+                <a:latin typeface="Consolas"/>
+              </a:rPr>
+              <a:t>// The browser calls this when the form is submitted.</a:t>
+            </a:r>
+          </a:p>
+          <a:p>
+            <a:pPr>
+              <a:spcAft>
+                <a:spcPts val="0"/>
+              </a:spcAft>
+            </a:pPr>
+            <a:r>
+              <a:rPr sz="1300">
+                <a:solidFill>
+                  <a:srgbClr val="6D8C97"/>
+                </a:solidFill>
+                <a:latin typeface="Consolas"/>
+              </a:rPr>
+              <a:t> 156  </a:t>
+            </a:r>
+            <a:r>
+              <a:rPr sz="1300">
+                <a:solidFill>
+                  <a:srgbClr val="6D8C97"/>
+                </a:solidFill>
+                <a:latin typeface="Consolas"/>
+              </a:rPr>
+              <a:t>composer.addEventListener('submit', async function (event) {</a:t>
+            </a:r>
+          </a:p>
+          <a:p>
+            <a:pPr>
+              <a:spcAft>
+                <a:spcPts val="0"/>
+              </a:spcAft>
+            </a:pPr>
+            <a:r>
+              <a:rPr sz="1300">
+                <a:solidFill>
+                  <a:srgbClr val="6D8C97"/>
+                </a:solidFill>
+                <a:latin typeface="Consolas"/>
+              </a:rPr>
+              <a:t> 157  </a:t>
+            </a:r>
+            <a:r>
+              <a:rPr sz="1300">
+                <a:solidFill>
+                  <a:srgbClr val="6D8C97"/>
+                </a:solidFill>
+                <a:latin typeface="Consolas"/>
+              </a:rPr>
+              <a:t>  event.preventDefault();</a:t>
+            </a:r>
+          </a:p>
+          <a:p>
+            <a:pPr>
+              <a:spcAft>
+                <a:spcPts val="0"/>
+              </a:spcAft>
+            </a:pPr>
+            <a:r>
+              <a:rPr sz="1300">
+                <a:solidFill>
+                  <a:srgbClr val="6D8C97"/>
+                </a:solidFill>
+                <a:latin typeface="Consolas"/>
+              </a:rPr>
+              <a:t> 158  </a:t>
+            </a:r>
+            <a:r>
+              <a:rPr sz="1300">
+                <a:solidFill>
+                  <a:srgbClr val="6D8C97"/>
+                </a:solidFill>
+                <a:latin typeface="Consolas"/>
+              </a:rPr>
+              <a:t>  const text = promptBox.value.trim();</a:t>
+            </a:r>
+          </a:p>
+          <a:p>
+            <a:pPr>
+              <a:spcAft>
+                <a:spcPts val="0"/>
+              </a:spcAft>
+            </a:pPr>
+            <a:r>
+              <a:rPr sz="1300">
+                <a:solidFill>
+                  <a:srgbClr val="6D8C97"/>
+                </a:solidFill>
+                <a:latin typeface="Consolas"/>
+              </a:rPr>
+              <a:t> 159  </a:t>
+            </a:r>
+            <a:r>
+              <a:rPr sz="1300">
+                <a:solidFill>
+                  <a:srgbClr val="6D8C97"/>
+                </a:solidFill>
+                <a:latin typeface="Consolas"/>
+              </a:rPr>
+              <a:t>  if (text === '') { return; }</a:t>
+            </a:r>
+          </a:p>
+          <a:p>
+            <a:pPr>
+              <a:spcAft>
+                <a:spcPts val="0"/>
+              </a:spcAft>
+            </a:pPr>
+            <a:r>
+              <a:rPr sz="1300">
+                <a:solidFill>
+                  <a:srgbClr val="6D8C97"/>
+                </a:solidFill>
+                <a:latin typeface="Consolas"/>
+              </a:rPr>
+              <a:t> 160  </a:t>
+            </a:r>
+            <a:r>
+              <a:rPr sz="1300">
+                <a:solidFill>
+                  <a:srgbClr val="6D8C97"/>
+                </a:solidFill>
+                <a:latin typeface="Consolas"/>
+              </a:rPr>
+              <a:t>  promptBox.value = '';</a:t>
+            </a:r>
+          </a:p>
+          <a:p>
+            <a:pPr>
+              <a:spcAft>
+                <a:spcPts val="0"/>
+              </a:spcAft>
+            </a:pPr>
+            <a:r>
+              <a:rPr sz="1300">
+                <a:solidFill>
+                  <a:srgbClr val="6D8C97"/>
+                </a:solidFill>
+                <a:latin typeface="Consolas"/>
+              </a:rPr>
+              <a:t> 161  </a:t>
+            </a:r>
+            <a:r>
+              <a:rPr sz="1300">
+                <a:solidFill>
+                  <a:srgbClr val="6D8C97"/>
+                </a:solidFill>
+                <a:latin typeface="Consolas"/>
+              </a:rPr>
+              <a:t>  addLine('you', text);</a:t>
+            </a:r>
+          </a:p>
+          <a:p>
+            <a:pPr>
+              <a:spcAft>
+                <a:spcPts val="0"/>
+              </a:spcAft>
+            </a:pPr>
+            <a:r>
+              <a:rPr sz="1300">
+                <a:solidFill>
+                  <a:srgbClr val="6D8C97"/>
+                </a:solidFill>
+                <a:latin typeface="Consolas"/>
+              </a:rPr>
+              <a:t> 162  </a:t>
+            </a:r>
+            <a:r>
+              <a:rPr sz="1300">
+                <a:solidFill>
+                  <a:srgbClr val="6D8C97"/>
+                </a:solidFill>
+                <a:latin typeface="Consolas"/>
+              </a:rPr>
+              <a:t>  history.push({ role: 'user', content: text });</a:t>
+            </a:r>
+          </a:p>
+          <a:p>
+            <a:pPr>
+              <a:spcAft>
+                <a:spcPts val="0"/>
+              </a:spcAft>
+            </a:pPr>
+            <a:r>
+              <a:rPr sz="1300">
+                <a:solidFill>
+                  <a:srgbClr val="6D8C97"/>
+                </a:solidFill>
+                <a:latin typeface="Consolas"/>
+              </a:rPr>
+              <a:t> 163  </a:t>
+            </a:r>
+            <a:r>
+              <a:rPr sz="1300">
+                <a:solidFill>
+                  <a:srgbClr val="6D8C97"/>
+                </a:solidFill>
+                <a:latin typeface="Consolas"/>
+              </a:rPr>
+              <a:t> </a:t>
+            </a:r>
+          </a:p>
+          <a:p>
+            <a:pPr>
+              <a:spcAft>
+                <a:spcPts val="0"/>
+              </a:spcAft>
+            </a:pPr>
+            <a:r>
+              <a:rPr sz="1300">
+                <a:solidFill>
+                  <a:srgbClr val="6D8C97"/>
+                </a:solidFill>
+                <a:latin typeface="Consolas"/>
+              </a:rPr>
+              <a:t> 164  </a:t>
+            </a:r>
+            <a:r>
+              <a:rPr sz="1300">
+                <a:solidFill>
+                  <a:srgbClr val="6D8C97"/>
+                </a:solidFill>
+                <a:latin typeface="Consolas"/>
+              </a:rPr>
+              <a:t>  const bubble = addLine('bot', '');</a:t>
+            </a:r>
+          </a:p>
+          <a:p>
+            <a:pPr>
+              <a:spcAft>
+                <a:spcPts val="0"/>
+              </a:spcAft>
+            </a:pPr>
+            <a:r>
+              <a:rPr sz="1300">
+                <a:solidFill>
+                  <a:srgbClr val="6D8C97"/>
+                </a:solidFill>
+                <a:latin typeface="Consolas"/>
+              </a:rPr>
+              <a:t> 165  </a:t>
+            </a:r>
+            <a:r>
+              <a:rPr sz="1300">
+                <a:solidFill>
+                  <a:srgbClr val="6D8C97"/>
+                </a:solidFill>
+                <a:latin typeface="Consolas"/>
+              </a:rPr>
+              <a:t>  bubble.classList.add('writing');   // week 11: blinking cursor while it types</a:t>
+            </a:r>
+          </a:p>
+          <a:p>
+            <a:pPr>
+              <a:spcAft>
+                <a:spcPts val="0"/>
+              </a:spcAft>
+            </a:pPr>
+            <a:r>
+              <a:rPr sz="1300">
+                <a:solidFill>
+                  <a:srgbClr val="6D8C97"/>
+                </a:solidFill>
+                <a:latin typeface="Consolas"/>
+              </a:rPr>
+              <a:t> 166  </a:t>
+            </a:r>
+            <a:r>
+              <a:rPr sz="1300">
+                <a:solidFill>
+                  <a:srgbClr val="6D8C97"/>
+                </a:solidFill>
+                <a:latin typeface="Consolas"/>
+              </a:rPr>
+              <a:t>  try {</a:t>
+            </a:r>
+          </a:p>
+          <a:p>
+            <a:pPr>
+              <a:spcAft>
+                <a:spcPts val="0"/>
+              </a:spcAft>
+            </a:pPr>
+            <a:r>
+              <a:rPr sz="1300">
+                <a:solidFill>
+                  <a:srgbClr val="6D8C97"/>
+                </a:solidFill>
+                <a:latin typeface="Consolas"/>
+              </a:rPr>
+              <a:t> 167  </a:t>
+            </a:r>
+            <a:r>
+              <a:rPr sz="1300">
+                <a:solidFill>
+                  <a:srgbClr val="6D8C97"/>
+                </a:solidFill>
+                <a:latin typeface="Consolas"/>
+              </a:rPr>
+              <a:t>    // The function we hand over runs on EVERY piece that arrives.</a:t>
+            </a:r>
+          </a:p>
+          <a:p>
+            <a:pPr>
+              <a:spcAft>
+                <a:spcPts val="0"/>
+              </a:spcAft>
+            </a:pPr>
+            <a:r>
+              <a:rPr sz="1300">
+                <a:solidFill>
+                  <a:srgbClr val="6D8C97"/>
+                </a:solidFill>
+                <a:latin typeface="Consolas"/>
+              </a:rPr>
+              <a:t> 168  </a:t>
+            </a:r>
+            <a:r>
+              <a:rPr sz="1300">
+                <a:solidFill>
+                  <a:srgbClr val="6D8C97"/>
+                </a:solidFill>
+                <a:latin typeface="Consolas"/>
+              </a:rPr>
+              <a:t>    const reply = await askAI(function (soFar) {</a:t>
+            </a:r>
+          </a:p>
+          <a:p>
+            <a:pPr>
+              <a:spcAft>
+                <a:spcPts val="0"/>
+              </a:spcAft>
+            </a:pPr>
+            <a:r>
+              <a:rPr sz="1300">
+                <a:solidFill>
+                  <a:srgbClr val="6D8C97"/>
+                </a:solidFill>
+                <a:latin typeface="Consolas"/>
+              </a:rPr>
+              <a:t> 169  </a:t>
+            </a:r>
+            <a:r>
+              <a:rPr sz="1300">
+                <a:solidFill>
+                  <a:srgbClr val="6D8C97"/>
+                </a:solidFill>
+                <a:latin typeface="Consolas"/>
+              </a:rPr>
+              <a:t>      bubble.textContent = soFar;</a:t>
+            </a:r>
+          </a:p>
+          <a:p>
+            <a:pPr>
+              <a:spcAft>
+                <a:spcPts val="0"/>
+              </a:spcAft>
+            </a:pPr>
+            <a:r>
+              <a:rPr sz="1300">
+                <a:solidFill>
+                  <a:srgbClr val="6D8C97"/>
+                </a:solidFill>
+                <a:latin typeface="Consolas"/>
+              </a:rPr>
+              <a:t> 170  </a:t>
+            </a:r>
+            <a:r>
+              <a:rPr sz="1300">
+                <a:solidFill>
+                  <a:srgbClr val="6D8C97"/>
+                </a:solidFill>
+                <a:latin typeface="Consolas"/>
+              </a:rPr>
+              <a:t>      chat.scrollTop = chat.scrollHeight;</a:t>
+            </a:r>
+          </a:p>
+          <a:p>
+            <a:pPr>
+              <a:spcAft>
+                <a:spcPts val="0"/>
+              </a:spcAft>
+            </a:pPr>
+            <a:r>
+              <a:rPr sz="1300">
+                <a:solidFill>
+                  <a:srgbClr val="6D8C97"/>
+                </a:solidFill>
+                <a:latin typeface="Consolas"/>
+              </a:rPr>
+              <a:t> 171  </a:t>
+            </a:r>
+            <a:r>
+              <a:rPr sz="1300">
+                <a:solidFill>
+                  <a:srgbClr val="6D8C97"/>
+                </a:solidFill>
+                <a:latin typeface="Consolas"/>
+              </a:rPr>
+              <a:t>    });</a:t>
+            </a:r>
+          </a:p>
+          <a:p>
+            <a:pPr>
+              <a:spcAft>
+                <a:spcPts val="0"/>
+              </a:spcAft>
+            </a:pPr>
+            <a:r>
+              <a:rPr sz="1300">
+                <a:solidFill>
+                  <a:srgbClr val="6D8C97"/>
+                </a:solidFill>
+                <a:latin typeface="Consolas"/>
+              </a:rPr>
+              <a:t> 172  </a:t>
+            </a:r>
+            <a:r>
+              <a:rPr sz="1300">
+                <a:solidFill>
+                  <a:srgbClr val="6D8C97"/>
+                </a:solidFill>
+                <a:latin typeface="Consolas"/>
+              </a:rPr>
+              <a:t>    bubble.classList.remove('writing');</a:t>
+            </a:r>
+          </a:p>
+          <a:p>
+            <a:pPr>
+              <a:spcAft>
+                <a:spcPts val="0"/>
+              </a:spcAft>
+            </a:pPr>
+            <a:r>
+              <a:rPr sz="1300">
+                <a:solidFill>
+                  <a:srgbClr val="6D8C97"/>
+                </a:solidFill>
+                <a:latin typeface="Consolas"/>
+              </a:rPr>
+              <a:t> 173  </a:t>
+            </a:r>
+            <a:r>
+              <a:rPr sz="1300">
+                <a:solidFill>
+                  <a:srgbClr val="6D8C97"/>
+                </a:solidFill>
+                <a:latin typeface="Consolas"/>
+              </a:rPr>
+              <a:t>    history.push({ role: 'assistant', content: reply });   // it said this too</a:t>
+            </a:r>
+          </a:p>
+          <a:p>
+            <a:pPr>
+              <a:spcAft>
+                <a:spcPts val="0"/>
+              </a:spcAft>
+            </a:pPr>
+            <a:r>
+              <a:rPr sz="1300">
+                <a:solidFill>
+                  <a:srgbClr val="6D8C97"/>
+                </a:solidFill>
+                <a:latin typeface="Consolas"/>
+              </a:rPr>
+              <a:t> 174  </a:t>
+            </a:r>
+            <a:r>
+              <a:rPr sz="1300">
+                <a:solidFill>
+                  <a:srgbClr val="6D8C97"/>
+                </a:solidFill>
+                <a:latin typeface="Consolas"/>
+              </a:rPr>
+              <a:t>  } catch (problem) {</a:t>
+            </a:r>
+          </a:p>
+          <a:p>
+            <a:pPr>
+              <a:spcAft>
+                <a:spcPts val="0"/>
+              </a:spcAft>
+            </a:pPr>
+            <a:r>
+              <a:rPr sz="1300">
+                <a:solidFill>
+                  <a:srgbClr val="6D8C97"/>
+                </a:solidFill>
+                <a:latin typeface="Consolas"/>
+              </a:rPr>
+              <a:t> 175  </a:t>
+            </a:r>
+            <a:r>
+              <a:rPr sz="1300">
+                <a:solidFill>
+                  <a:srgbClr val="6D8C97"/>
+                </a:solidFill>
+                <a:latin typeface="Consolas"/>
+              </a:rPr>
+              <a:t>    bubble.remove();</a:t>
+            </a:r>
+          </a:p>
+          <a:p>
+            <a:pPr>
+              <a:spcAft>
+                <a:spcPts val="0"/>
+              </a:spcAft>
+            </a:pPr>
+            <a:r>
+              <a:rPr sz="1300">
+                <a:solidFill>
+                  <a:srgbClr val="6D8C97"/>
+                </a:solidFill>
+                <a:latin typeface="Consolas"/>
+              </a:rPr>
+              <a:t> 176  </a:t>
+            </a:r>
+            <a:r>
+              <a:rPr sz="1300">
+                <a:solidFill>
+                  <a:srgbClr val="6D8C97"/>
+                </a:solidFill>
+                <a:latin typeface="Consolas"/>
+              </a:rPr>
+              <a:t>    // 'Failed to fetch' means the request never arrived anywhere. That is</a:t>
+            </a:r>
+          </a:p>
+          <a:p>
+            <a:pPr>
+              <a:spcAft>
+                <a:spcPts val="0"/>
+              </a:spcAft>
+            </a:pPr>
+            <a:r>
+              <a:rPr sz="1300">
+                <a:solidFill>
+                  <a:srgbClr val="6D8C97"/>
+                </a:solidFill>
+                <a:latin typeface="Consolas"/>
+              </a:rPr>
+              <a:t> 177  </a:t>
+            </a:r>
+            <a:r>
+              <a:rPr sz="1300">
+                <a:solidFill>
+                  <a:srgbClr val="6D8C97"/>
+                </a:solidFill>
+                <a:latin typeface="Consolas"/>
+              </a:rPr>
+              <a:t>    // the commonest real failure and the least helpful wording, so replace it.</a:t>
+            </a:r>
+          </a:p>
+          <a:p>
+            <a:pPr>
+              <a:spcAft>
+                <a:spcPts val="0"/>
+              </a:spcAft>
+            </a:pPr>
+            <a:r>
+              <a:rPr sz="1300">
+                <a:solidFill>
+                  <a:srgbClr val="6D8C97"/>
+                </a:solidFill>
+                <a:latin typeface="Consolas"/>
+              </a:rPr>
+              <a:t> 178  </a:t>
+            </a:r>
+            <a:r>
+              <a:rPr sz="1300">
+                <a:solidFill>
+                  <a:srgbClr val="6D8C97"/>
+                </a:solidFill>
+                <a:latin typeface="Consolas"/>
+              </a:rPr>
+              <a:t>    const said = problem.message === 'Failed to fetch'</a:t>
+            </a:r>
+          </a:p>
+          <a:p>
+            <a:pPr>
+              <a:spcAft>
+                <a:spcPts val="0"/>
+              </a:spcAft>
+            </a:pPr>
+            <a:r>
+              <a:rPr sz="1300">
+                <a:solidFill>
+                  <a:srgbClr val="6D8C97"/>
+                </a:solidFill>
+                <a:latin typeface="Consolas"/>
+              </a:rPr>
+              <a:t> 179  </a:t>
+            </a:r>
+            <a:r>
+              <a:rPr sz="1300">
+                <a:solidFill>
+                  <a:srgbClr val="6D8C97"/>
+                </a:solidFill>
+                <a:latin typeface="Consolas"/>
+              </a:rPr>
+              <a:t>      ? 'Could not reach the AI. Are you on the school network?'</a:t>
+            </a:r>
+          </a:p>
+          <a:p>
+            <a:pPr>
+              <a:spcAft>
+                <a:spcPts val="0"/>
+              </a:spcAft>
+            </a:pPr>
+            <a:r>
+              <a:rPr sz="1300">
+                <a:solidFill>
+                  <a:srgbClr val="6D8C97"/>
+                </a:solidFill>
+                <a:latin typeface="Consolas"/>
+              </a:rPr>
+              <a:t> 180  </a:t>
+            </a:r>
+            <a:r>
+              <a:rPr sz="1300">
+                <a:solidFill>
+                  <a:srgbClr val="6D8C97"/>
+                </a:solidFill>
+                <a:latin typeface="Consolas"/>
+              </a:rPr>
+              <a:t>      : problem.message;</a:t>
+            </a:r>
+          </a:p>
+          <a:p>
+            <a:pPr>
+              <a:spcAft>
+                <a:spcPts val="0"/>
+              </a:spcAft>
+            </a:pPr>
+            <a:r>
+              <a:rPr sz="1300">
+                <a:solidFill>
+                  <a:srgbClr val="6D8C97"/>
+                </a:solidFill>
+                <a:latin typeface="Consolas"/>
+              </a:rPr>
+              <a:t> 181  </a:t>
+            </a:r>
+            <a:r>
+              <a:rPr sz="1300">
+                <a:solidFill>
                   <a:srgbClr val="7FE0A0"/>
                 </a:solidFill>
                 <a:latin typeface="Consolas"/>
               </a:rPr>
-              <a:t> </a:t>
-            </a:r>
-          </a:p>
-          <a:p>
-            <a:pPr>
-              <a:spcAft>
-                <a:spcPts val="0"/>
-              </a:spcAft>
-            </a:pPr>
-            <a:r>
-              <a:rPr sz="1300">
-                <a:solidFill>
-                  <a:srgbClr val="6D8C97"/>
-                </a:solidFill>
-                <a:latin typeface="Consolas"/>
-              </a:rPr>
-              <a:t> 155  </a:t>
-            </a:r>
-            <a:r>
-              <a:rPr sz="1300">
-                <a:solidFill>
-                  <a:srgbClr val="7FE0A0"/>
-                </a:solidFill>
-                <a:latin typeface="Consolas"/>
-              </a:rPr>
-              <a:t>// The browser calls this when the form is submitted.</a:t>
-            </a:r>
-          </a:p>
-          <a:p>
-            <a:pPr>
-              <a:spcAft>
-                <a:spcPts val="0"/>
-              </a:spcAft>
-            </a:pPr>
-            <a:r>
-              <a:rPr sz="1300">
-                <a:solidFill>
-                  <a:srgbClr val="6D8C97"/>
-                </a:solidFill>
-                <a:latin typeface="Consolas"/>
-              </a:rPr>
-              <a:t> 156  </a:t>
-            </a:r>
-            <a:r>
-              <a:rPr sz="1300">
-                <a:solidFill>
-                  <a:srgbClr val="7FE0A0"/>
-                </a:solidFill>
-                <a:latin typeface="Consolas"/>
-              </a:rPr>
-              <a:t>composer.addEventListener('submit', async function (event) {</a:t>
-            </a:r>
-          </a:p>
-          <a:p>
-            <a:pPr>
-              <a:spcAft>
-                <a:spcPts val="0"/>
-              </a:spcAft>
-            </a:pPr>
-            <a:r>
-              <a:rPr sz="1300">
-                <a:solidFill>
-                  <a:srgbClr val="6D8C97"/>
-                </a:solidFill>
-                <a:latin typeface="Consolas"/>
-              </a:rPr>
-              <a:t> 157  </a:t>
-            </a:r>
-            <a:r>
-              <a:rPr sz="1300">
-                <a:solidFill>
-                  <a:srgbClr val="7FE0A0"/>
-                </a:solidFill>
-                <a:latin typeface="Consolas"/>
-              </a:rPr>
-              <a:t>  event.preventDefault();</a:t>
-            </a:r>
-          </a:p>
-          <a:p>
-            <a:pPr>
-              <a:spcAft>
-                <a:spcPts val="0"/>
-              </a:spcAft>
-            </a:pPr>
-            <a:r>
-              <a:rPr sz="1300">
-                <a:solidFill>
-                  <a:srgbClr val="6D8C97"/>
-                </a:solidFill>
-                <a:latin typeface="Consolas"/>
-              </a:rPr>
-              <a:t> 158  </a:t>
-            </a:r>
-            <a:r>
-              <a:rPr sz="1300">
-                <a:solidFill>
-                  <a:srgbClr val="7FE0A0"/>
-                </a:solidFill>
-                <a:latin typeface="Consolas"/>
-              </a:rPr>
-              <a:t>  const text = promptBox.value.trim();</a:t>
-            </a:r>
-          </a:p>
-          <a:p>
-            <a:pPr>
-              <a:spcAft>
-                <a:spcPts val="0"/>
-              </a:spcAft>
-            </a:pPr>
-            <a:r>
-              <a:rPr sz="1300">
-                <a:solidFill>
-                  <a:srgbClr val="6D8C97"/>
-                </a:solidFill>
-                <a:latin typeface="Consolas"/>
-              </a:rPr>
-              <a:t> 159  </a:t>
-            </a:r>
-            <a:r>
-              <a:rPr sz="1300">
-                <a:solidFill>
-                  <a:srgbClr val="7FE0A0"/>
-                </a:solidFill>
-                <a:latin typeface="Consolas"/>
-              </a:rPr>
-              <a:t>  if (text === '') { return; }</a:t>
-            </a:r>
-          </a:p>
-          <a:p>
-            <a:pPr>
-              <a:spcAft>
-                <a:spcPts val="0"/>
-              </a:spcAft>
-            </a:pPr>
-            <a:r>
-              <a:rPr sz="1300">
-                <a:solidFill>
-                  <a:srgbClr val="6D8C97"/>
-                </a:solidFill>
-                <a:latin typeface="Consolas"/>
-              </a:rPr>
-              <a:t> 160  </a:t>
-            </a:r>
-            <a:r>
-              <a:rPr sz="1300">
-                <a:solidFill>
-                  <a:srgbClr val="7FE0A0"/>
-                </a:solidFill>
-                <a:latin typeface="Consolas"/>
-              </a:rPr>
-              <a:t>  promptBox.value = '';</a:t>
-            </a:r>
-          </a:p>
-          <a:p>
-            <a:pPr>
-              <a:spcAft>
-                <a:spcPts val="0"/>
-              </a:spcAft>
-            </a:pPr>
-            <a:r>
-              <a:rPr sz="1300">
-                <a:solidFill>
-                  <a:srgbClr val="6D8C97"/>
-                </a:solidFill>
-                <a:latin typeface="Consolas"/>
-              </a:rPr>
-              <a:t> 161  </a:t>
-            </a:r>
-            <a:r>
-              <a:rPr sz="1300">
-                <a:solidFill>
-                  <a:srgbClr val="7FE0A0"/>
-                </a:solidFill>
-                <a:latin typeface="Consolas"/>
-              </a:rPr>
-              <a:t>  addLine('you', text);</a:t>
-            </a:r>
-          </a:p>
-          <a:p>
-            <a:pPr>
-              <a:spcAft>
-                <a:spcPts val="0"/>
-              </a:spcAft>
-            </a:pPr>
-            <a:r>
-              <a:rPr sz="1300">
-                <a:solidFill>
-                  <a:srgbClr val="6D8C97"/>
-                </a:solidFill>
-                <a:latin typeface="Consolas"/>
-              </a:rPr>
-              <a:t> 162  </a:t>
-            </a:r>
-            <a:r>
-              <a:rPr sz="1300">
-                <a:solidFill>
-                  <a:srgbClr val="7FE0A0"/>
-                </a:solidFill>
-                <a:latin typeface="Consolas"/>
-              </a:rPr>
-              <a:t>  history.push({ role: 'user', content: text });</a:t>
-            </a:r>
-          </a:p>
-          <a:p>
-            <a:pPr>
-              <a:spcAft>
-                <a:spcPts val="0"/>
-              </a:spcAft>
-            </a:pPr>
-            <a:r>
-              <a:rPr sz="1300">
-                <a:solidFill>
-                  <a:srgbClr val="6D8C97"/>
-                </a:solidFill>
-                <a:latin typeface="Consolas"/>
-              </a:rPr>
-              <a:t> 163  </a:t>
-            </a:r>
-            <a:r>
-              <a:rPr sz="1300">
-                <a:solidFill>
-                  <a:srgbClr val="7FE0A0"/>
-                </a:solidFill>
-                <a:latin typeface="Consolas"/>
-              </a:rPr>
-              <a:t> </a:t>
-            </a:r>
-          </a:p>
-          <a:p>
-            <a:pPr>
-              <a:spcAft>
-                <a:spcPts val="0"/>
-              </a:spcAft>
-            </a:pPr>
-            <a:r>
-              <a:rPr sz="1300">
-                <a:solidFill>
-                  <a:srgbClr val="6D8C97"/>
-                </a:solidFill>
-                <a:latin typeface="Consolas"/>
-              </a:rPr>
-              <a:t> 164  </a:t>
-            </a:r>
-            <a:r>
-              <a:rPr sz="1300">
-                <a:solidFill>
-                  <a:srgbClr val="7FE0A0"/>
-                </a:solidFill>
-                <a:latin typeface="Consolas"/>
-              </a:rPr>
-              <a:t>  const bubble = addLine('bot', '');</a:t>
-            </a:r>
-          </a:p>
-          <a:p>
-            <a:pPr>
-              <a:spcAft>
-                <a:spcPts val="0"/>
-              </a:spcAft>
-            </a:pPr>
-            <a:r>
-              <a:rPr sz="1300">
-                <a:solidFill>
-                  <a:srgbClr val="6D8C97"/>
-                </a:solidFill>
-                <a:latin typeface="Consolas"/>
-              </a:rPr>
-              <a:t> 165  </a:t>
-            </a:r>
-            <a:r>
-              <a:rPr sz="1300">
-                <a:solidFill>
-                  <a:srgbClr val="7FE0A0"/>
-                </a:solidFill>
-                <a:latin typeface="Consolas"/>
-              </a:rPr>
-              <a:t>  bubble.classList.add('writing');   // week 11: blinking cursor while it types</a:t>
-            </a:r>
-          </a:p>
-          <a:p>
-            <a:pPr>
-              <a:spcAft>
-                <a:spcPts val="0"/>
-              </a:spcAft>
-            </a:pPr>
-            <a:r>
-              <a:rPr sz="1300">
-                <a:solidFill>
-                  <a:srgbClr val="6D8C97"/>
-                </a:solidFill>
-                <a:latin typeface="Consolas"/>
-              </a:rPr>
-              <a:t> 166  </a:t>
-            </a:r>
-            <a:r>
-              <a:rPr sz="1300">
-                <a:solidFill>
-                  <a:srgbClr val="7FE0A0"/>
-                </a:solidFill>
-                <a:latin typeface="Consolas"/>
-              </a:rPr>
-              <a:t>  try {</a:t>
-            </a:r>
-          </a:p>
-          <a:p>
-            <a:pPr>
-              <a:spcAft>
-                <a:spcPts val="0"/>
-              </a:spcAft>
-            </a:pPr>
-            <a:r>
-              <a:rPr sz="1300">
-                <a:solidFill>
-                  <a:srgbClr val="6D8C97"/>
-                </a:solidFill>
-                <a:latin typeface="Consolas"/>
-              </a:rPr>
-              <a:t> 167  </a:t>
-            </a:r>
-            <a:r>
-              <a:rPr sz="1300">
-                <a:solidFill>
-                  <a:srgbClr val="7FE0A0"/>
-                </a:solidFill>
-                <a:latin typeface="Consolas"/>
-              </a:rPr>
-              <a:t>    // The function we hand over runs on EVERY piece that arrives.</a:t>
-            </a:r>
-          </a:p>
-          <a:p>
-            <a:pPr>
-              <a:spcAft>
-                <a:spcPts val="0"/>
-              </a:spcAft>
-            </a:pPr>
-            <a:r>
-              <a:rPr sz="1300">
-                <a:solidFill>
-                  <a:srgbClr val="6D8C97"/>
-                </a:solidFill>
-                <a:latin typeface="Consolas"/>
-              </a:rPr>
-              <a:t> 168  </a:t>
-            </a:r>
-            <a:r>
-              <a:rPr sz="1300">
-                <a:solidFill>
-                  <a:srgbClr val="7FE0A0"/>
-                </a:solidFill>
-                <a:latin typeface="Consolas"/>
-              </a:rPr>
-              <a:t>    const reply = await askAI(function (soFar) {</a:t>
-            </a:r>
-          </a:p>
-          <a:p>
-            <a:pPr>
-              <a:spcAft>
-                <a:spcPts val="0"/>
-              </a:spcAft>
-            </a:pPr>
-            <a:r>
-              <a:rPr sz="1300">
-                <a:solidFill>
-                  <a:srgbClr val="6D8C97"/>
-                </a:solidFill>
-                <a:latin typeface="Consolas"/>
-              </a:rPr>
-              <a:t> 169  </a:t>
-            </a:r>
-            <a:r>
-              <a:rPr sz="1300">
-                <a:solidFill>
-                  <a:srgbClr val="7FE0A0"/>
-                </a:solidFill>
-                <a:latin typeface="Consolas"/>
-              </a:rPr>
-              <a:t>      bubble.textContent = soFar;</a:t>
-            </a:r>
-          </a:p>
-          <a:p>
-            <a:pPr>
-              <a:spcAft>
-                <a:spcPts val="0"/>
-              </a:spcAft>
-            </a:pPr>
-            <a:r>
-              <a:rPr sz="1300">
-                <a:solidFill>
-                  <a:srgbClr val="6D8C97"/>
-                </a:solidFill>
-                <a:latin typeface="Consolas"/>
-              </a:rPr>
-              <a:t> 170  </a:t>
-            </a:r>
-            <a:r>
-              <a:rPr sz="1300">
-                <a:solidFill>
-                  <a:srgbClr val="7FE0A0"/>
-                </a:solidFill>
-                <a:latin typeface="Consolas"/>
-              </a:rPr>
-              <a:t>      chat.scrollTop = chat.scrollHeight;</a:t>
-            </a:r>
-          </a:p>
-          <a:p>
-            <a:pPr>
-              <a:spcAft>
-                <a:spcPts val="0"/>
-              </a:spcAft>
-            </a:pPr>
-            <a:r>
-              <a:rPr sz="1300">
-                <a:solidFill>
-                  <a:srgbClr val="6D8C97"/>
-                </a:solidFill>
-                <a:latin typeface="Consolas"/>
-              </a:rPr>
-              <a:t> 171  </a:t>
-            </a:r>
-            <a:r>
-              <a:rPr sz="1300">
-                <a:solidFill>
-                  <a:srgbClr val="7FE0A0"/>
-                </a:solidFill>
-                <a:latin typeface="Consolas"/>
-              </a:rPr>
-              <a:t>    });</a:t>
-            </a:r>
-          </a:p>
-          <a:p>
-            <a:pPr>
-              <a:spcAft>
-                <a:spcPts val="0"/>
-              </a:spcAft>
-            </a:pPr>
-            <a:r>
-              <a:rPr sz="1300">
-                <a:solidFill>
-                  <a:srgbClr val="6D8C97"/>
-                </a:solidFill>
-                <a:latin typeface="Consolas"/>
-              </a:rPr>
-              <a:t> 172  </a:t>
-            </a:r>
-            <a:r>
-              <a:rPr sz="1300">
-                <a:solidFill>
-                  <a:srgbClr val="7FE0A0"/>
-                </a:solidFill>
-                <a:latin typeface="Consolas"/>
-              </a:rPr>
-              <a:t>    bubble.classList.remove('writing');</a:t>
-            </a:r>
-          </a:p>
-          <a:p>
-            <a:pPr>
-              <a:spcAft>
-                <a:spcPts val="0"/>
-              </a:spcAft>
-            </a:pPr>
-            <a:r>
-              <a:rPr sz="1300">
-                <a:solidFill>
-                  <a:srgbClr val="6D8C97"/>
-                </a:solidFill>
-                <a:latin typeface="Consolas"/>
-              </a:rPr>
-              <a:t> 173  </a:t>
-            </a:r>
-            <a:r>
-              <a:rPr sz="1300">
-                <a:solidFill>
-                  <a:srgbClr val="7FE0A0"/>
-                </a:solidFill>
-                <a:latin typeface="Consolas"/>
-              </a:rPr>
-              <a:t>    history.push({ role: 'assistant', content: reply });   // it said this too</a:t>
-            </a:r>
-          </a:p>
-          <a:p>
-            <a:pPr>
-              <a:spcAft>
-                <a:spcPts val="0"/>
-              </a:spcAft>
-            </a:pPr>
-            <a:r>
-              <a:rPr sz="1300">
-                <a:solidFill>
-                  <a:srgbClr val="6D8C97"/>
-                </a:solidFill>
-                <a:latin typeface="Consolas"/>
-              </a:rPr>
-              <a:t> 174  </a:t>
-            </a:r>
-            <a:r>
-              <a:rPr sz="1300">
-                <a:solidFill>
-                  <a:srgbClr val="7FE0A0"/>
-                </a:solidFill>
-                <a:latin typeface="Consolas"/>
-              </a:rPr>
-              <a:t>  } catch (problem) {</a:t>
-            </a:r>
-          </a:p>
-          <a:p>
-            <a:pPr>
-              <a:spcAft>
-                <a:spcPts val="0"/>
-              </a:spcAft>
-            </a:pPr>
-            <a:r>
-              <a:rPr sz="1300">
-                <a:solidFill>
-                  <a:srgbClr val="6D8C97"/>
-                </a:solidFill>
-                <a:latin typeface="Consolas"/>
-              </a:rPr>
-              <a:t> 175  </a:t>
-            </a:r>
-            <a:r>
-              <a:rPr sz="1300">
-                <a:solidFill>
-                  <a:srgbClr val="7FE0A0"/>
-                </a:solidFill>
-                <a:latin typeface="Consolas"/>
-              </a:rPr>
-              <a:t>    bubble.remove();</a:t>
-            </a:r>
-          </a:p>
-          <a:p>
-            <a:pPr>
-              <a:spcAft>
-                <a:spcPts val="0"/>
-              </a:spcAft>
-            </a:pPr>
-            <a:r>
-              <a:rPr sz="1300">
-                <a:solidFill>
-                  <a:srgbClr val="6D8C97"/>
-                </a:solidFill>
-                <a:latin typeface="Consolas"/>
-              </a:rPr>
-              <a:t> 176  </a:t>
-            </a:r>
-            <a:r>
-              <a:rPr sz="1300">
-                <a:solidFill>
-                  <a:srgbClr val="7FE0A0"/>
-                </a:solidFill>
-                <a:latin typeface="Consolas"/>
-              </a:rPr>
-              <a:t>    // 'Failed to fetch' means the request never arrived anywhere. That is</a:t>
-            </a:r>
-          </a:p>
-          <a:p>
-            <a:pPr>
-              <a:spcAft>
-                <a:spcPts val="0"/>
-              </a:spcAft>
-            </a:pPr>
-            <a:r>
-              <a:rPr sz="1300">
-                <a:solidFill>
-                  <a:srgbClr val="6D8C97"/>
-                </a:solidFill>
-                <a:latin typeface="Consolas"/>
-              </a:rPr>
-              <a:t> 177  </a:t>
-            </a:r>
-            <a:r>
-              <a:rPr sz="1300">
-                <a:solidFill>
-                  <a:srgbClr val="7FE0A0"/>
-                </a:solidFill>
-                <a:latin typeface="Consolas"/>
-              </a:rPr>
-              <a:t>    // the commonest real failure and the least helpful wording, so replace it.</a:t>
-            </a:r>
-          </a:p>
-          <a:p>
-            <a:pPr>
-              <a:spcAft>
-                <a:spcPts val="0"/>
-              </a:spcAft>
-            </a:pPr>
-            <a:r>
-              <a:rPr sz="1300">
-                <a:solidFill>
-                  <a:srgbClr val="6D8C97"/>
-                </a:solidFill>
-                <a:latin typeface="Consolas"/>
-              </a:rPr>
-              <a:t> 178  </a:t>
-            </a:r>
-            <a:r>
-              <a:rPr sz="1300">
-                <a:solidFill>
-                  <a:srgbClr val="7FE0A0"/>
-                </a:solidFill>
-                <a:latin typeface="Consolas"/>
-              </a:rPr>
-              <a:t>    const said = problem.message === 'Failed to fetch'</a:t>
-            </a:r>
-          </a:p>
-          <a:p>
-            <a:pPr>
-              <a:spcAft>
-                <a:spcPts val="0"/>
-              </a:spcAft>
-            </a:pPr>
-            <a:r>
-              <a:rPr sz="1300">
-                <a:solidFill>
-                  <a:srgbClr val="6D8C97"/>
-                </a:solidFill>
-                <a:latin typeface="Consolas"/>
-              </a:rPr>
-              <a:t> 179  </a:t>
-            </a:r>
-            <a:r>
-              <a:rPr sz="1300">
-                <a:solidFill>
-                  <a:srgbClr val="7FE0A0"/>
-                </a:solidFill>
-                <a:latin typeface="Consolas"/>
-              </a:rPr>
-              <a:t>      ? 'Could not reach the AI. Are you on the school network?'</a:t>
-            </a:r>
-          </a:p>
-          <a:p>
-            <a:pPr>
-              <a:spcAft>
-                <a:spcPts val="0"/>
-              </a:spcAft>
-            </a:pPr>
-            <a:r>
-              <a:rPr sz="1300">
-                <a:solidFill>
-                  <a:srgbClr val="6D8C97"/>
-                </a:solidFill>
-                <a:latin typeface="Consolas"/>
-              </a:rPr>
-              <a:t> 180  </a:t>
-            </a:r>
-            <a:r>
-              <a:rPr sz="1300">
-                <a:solidFill>
-                  <a:srgbClr val="7FE0A0"/>
-                </a:solidFill>
-                <a:latin typeface="Consolas"/>
-              </a:rPr>
-              <a:t>      : problem.message;</a:t>
-            </a:r>
-          </a:p>
-          <a:p>
-            <a:pPr>
-              <a:spcAft>
-                <a:spcPts val="0"/>
-              </a:spcAft>
-            </a:pPr>
-            <a:r>
-              <a:rPr sz="1300">
-                <a:solidFill>
-                  <a:srgbClr val="6D8C97"/>
-                </a:solidFill>
-                <a:latin typeface="Consolas"/>
-              </a:rPr>
-              <a:t> 181  </a:t>
-            </a:r>
-            <a:r>
-              <a:rPr sz="1300">
-                <a:solidFill>
-                  <a:srgbClr val="7FE0A0"/>
-                </a:solidFill>
-                <a:latin typeface="Consolas"/>
-              </a:rPr>
               <a:t>    addLine('problem', said);</a:t>
-            </a:r>
-          </a:p>
-          <a:p>
-            <a:pPr>
-              <a:spcAft>
-                <a:spcPts val="0"/>
-              </a:spcAft>
-            </a:pPr>
-            <a:r>
-              <a:rPr sz="1300">
-                <a:solidFill>
-                  <a:srgbClr val="6D8C97"/>
-                </a:solidFill>
-                <a:latin typeface="Consolas"/>
-              </a:rPr>
-              <a:t> 182  </a:t>
-            </a:r>
-            <a:r>
-              <a:rPr sz="1300">
-                <a:solidFill>
-                  <a:srgbClr val="7FE0A0"/>
-                </a:solidFill>
-                <a:latin typeface="Consolas"/>
-              </a:rPr>
-              <a:t>  }</a:t>
-            </a:r>
-          </a:p>
-          <a:p>
-            <a:pPr>
-              <a:spcAft>
-                <a:spcPts val="0"/>
-              </a:spcAft>
-            </a:pPr>
-            <a:r>
-              <a:rPr sz="1300">
-                <a:solidFill>
-                  <a:srgbClr val="6D8C97"/>
-                </a:solidFill>
-                <a:latin typeface="Consolas"/>
-              </a:rPr>
-              <a:t> 183  </a:t>
-            </a:r>
-            <a:r>
-              <a:rPr sz="1300">
-                <a:solidFill>
-                  <a:srgbClr val="7FE0A0"/>
-                </a:solidFill>
-                <a:latin typeface="Consolas"/>
-              </a:rPr>
-              <a:t>});</a:t>
             </a:r>
           </a:p>
         </p:txBody>
@@ -24073,7 +23821,7 @@
                   <a:srgbClr val="DCECEF"/>
                 </a:solidFill>
               </a:rPr>
-              <a:t>That is the whole piece. Check yours looks the same before moving on.</a:t>
+              <a:t>Show it as a problem bubble.</a:t>
             </a:r>
           </a:p>
         </p:txBody>
@@ -24132,7 +23880,7 @@
                   <a:srgbClr val="01AEFD"/>
                 </a:solidFill>
               </a:rPr>
-              <a:t>Type this into style.css   -   line 84</a:t>
+              <a:t>All together in script.js</a:t>
             </a:r>
           </a:p>
         </p:txBody>
@@ -24165,22 +23913,747 @@
               </a:spcAft>
             </a:pPr>
             <a:r>
-              <a:rPr sz="1800">
-                <a:solidFill>
-                  <a:srgbClr val="6D8C97"/>
-                </a:solidFill>
-                <a:latin typeface="Consolas"/>
-              </a:rPr>
-              <a:t>  84  </a:t>
-            </a:r>
-            <a:r>
-              <a:rPr sz="1800">
+              <a:rPr sz="1300">
+                <a:solidFill>
+                  <a:srgbClr val="6D8C97"/>
+                </a:solidFill>
+                <a:latin typeface="Consolas"/>
+              </a:rPr>
+              <a:t> 154  </a:t>
+            </a:r>
+            <a:r>
+              <a:rPr sz="1300">
                 <a:solidFill>
                   <a:srgbClr val="7FE0A0"/>
                 </a:solidFill>
                 <a:latin typeface="Consolas"/>
               </a:rPr>
-              <a:t>.bubble.writing::after {</a:t>
+              <a:t> </a:t>
+            </a:r>
+          </a:p>
+          <a:p>
+            <a:pPr>
+              <a:spcAft>
+                <a:spcPts val="0"/>
+              </a:spcAft>
+            </a:pPr>
+            <a:r>
+              <a:rPr sz="1300">
+                <a:solidFill>
+                  <a:srgbClr val="6D8C97"/>
+                </a:solidFill>
+                <a:latin typeface="Consolas"/>
+              </a:rPr>
+              <a:t> 155  </a:t>
+            </a:r>
+            <a:r>
+              <a:rPr sz="1300">
+                <a:solidFill>
+                  <a:srgbClr val="7FE0A0"/>
+                </a:solidFill>
+                <a:latin typeface="Consolas"/>
+              </a:rPr>
+              <a:t>// The browser calls this when the form is submitted.</a:t>
+            </a:r>
+          </a:p>
+          <a:p>
+            <a:pPr>
+              <a:spcAft>
+                <a:spcPts val="0"/>
+              </a:spcAft>
+            </a:pPr>
+            <a:r>
+              <a:rPr sz="1300">
+                <a:solidFill>
+                  <a:srgbClr val="6D8C97"/>
+                </a:solidFill>
+                <a:latin typeface="Consolas"/>
+              </a:rPr>
+              <a:t> 156  </a:t>
+            </a:r>
+            <a:r>
+              <a:rPr sz="1300">
+                <a:solidFill>
+                  <a:srgbClr val="7FE0A0"/>
+                </a:solidFill>
+                <a:latin typeface="Consolas"/>
+              </a:rPr>
+              <a:t>composer.addEventListener('submit', async function (event) {</a:t>
+            </a:r>
+          </a:p>
+          <a:p>
+            <a:pPr>
+              <a:spcAft>
+                <a:spcPts val="0"/>
+              </a:spcAft>
+            </a:pPr>
+            <a:r>
+              <a:rPr sz="1300">
+                <a:solidFill>
+                  <a:srgbClr val="6D8C97"/>
+                </a:solidFill>
+                <a:latin typeface="Consolas"/>
+              </a:rPr>
+              <a:t> 157  </a:t>
+            </a:r>
+            <a:r>
+              <a:rPr sz="1300">
+                <a:solidFill>
+                  <a:srgbClr val="7FE0A0"/>
+                </a:solidFill>
+                <a:latin typeface="Consolas"/>
+              </a:rPr>
+              <a:t>  event.preventDefault();</a:t>
+            </a:r>
+          </a:p>
+          <a:p>
+            <a:pPr>
+              <a:spcAft>
+                <a:spcPts val="0"/>
+              </a:spcAft>
+            </a:pPr>
+            <a:r>
+              <a:rPr sz="1300">
+                <a:solidFill>
+                  <a:srgbClr val="6D8C97"/>
+                </a:solidFill>
+                <a:latin typeface="Consolas"/>
+              </a:rPr>
+              <a:t> 158  </a:t>
+            </a:r>
+            <a:r>
+              <a:rPr sz="1300">
+                <a:solidFill>
+                  <a:srgbClr val="7FE0A0"/>
+                </a:solidFill>
+                <a:latin typeface="Consolas"/>
+              </a:rPr>
+              <a:t>  const text = promptBox.value.trim();</a:t>
+            </a:r>
+          </a:p>
+          <a:p>
+            <a:pPr>
+              <a:spcAft>
+                <a:spcPts val="0"/>
+              </a:spcAft>
+            </a:pPr>
+            <a:r>
+              <a:rPr sz="1300">
+                <a:solidFill>
+                  <a:srgbClr val="6D8C97"/>
+                </a:solidFill>
+                <a:latin typeface="Consolas"/>
+              </a:rPr>
+              <a:t> 159  </a:t>
+            </a:r>
+            <a:r>
+              <a:rPr sz="1300">
+                <a:solidFill>
+                  <a:srgbClr val="7FE0A0"/>
+                </a:solidFill>
+                <a:latin typeface="Consolas"/>
+              </a:rPr>
+              <a:t>  if (text === '') { return; }</a:t>
+            </a:r>
+          </a:p>
+          <a:p>
+            <a:pPr>
+              <a:spcAft>
+                <a:spcPts val="0"/>
+              </a:spcAft>
+            </a:pPr>
+            <a:r>
+              <a:rPr sz="1300">
+                <a:solidFill>
+                  <a:srgbClr val="6D8C97"/>
+                </a:solidFill>
+                <a:latin typeface="Consolas"/>
+              </a:rPr>
+              <a:t> 160  </a:t>
+            </a:r>
+            <a:r>
+              <a:rPr sz="1300">
+                <a:solidFill>
+                  <a:srgbClr val="7FE0A0"/>
+                </a:solidFill>
+                <a:latin typeface="Consolas"/>
+              </a:rPr>
+              <a:t>  promptBox.value = '';</a:t>
+            </a:r>
+          </a:p>
+          <a:p>
+            <a:pPr>
+              <a:spcAft>
+                <a:spcPts val="0"/>
+              </a:spcAft>
+            </a:pPr>
+            <a:r>
+              <a:rPr sz="1300">
+                <a:solidFill>
+                  <a:srgbClr val="6D8C97"/>
+                </a:solidFill>
+                <a:latin typeface="Consolas"/>
+              </a:rPr>
+              <a:t> 161  </a:t>
+            </a:r>
+            <a:r>
+              <a:rPr sz="1300">
+                <a:solidFill>
+                  <a:srgbClr val="7FE0A0"/>
+                </a:solidFill>
+                <a:latin typeface="Consolas"/>
+              </a:rPr>
+              <a:t>  addLine('you', text);</a:t>
+            </a:r>
+          </a:p>
+          <a:p>
+            <a:pPr>
+              <a:spcAft>
+                <a:spcPts val="0"/>
+              </a:spcAft>
+            </a:pPr>
+            <a:r>
+              <a:rPr sz="1300">
+                <a:solidFill>
+                  <a:srgbClr val="6D8C97"/>
+                </a:solidFill>
+                <a:latin typeface="Consolas"/>
+              </a:rPr>
+              <a:t> 162  </a:t>
+            </a:r>
+            <a:r>
+              <a:rPr sz="1300">
+                <a:solidFill>
+                  <a:srgbClr val="7FE0A0"/>
+                </a:solidFill>
+                <a:latin typeface="Consolas"/>
+              </a:rPr>
+              <a:t>  history.push({ role: 'user', content: text });</a:t>
+            </a:r>
+          </a:p>
+          <a:p>
+            <a:pPr>
+              <a:spcAft>
+                <a:spcPts val="0"/>
+              </a:spcAft>
+            </a:pPr>
+            <a:r>
+              <a:rPr sz="1300">
+                <a:solidFill>
+                  <a:srgbClr val="6D8C97"/>
+                </a:solidFill>
+                <a:latin typeface="Consolas"/>
+              </a:rPr>
+              <a:t> 163  </a:t>
+            </a:r>
+            <a:r>
+              <a:rPr sz="1300">
+                <a:solidFill>
+                  <a:srgbClr val="7FE0A0"/>
+                </a:solidFill>
+                <a:latin typeface="Consolas"/>
+              </a:rPr>
+              <a:t> </a:t>
+            </a:r>
+          </a:p>
+          <a:p>
+            <a:pPr>
+              <a:spcAft>
+                <a:spcPts val="0"/>
+              </a:spcAft>
+            </a:pPr>
+            <a:r>
+              <a:rPr sz="1300">
+                <a:solidFill>
+                  <a:srgbClr val="6D8C97"/>
+                </a:solidFill>
+                <a:latin typeface="Consolas"/>
+              </a:rPr>
+              <a:t> 164  </a:t>
+            </a:r>
+            <a:r>
+              <a:rPr sz="1300">
+                <a:solidFill>
+                  <a:srgbClr val="7FE0A0"/>
+                </a:solidFill>
+                <a:latin typeface="Consolas"/>
+              </a:rPr>
+              <a:t>  const bubble = addLine('bot', '');</a:t>
+            </a:r>
+          </a:p>
+          <a:p>
+            <a:pPr>
+              <a:spcAft>
+                <a:spcPts val="0"/>
+              </a:spcAft>
+            </a:pPr>
+            <a:r>
+              <a:rPr sz="1300">
+                <a:solidFill>
+                  <a:srgbClr val="6D8C97"/>
+                </a:solidFill>
+                <a:latin typeface="Consolas"/>
+              </a:rPr>
+              <a:t> 165  </a:t>
+            </a:r>
+            <a:r>
+              <a:rPr sz="1300">
+                <a:solidFill>
+                  <a:srgbClr val="7FE0A0"/>
+                </a:solidFill>
+                <a:latin typeface="Consolas"/>
+              </a:rPr>
+              <a:t>  bubble.classList.add('writing');   // week 11: blinking cursor while it types</a:t>
+            </a:r>
+          </a:p>
+          <a:p>
+            <a:pPr>
+              <a:spcAft>
+                <a:spcPts val="0"/>
+              </a:spcAft>
+            </a:pPr>
+            <a:r>
+              <a:rPr sz="1300">
+                <a:solidFill>
+                  <a:srgbClr val="6D8C97"/>
+                </a:solidFill>
+                <a:latin typeface="Consolas"/>
+              </a:rPr>
+              <a:t> 166  </a:t>
+            </a:r>
+            <a:r>
+              <a:rPr sz="1300">
+                <a:solidFill>
+                  <a:srgbClr val="7FE0A0"/>
+                </a:solidFill>
+                <a:latin typeface="Consolas"/>
+              </a:rPr>
+              <a:t>  try {</a:t>
+            </a:r>
+          </a:p>
+          <a:p>
+            <a:pPr>
+              <a:spcAft>
+                <a:spcPts val="0"/>
+              </a:spcAft>
+            </a:pPr>
+            <a:r>
+              <a:rPr sz="1300">
+                <a:solidFill>
+                  <a:srgbClr val="6D8C97"/>
+                </a:solidFill>
+                <a:latin typeface="Consolas"/>
+              </a:rPr>
+              <a:t> 167  </a:t>
+            </a:r>
+            <a:r>
+              <a:rPr sz="1300">
+                <a:solidFill>
+                  <a:srgbClr val="7FE0A0"/>
+                </a:solidFill>
+                <a:latin typeface="Consolas"/>
+              </a:rPr>
+              <a:t>    // The function we hand over runs on EVERY piece that arrives.</a:t>
+            </a:r>
+          </a:p>
+          <a:p>
+            <a:pPr>
+              <a:spcAft>
+                <a:spcPts val="0"/>
+              </a:spcAft>
+            </a:pPr>
+            <a:r>
+              <a:rPr sz="1300">
+                <a:solidFill>
+                  <a:srgbClr val="6D8C97"/>
+                </a:solidFill>
+                <a:latin typeface="Consolas"/>
+              </a:rPr>
+              <a:t> 168  </a:t>
+            </a:r>
+            <a:r>
+              <a:rPr sz="1300">
+                <a:solidFill>
+                  <a:srgbClr val="7FE0A0"/>
+                </a:solidFill>
+                <a:latin typeface="Consolas"/>
+              </a:rPr>
+              <a:t>    const reply = await askAI(function (soFar) {</a:t>
+            </a:r>
+          </a:p>
+          <a:p>
+            <a:pPr>
+              <a:spcAft>
+                <a:spcPts val="0"/>
+              </a:spcAft>
+            </a:pPr>
+            <a:r>
+              <a:rPr sz="1300">
+                <a:solidFill>
+                  <a:srgbClr val="6D8C97"/>
+                </a:solidFill>
+                <a:latin typeface="Consolas"/>
+              </a:rPr>
+              <a:t> 169  </a:t>
+            </a:r>
+            <a:r>
+              <a:rPr sz="1300">
+                <a:solidFill>
+                  <a:srgbClr val="7FE0A0"/>
+                </a:solidFill>
+                <a:latin typeface="Consolas"/>
+              </a:rPr>
+              <a:t>      bubble.textContent = soFar;</a:t>
+            </a:r>
+          </a:p>
+          <a:p>
+            <a:pPr>
+              <a:spcAft>
+                <a:spcPts val="0"/>
+              </a:spcAft>
+            </a:pPr>
+            <a:r>
+              <a:rPr sz="1300">
+                <a:solidFill>
+                  <a:srgbClr val="6D8C97"/>
+                </a:solidFill>
+                <a:latin typeface="Consolas"/>
+              </a:rPr>
+              <a:t> 170  </a:t>
+            </a:r>
+            <a:r>
+              <a:rPr sz="1300">
+                <a:solidFill>
+                  <a:srgbClr val="7FE0A0"/>
+                </a:solidFill>
+                <a:latin typeface="Consolas"/>
+              </a:rPr>
+              <a:t>      chat.scrollTop = chat.scrollHeight;</a:t>
+            </a:r>
+          </a:p>
+          <a:p>
+            <a:pPr>
+              <a:spcAft>
+                <a:spcPts val="0"/>
+              </a:spcAft>
+            </a:pPr>
+            <a:r>
+              <a:rPr sz="1300">
+                <a:solidFill>
+                  <a:srgbClr val="6D8C97"/>
+                </a:solidFill>
+                <a:latin typeface="Consolas"/>
+              </a:rPr>
+              <a:t> 171  </a:t>
+            </a:r>
+            <a:r>
+              <a:rPr sz="1300">
+                <a:solidFill>
+                  <a:srgbClr val="7FE0A0"/>
+                </a:solidFill>
+                <a:latin typeface="Consolas"/>
+              </a:rPr>
+              <a:t>    });</a:t>
+            </a:r>
+          </a:p>
+          <a:p>
+            <a:pPr>
+              <a:spcAft>
+                <a:spcPts val="0"/>
+              </a:spcAft>
+            </a:pPr>
+            <a:r>
+              <a:rPr sz="1300">
+                <a:solidFill>
+                  <a:srgbClr val="6D8C97"/>
+                </a:solidFill>
+                <a:latin typeface="Consolas"/>
+              </a:rPr>
+              <a:t> 172  </a:t>
+            </a:r>
+            <a:r>
+              <a:rPr sz="1300">
+                <a:solidFill>
+                  <a:srgbClr val="7FE0A0"/>
+                </a:solidFill>
+                <a:latin typeface="Consolas"/>
+              </a:rPr>
+              <a:t>    bubble.classList.remove('writing');</a:t>
+            </a:r>
+          </a:p>
+          <a:p>
+            <a:pPr>
+              <a:spcAft>
+                <a:spcPts val="0"/>
+              </a:spcAft>
+            </a:pPr>
+            <a:r>
+              <a:rPr sz="1300">
+                <a:solidFill>
+                  <a:srgbClr val="6D8C97"/>
+                </a:solidFill>
+                <a:latin typeface="Consolas"/>
+              </a:rPr>
+              <a:t> 173  </a:t>
+            </a:r>
+            <a:r>
+              <a:rPr sz="1300">
+                <a:solidFill>
+                  <a:srgbClr val="7FE0A0"/>
+                </a:solidFill>
+                <a:latin typeface="Consolas"/>
+              </a:rPr>
+              <a:t>    history.push({ role: 'assistant', content: reply });   // it said this too</a:t>
+            </a:r>
+          </a:p>
+          <a:p>
+            <a:pPr>
+              <a:spcAft>
+                <a:spcPts val="0"/>
+              </a:spcAft>
+            </a:pPr>
+            <a:r>
+              <a:rPr sz="1300">
+                <a:solidFill>
+                  <a:srgbClr val="6D8C97"/>
+                </a:solidFill>
+                <a:latin typeface="Consolas"/>
+              </a:rPr>
+              <a:t> 174  </a:t>
+            </a:r>
+            <a:r>
+              <a:rPr sz="1300">
+                <a:solidFill>
+                  <a:srgbClr val="7FE0A0"/>
+                </a:solidFill>
+                <a:latin typeface="Consolas"/>
+              </a:rPr>
+              <a:t>  } catch (problem) {</a:t>
+            </a:r>
+          </a:p>
+          <a:p>
+            <a:pPr>
+              <a:spcAft>
+                <a:spcPts val="0"/>
+              </a:spcAft>
+            </a:pPr>
+            <a:r>
+              <a:rPr sz="1300">
+                <a:solidFill>
+                  <a:srgbClr val="6D8C97"/>
+                </a:solidFill>
+                <a:latin typeface="Consolas"/>
+              </a:rPr>
+              <a:t> 175  </a:t>
+            </a:r>
+            <a:r>
+              <a:rPr sz="1300">
+                <a:solidFill>
+                  <a:srgbClr val="7FE0A0"/>
+                </a:solidFill>
+                <a:latin typeface="Consolas"/>
+              </a:rPr>
+              <a:t>    bubble.remove();</a:t>
+            </a:r>
+          </a:p>
+          <a:p>
+            <a:pPr>
+              <a:spcAft>
+                <a:spcPts val="0"/>
+              </a:spcAft>
+            </a:pPr>
+            <a:r>
+              <a:rPr sz="1300">
+                <a:solidFill>
+                  <a:srgbClr val="6D8C97"/>
+                </a:solidFill>
+                <a:latin typeface="Consolas"/>
+              </a:rPr>
+              <a:t> 176  </a:t>
+            </a:r>
+            <a:r>
+              <a:rPr sz="1300">
+                <a:solidFill>
+                  <a:srgbClr val="7FE0A0"/>
+                </a:solidFill>
+                <a:latin typeface="Consolas"/>
+              </a:rPr>
+              <a:t>    // 'Failed to fetch' means the request never arrived anywhere. That is</a:t>
+            </a:r>
+          </a:p>
+          <a:p>
+            <a:pPr>
+              <a:spcAft>
+                <a:spcPts val="0"/>
+              </a:spcAft>
+            </a:pPr>
+            <a:r>
+              <a:rPr sz="1300">
+                <a:solidFill>
+                  <a:srgbClr val="6D8C97"/>
+                </a:solidFill>
+                <a:latin typeface="Consolas"/>
+              </a:rPr>
+              <a:t> 177  </a:t>
+            </a:r>
+            <a:r>
+              <a:rPr sz="1300">
+                <a:solidFill>
+                  <a:srgbClr val="7FE0A0"/>
+                </a:solidFill>
+                <a:latin typeface="Consolas"/>
+              </a:rPr>
+              <a:t>    // the commonest real failure and the least helpful wording, so replace it.</a:t>
+            </a:r>
+          </a:p>
+          <a:p>
+            <a:pPr>
+              <a:spcAft>
+                <a:spcPts val="0"/>
+              </a:spcAft>
+            </a:pPr>
+            <a:r>
+              <a:rPr sz="1300">
+                <a:solidFill>
+                  <a:srgbClr val="6D8C97"/>
+                </a:solidFill>
+                <a:latin typeface="Consolas"/>
+              </a:rPr>
+              <a:t> 178  </a:t>
+            </a:r>
+            <a:r>
+              <a:rPr sz="1300">
+                <a:solidFill>
+                  <a:srgbClr val="7FE0A0"/>
+                </a:solidFill>
+                <a:latin typeface="Consolas"/>
+              </a:rPr>
+              <a:t>    const said = problem.message === 'Failed to fetch'</a:t>
+            </a:r>
+          </a:p>
+          <a:p>
+            <a:pPr>
+              <a:spcAft>
+                <a:spcPts val="0"/>
+              </a:spcAft>
+            </a:pPr>
+            <a:r>
+              <a:rPr sz="1300">
+                <a:solidFill>
+                  <a:srgbClr val="6D8C97"/>
+                </a:solidFill>
+                <a:latin typeface="Consolas"/>
+              </a:rPr>
+              <a:t> 179  </a:t>
+            </a:r>
+            <a:r>
+              <a:rPr sz="1300">
+                <a:solidFill>
+                  <a:srgbClr val="7FE0A0"/>
+                </a:solidFill>
+                <a:latin typeface="Consolas"/>
+              </a:rPr>
+              <a:t>      ? 'Could not reach the AI. Are you on the school network?'</a:t>
+            </a:r>
+          </a:p>
+          <a:p>
+            <a:pPr>
+              <a:spcAft>
+                <a:spcPts val="0"/>
+              </a:spcAft>
+            </a:pPr>
+            <a:r>
+              <a:rPr sz="1300">
+                <a:solidFill>
+                  <a:srgbClr val="6D8C97"/>
+                </a:solidFill>
+                <a:latin typeface="Consolas"/>
+              </a:rPr>
+              <a:t> 180  </a:t>
+            </a:r>
+            <a:r>
+              <a:rPr sz="1300">
+                <a:solidFill>
+                  <a:srgbClr val="7FE0A0"/>
+                </a:solidFill>
+                <a:latin typeface="Consolas"/>
+              </a:rPr>
+              <a:t>      : problem.message;</a:t>
+            </a:r>
+          </a:p>
+          <a:p>
+            <a:pPr>
+              <a:spcAft>
+                <a:spcPts val="0"/>
+              </a:spcAft>
+            </a:pPr>
+            <a:r>
+              <a:rPr sz="1300">
+                <a:solidFill>
+                  <a:srgbClr val="6D8C97"/>
+                </a:solidFill>
+                <a:latin typeface="Consolas"/>
+              </a:rPr>
+              <a:t> 181  </a:t>
+            </a:r>
+            <a:r>
+              <a:rPr sz="1300">
+                <a:solidFill>
+                  <a:srgbClr val="7FE0A0"/>
+                </a:solidFill>
+                <a:latin typeface="Consolas"/>
+              </a:rPr>
+              <a:t>    addLine('problem', said);</a:t>
+            </a:r>
+          </a:p>
+          <a:p>
+            <a:pPr>
+              <a:spcAft>
+                <a:spcPts val="0"/>
+              </a:spcAft>
+            </a:pPr>
+            <a:r>
+              <a:rPr sz="1300">
+                <a:solidFill>
+                  <a:srgbClr val="6D8C97"/>
+                </a:solidFill>
+                <a:latin typeface="Consolas"/>
+              </a:rPr>
+              <a:t> 182  </a:t>
+            </a:r>
+            <a:r>
+              <a:rPr sz="1300">
+                <a:solidFill>
+                  <a:srgbClr val="7FE0A0"/>
+                </a:solidFill>
+                <a:latin typeface="Consolas"/>
+              </a:rPr>
+              <a:t>  }</a:t>
+            </a:r>
+          </a:p>
+          <a:p>
+            <a:pPr>
+              <a:spcAft>
+                <a:spcPts val="0"/>
+              </a:spcAft>
+            </a:pPr>
+            <a:r>
+              <a:rPr sz="1300">
+                <a:solidFill>
+                  <a:srgbClr val="6D8C97"/>
+                </a:solidFill>
+                <a:latin typeface="Consolas"/>
+              </a:rPr>
+              <a:t> 183  </a:t>
+            </a:r>
+            <a:r>
+              <a:rPr sz="1300">
+                <a:solidFill>
+                  <a:srgbClr val="7FE0A0"/>
+                </a:solidFill>
+                <a:latin typeface="Consolas"/>
+              </a:rPr>
+              <a:t>});</a:t>
             </a:r>
           </a:p>
         </p:txBody>
@@ -24213,7 +24686,7 @@
                   <a:srgbClr val="DCECEF"/>
                 </a:solidFill>
               </a:rPr>
-              <a:t>Add a fake element AFTER a writing bubble - ::after is a spot CSS can fill, and that is where the cursor goes.</a:t>
+              <a:t>That is the whole piece. Check yours looks the same before moving on.</a:t>
             </a:r>
           </a:p>
         </p:txBody>
@@ -24227,166 +24700,6 @@
 </file>
 
 <file path=ppt/slides/slide44.xml><?xml version="1.0" encoding="utf-8"?>
-<p:sld xmlns:a="http://schemas.openxmlformats.org/drawingml/2006/main" xmlns:p="http://schemas.openxmlformats.org/presentationml/2006/main" xmlns:r="http://schemas.openxmlformats.org/officeDocument/2006/relationships">
-  <p:cSld>
-    <p:spTree>
-      <p:nvGrpSpPr>
-        <p:cNvPr id="1" name=""/>
-        <p:cNvGrpSpPr/>
-        <p:nvPr/>
-      </p:nvGrpSpPr>
-      <p:grpSpPr/>
-      <p:sp>
-        <p:nvSpPr>
-          <p:cNvPr id="2" name="Title 1"/>
-          <p:cNvSpPr>
-            <a:spLocks noGrp="1"/>
-          </p:cNvSpPr>
-          <p:nvPr>
-            <p:ph type="title"/>
-          </p:nvPr>
-        </p:nvSpPr>
-        <p:spPr/>
-        <p:txBody>
-          <a:bodyPr/>
-          <a:lstStyle/>
-          <a:p>
-            <a:r>
-              <a:rPr sz="3800" b="1">
-                <a:solidFill>
-                  <a:srgbClr val="1F2A37"/>
-                </a:solidFill>
-              </a:rPr>
-              <a:t>content</a:t>
-            </a:r>
-          </a:p>
-        </p:txBody>
-      </p:sp>
-      <p:sp>
-        <p:nvSpPr>
-          <p:cNvPr id="3" name="TextBox 2"/>
-          <p:cNvSpPr txBox="1"/>
-          <p:nvPr/>
-        </p:nvSpPr>
-        <p:spPr>
-          <a:xfrm>
-            <a:off x="868680" y="502920"/>
-            <a:ext cx="5486400" cy="457200"/>
-          </a:xfrm>
-          <a:prstGeom prst="rect">
-            <a:avLst/>
-          </a:prstGeom>
-          <a:noFill/>
-        </p:spPr>
-        <p:txBody>
-          <a:bodyPr wrap="none">
-            <a:spAutoFit/>
-          </a:bodyPr>
-          <a:lstStyle/>
-          <a:p>
-            <a:r>
-              <a:rPr sz="1500" b="1">
-                <a:solidFill>
-                  <a:srgbClr val="01AEFD"/>
-                </a:solidFill>
-              </a:rPr>
-              <a:t>CSS</a:t>
-            </a:r>
-          </a:p>
-        </p:txBody>
-      </p:sp>
-      <p:sp>
-        <p:nvSpPr>
-          <p:cNvPr id="4" name="TextBox 3"/>
-          <p:cNvSpPr txBox="1"/>
-          <p:nvPr/>
-        </p:nvSpPr>
-        <p:spPr>
-          <a:xfrm>
-            <a:off x="822960" y="1828800"/>
-            <a:ext cx="10515600" cy="4206240"/>
-          </a:xfrm>
-          <a:prstGeom prst="rect">
-            <a:avLst/>
-          </a:prstGeom>
-          <a:noFill/>
-        </p:spPr>
-        <p:txBody>
-          <a:bodyPr wrap="square">
-            <a:spAutoFit/>
-          </a:bodyPr>
-          <a:lstStyle/>
-          <a:p>
-            <a:pPr>
-              <a:spcAft>
-                <a:spcPts val="1400"/>
-              </a:spcAft>
-            </a:pPr>
-            <a:r>
-              <a:rPr sz="2800">
-                <a:solidFill>
-                  <a:srgbClr val="01AEFD"/>
-                </a:solidFill>
-              </a:rPr>
-              <a:t>content: "\258C";</a:t>
-            </a:r>
-          </a:p>
-          <a:p>
-            <a:pPr>
-              <a:spcAft>
-                <a:spcPts val="1400"/>
-              </a:spcAft>
-            </a:pPr>
-            <a:r>
-              <a:rPr sz="2400">
-                <a:solidFill>
-                  <a:srgbClr val="1F2A37"/>
-                </a:solidFill>
-              </a:rPr>
-              <a:t>• Fills a ::after with text - here a block character used as a cursor.</a:t>
-            </a:r>
-          </a:p>
-          <a:p>
-            <a:pPr>
-              <a:spcAft>
-                <a:spcPts val="1400"/>
-              </a:spcAft>
-            </a:pPr>
-            <a:r>
-              <a:rPr sz="2400">
-                <a:solidFill>
-                  <a:srgbClr val="1F2A37"/>
-                </a:solidFill>
-              </a:rPr>
-              <a:t>• It is the one property that puts text on the page from CSS, not HTML.</a:t>
-            </a:r>
-          </a:p>
-          <a:p>
-            <a:pPr>
-              <a:spcAft>
-                <a:spcPts val="1400"/>
-              </a:spcAft>
-            </a:pPr>
-            <a:r>
-              <a:rPr sz="2400">
-                <a:solidFill>
-                  <a:srgbClr val="1F2A37"/>
-                </a:solidFill>
-              </a:rPr>
-              <a:t>• Pairs with animation (next) to make that cursor blink.</a:t>
-            </a:r>
-          </a:p>
-        </p:txBody>
-      </p:sp>
-    </p:spTree>
-  </p:cSld>
-  <p:clrMapOvr>
-    <a:masterClrMapping/>
-  </p:clrMapOvr>
-</p:sld>
-</file>
-
-<file path=ppt/slides/slide45.xml><?xml version="1.0" encoding="utf-8"?>
 <p:sld xmlns:a="http://schemas.openxmlformats.org/drawingml/2006/main" xmlns:p="http://schemas.openxmlformats.org/presentationml/2006/main" xmlns:r="http://schemas.openxmlformats.org/officeDocument/2006/relationships">
   <p:cSld>
     <p:bg>
@@ -24432,7 +24745,7 @@
                   <a:srgbClr val="01AEFD"/>
                 </a:solidFill>
               </a:rPr>
-              <a:t>Type this into style.css   -   line 85</a:t>
+              <a:t>Type this into style.css   -   line 84</a:t>
             </a:r>
           </a:p>
         </p:txBody>
@@ -24476,36 +24789,11 @@
             <a:r>
               <a:rPr sz="1800">
                 <a:solidFill>
-                  <a:srgbClr val="6D8C97"/>
+                  <a:srgbClr val="7FE0A0"/>
                 </a:solidFill>
                 <a:latin typeface="Consolas"/>
               </a:rPr>
               <a:t>.bubble.writing::after {</a:t>
-            </a:r>
-          </a:p>
-          <a:p>
-            <a:pPr>
-              <a:spcAft>
-                <a:spcPts val="0"/>
-              </a:spcAft>
-            </a:pPr>
-            <a:r>
-              <a:rPr sz="1800">
-                <a:solidFill>
-                  <a:srgbClr val="6D8C97"/>
-                </a:solidFill>
-                <a:latin typeface="Consolas"/>
-              </a:rPr>
-              <a:t>  85  </a:t>
-            </a:r>
-            <a:r>
-              <a:rPr sz="1800">
-                <a:solidFill>
-                  <a:srgbClr val="7FE0A0"/>
-                </a:solidFill>
-                <a:latin typeface="Consolas"/>
-              </a:rPr>
-              <a:t>  content: "\258C";</a:t>
             </a:r>
           </a:p>
         </p:txBody>
@@ -24538,7 +24826,167 @@
                   <a:srgbClr val="DCECEF"/>
                 </a:solidFill>
               </a:rPr>
-              <a:t>content fills it with a block character "\258C" - our cursor.</a:t>
+              <a:t>Add a fake element AFTER a writing bubble - ::after is a spot CSS can fill, and that is where the cursor goes.</a:t>
+            </a:r>
+          </a:p>
+        </p:txBody>
+      </p:sp>
+    </p:spTree>
+  </p:cSld>
+  <p:clrMapOvr>
+    <a:masterClrMapping/>
+  </p:clrMapOvr>
+</p:sld>
+</file>
+
+<file path=ppt/slides/slide45.xml><?xml version="1.0" encoding="utf-8"?>
+<p:sld xmlns:a="http://schemas.openxmlformats.org/drawingml/2006/main" xmlns:p="http://schemas.openxmlformats.org/presentationml/2006/main" xmlns:r="http://schemas.openxmlformats.org/officeDocument/2006/relationships">
+  <p:cSld>
+    <p:spTree>
+      <p:nvGrpSpPr>
+        <p:cNvPr id="1" name=""/>
+        <p:cNvGrpSpPr/>
+        <p:nvPr/>
+      </p:nvGrpSpPr>
+      <p:grpSpPr/>
+      <p:sp>
+        <p:nvSpPr>
+          <p:cNvPr id="2" name="Title 1"/>
+          <p:cNvSpPr>
+            <a:spLocks noGrp="1"/>
+          </p:cNvSpPr>
+          <p:nvPr>
+            <p:ph type="title"/>
+          </p:nvPr>
+        </p:nvSpPr>
+        <p:spPr/>
+        <p:txBody>
+          <a:bodyPr/>
+          <a:lstStyle/>
+          <a:p>
+            <a:r>
+              <a:rPr sz="3800" b="1">
+                <a:solidFill>
+                  <a:srgbClr val="1F2A37"/>
+                </a:solidFill>
+              </a:rPr>
+              <a:t>content</a:t>
+            </a:r>
+          </a:p>
+        </p:txBody>
+      </p:sp>
+      <p:sp>
+        <p:nvSpPr>
+          <p:cNvPr id="3" name="TextBox 2"/>
+          <p:cNvSpPr txBox="1"/>
+          <p:nvPr/>
+        </p:nvSpPr>
+        <p:spPr>
+          <a:xfrm>
+            <a:off x="868680" y="502920"/>
+            <a:ext cx="5486400" cy="457200"/>
+          </a:xfrm>
+          <a:prstGeom prst="rect">
+            <a:avLst/>
+          </a:prstGeom>
+          <a:noFill/>
+        </p:spPr>
+        <p:txBody>
+          <a:bodyPr wrap="none">
+            <a:spAutoFit/>
+          </a:bodyPr>
+          <a:lstStyle/>
+          <a:p>
+            <a:r>
+              <a:rPr sz="1500" b="1">
+                <a:solidFill>
+                  <a:srgbClr val="01AEFD"/>
+                </a:solidFill>
+              </a:rPr>
+              <a:t>CSS</a:t>
+            </a:r>
+          </a:p>
+        </p:txBody>
+      </p:sp>
+      <p:sp>
+        <p:nvSpPr>
+          <p:cNvPr id="4" name="TextBox 3"/>
+          <p:cNvSpPr txBox="1"/>
+          <p:nvPr/>
+        </p:nvSpPr>
+        <p:spPr>
+          <a:xfrm>
+            <a:off x="822960" y="1828800"/>
+            <a:ext cx="10515600" cy="4206240"/>
+          </a:xfrm>
+          <a:prstGeom prst="rect">
+            <a:avLst/>
+          </a:prstGeom>
+          <a:noFill/>
+        </p:spPr>
+        <p:txBody>
+          <a:bodyPr wrap="square">
+            <a:spAutoFit/>
+          </a:bodyPr>
+          <a:lstStyle/>
+          <a:p>
+            <a:pPr>
+              <a:spcAft>
+                <a:spcPts val="1400"/>
+              </a:spcAft>
+            </a:pPr>
+            <a:r>
+              <a:rPr sz="2800">
+                <a:solidFill>
+                  <a:srgbClr val="01AEFD"/>
+                </a:solidFill>
+              </a:rPr>
+              <a:t>content: "\258C";</a:t>
+            </a:r>
+          </a:p>
+          <a:p>
+            <a:pPr>
+              <a:spcAft>
+                <a:spcPts val="1400"/>
+              </a:spcAft>
+            </a:pPr>
+            <a:r>
+              <a:rPr sz="2400">
+                <a:solidFill>
+                  <a:srgbClr val="1F2A37"/>
+                </a:solidFill>
+              </a:rPr>
+              <a:t>• Fills a ::after with text - here a block character used as a cursor.</a:t>
+            </a:r>
+          </a:p>
+          <a:p>
+            <a:pPr>
+              <a:spcAft>
+                <a:spcPts val="1400"/>
+              </a:spcAft>
+            </a:pPr>
+            <a:r>
+              <a:rPr sz="2400">
+                <a:solidFill>
+                  <a:srgbClr val="1F2A37"/>
+                </a:solidFill>
+              </a:rPr>
+              <a:t>• It is the one property that puts text on the page from CSS, not HTML.</a:t>
+            </a:r>
+          </a:p>
+          <a:p>
+            <a:pPr>
+              <a:spcAft>
+                <a:spcPts val="1400"/>
+              </a:spcAft>
+            </a:pPr>
+            <a:r>
+              <a:rPr sz="2400">
+                <a:solidFill>
+                  <a:srgbClr val="1F2A37"/>
+                </a:solidFill>
+              </a:rPr>
+              <a:t>• Pairs with animation (next) to make that cursor blink.</a:t>
             </a:r>
           </a:p>
         </p:txBody>
@@ -24552,6 +25000,615 @@
 </file>
 
 <file path=ppt/slides/slide46.xml><?xml version="1.0" encoding="utf-8"?>
+<p:sld xmlns:a="http://schemas.openxmlformats.org/drawingml/2006/main" xmlns:p="http://schemas.openxmlformats.org/presentationml/2006/main" xmlns:r="http://schemas.openxmlformats.org/officeDocument/2006/relationships">
+  <p:cSld>
+    <p:bg>
+      <p:bgPr>
+        <a:solidFill>
+          <a:srgbClr val="F4F8FB"/>
+        </a:solidFill>
+        <a:effectLst/>
+      </p:bgPr>
+    </p:bg>
+    <p:spTree>
+      <p:nvGrpSpPr>
+        <p:cNvPr id="1" name=""/>
+        <p:cNvGrpSpPr/>
+        <p:nvPr/>
+      </p:nvGrpSpPr>
+      <p:grpSpPr/>
+      <p:sp>
+        <p:nvSpPr>
+          <p:cNvPr id="2" name="TextBox 1"/>
+          <p:cNvSpPr txBox="1"/>
+          <p:nvPr/>
+        </p:nvSpPr>
+        <p:spPr>
+          <a:xfrm>
+            <a:off x="822960" y="365760"/>
+            <a:ext cx="7315200" cy="365760"/>
+          </a:xfrm>
+          <a:prstGeom prst="rect">
+            <a:avLst/>
+          </a:prstGeom>
+          <a:noFill/>
+        </p:spPr>
+        <p:txBody>
+          <a:bodyPr wrap="none">
+            <a:spAutoFit/>
+          </a:bodyPr>
+          <a:lstStyle/>
+          <a:p>
+            <a:r>
+              <a:rPr sz="1400" b="1">
+                <a:solidFill>
+                  <a:srgbClr val="01AEFD"/>
+                </a:solidFill>
+              </a:rPr>
+              <a:t>ON THE PAGE</a:t>
+            </a:r>
+          </a:p>
+        </p:txBody>
+      </p:sp>
+      <p:sp>
+        <p:nvSpPr>
+          <p:cNvPr id="3" name="TextBox 2"/>
+          <p:cNvSpPr txBox="1"/>
+          <p:nvPr/>
+        </p:nvSpPr>
+        <p:spPr>
+          <a:xfrm>
+            <a:off x="822960" y="658368"/>
+            <a:ext cx="10515600" cy="731520"/>
+          </a:xfrm>
+          <a:prstGeom prst="rect">
+            <a:avLst/>
+          </a:prstGeom>
+          <a:noFill/>
+        </p:spPr>
+        <p:txBody>
+          <a:bodyPr wrap="none">
+            <a:spAutoFit/>
+          </a:bodyPr>
+          <a:lstStyle/>
+          <a:p>
+            <a:r>
+              <a:rPr sz="3200" b="1">
+                <a:solidFill>
+                  <a:srgbClr val="1F2A37"/>
+                </a:solidFill>
+              </a:rPr>
+              <a:t>content</a:t>
+            </a:r>
+          </a:p>
+        </p:txBody>
+      </p:sp>
+      <p:sp>
+        <p:nvSpPr>
+          <p:cNvPr id="4" name="Rounded Rectangle 3"/>
+          <p:cNvSpPr/>
+          <p:nvPr/>
+        </p:nvSpPr>
+        <p:spPr>
+          <a:xfrm>
+            <a:off x="3454237" y="1641896"/>
+            <a:ext cx="5249387" cy="3918021"/>
+          </a:xfrm>
+          <a:prstGeom prst="roundRect">
+            <a:avLst/>
+          </a:prstGeom>
+          <a:solidFill>
+            <a:srgbClr val="0F1F27"/>
+          </a:solidFill>
+          <a:ln>
+            <a:noFill/>
+          </a:ln>
+          <a:effectLst/>
+        </p:spPr>
+        <p:style>
+          <a:lnRef idx="1">
+            <a:schemeClr val="accent1"/>
+          </a:lnRef>
+          <a:fillRef idx="3">
+            <a:schemeClr val="accent1"/>
+          </a:fillRef>
+          <a:effectRef idx="2">
+            <a:schemeClr val="accent1"/>
+          </a:effectRef>
+          <a:fontRef idx="minor">
+            <a:schemeClr val="lt1"/>
+          </a:fontRef>
+        </p:style>
+        <p:txBody>
+          <a:bodyPr rtlCol="0" anchor="ctr"/>
+          <a:lstStyle/>
+          <a:p>
+            <a:pPr algn="ctr"/>
+          </a:p>
+        </p:txBody>
+      </p:sp>
+      <p:sp>
+        <p:nvSpPr>
+          <p:cNvPr id="5" name="Rounded Rectangle 4"/>
+          <p:cNvSpPr/>
+          <p:nvPr/>
+        </p:nvSpPr>
+        <p:spPr>
+          <a:xfrm>
+            <a:off x="3606393" y="2022287"/>
+            <a:ext cx="4945075" cy="437448"/>
+          </a:xfrm>
+          <a:prstGeom prst="roundRect">
+            <a:avLst/>
+          </a:prstGeom>
+          <a:solidFill>
+            <a:srgbClr val="16303A"/>
+          </a:solidFill>
+          <a:ln>
+            <a:noFill/>
+          </a:ln>
+          <a:effectLst/>
+        </p:spPr>
+        <p:style>
+          <a:lnRef idx="1">
+            <a:schemeClr val="accent1"/>
+          </a:lnRef>
+          <a:fillRef idx="3">
+            <a:schemeClr val="accent1"/>
+          </a:fillRef>
+          <a:effectRef idx="2">
+            <a:schemeClr val="accent1"/>
+          </a:effectRef>
+          <a:fontRef idx="minor">
+            <a:schemeClr val="lt1"/>
+          </a:fontRef>
+        </p:style>
+        <p:txBody>
+          <a:bodyPr rtlCol="0" anchor="ctr"/>
+          <a:lstStyle/>
+          <a:p>
+            <a:pPr algn="ctr"/>
+          </a:p>
+        </p:txBody>
+      </p:sp>
+      <p:sp>
+        <p:nvSpPr>
+          <p:cNvPr id="6" name="Rounded Rectangle 5"/>
+          <p:cNvSpPr/>
+          <p:nvPr/>
+        </p:nvSpPr>
+        <p:spPr>
+          <a:xfrm>
+            <a:off x="3720510" y="2155423"/>
+            <a:ext cx="1426463" cy="190195"/>
+          </a:xfrm>
+          <a:prstGeom prst="roundRect">
+            <a:avLst/>
+          </a:prstGeom>
+          <a:solidFill>
+            <a:srgbClr val="4A6B78"/>
+          </a:solidFill>
+          <a:ln>
+            <a:noFill/>
+          </a:ln>
+          <a:effectLst/>
+        </p:spPr>
+        <p:style>
+          <a:lnRef idx="1">
+            <a:schemeClr val="accent1"/>
+          </a:lnRef>
+          <a:fillRef idx="3">
+            <a:schemeClr val="accent1"/>
+          </a:fillRef>
+          <a:effectRef idx="2">
+            <a:schemeClr val="accent1"/>
+          </a:effectRef>
+          <a:fontRef idx="minor">
+            <a:schemeClr val="lt1"/>
+          </a:fontRef>
+        </p:style>
+        <p:txBody>
+          <a:bodyPr rtlCol="0" anchor="ctr"/>
+          <a:lstStyle/>
+          <a:p>
+            <a:pPr algn="ctr"/>
+          </a:p>
+        </p:txBody>
+      </p:sp>
+      <p:sp>
+        <p:nvSpPr>
+          <p:cNvPr id="7" name="Rounded Rectangle 6"/>
+          <p:cNvSpPr/>
+          <p:nvPr/>
+        </p:nvSpPr>
+        <p:spPr>
+          <a:xfrm>
+            <a:off x="3606393" y="2554833"/>
+            <a:ext cx="4945075" cy="1806854"/>
+          </a:xfrm>
+          <a:prstGeom prst="roundRect">
+            <a:avLst/>
+          </a:prstGeom>
+          <a:solidFill>
+            <a:srgbClr val="0B171D"/>
+          </a:solidFill>
+          <a:ln>
+            <a:noFill/>
+          </a:ln>
+          <a:effectLst/>
+        </p:spPr>
+        <p:style>
+          <a:lnRef idx="1">
+            <a:schemeClr val="accent1"/>
+          </a:lnRef>
+          <a:fillRef idx="3">
+            <a:schemeClr val="accent1"/>
+          </a:fillRef>
+          <a:effectRef idx="2">
+            <a:schemeClr val="accent1"/>
+          </a:effectRef>
+          <a:fontRef idx="minor">
+            <a:schemeClr val="lt1"/>
+          </a:fontRef>
+        </p:style>
+        <p:txBody>
+          <a:bodyPr rtlCol="0" anchor="ctr"/>
+          <a:lstStyle/>
+          <a:p>
+            <a:pPr algn="ctr"/>
+          </a:p>
+        </p:txBody>
+      </p:sp>
+      <p:sp>
+        <p:nvSpPr>
+          <p:cNvPr id="8" name="Rounded Rectangle 7"/>
+          <p:cNvSpPr/>
+          <p:nvPr/>
+        </p:nvSpPr>
+        <p:spPr>
+          <a:xfrm>
+            <a:off x="3720510" y="2668950"/>
+            <a:ext cx="2852927" cy="399409"/>
+          </a:xfrm>
+          <a:prstGeom prst="roundRect">
+            <a:avLst/>
+          </a:prstGeom>
+          <a:solidFill>
+            <a:srgbClr val="1B3540"/>
+          </a:solidFill>
+          <a:ln>
+            <a:noFill/>
+          </a:ln>
+          <a:effectLst/>
+        </p:spPr>
+        <p:style>
+          <a:lnRef idx="1">
+            <a:schemeClr val="accent1"/>
+          </a:lnRef>
+          <a:fillRef idx="3">
+            <a:schemeClr val="accent1"/>
+          </a:fillRef>
+          <a:effectRef idx="2">
+            <a:schemeClr val="accent1"/>
+          </a:effectRef>
+          <a:fontRef idx="minor">
+            <a:schemeClr val="lt1"/>
+          </a:fontRef>
+        </p:style>
+        <p:txBody>
+          <a:bodyPr rtlCol="0" anchor="ctr"/>
+          <a:lstStyle/>
+          <a:p>
+            <a:pPr algn="ctr"/>
+          </a:p>
+        </p:txBody>
+      </p:sp>
+      <p:sp>
+        <p:nvSpPr>
+          <p:cNvPr id="9" name="Rounded Rectangle 8"/>
+          <p:cNvSpPr/>
+          <p:nvPr/>
+        </p:nvSpPr>
+        <p:spPr>
+          <a:xfrm>
+            <a:off x="5584423" y="3182477"/>
+            <a:ext cx="2852927" cy="399409"/>
+          </a:xfrm>
+          <a:prstGeom prst="roundRect">
+            <a:avLst/>
+          </a:prstGeom>
+          <a:solidFill>
+            <a:srgbClr val="123A32"/>
+          </a:solidFill>
+          <a:ln>
+            <a:noFill/>
+          </a:ln>
+          <a:effectLst/>
+        </p:spPr>
+        <p:style>
+          <a:lnRef idx="1">
+            <a:schemeClr val="accent1"/>
+          </a:lnRef>
+          <a:fillRef idx="3">
+            <a:schemeClr val="accent1"/>
+          </a:fillRef>
+          <a:effectRef idx="2">
+            <a:schemeClr val="accent1"/>
+          </a:effectRef>
+          <a:fontRef idx="minor">
+            <a:schemeClr val="lt1"/>
+          </a:fontRef>
+        </p:style>
+        <p:txBody>
+          <a:bodyPr rtlCol="0" anchor="ctr"/>
+          <a:lstStyle/>
+          <a:p>
+            <a:pPr algn="ctr"/>
+          </a:p>
+        </p:txBody>
+      </p:sp>
+      <p:sp>
+        <p:nvSpPr>
+          <p:cNvPr id="10" name="Rounded Rectangle 9"/>
+          <p:cNvSpPr/>
+          <p:nvPr/>
+        </p:nvSpPr>
+        <p:spPr>
+          <a:xfrm>
+            <a:off x="3720510" y="3696004"/>
+            <a:ext cx="3138220" cy="399409"/>
+          </a:xfrm>
+          <a:prstGeom prst="roundRect">
+            <a:avLst/>
+          </a:prstGeom>
+          <a:solidFill>
+            <a:srgbClr val="1B3540"/>
+          </a:solidFill>
+          <a:ln>
+            <a:noFill/>
+          </a:ln>
+          <a:effectLst/>
+        </p:spPr>
+        <p:style>
+          <a:lnRef idx="1">
+            <a:schemeClr val="accent1"/>
+          </a:lnRef>
+          <a:fillRef idx="3">
+            <a:schemeClr val="accent1"/>
+          </a:fillRef>
+          <a:effectRef idx="2">
+            <a:schemeClr val="accent1"/>
+          </a:effectRef>
+          <a:fontRef idx="minor">
+            <a:schemeClr val="lt1"/>
+          </a:fontRef>
+        </p:style>
+        <p:txBody>
+          <a:bodyPr rtlCol="0" anchor="ctr"/>
+          <a:lstStyle/>
+          <a:p>
+            <a:pPr algn="ctr"/>
+          </a:p>
+        </p:txBody>
+      </p:sp>
+      <p:sp>
+        <p:nvSpPr>
+          <p:cNvPr id="11" name="Rounded Rectangle 10"/>
+          <p:cNvSpPr/>
+          <p:nvPr/>
+        </p:nvSpPr>
+        <p:spPr>
+          <a:xfrm>
+            <a:off x="3701491" y="4856195"/>
+            <a:ext cx="3899001" cy="323331"/>
+          </a:xfrm>
+          <a:prstGeom prst="roundRect">
+            <a:avLst/>
+          </a:prstGeom>
+          <a:solidFill>
+            <a:srgbClr val="16303A"/>
+          </a:solidFill>
+          <a:ln>
+            <a:noFill/>
+          </a:ln>
+          <a:effectLst/>
+        </p:spPr>
+        <p:style>
+          <a:lnRef idx="1">
+            <a:schemeClr val="accent1"/>
+          </a:lnRef>
+          <a:fillRef idx="3">
+            <a:schemeClr val="accent1"/>
+          </a:fillRef>
+          <a:effectRef idx="2">
+            <a:schemeClr val="accent1"/>
+          </a:effectRef>
+          <a:fontRef idx="minor">
+            <a:schemeClr val="lt1"/>
+          </a:fontRef>
+        </p:style>
+        <p:txBody>
+          <a:bodyPr rtlCol="0" anchor="ctr"/>
+          <a:lstStyle/>
+          <a:p>
+            <a:pPr algn="ctr"/>
+          </a:p>
+        </p:txBody>
+      </p:sp>
+      <p:sp>
+        <p:nvSpPr>
+          <p:cNvPr id="12" name="Rounded Rectangle 11"/>
+          <p:cNvSpPr/>
+          <p:nvPr/>
+        </p:nvSpPr>
+        <p:spPr>
+          <a:xfrm>
+            <a:off x="7695590" y="4856195"/>
+            <a:ext cx="779800" cy="323331"/>
+          </a:xfrm>
+          <a:prstGeom prst="roundRect">
+            <a:avLst/>
+          </a:prstGeom>
+          <a:solidFill>
+            <a:srgbClr val="01AEFD"/>
+          </a:solidFill>
+          <a:ln>
+            <a:noFill/>
+          </a:ln>
+          <a:effectLst/>
+        </p:spPr>
+        <p:style>
+          <a:lnRef idx="1">
+            <a:schemeClr val="accent1"/>
+          </a:lnRef>
+          <a:fillRef idx="3">
+            <a:schemeClr val="accent1"/>
+          </a:fillRef>
+          <a:effectRef idx="2">
+            <a:schemeClr val="accent1"/>
+          </a:effectRef>
+          <a:fontRef idx="minor">
+            <a:schemeClr val="lt1"/>
+          </a:fontRef>
+        </p:style>
+        <p:txBody>
+          <a:bodyPr rtlCol="0" anchor="ctr"/>
+          <a:lstStyle/>
+          <a:p>
+            <a:pPr algn="ctr"/>
+          </a:p>
+        </p:txBody>
+      </p:sp>
+      <p:sp>
+        <p:nvSpPr>
+          <p:cNvPr id="13" name="Rounded Rectangle 12"/>
+          <p:cNvSpPr/>
+          <p:nvPr/>
+        </p:nvSpPr>
+        <p:spPr>
+          <a:xfrm>
+            <a:off x="3720510" y="5407761"/>
+            <a:ext cx="1616659" cy="95097"/>
+          </a:xfrm>
+          <a:prstGeom prst="roundRect">
+            <a:avLst/>
+          </a:prstGeom>
+          <a:solidFill>
+            <a:srgbClr val="2A4550"/>
+          </a:solidFill>
+          <a:ln>
+            <a:noFill/>
+          </a:ln>
+          <a:effectLst/>
+        </p:spPr>
+        <p:style>
+          <a:lnRef idx="1">
+            <a:schemeClr val="accent1"/>
+          </a:lnRef>
+          <a:fillRef idx="3">
+            <a:schemeClr val="accent1"/>
+          </a:fillRef>
+          <a:effectRef idx="2">
+            <a:schemeClr val="accent1"/>
+          </a:effectRef>
+          <a:fontRef idx="minor">
+            <a:schemeClr val="lt1"/>
+          </a:fontRef>
+        </p:style>
+        <p:txBody>
+          <a:bodyPr rtlCol="0" anchor="ctr"/>
+          <a:lstStyle/>
+          <a:p>
+            <a:pPr algn="ctr"/>
+          </a:p>
+        </p:txBody>
+      </p:sp>
+      <p:sp>
+        <p:nvSpPr>
+          <p:cNvPr id="14" name="Rounded Rectangle 13"/>
+          <p:cNvSpPr/>
+          <p:nvPr/>
+        </p:nvSpPr>
+        <p:spPr>
+          <a:xfrm>
+            <a:off x="7657551" y="4818156"/>
+            <a:ext cx="855878" cy="399409"/>
+          </a:xfrm>
+          <a:prstGeom prst="roundRect">
+            <a:avLst/>
+          </a:prstGeom>
+          <a:noFill/>
+          <a:ln w="44450">
+            <a:solidFill>
+              <a:srgbClr val="FFD633"/>
+            </a:solidFill>
+          </a:ln>
+          <a:effectLst/>
+        </p:spPr>
+        <p:style>
+          <a:lnRef idx="1">
+            <a:schemeClr val="accent1"/>
+          </a:lnRef>
+          <a:fillRef idx="3">
+            <a:schemeClr val="accent1"/>
+          </a:fillRef>
+          <a:effectRef idx="2">
+            <a:schemeClr val="accent1"/>
+          </a:effectRef>
+          <a:fontRef idx="minor">
+            <a:schemeClr val="lt1"/>
+          </a:fontRef>
+        </p:style>
+        <p:txBody>
+          <a:bodyPr rtlCol="0" anchor="ctr"/>
+          <a:lstStyle/>
+          <a:p>
+            <a:pPr algn="ctr"/>
+          </a:p>
+        </p:txBody>
+      </p:sp>
+      <p:sp>
+        <p:nvSpPr>
+          <p:cNvPr id="15" name="TextBox 14"/>
+          <p:cNvSpPr txBox="1"/>
+          <p:nvPr/>
+        </p:nvSpPr>
+        <p:spPr>
+          <a:xfrm>
+            <a:off x="822960" y="6172200"/>
+            <a:ext cx="10515600" cy="548640"/>
+          </a:xfrm>
+          <a:prstGeom prst="rect">
+            <a:avLst/>
+          </a:prstGeom>
+          <a:noFill/>
+        </p:spPr>
+        <p:txBody>
+          <a:bodyPr wrap="square">
+            <a:spAutoFit/>
+          </a:bodyPr>
+          <a:lstStyle/>
+          <a:p>
+            <a:r>
+              <a:rPr sz="2000">
+                <a:solidFill>
+                  <a:srgbClr val="0A6299"/>
+                </a:solidFill>
+              </a:rPr>
+              <a:t>content can drop an icon into the button.</a:t>
+            </a:r>
+          </a:p>
+        </p:txBody>
+      </p:sp>
+    </p:spTree>
+  </p:cSld>
+  <p:clrMapOvr>
+    <a:masterClrMapping/>
+  </p:clrMapOvr>
+</p:sld>
+</file>
+
+<file path=ppt/slides/slide47.xml><?xml version="1.0" encoding="utf-8"?>
 <p:sld xmlns:a="http://schemas.openxmlformats.org/drawingml/2006/main" xmlns:p="http://schemas.openxmlformats.org/presentationml/2006/main" xmlns:r="http://schemas.openxmlformats.org/officeDocument/2006/relationships">
   <p:cSld>
     <p:bg>
@@ -24597,7 +25654,7 @@
                   <a:srgbClr val="01AEFD"/>
                 </a:solidFill>
               </a:rPr>
-              <a:t>Type this into style.css   -   line 86</a:t>
+              <a:t>Type this into style.css   -   line 85</a:t>
             </a:r>
           </a:p>
         </p:txBody>
@@ -24666,36 +25723,11 @@
             <a:r>
               <a:rPr sz="1800">
                 <a:solidFill>
-                  <a:srgbClr val="6D8C97"/>
+                  <a:srgbClr val="7FE0A0"/>
                 </a:solidFill>
                 <a:latin typeface="Consolas"/>
               </a:rPr>
               <a:t>  content: "\258C";</a:t>
-            </a:r>
-          </a:p>
-          <a:p>
-            <a:pPr>
-              <a:spcAft>
-                <a:spcPts val="0"/>
-              </a:spcAft>
-            </a:pPr>
-            <a:r>
-              <a:rPr sz="1800">
-                <a:solidFill>
-                  <a:srgbClr val="6D8C97"/>
-                </a:solidFill>
-                <a:latin typeface="Consolas"/>
-              </a:rPr>
-              <a:t>  86  </a:t>
-            </a:r>
-            <a:r>
-              <a:rPr sz="1800">
-                <a:solidFill>
-                  <a:srgbClr val="7FE0A0"/>
-                </a:solidFill>
-                <a:latin typeface="Consolas"/>
-              </a:rPr>
-              <a:t>  color: #01aefd;</a:t>
             </a:r>
           </a:p>
         </p:txBody>
@@ -24728,167 +25760,7 @@
                   <a:srgbClr val="DCECEF"/>
                 </a:solidFill>
               </a:rPr>
-              <a:t>Make the cursor blue.</a:t>
-            </a:r>
-          </a:p>
-        </p:txBody>
-      </p:sp>
-    </p:spTree>
-  </p:cSld>
-  <p:clrMapOvr>
-    <a:masterClrMapping/>
-  </p:clrMapOvr>
-</p:sld>
-</file>
-
-<file path=ppt/slides/slide47.xml><?xml version="1.0" encoding="utf-8"?>
-<p:sld xmlns:a="http://schemas.openxmlformats.org/drawingml/2006/main" xmlns:p="http://schemas.openxmlformats.org/presentationml/2006/main" xmlns:r="http://schemas.openxmlformats.org/officeDocument/2006/relationships">
-  <p:cSld>
-    <p:spTree>
-      <p:nvGrpSpPr>
-        <p:cNvPr id="1" name=""/>
-        <p:cNvGrpSpPr/>
-        <p:nvPr/>
-      </p:nvGrpSpPr>
-      <p:grpSpPr/>
-      <p:sp>
-        <p:nvSpPr>
-          <p:cNvPr id="2" name="Title 1"/>
-          <p:cNvSpPr>
-            <a:spLocks noGrp="1"/>
-          </p:cNvSpPr>
-          <p:nvPr>
-            <p:ph type="title"/>
-          </p:nvPr>
-        </p:nvSpPr>
-        <p:spPr/>
-        <p:txBody>
-          <a:bodyPr/>
-          <a:lstStyle/>
-          <a:p>
-            <a:r>
-              <a:rPr sz="3800" b="1">
-                <a:solidFill>
-                  <a:srgbClr val="1F2A37"/>
-                </a:solidFill>
-              </a:rPr>
-              <a:t>animation</a:t>
-            </a:r>
-          </a:p>
-        </p:txBody>
-      </p:sp>
-      <p:sp>
-        <p:nvSpPr>
-          <p:cNvPr id="3" name="TextBox 2"/>
-          <p:cNvSpPr txBox="1"/>
-          <p:nvPr/>
-        </p:nvSpPr>
-        <p:spPr>
-          <a:xfrm>
-            <a:off x="868680" y="502920"/>
-            <a:ext cx="5486400" cy="457200"/>
-          </a:xfrm>
-          <a:prstGeom prst="rect">
-            <a:avLst/>
-          </a:prstGeom>
-          <a:noFill/>
-        </p:spPr>
-        <p:txBody>
-          <a:bodyPr wrap="none">
-            <a:spAutoFit/>
-          </a:bodyPr>
-          <a:lstStyle/>
-          <a:p>
-            <a:r>
-              <a:rPr sz="1500" b="1">
-                <a:solidFill>
-                  <a:srgbClr val="01AEFD"/>
-                </a:solidFill>
-              </a:rPr>
-              <a:t>CSS</a:t>
-            </a:r>
-          </a:p>
-        </p:txBody>
-      </p:sp>
-      <p:sp>
-        <p:nvSpPr>
-          <p:cNvPr id="4" name="TextBox 3"/>
-          <p:cNvSpPr txBox="1"/>
-          <p:nvPr/>
-        </p:nvSpPr>
-        <p:spPr>
-          <a:xfrm>
-            <a:off x="822960" y="1828800"/>
-            <a:ext cx="10515600" cy="4206240"/>
-          </a:xfrm>
-          <a:prstGeom prst="rect">
-            <a:avLst/>
-          </a:prstGeom>
-          <a:noFill/>
-        </p:spPr>
-        <p:txBody>
-          <a:bodyPr wrap="square">
-            <a:spAutoFit/>
-          </a:bodyPr>
-          <a:lstStyle/>
-          <a:p>
-            <a:pPr>
-              <a:spcAft>
-                <a:spcPts val="1400"/>
-              </a:spcAft>
-            </a:pPr>
-            <a:r>
-              <a:rPr sz="2800">
-                <a:solidFill>
-                  <a:srgbClr val="01AEFD"/>
-                </a:solidFill>
-              </a:rPr>
-              <a:t>animation: blink 1s steps(2, start) infinite;</a:t>
-            </a:r>
-          </a:p>
-          <a:p>
-            <a:pPr>
-              <a:spcAft>
-                <a:spcPts val="1400"/>
-              </a:spcAft>
-            </a:pPr>
-            <a:r>
-              <a:rPr sz="2400">
-                <a:solidFill>
-                  <a:srgbClr val="1F2A37"/>
-                </a:solidFill>
-              </a:rPr>
-              <a:t>• Plays a keyframes animation: its name, how long, the timing, how often.</a:t>
-            </a:r>
-          </a:p>
-          <a:p>
-            <a:pPr>
-              <a:spcAft>
-                <a:spcPts val="1400"/>
-              </a:spcAft>
-            </a:pPr>
-            <a:r>
-              <a:rPr sz="2400">
-                <a:solidFill>
-                  <a:srgbClr val="1F2A37"/>
-                </a:solidFill>
-              </a:rPr>
-              <a:t>• The keyframes say WHAT changes; animation says how to play it.</a:t>
-            </a:r>
-          </a:p>
-          <a:p>
-            <a:pPr>
-              <a:spcAft>
-                <a:spcPts val="1400"/>
-              </a:spcAft>
-            </a:pPr>
-            <a:r>
-              <a:rPr sz="2400">
-                <a:solidFill>
-                  <a:srgbClr val="1F2A37"/>
-                </a:solidFill>
-              </a:rPr>
-              <a:t>• 'blink 1s ... infinite' fades the cursor over and over.</a:t>
+              <a:t>content fills it with a block character "\258C" - our cursor.</a:t>
             </a:r>
           </a:p>
         </p:txBody>
@@ -24947,7 +25819,7 @@
                   <a:srgbClr val="01AEFD"/>
                 </a:solidFill>
               </a:rPr>
-              <a:t>Type this into style.css   -   line 87</a:t>
+              <a:t>Type this into style.css   -   line 86</a:t>
             </a:r>
           </a:p>
         </p:txBody>
@@ -25041,36 +25913,11 @@
             <a:r>
               <a:rPr sz="1800">
                 <a:solidFill>
-                  <a:srgbClr val="6D8C97"/>
+                  <a:srgbClr val="7FE0A0"/>
                 </a:solidFill>
                 <a:latin typeface="Consolas"/>
               </a:rPr>
               <a:t>  color: #01aefd;</a:t>
-            </a:r>
-          </a:p>
-          <a:p>
-            <a:pPr>
-              <a:spcAft>
-                <a:spcPts val="0"/>
-              </a:spcAft>
-            </a:pPr>
-            <a:r>
-              <a:rPr sz="1800">
-                <a:solidFill>
-                  <a:srgbClr val="6D8C97"/>
-                </a:solidFill>
-                <a:latin typeface="Consolas"/>
-              </a:rPr>
-              <a:t>  87  </a:t>
-            </a:r>
-            <a:r>
-              <a:rPr sz="1800">
-                <a:solidFill>
-                  <a:srgbClr val="7FE0A0"/>
-                </a:solidFill>
-                <a:latin typeface="Consolas"/>
-              </a:rPr>
-              <a:t>  animation: blink 1s steps(2, start) infinite;</a:t>
             </a:r>
           </a:p>
         </p:txBody>
@@ -25103,7 +25950,7 @@
                   <a:srgbClr val="DCECEF"/>
                 </a:solidFill>
               </a:rPr>
-              <a:t>Run the 'blink' animation: 1 second, 2 hard steps, forever.</a:t>
+              <a:t>Make the cursor blue.</a:t>
             </a:r>
           </a:p>
         </p:txBody>
@@ -25119,14 +25966,6 @@
 <file path=ppt/slides/slide49.xml><?xml version="1.0" encoding="utf-8"?>
 <p:sld xmlns:a="http://schemas.openxmlformats.org/drawingml/2006/main" xmlns:p="http://schemas.openxmlformats.org/presentationml/2006/main" xmlns:r="http://schemas.openxmlformats.org/officeDocument/2006/relationships">
   <p:cSld>
-    <p:bg>
-      <p:bgPr>
-        <a:solidFill>
-          <a:srgbClr val="102127"/>
-        </a:solidFill>
-        <a:effectLst/>
-      </p:bgPr>
-    </p:bg>
     <p:spTree>
       <p:nvGrpSpPr>
         <p:cNvPr id="1" name=""/>
@@ -25136,14 +25975,40 @@
       <p:grpSpPr/>
       <p:sp>
         <p:nvSpPr>
-          <p:cNvPr id="2" name="TextBox 1"/>
+          <p:cNvPr id="2" name="Title 1"/>
+          <p:cNvSpPr>
+            <a:spLocks noGrp="1"/>
+          </p:cNvSpPr>
+          <p:nvPr>
+            <p:ph type="title"/>
+          </p:nvPr>
+        </p:nvSpPr>
+        <p:spPr/>
+        <p:txBody>
+          <a:bodyPr/>
+          <a:lstStyle/>
+          <a:p>
+            <a:r>
+              <a:rPr sz="3800" b="1">
+                <a:solidFill>
+                  <a:srgbClr val="1F2A37"/>
+                </a:solidFill>
+              </a:rPr>
+              <a:t>animation</a:t>
+            </a:r>
+          </a:p>
+        </p:txBody>
+      </p:sp>
+      <p:sp>
+        <p:nvSpPr>
+          <p:cNvPr id="3" name="TextBox 2"/>
           <p:cNvSpPr txBox="1"/>
           <p:nvPr/>
         </p:nvSpPr>
         <p:spPr>
           <a:xfrm>
-            <a:off x="502920" y="274320"/>
-            <a:ext cx="11155680" cy="548640"/>
+            <a:off x="868680" y="502920"/>
+            <a:ext cx="5486400" cy="457200"/>
           </a:xfrm>
           <a:prstGeom prst="rect">
             <a:avLst/>
@@ -25157,160 +26022,12 @@
           <a:lstStyle/>
           <a:p>
             <a:r>
-              <a:rPr sz="2200" b="1">
+              <a:rPr sz="1500" b="1">
                 <a:solidFill>
                   <a:srgbClr val="01AEFD"/>
                 </a:solidFill>
               </a:rPr>
-              <a:t>Type this into style.css   -   line 88</a:t>
-            </a:r>
-          </a:p>
-        </p:txBody>
-      </p:sp>
-      <p:sp>
-        <p:nvSpPr>
-          <p:cNvPr id="3" name="TextBox 2"/>
-          <p:cNvSpPr txBox="1"/>
-          <p:nvPr/>
-        </p:nvSpPr>
-        <p:spPr>
-          <a:xfrm>
-            <a:off x="502920" y="960120"/>
-            <a:ext cx="11155680" cy="4297680"/>
-          </a:xfrm>
-          <a:prstGeom prst="rect">
-            <a:avLst/>
-          </a:prstGeom>
-          <a:noFill/>
-        </p:spPr>
-        <p:txBody>
-          <a:bodyPr wrap="none">
-            <a:spAutoFit/>
-          </a:bodyPr>
-          <a:lstStyle/>
-          <a:p>
-            <a:pPr>
-              <a:spcAft>
-                <a:spcPts val="0"/>
-              </a:spcAft>
-            </a:pPr>
-            <a:r>
-              <a:rPr sz="1800">
-                <a:solidFill>
-                  <a:srgbClr val="6D8C97"/>
-                </a:solidFill>
-                <a:latin typeface="Consolas"/>
-              </a:rPr>
-              <a:t>  84  </a:t>
-            </a:r>
-            <a:r>
-              <a:rPr sz="1800">
-                <a:solidFill>
-                  <a:srgbClr val="6D8C97"/>
-                </a:solidFill>
-                <a:latin typeface="Consolas"/>
-              </a:rPr>
-              <a:t>.bubble.writing::after {</a:t>
-            </a:r>
-          </a:p>
-          <a:p>
-            <a:pPr>
-              <a:spcAft>
-                <a:spcPts val="0"/>
-              </a:spcAft>
-            </a:pPr>
-            <a:r>
-              <a:rPr sz="1800">
-                <a:solidFill>
-                  <a:srgbClr val="6D8C97"/>
-                </a:solidFill>
-                <a:latin typeface="Consolas"/>
-              </a:rPr>
-              <a:t>  85  </a:t>
-            </a:r>
-            <a:r>
-              <a:rPr sz="1800">
-                <a:solidFill>
-                  <a:srgbClr val="6D8C97"/>
-                </a:solidFill>
-                <a:latin typeface="Consolas"/>
-              </a:rPr>
-              <a:t>  content: "\258C";</a:t>
-            </a:r>
-          </a:p>
-          <a:p>
-            <a:pPr>
-              <a:spcAft>
-                <a:spcPts val="0"/>
-              </a:spcAft>
-            </a:pPr>
-            <a:r>
-              <a:rPr sz="1800">
-                <a:solidFill>
-                  <a:srgbClr val="6D8C97"/>
-                </a:solidFill>
-                <a:latin typeface="Consolas"/>
-              </a:rPr>
-              <a:t>  86  </a:t>
-            </a:r>
-            <a:r>
-              <a:rPr sz="1800">
-                <a:solidFill>
-                  <a:srgbClr val="6D8C97"/>
-                </a:solidFill>
-                <a:latin typeface="Consolas"/>
-              </a:rPr>
-              <a:t>  color: #01aefd;</a:t>
-            </a:r>
-          </a:p>
-          <a:p>
-            <a:pPr>
-              <a:spcAft>
-                <a:spcPts val="0"/>
-              </a:spcAft>
-            </a:pPr>
-            <a:r>
-              <a:rPr sz="1800">
-                <a:solidFill>
-                  <a:srgbClr val="6D8C97"/>
-                </a:solidFill>
-                <a:latin typeface="Consolas"/>
-              </a:rPr>
-              <a:t>  87  </a:t>
-            </a:r>
-            <a:r>
-              <a:rPr sz="1800">
-                <a:solidFill>
-                  <a:srgbClr val="6D8C97"/>
-                </a:solidFill>
-                <a:latin typeface="Consolas"/>
-              </a:rPr>
-              <a:t>  animation: blink 1s steps(2, start) infinite;</a:t>
-            </a:r>
-          </a:p>
-          <a:p>
-            <a:pPr>
-              <a:spcAft>
-                <a:spcPts val="0"/>
-              </a:spcAft>
-            </a:pPr>
-            <a:r>
-              <a:rPr sz="1800">
-                <a:solidFill>
-                  <a:srgbClr val="6D8C97"/>
-                </a:solidFill>
-                <a:latin typeface="Consolas"/>
-              </a:rPr>
-              <a:t>  88  </a:t>
-            </a:r>
-            <a:r>
-              <a:rPr sz="1800">
-                <a:solidFill>
-                  <a:srgbClr val="7FE0A0"/>
-                </a:solidFill>
-                <a:latin typeface="Consolas"/>
-              </a:rPr>
-              <a:t>}</a:t>
+              <a:t>CSS</a:t>
             </a:r>
           </a:p>
         </p:txBody>
@@ -25323,8 +26040,8 @@
         </p:nvSpPr>
         <p:spPr>
           <a:xfrm>
-            <a:off x="548640" y="5623560"/>
-            <a:ext cx="11064240" cy="1051560"/>
+            <a:off x="822960" y="1828800"/>
+            <a:ext cx="10515600" cy="4206240"/>
           </a:xfrm>
           <a:prstGeom prst="rect">
             <a:avLst/>
@@ -25337,13 +26054,63 @@
           </a:bodyPr>
           <a:lstStyle/>
           <a:p>
-            <a:r>
-              <a:rPr sz="2000">
-                <a:solidFill>
-                  <a:srgbClr val="DCECEF"/>
-                </a:solidFill>
-              </a:rPr>
-              <a:t>Close the rule.</a:t>
+            <a:pPr>
+              <a:spcAft>
+                <a:spcPts val="1400"/>
+              </a:spcAft>
+            </a:pPr>
+            <a:r>
+              <a:rPr sz="2800">
+                <a:solidFill>
+                  <a:srgbClr val="01AEFD"/>
+                </a:solidFill>
+              </a:rPr>
+              <a:t>animation: blink 1s steps(2, start) infinite;</a:t>
+            </a:r>
+          </a:p>
+          <a:p>
+            <a:pPr>
+              <a:spcAft>
+                <a:spcPts val="1400"/>
+              </a:spcAft>
+            </a:pPr>
+            <a:r>
+              <a:rPr sz="2400">
+                <a:solidFill>
+                  <a:srgbClr val="1F2A37"/>
+                </a:solidFill>
+              </a:rPr>
+              <a:t>• Plays a keyframes animation: its name, how long, the timing, how often.</a:t>
+            </a:r>
+          </a:p>
+          <a:p>
+            <a:pPr>
+              <a:spcAft>
+                <a:spcPts val="1400"/>
+              </a:spcAft>
+            </a:pPr>
+            <a:r>
+              <a:rPr sz="2400">
+                <a:solidFill>
+                  <a:srgbClr val="1F2A37"/>
+                </a:solidFill>
+              </a:rPr>
+              <a:t>• The keyframes say WHAT changes; animation says how to play it.</a:t>
+            </a:r>
+          </a:p>
+          <a:p>
+            <a:pPr>
+              <a:spcAft>
+                <a:spcPts val="1400"/>
+              </a:spcAft>
+            </a:pPr>
+            <a:r>
+              <a:rPr sz="2400">
+                <a:solidFill>
+                  <a:srgbClr val="1F2A37"/>
+                </a:solidFill>
+              </a:rPr>
+              <a:t>• 'blink 1s ... infinite' fades the cursor over and over.</a:t>
             </a:r>
           </a:p>
         </p:txBody>
@@ -25486,6 +26253,14 @@
 <file path=ppt/slides/slide50.xml><?xml version="1.0" encoding="utf-8"?>
 <p:sld xmlns:a="http://schemas.openxmlformats.org/drawingml/2006/main" xmlns:p="http://schemas.openxmlformats.org/presentationml/2006/main" xmlns:r="http://schemas.openxmlformats.org/officeDocument/2006/relationships">
   <p:cSld>
+    <p:bg>
+      <p:bgPr>
+        <a:solidFill>
+          <a:srgbClr val="F4F8FB"/>
+        </a:solidFill>
+        <a:effectLst/>
+      </p:bgPr>
+    </p:bg>
     <p:spTree>
       <p:nvGrpSpPr>
         <p:cNvPr id="1" name=""/>
@@ -25495,40 +26270,14 @@
       <p:grpSpPr/>
       <p:sp>
         <p:nvSpPr>
-          <p:cNvPr id="2" name="Title 1"/>
-          <p:cNvSpPr>
-            <a:spLocks noGrp="1"/>
-          </p:cNvSpPr>
-          <p:nvPr>
-            <p:ph type="title"/>
-          </p:nvPr>
-        </p:nvSpPr>
-        <p:spPr/>
-        <p:txBody>
-          <a:bodyPr/>
-          <a:lstStyle/>
-          <a:p>
-            <a:r>
-              <a:rPr sz="3800" b="1">
-                <a:solidFill>
-                  <a:srgbClr val="1F2A37"/>
-                </a:solidFill>
-              </a:rPr>
-              <a:t>visibility</a:t>
-            </a:r>
-          </a:p>
-        </p:txBody>
-      </p:sp>
-      <p:sp>
-        <p:nvSpPr>
-          <p:cNvPr id="3" name="TextBox 2"/>
+          <p:cNvPr id="2" name="TextBox 1"/>
           <p:cNvSpPr txBox="1"/>
           <p:nvPr/>
         </p:nvSpPr>
         <p:spPr>
           <a:xfrm>
-            <a:off x="868680" y="502920"/>
-            <a:ext cx="5486400" cy="457200"/>
+            <a:off x="822960" y="365760"/>
+            <a:ext cx="7315200" cy="365760"/>
           </a:xfrm>
           <a:prstGeom prst="rect">
             <a:avLst/>
@@ -25542,26 +26291,543 @@
           <a:lstStyle/>
           <a:p>
             <a:r>
-              <a:rPr sz="1500" b="1">
+              <a:rPr sz="1400" b="1">
                 <a:solidFill>
                   <a:srgbClr val="01AEFD"/>
                 </a:solidFill>
               </a:rPr>
-              <a:t>CSS</a:t>
+              <a:t>ON THE PAGE</a:t>
             </a:r>
           </a:p>
         </p:txBody>
       </p:sp>
       <p:sp>
         <p:nvSpPr>
-          <p:cNvPr id="4" name="TextBox 3"/>
+          <p:cNvPr id="3" name="TextBox 2"/>
           <p:cNvSpPr txBox="1"/>
           <p:nvPr/>
         </p:nvSpPr>
         <p:spPr>
           <a:xfrm>
-            <a:off x="822960" y="1828800"/>
-            <a:ext cx="10515600" cy="4206240"/>
+            <a:off x="822960" y="658368"/>
+            <a:ext cx="10515600" cy="731520"/>
+          </a:xfrm>
+          <a:prstGeom prst="rect">
+            <a:avLst/>
+          </a:prstGeom>
+          <a:noFill/>
+        </p:spPr>
+        <p:txBody>
+          <a:bodyPr wrap="none">
+            <a:spAutoFit/>
+          </a:bodyPr>
+          <a:lstStyle/>
+          <a:p>
+            <a:r>
+              <a:rPr sz="3200" b="1">
+                <a:solidFill>
+                  <a:srgbClr val="1F2A37"/>
+                </a:solidFill>
+              </a:rPr>
+              <a:t>animation</a:t>
+            </a:r>
+          </a:p>
+        </p:txBody>
+      </p:sp>
+      <p:sp>
+        <p:nvSpPr>
+          <p:cNvPr id="4" name="Rounded Rectangle 3"/>
+          <p:cNvSpPr/>
+          <p:nvPr/>
+        </p:nvSpPr>
+        <p:spPr>
+          <a:xfrm>
+            <a:off x="3454237" y="1641896"/>
+            <a:ext cx="5249387" cy="3918021"/>
+          </a:xfrm>
+          <a:prstGeom prst="roundRect">
+            <a:avLst/>
+          </a:prstGeom>
+          <a:solidFill>
+            <a:srgbClr val="0F1F27"/>
+          </a:solidFill>
+          <a:ln>
+            <a:noFill/>
+          </a:ln>
+          <a:effectLst/>
+        </p:spPr>
+        <p:style>
+          <a:lnRef idx="1">
+            <a:schemeClr val="accent1"/>
+          </a:lnRef>
+          <a:fillRef idx="3">
+            <a:schemeClr val="accent1"/>
+          </a:fillRef>
+          <a:effectRef idx="2">
+            <a:schemeClr val="accent1"/>
+          </a:effectRef>
+          <a:fontRef idx="minor">
+            <a:schemeClr val="lt1"/>
+          </a:fontRef>
+        </p:style>
+        <p:txBody>
+          <a:bodyPr rtlCol="0" anchor="ctr"/>
+          <a:lstStyle/>
+          <a:p>
+            <a:pPr algn="ctr"/>
+          </a:p>
+        </p:txBody>
+      </p:sp>
+      <p:sp>
+        <p:nvSpPr>
+          <p:cNvPr id="5" name="Rounded Rectangle 4"/>
+          <p:cNvSpPr/>
+          <p:nvPr/>
+        </p:nvSpPr>
+        <p:spPr>
+          <a:xfrm>
+            <a:off x="3606393" y="2022287"/>
+            <a:ext cx="4945075" cy="437448"/>
+          </a:xfrm>
+          <a:prstGeom prst="roundRect">
+            <a:avLst/>
+          </a:prstGeom>
+          <a:solidFill>
+            <a:srgbClr val="16303A"/>
+          </a:solidFill>
+          <a:ln>
+            <a:noFill/>
+          </a:ln>
+          <a:effectLst/>
+        </p:spPr>
+        <p:style>
+          <a:lnRef idx="1">
+            <a:schemeClr val="accent1"/>
+          </a:lnRef>
+          <a:fillRef idx="3">
+            <a:schemeClr val="accent1"/>
+          </a:fillRef>
+          <a:effectRef idx="2">
+            <a:schemeClr val="accent1"/>
+          </a:effectRef>
+          <a:fontRef idx="minor">
+            <a:schemeClr val="lt1"/>
+          </a:fontRef>
+        </p:style>
+        <p:txBody>
+          <a:bodyPr rtlCol="0" anchor="ctr"/>
+          <a:lstStyle/>
+          <a:p>
+            <a:pPr algn="ctr"/>
+          </a:p>
+        </p:txBody>
+      </p:sp>
+      <p:sp>
+        <p:nvSpPr>
+          <p:cNvPr id="6" name="Rounded Rectangle 5"/>
+          <p:cNvSpPr/>
+          <p:nvPr/>
+        </p:nvSpPr>
+        <p:spPr>
+          <a:xfrm>
+            <a:off x="3720510" y="2155423"/>
+            <a:ext cx="1426463" cy="190195"/>
+          </a:xfrm>
+          <a:prstGeom prst="roundRect">
+            <a:avLst/>
+          </a:prstGeom>
+          <a:solidFill>
+            <a:srgbClr val="4A6B78"/>
+          </a:solidFill>
+          <a:ln>
+            <a:noFill/>
+          </a:ln>
+          <a:effectLst/>
+        </p:spPr>
+        <p:style>
+          <a:lnRef idx="1">
+            <a:schemeClr val="accent1"/>
+          </a:lnRef>
+          <a:fillRef idx="3">
+            <a:schemeClr val="accent1"/>
+          </a:fillRef>
+          <a:effectRef idx="2">
+            <a:schemeClr val="accent1"/>
+          </a:effectRef>
+          <a:fontRef idx="minor">
+            <a:schemeClr val="lt1"/>
+          </a:fontRef>
+        </p:style>
+        <p:txBody>
+          <a:bodyPr rtlCol="0" anchor="ctr"/>
+          <a:lstStyle/>
+          <a:p>
+            <a:pPr algn="ctr"/>
+          </a:p>
+        </p:txBody>
+      </p:sp>
+      <p:sp>
+        <p:nvSpPr>
+          <p:cNvPr id="7" name="Rounded Rectangle 6"/>
+          <p:cNvSpPr/>
+          <p:nvPr/>
+        </p:nvSpPr>
+        <p:spPr>
+          <a:xfrm>
+            <a:off x="3606393" y="2554833"/>
+            <a:ext cx="4945075" cy="1806854"/>
+          </a:xfrm>
+          <a:prstGeom prst="roundRect">
+            <a:avLst/>
+          </a:prstGeom>
+          <a:solidFill>
+            <a:srgbClr val="0B171D"/>
+          </a:solidFill>
+          <a:ln>
+            <a:noFill/>
+          </a:ln>
+          <a:effectLst/>
+        </p:spPr>
+        <p:style>
+          <a:lnRef idx="1">
+            <a:schemeClr val="accent1"/>
+          </a:lnRef>
+          <a:fillRef idx="3">
+            <a:schemeClr val="accent1"/>
+          </a:fillRef>
+          <a:effectRef idx="2">
+            <a:schemeClr val="accent1"/>
+          </a:effectRef>
+          <a:fontRef idx="minor">
+            <a:schemeClr val="lt1"/>
+          </a:fontRef>
+        </p:style>
+        <p:txBody>
+          <a:bodyPr rtlCol="0" anchor="ctr"/>
+          <a:lstStyle/>
+          <a:p>
+            <a:pPr algn="ctr"/>
+          </a:p>
+        </p:txBody>
+      </p:sp>
+      <p:sp>
+        <p:nvSpPr>
+          <p:cNvPr id="8" name="Rounded Rectangle 7"/>
+          <p:cNvSpPr/>
+          <p:nvPr/>
+        </p:nvSpPr>
+        <p:spPr>
+          <a:xfrm>
+            <a:off x="3720510" y="2668950"/>
+            <a:ext cx="2852927" cy="399409"/>
+          </a:xfrm>
+          <a:prstGeom prst="roundRect">
+            <a:avLst/>
+          </a:prstGeom>
+          <a:solidFill>
+            <a:srgbClr val="1B3540"/>
+          </a:solidFill>
+          <a:ln>
+            <a:noFill/>
+          </a:ln>
+          <a:effectLst/>
+        </p:spPr>
+        <p:style>
+          <a:lnRef idx="1">
+            <a:schemeClr val="accent1"/>
+          </a:lnRef>
+          <a:fillRef idx="3">
+            <a:schemeClr val="accent1"/>
+          </a:fillRef>
+          <a:effectRef idx="2">
+            <a:schemeClr val="accent1"/>
+          </a:effectRef>
+          <a:fontRef idx="minor">
+            <a:schemeClr val="lt1"/>
+          </a:fontRef>
+        </p:style>
+        <p:txBody>
+          <a:bodyPr rtlCol="0" anchor="ctr"/>
+          <a:lstStyle/>
+          <a:p>
+            <a:pPr algn="ctr"/>
+          </a:p>
+        </p:txBody>
+      </p:sp>
+      <p:sp>
+        <p:nvSpPr>
+          <p:cNvPr id="9" name="Rounded Rectangle 8"/>
+          <p:cNvSpPr/>
+          <p:nvPr/>
+        </p:nvSpPr>
+        <p:spPr>
+          <a:xfrm>
+            <a:off x="5584423" y="3182477"/>
+            <a:ext cx="2852927" cy="399409"/>
+          </a:xfrm>
+          <a:prstGeom prst="roundRect">
+            <a:avLst/>
+          </a:prstGeom>
+          <a:solidFill>
+            <a:srgbClr val="123A32"/>
+          </a:solidFill>
+          <a:ln>
+            <a:noFill/>
+          </a:ln>
+          <a:effectLst/>
+        </p:spPr>
+        <p:style>
+          <a:lnRef idx="1">
+            <a:schemeClr val="accent1"/>
+          </a:lnRef>
+          <a:fillRef idx="3">
+            <a:schemeClr val="accent1"/>
+          </a:fillRef>
+          <a:effectRef idx="2">
+            <a:schemeClr val="accent1"/>
+          </a:effectRef>
+          <a:fontRef idx="minor">
+            <a:schemeClr val="lt1"/>
+          </a:fontRef>
+        </p:style>
+        <p:txBody>
+          <a:bodyPr rtlCol="0" anchor="ctr"/>
+          <a:lstStyle/>
+          <a:p>
+            <a:pPr algn="ctr"/>
+          </a:p>
+        </p:txBody>
+      </p:sp>
+      <p:sp>
+        <p:nvSpPr>
+          <p:cNvPr id="10" name="Rounded Rectangle 9"/>
+          <p:cNvSpPr/>
+          <p:nvPr/>
+        </p:nvSpPr>
+        <p:spPr>
+          <a:xfrm>
+            <a:off x="3720510" y="3696004"/>
+            <a:ext cx="3138220" cy="399409"/>
+          </a:xfrm>
+          <a:prstGeom prst="roundRect">
+            <a:avLst/>
+          </a:prstGeom>
+          <a:solidFill>
+            <a:srgbClr val="1B3540"/>
+          </a:solidFill>
+          <a:ln>
+            <a:noFill/>
+          </a:ln>
+          <a:effectLst/>
+        </p:spPr>
+        <p:style>
+          <a:lnRef idx="1">
+            <a:schemeClr val="accent1"/>
+          </a:lnRef>
+          <a:fillRef idx="3">
+            <a:schemeClr val="accent1"/>
+          </a:fillRef>
+          <a:effectRef idx="2">
+            <a:schemeClr val="accent1"/>
+          </a:effectRef>
+          <a:fontRef idx="minor">
+            <a:schemeClr val="lt1"/>
+          </a:fontRef>
+        </p:style>
+        <p:txBody>
+          <a:bodyPr rtlCol="0" anchor="ctr"/>
+          <a:lstStyle/>
+          <a:p>
+            <a:pPr algn="ctr"/>
+          </a:p>
+        </p:txBody>
+      </p:sp>
+      <p:sp>
+        <p:nvSpPr>
+          <p:cNvPr id="11" name="Rounded Rectangle 10"/>
+          <p:cNvSpPr/>
+          <p:nvPr/>
+        </p:nvSpPr>
+        <p:spPr>
+          <a:xfrm>
+            <a:off x="3701491" y="4856195"/>
+            <a:ext cx="3899001" cy="323331"/>
+          </a:xfrm>
+          <a:prstGeom prst="roundRect">
+            <a:avLst/>
+          </a:prstGeom>
+          <a:solidFill>
+            <a:srgbClr val="16303A"/>
+          </a:solidFill>
+          <a:ln>
+            <a:noFill/>
+          </a:ln>
+          <a:effectLst/>
+        </p:spPr>
+        <p:style>
+          <a:lnRef idx="1">
+            <a:schemeClr val="accent1"/>
+          </a:lnRef>
+          <a:fillRef idx="3">
+            <a:schemeClr val="accent1"/>
+          </a:fillRef>
+          <a:effectRef idx="2">
+            <a:schemeClr val="accent1"/>
+          </a:effectRef>
+          <a:fontRef idx="minor">
+            <a:schemeClr val="lt1"/>
+          </a:fontRef>
+        </p:style>
+        <p:txBody>
+          <a:bodyPr rtlCol="0" anchor="ctr"/>
+          <a:lstStyle/>
+          <a:p>
+            <a:pPr algn="ctr"/>
+          </a:p>
+        </p:txBody>
+      </p:sp>
+      <p:sp>
+        <p:nvSpPr>
+          <p:cNvPr id="12" name="Rounded Rectangle 11"/>
+          <p:cNvSpPr/>
+          <p:nvPr/>
+        </p:nvSpPr>
+        <p:spPr>
+          <a:xfrm>
+            <a:off x="7695590" y="4856195"/>
+            <a:ext cx="779800" cy="323331"/>
+          </a:xfrm>
+          <a:prstGeom prst="roundRect">
+            <a:avLst/>
+          </a:prstGeom>
+          <a:solidFill>
+            <a:srgbClr val="01AEFD"/>
+          </a:solidFill>
+          <a:ln>
+            <a:noFill/>
+          </a:ln>
+          <a:effectLst/>
+        </p:spPr>
+        <p:style>
+          <a:lnRef idx="1">
+            <a:schemeClr val="accent1"/>
+          </a:lnRef>
+          <a:fillRef idx="3">
+            <a:schemeClr val="accent1"/>
+          </a:fillRef>
+          <a:effectRef idx="2">
+            <a:schemeClr val="accent1"/>
+          </a:effectRef>
+          <a:fontRef idx="minor">
+            <a:schemeClr val="lt1"/>
+          </a:fontRef>
+        </p:style>
+        <p:txBody>
+          <a:bodyPr rtlCol="0" anchor="ctr"/>
+          <a:lstStyle/>
+          <a:p>
+            <a:pPr algn="ctr"/>
+          </a:p>
+        </p:txBody>
+      </p:sp>
+      <p:sp>
+        <p:nvSpPr>
+          <p:cNvPr id="13" name="Rounded Rectangle 12"/>
+          <p:cNvSpPr/>
+          <p:nvPr/>
+        </p:nvSpPr>
+        <p:spPr>
+          <a:xfrm>
+            <a:off x="3720510" y="5407761"/>
+            <a:ext cx="1616659" cy="95097"/>
+          </a:xfrm>
+          <a:prstGeom prst="roundRect">
+            <a:avLst/>
+          </a:prstGeom>
+          <a:solidFill>
+            <a:srgbClr val="2A4550"/>
+          </a:solidFill>
+          <a:ln>
+            <a:noFill/>
+          </a:ln>
+          <a:effectLst/>
+        </p:spPr>
+        <p:style>
+          <a:lnRef idx="1">
+            <a:schemeClr val="accent1"/>
+          </a:lnRef>
+          <a:fillRef idx="3">
+            <a:schemeClr val="accent1"/>
+          </a:fillRef>
+          <a:effectRef idx="2">
+            <a:schemeClr val="accent1"/>
+          </a:effectRef>
+          <a:fontRef idx="minor">
+            <a:schemeClr val="lt1"/>
+          </a:fontRef>
+        </p:style>
+        <p:txBody>
+          <a:bodyPr rtlCol="0" anchor="ctr"/>
+          <a:lstStyle/>
+          <a:p>
+            <a:pPr algn="ctr"/>
+          </a:p>
+        </p:txBody>
+      </p:sp>
+      <p:sp>
+        <p:nvSpPr>
+          <p:cNvPr id="14" name="Rounded Rectangle 13"/>
+          <p:cNvSpPr/>
+          <p:nvPr/>
+        </p:nvSpPr>
+        <p:spPr>
+          <a:xfrm>
+            <a:off x="3682471" y="2630911"/>
+            <a:ext cx="2929006" cy="475488"/>
+          </a:xfrm>
+          <a:prstGeom prst="roundRect">
+            <a:avLst/>
+          </a:prstGeom>
+          <a:noFill/>
+          <a:ln w="44450">
+            <a:solidFill>
+              <a:srgbClr val="FFD633"/>
+            </a:solidFill>
+          </a:ln>
+          <a:effectLst/>
+        </p:spPr>
+        <p:style>
+          <a:lnRef idx="1">
+            <a:schemeClr val="accent1"/>
+          </a:lnRef>
+          <a:fillRef idx="3">
+            <a:schemeClr val="accent1"/>
+          </a:fillRef>
+          <a:effectRef idx="2">
+            <a:schemeClr val="accent1"/>
+          </a:effectRef>
+          <a:fontRef idx="minor">
+            <a:schemeClr val="lt1"/>
+          </a:fontRef>
+        </p:style>
+        <p:txBody>
+          <a:bodyPr rtlCol="0" anchor="ctr"/>
+          <a:lstStyle/>
+          <a:p>
+            <a:pPr algn="ctr"/>
+          </a:p>
+        </p:txBody>
+      </p:sp>
+      <p:sp>
+        <p:nvSpPr>
+          <p:cNvPr id="15" name="TextBox 14"/>
+          <p:cNvSpPr txBox="1"/>
+          <p:nvPr/>
+        </p:nvSpPr>
+        <p:spPr>
+          <a:xfrm>
+            <a:off x="822960" y="6172200"/>
+            <a:ext cx="10515600" cy="548640"/>
           </a:xfrm>
           <a:prstGeom prst="rect">
             <a:avLst/>
@@ -25574,63 +26840,13 @@
           </a:bodyPr>
           <a:lstStyle/>
           <a:p>
-            <a:pPr>
-              <a:spcAft>
-                <a:spcPts val="1400"/>
-              </a:spcAft>
-            </a:pPr>
-            <a:r>
-              <a:rPr sz="2800">
-                <a:solidFill>
-                  <a:srgbClr val="01AEFD"/>
-                </a:solidFill>
-              </a:rPr>
-              <a:t>to { visibility: hidden; }</a:t>
-            </a:r>
-          </a:p>
-          <a:p>
-            <a:pPr>
-              <a:spcAft>
-                <a:spcPts val="1400"/>
-              </a:spcAft>
-            </a:pPr>
-            <a:r>
-              <a:rPr sz="2400">
-                <a:solidFill>
-                  <a:srgbClr val="1F2A37"/>
-                </a:solidFill>
-              </a:rPr>
-              <a:t>• Hides the element but KEEPS its space.</a:t>
-            </a:r>
-          </a:p>
-          <a:p>
-            <a:pPr>
-              <a:spcAft>
-                <a:spcPts val="1400"/>
-              </a:spcAft>
-            </a:pPr>
-            <a:r>
-              <a:rPr sz="2400">
-                <a:solidFill>
-                  <a:srgbClr val="1F2A37"/>
-                </a:solidFill>
-              </a:rPr>
-              <a:t>• So the blinking cursor vanishes without the text jumping around.</a:t>
-            </a:r>
-          </a:p>
-          <a:p>
-            <a:pPr>
-              <a:spcAft>
-                <a:spcPts val="1400"/>
-              </a:spcAft>
-            </a:pPr>
-            <a:r>
-              <a:rPr sz="2400">
-                <a:solidFill>
-                  <a:srgbClr val="1F2A37"/>
-                </a:solidFill>
-              </a:rPr>
-              <a:t>• Different from removing it (.remove, week 5), which collapses the gap.</a:t>
+            <a:r>
+              <a:rPr sz="2000">
+                <a:solidFill>
+                  <a:srgbClr val="0A6299"/>
+                </a:solidFill>
+              </a:rPr>
+              <a:t>animation drives the little typing dots in a bubble.</a:t>
             </a:r>
           </a:p>
         </p:txBody>
@@ -25689,7 +26905,7 @@
                   <a:srgbClr val="01AEFD"/>
                 </a:solidFill>
               </a:rPr>
-              <a:t>Type this into style.css   -   line 89</a:t>
+              <a:t>Type this into style.css   -   line 87</a:t>
             </a:r>
           </a:p>
         </p:txBody>
@@ -25808,61 +27024,11 @@
             <a:r>
               <a:rPr sz="1800">
                 <a:solidFill>
-                  <a:srgbClr val="6D8C97"/>
+                  <a:srgbClr val="7FE0A0"/>
                 </a:solidFill>
                 <a:latin typeface="Consolas"/>
               </a:rPr>
               <a:t>  animation: blink 1s steps(2, start) infinite;</a:t>
-            </a:r>
-          </a:p>
-          <a:p>
-            <a:pPr>
-              <a:spcAft>
-                <a:spcPts val="0"/>
-              </a:spcAft>
-            </a:pPr>
-            <a:r>
-              <a:rPr sz="1800">
-                <a:solidFill>
-                  <a:srgbClr val="6D8C97"/>
-                </a:solidFill>
-                <a:latin typeface="Consolas"/>
-              </a:rPr>
-              <a:t>  88  </a:t>
-            </a:r>
-            <a:r>
-              <a:rPr sz="1800">
-                <a:solidFill>
-                  <a:srgbClr val="6D8C97"/>
-                </a:solidFill>
-                <a:latin typeface="Consolas"/>
-              </a:rPr>
-              <a:t>}</a:t>
-            </a:r>
-          </a:p>
-          <a:p>
-            <a:pPr>
-              <a:spcAft>
-                <a:spcPts val="0"/>
-              </a:spcAft>
-            </a:pPr>
-            <a:r>
-              <a:rPr sz="1800">
-                <a:solidFill>
-                  <a:srgbClr val="6D8C97"/>
-                </a:solidFill>
-                <a:latin typeface="Consolas"/>
-              </a:rPr>
-              <a:t>  89  </a:t>
-            </a:r>
-            <a:r>
-              <a:rPr sz="1800">
-                <a:solidFill>
-                  <a:srgbClr val="7FE0A0"/>
-                </a:solidFill>
-                <a:latin typeface="Consolas"/>
-              </a:rPr>
-              <a:t>@keyframes blink { to { visibility: hidden; } }</a:t>
             </a:r>
           </a:p>
         </p:txBody>
@@ -25895,7 +27061,7 @@
                   <a:srgbClr val="DCECEF"/>
                 </a:solidFill>
               </a:rPr>
-              <a:t>@keyframes defines 'blink': fade the cursor to hidden and back, over and over.</a:t>
+              <a:t>Run the 'blink' animation: 1 second, 2 hard steps, forever.</a:t>
             </a:r>
           </a:p>
         </p:txBody>
@@ -25954,7 +27120,7 @@
                   <a:srgbClr val="01AEFD"/>
                 </a:solidFill>
               </a:rPr>
-              <a:t>All together in style.css</a:t>
+              <a:t>Type this into style.css   -   line 88</a:t>
             </a:r>
           </a:p>
         </p:txBody>
@@ -25998,136 +27164,111 @@
             <a:r>
               <a:rPr sz="1800">
                 <a:solidFill>
+                  <a:srgbClr val="6D8C97"/>
+                </a:solidFill>
+                <a:latin typeface="Consolas"/>
+              </a:rPr>
+              <a:t>.bubble.writing::after {</a:t>
+            </a:r>
+          </a:p>
+          <a:p>
+            <a:pPr>
+              <a:spcAft>
+                <a:spcPts val="0"/>
+              </a:spcAft>
+            </a:pPr>
+            <a:r>
+              <a:rPr sz="1800">
+                <a:solidFill>
+                  <a:srgbClr val="6D8C97"/>
+                </a:solidFill>
+                <a:latin typeface="Consolas"/>
+              </a:rPr>
+              <a:t>  85  </a:t>
+            </a:r>
+            <a:r>
+              <a:rPr sz="1800">
+                <a:solidFill>
+                  <a:srgbClr val="6D8C97"/>
+                </a:solidFill>
+                <a:latin typeface="Consolas"/>
+              </a:rPr>
+              <a:t>  content: "\258C";</a:t>
+            </a:r>
+          </a:p>
+          <a:p>
+            <a:pPr>
+              <a:spcAft>
+                <a:spcPts val="0"/>
+              </a:spcAft>
+            </a:pPr>
+            <a:r>
+              <a:rPr sz="1800">
+                <a:solidFill>
+                  <a:srgbClr val="6D8C97"/>
+                </a:solidFill>
+                <a:latin typeface="Consolas"/>
+              </a:rPr>
+              <a:t>  86  </a:t>
+            </a:r>
+            <a:r>
+              <a:rPr sz="1800">
+                <a:solidFill>
+                  <a:srgbClr val="6D8C97"/>
+                </a:solidFill>
+                <a:latin typeface="Consolas"/>
+              </a:rPr>
+              <a:t>  color: #01aefd;</a:t>
+            </a:r>
+          </a:p>
+          <a:p>
+            <a:pPr>
+              <a:spcAft>
+                <a:spcPts val="0"/>
+              </a:spcAft>
+            </a:pPr>
+            <a:r>
+              <a:rPr sz="1800">
+                <a:solidFill>
+                  <a:srgbClr val="6D8C97"/>
+                </a:solidFill>
+                <a:latin typeface="Consolas"/>
+              </a:rPr>
+              <a:t>  87  </a:t>
+            </a:r>
+            <a:r>
+              <a:rPr sz="1800">
+                <a:solidFill>
+                  <a:srgbClr val="6D8C97"/>
+                </a:solidFill>
+                <a:latin typeface="Consolas"/>
+              </a:rPr>
+              <a:t>  animation: blink 1s steps(2, start) infinite;</a:t>
+            </a:r>
+          </a:p>
+          <a:p>
+            <a:pPr>
+              <a:spcAft>
+                <a:spcPts val="0"/>
+              </a:spcAft>
+            </a:pPr>
+            <a:r>
+              <a:rPr sz="1800">
+                <a:solidFill>
+                  <a:srgbClr val="6D8C97"/>
+                </a:solidFill>
+                <a:latin typeface="Consolas"/>
+              </a:rPr>
+              <a:t>  88  </a:t>
+            </a:r>
+            <a:r>
+              <a:rPr sz="1800">
+                <a:solidFill>
                   <a:srgbClr val="7FE0A0"/>
                 </a:solidFill>
                 <a:latin typeface="Consolas"/>
               </a:rPr>
-              <a:t>.bubble.writing::after {</a:t>
-            </a:r>
-          </a:p>
-          <a:p>
-            <a:pPr>
-              <a:spcAft>
-                <a:spcPts val="0"/>
-              </a:spcAft>
-            </a:pPr>
-            <a:r>
-              <a:rPr sz="1800">
-                <a:solidFill>
-                  <a:srgbClr val="6D8C97"/>
-                </a:solidFill>
-                <a:latin typeface="Consolas"/>
-              </a:rPr>
-              <a:t>  85  </a:t>
-            </a:r>
-            <a:r>
-              <a:rPr sz="1800">
-                <a:solidFill>
-                  <a:srgbClr val="7FE0A0"/>
-                </a:solidFill>
-                <a:latin typeface="Consolas"/>
-              </a:rPr>
-              <a:t>  content: "\258C";</a:t>
-            </a:r>
-          </a:p>
-          <a:p>
-            <a:pPr>
-              <a:spcAft>
-                <a:spcPts val="0"/>
-              </a:spcAft>
-            </a:pPr>
-            <a:r>
-              <a:rPr sz="1800">
-                <a:solidFill>
-                  <a:srgbClr val="6D8C97"/>
-                </a:solidFill>
-                <a:latin typeface="Consolas"/>
-              </a:rPr>
-              <a:t>  86  </a:t>
-            </a:r>
-            <a:r>
-              <a:rPr sz="1800">
-                <a:solidFill>
-                  <a:srgbClr val="7FE0A0"/>
-                </a:solidFill>
-                <a:latin typeface="Consolas"/>
-              </a:rPr>
-              <a:t>  color: #01aefd;</a:t>
-            </a:r>
-          </a:p>
-          <a:p>
-            <a:pPr>
-              <a:spcAft>
-                <a:spcPts val="0"/>
-              </a:spcAft>
-            </a:pPr>
-            <a:r>
-              <a:rPr sz="1800">
-                <a:solidFill>
-                  <a:srgbClr val="6D8C97"/>
-                </a:solidFill>
-                <a:latin typeface="Consolas"/>
-              </a:rPr>
-              <a:t>  87  </a:t>
-            </a:r>
-            <a:r>
-              <a:rPr sz="1800">
-                <a:solidFill>
-                  <a:srgbClr val="7FE0A0"/>
-                </a:solidFill>
-                <a:latin typeface="Consolas"/>
-              </a:rPr>
-              <a:t>  animation: blink 1s steps(2, start) infinite;</a:t>
-            </a:r>
-          </a:p>
-          <a:p>
-            <a:pPr>
-              <a:spcAft>
-                <a:spcPts val="0"/>
-              </a:spcAft>
-            </a:pPr>
-            <a:r>
-              <a:rPr sz="1800">
-                <a:solidFill>
-                  <a:srgbClr val="6D8C97"/>
-                </a:solidFill>
-                <a:latin typeface="Consolas"/>
-              </a:rPr>
-              <a:t>  88  </a:t>
-            </a:r>
-            <a:r>
-              <a:rPr sz="1800">
-                <a:solidFill>
-                  <a:srgbClr val="7FE0A0"/>
-                </a:solidFill>
-                <a:latin typeface="Consolas"/>
-              </a:rPr>
               <a:t>}</a:t>
-            </a:r>
-          </a:p>
-          <a:p>
-            <a:pPr>
-              <a:spcAft>
-                <a:spcPts val="0"/>
-              </a:spcAft>
-            </a:pPr>
-            <a:r>
-              <a:rPr sz="1800">
-                <a:solidFill>
-                  <a:srgbClr val="6D8C97"/>
-                </a:solidFill>
-                <a:latin typeface="Consolas"/>
-              </a:rPr>
-              <a:t>  89  </a:t>
-            </a:r>
-            <a:r>
-              <a:rPr sz="1800">
-                <a:solidFill>
-                  <a:srgbClr val="7FE0A0"/>
-                </a:solidFill>
-                <a:latin typeface="Consolas"/>
-              </a:rPr>
-              <a:t>@keyframes blink { to { visibility: hidden; } }</a:t>
             </a:r>
           </a:p>
         </p:txBody>
@@ -26160,7 +27301,7 @@
                   <a:srgbClr val="DCECEF"/>
                 </a:solidFill>
               </a:rPr>
-              <a:t>That is the whole piece. Check yours looks the same before moving on.</a:t>
+              <a:t>Close the rule.</a:t>
             </a:r>
           </a:p>
         </p:txBody>
@@ -26204,7 +27345,7 @@
                   <a:srgbClr val="1F2A37"/>
                 </a:solidFill>
               </a:rPr>
-              <a:t>Checkpoint: watch it type</a:t>
+              <a:t>visibility</a:t>
             </a:r>
           </a:p>
         </p:txBody>
@@ -26237,7 +27378,7 @@
                   <a:srgbClr val="01AEFD"/>
                 </a:solidFill>
               </a:rPr>
-              <a:t>CHECKPOINT - RUN IT</a:t>
+              <a:t>CSS</a:t>
             </a:r>
           </a:p>
         </p:txBody>
@@ -26275,7 +27416,7 @@
                   <a:srgbClr val="01AEFD"/>
                 </a:solidFill>
               </a:rPr>
-              <a:t>Press Run and send a question. Now the reply appears a few letters at a time, with a blinking cursor, instead of all at once. Same data as last week - you are just drawing each piece the moment it arrives.</a:t>
+              <a:t>to { visibility: hidden; }</a:t>
             </a:r>
           </a:p>
           <a:p>
@@ -26290,7 +27431,7 @@
                   <a:srgbClr val="1F2A37"/>
                 </a:solidFill>
               </a:rPr>
-              <a:t>• Run it in the classroom, or press Show the output in the web deck.</a:t>
+              <a:t>• Hides the element but KEEPS its space.</a:t>
             </a:r>
           </a:p>
           <a:p>
@@ -26305,7 +27446,22 @@
                   <a:srgbClr val="1F2A37"/>
                 </a:solidFill>
               </a:rPr>
-              <a:t>• Everyone's screen should match this.</a:t>
+              <a:t>• So the blinking cursor vanishes without the text jumping around.</a:t>
+            </a:r>
+          </a:p>
+          <a:p>
+            <a:pPr>
+              <a:spcAft>
+                <a:spcPts val="1400"/>
+              </a:spcAft>
+            </a:pPr>
+            <a:r>
+              <a:rPr sz="2400">
+                <a:solidFill>
+                  <a:srgbClr val="1F2A37"/>
+                </a:solidFill>
+              </a:rPr>
+              <a:t>• Different from removing it (.remove, week 5), which collapses the gap.</a:t>
             </a:r>
           </a:p>
         </p:txBody>
@@ -26319,6 +27475,1290 @@
 </file>
 
 <file path=ppt/slides/slide54.xml><?xml version="1.0" encoding="utf-8"?>
+<p:sld xmlns:a="http://schemas.openxmlformats.org/drawingml/2006/main" xmlns:p="http://schemas.openxmlformats.org/presentationml/2006/main" xmlns:r="http://schemas.openxmlformats.org/officeDocument/2006/relationships">
+  <p:cSld>
+    <p:bg>
+      <p:bgPr>
+        <a:solidFill>
+          <a:srgbClr val="F4F8FB"/>
+        </a:solidFill>
+        <a:effectLst/>
+      </p:bgPr>
+    </p:bg>
+    <p:spTree>
+      <p:nvGrpSpPr>
+        <p:cNvPr id="1" name=""/>
+        <p:cNvGrpSpPr/>
+        <p:nvPr/>
+      </p:nvGrpSpPr>
+      <p:grpSpPr/>
+      <p:sp>
+        <p:nvSpPr>
+          <p:cNvPr id="2" name="TextBox 1"/>
+          <p:cNvSpPr txBox="1"/>
+          <p:nvPr/>
+        </p:nvSpPr>
+        <p:spPr>
+          <a:xfrm>
+            <a:off x="822960" y="365760"/>
+            <a:ext cx="7315200" cy="365760"/>
+          </a:xfrm>
+          <a:prstGeom prst="rect">
+            <a:avLst/>
+          </a:prstGeom>
+          <a:noFill/>
+        </p:spPr>
+        <p:txBody>
+          <a:bodyPr wrap="none">
+            <a:spAutoFit/>
+          </a:bodyPr>
+          <a:lstStyle/>
+          <a:p>
+            <a:r>
+              <a:rPr sz="1400" b="1">
+                <a:solidFill>
+                  <a:srgbClr val="01AEFD"/>
+                </a:solidFill>
+              </a:rPr>
+              <a:t>ON THE PAGE</a:t>
+            </a:r>
+          </a:p>
+        </p:txBody>
+      </p:sp>
+      <p:sp>
+        <p:nvSpPr>
+          <p:cNvPr id="3" name="TextBox 2"/>
+          <p:cNvSpPr txBox="1"/>
+          <p:nvPr/>
+        </p:nvSpPr>
+        <p:spPr>
+          <a:xfrm>
+            <a:off x="822960" y="658368"/>
+            <a:ext cx="10515600" cy="731520"/>
+          </a:xfrm>
+          <a:prstGeom prst="rect">
+            <a:avLst/>
+          </a:prstGeom>
+          <a:noFill/>
+        </p:spPr>
+        <p:txBody>
+          <a:bodyPr wrap="none">
+            <a:spAutoFit/>
+          </a:bodyPr>
+          <a:lstStyle/>
+          <a:p>
+            <a:r>
+              <a:rPr sz="3200" b="1">
+                <a:solidFill>
+                  <a:srgbClr val="1F2A37"/>
+                </a:solidFill>
+              </a:rPr>
+              <a:t>visibility</a:t>
+            </a:r>
+          </a:p>
+        </p:txBody>
+      </p:sp>
+      <p:sp>
+        <p:nvSpPr>
+          <p:cNvPr id="4" name="Rounded Rectangle 3"/>
+          <p:cNvSpPr/>
+          <p:nvPr/>
+        </p:nvSpPr>
+        <p:spPr>
+          <a:xfrm>
+            <a:off x="3454237" y="1641896"/>
+            <a:ext cx="5249387" cy="3918021"/>
+          </a:xfrm>
+          <a:prstGeom prst="roundRect">
+            <a:avLst/>
+          </a:prstGeom>
+          <a:solidFill>
+            <a:srgbClr val="0F1F27"/>
+          </a:solidFill>
+          <a:ln>
+            <a:noFill/>
+          </a:ln>
+          <a:effectLst/>
+        </p:spPr>
+        <p:style>
+          <a:lnRef idx="1">
+            <a:schemeClr val="accent1"/>
+          </a:lnRef>
+          <a:fillRef idx="3">
+            <a:schemeClr val="accent1"/>
+          </a:fillRef>
+          <a:effectRef idx="2">
+            <a:schemeClr val="accent1"/>
+          </a:effectRef>
+          <a:fontRef idx="minor">
+            <a:schemeClr val="lt1"/>
+          </a:fontRef>
+        </p:style>
+        <p:txBody>
+          <a:bodyPr rtlCol="0" anchor="ctr"/>
+          <a:lstStyle/>
+          <a:p>
+            <a:pPr algn="ctr"/>
+          </a:p>
+        </p:txBody>
+      </p:sp>
+      <p:sp>
+        <p:nvSpPr>
+          <p:cNvPr id="5" name="Rounded Rectangle 4"/>
+          <p:cNvSpPr/>
+          <p:nvPr/>
+        </p:nvSpPr>
+        <p:spPr>
+          <a:xfrm>
+            <a:off x="3606393" y="2022287"/>
+            <a:ext cx="4945075" cy="437448"/>
+          </a:xfrm>
+          <a:prstGeom prst="roundRect">
+            <a:avLst/>
+          </a:prstGeom>
+          <a:solidFill>
+            <a:srgbClr val="16303A"/>
+          </a:solidFill>
+          <a:ln>
+            <a:noFill/>
+          </a:ln>
+          <a:effectLst/>
+        </p:spPr>
+        <p:style>
+          <a:lnRef idx="1">
+            <a:schemeClr val="accent1"/>
+          </a:lnRef>
+          <a:fillRef idx="3">
+            <a:schemeClr val="accent1"/>
+          </a:fillRef>
+          <a:effectRef idx="2">
+            <a:schemeClr val="accent1"/>
+          </a:effectRef>
+          <a:fontRef idx="minor">
+            <a:schemeClr val="lt1"/>
+          </a:fontRef>
+        </p:style>
+        <p:txBody>
+          <a:bodyPr rtlCol="0" anchor="ctr"/>
+          <a:lstStyle/>
+          <a:p>
+            <a:pPr algn="ctr"/>
+          </a:p>
+        </p:txBody>
+      </p:sp>
+      <p:sp>
+        <p:nvSpPr>
+          <p:cNvPr id="6" name="Rounded Rectangle 5"/>
+          <p:cNvSpPr/>
+          <p:nvPr/>
+        </p:nvSpPr>
+        <p:spPr>
+          <a:xfrm>
+            <a:off x="3720510" y="2155423"/>
+            <a:ext cx="1426463" cy="190195"/>
+          </a:xfrm>
+          <a:prstGeom prst="roundRect">
+            <a:avLst/>
+          </a:prstGeom>
+          <a:solidFill>
+            <a:srgbClr val="4A6B78"/>
+          </a:solidFill>
+          <a:ln>
+            <a:noFill/>
+          </a:ln>
+          <a:effectLst/>
+        </p:spPr>
+        <p:style>
+          <a:lnRef idx="1">
+            <a:schemeClr val="accent1"/>
+          </a:lnRef>
+          <a:fillRef idx="3">
+            <a:schemeClr val="accent1"/>
+          </a:fillRef>
+          <a:effectRef idx="2">
+            <a:schemeClr val="accent1"/>
+          </a:effectRef>
+          <a:fontRef idx="minor">
+            <a:schemeClr val="lt1"/>
+          </a:fontRef>
+        </p:style>
+        <p:txBody>
+          <a:bodyPr rtlCol="0" anchor="ctr"/>
+          <a:lstStyle/>
+          <a:p>
+            <a:pPr algn="ctr"/>
+          </a:p>
+        </p:txBody>
+      </p:sp>
+      <p:sp>
+        <p:nvSpPr>
+          <p:cNvPr id="7" name="Rounded Rectangle 6"/>
+          <p:cNvSpPr/>
+          <p:nvPr/>
+        </p:nvSpPr>
+        <p:spPr>
+          <a:xfrm>
+            <a:off x="3606393" y="2554833"/>
+            <a:ext cx="4945075" cy="1806854"/>
+          </a:xfrm>
+          <a:prstGeom prst="roundRect">
+            <a:avLst/>
+          </a:prstGeom>
+          <a:solidFill>
+            <a:srgbClr val="0B171D"/>
+          </a:solidFill>
+          <a:ln>
+            <a:noFill/>
+          </a:ln>
+          <a:effectLst/>
+        </p:spPr>
+        <p:style>
+          <a:lnRef idx="1">
+            <a:schemeClr val="accent1"/>
+          </a:lnRef>
+          <a:fillRef idx="3">
+            <a:schemeClr val="accent1"/>
+          </a:fillRef>
+          <a:effectRef idx="2">
+            <a:schemeClr val="accent1"/>
+          </a:effectRef>
+          <a:fontRef idx="minor">
+            <a:schemeClr val="lt1"/>
+          </a:fontRef>
+        </p:style>
+        <p:txBody>
+          <a:bodyPr rtlCol="0" anchor="ctr"/>
+          <a:lstStyle/>
+          <a:p>
+            <a:pPr algn="ctr"/>
+          </a:p>
+        </p:txBody>
+      </p:sp>
+      <p:sp>
+        <p:nvSpPr>
+          <p:cNvPr id="8" name="Rounded Rectangle 7"/>
+          <p:cNvSpPr/>
+          <p:nvPr/>
+        </p:nvSpPr>
+        <p:spPr>
+          <a:xfrm>
+            <a:off x="3720510" y="2668950"/>
+            <a:ext cx="2852927" cy="399409"/>
+          </a:xfrm>
+          <a:prstGeom prst="roundRect">
+            <a:avLst/>
+          </a:prstGeom>
+          <a:solidFill>
+            <a:srgbClr val="1B3540"/>
+          </a:solidFill>
+          <a:ln>
+            <a:noFill/>
+          </a:ln>
+          <a:effectLst/>
+        </p:spPr>
+        <p:style>
+          <a:lnRef idx="1">
+            <a:schemeClr val="accent1"/>
+          </a:lnRef>
+          <a:fillRef idx="3">
+            <a:schemeClr val="accent1"/>
+          </a:fillRef>
+          <a:effectRef idx="2">
+            <a:schemeClr val="accent1"/>
+          </a:effectRef>
+          <a:fontRef idx="minor">
+            <a:schemeClr val="lt1"/>
+          </a:fontRef>
+        </p:style>
+        <p:txBody>
+          <a:bodyPr rtlCol="0" anchor="ctr"/>
+          <a:lstStyle/>
+          <a:p>
+            <a:pPr algn="ctr"/>
+          </a:p>
+        </p:txBody>
+      </p:sp>
+      <p:sp>
+        <p:nvSpPr>
+          <p:cNvPr id="9" name="Rounded Rectangle 8"/>
+          <p:cNvSpPr/>
+          <p:nvPr/>
+        </p:nvSpPr>
+        <p:spPr>
+          <a:xfrm>
+            <a:off x="5584423" y="3182477"/>
+            <a:ext cx="2852927" cy="399409"/>
+          </a:xfrm>
+          <a:prstGeom prst="roundRect">
+            <a:avLst/>
+          </a:prstGeom>
+          <a:solidFill>
+            <a:srgbClr val="123A32"/>
+          </a:solidFill>
+          <a:ln>
+            <a:noFill/>
+          </a:ln>
+          <a:effectLst/>
+        </p:spPr>
+        <p:style>
+          <a:lnRef idx="1">
+            <a:schemeClr val="accent1"/>
+          </a:lnRef>
+          <a:fillRef idx="3">
+            <a:schemeClr val="accent1"/>
+          </a:fillRef>
+          <a:effectRef idx="2">
+            <a:schemeClr val="accent1"/>
+          </a:effectRef>
+          <a:fontRef idx="minor">
+            <a:schemeClr val="lt1"/>
+          </a:fontRef>
+        </p:style>
+        <p:txBody>
+          <a:bodyPr rtlCol="0" anchor="ctr"/>
+          <a:lstStyle/>
+          <a:p>
+            <a:pPr algn="ctr"/>
+          </a:p>
+        </p:txBody>
+      </p:sp>
+      <p:sp>
+        <p:nvSpPr>
+          <p:cNvPr id="10" name="Rounded Rectangle 9"/>
+          <p:cNvSpPr/>
+          <p:nvPr/>
+        </p:nvSpPr>
+        <p:spPr>
+          <a:xfrm>
+            <a:off x="3720510" y="3696004"/>
+            <a:ext cx="3138220" cy="399409"/>
+          </a:xfrm>
+          <a:prstGeom prst="roundRect">
+            <a:avLst/>
+          </a:prstGeom>
+          <a:solidFill>
+            <a:srgbClr val="1B3540"/>
+          </a:solidFill>
+          <a:ln>
+            <a:noFill/>
+          </a:ln>
+          <a:effectLst/>
+        </p:spPr>
+        <p:style>
+          <a:lnRef idx="1">
+            <a:schemeClr val="accent1"/>
+          </a:lnRef>
+          <a:fillRef idx="3">
+            <a:schemeClr val="accent1"/>
+          </a:fillRef>
+          <a:effectRef idx="2">
+            <a:schemeClr val="accent1"/>
+          </a:effectRef>
+          <a:fontRef idx="minor">
+            <a:schemeClr val="lt1"/>
+          </a:fontRef>
+        </p:style>
+        <p:txBody>
+          <a:bodyPr rtlCol="0" anchor="ctr"/>
+          <a:lstStyle/>
+          <a:p>
+            <a:pPr algn="ctr"/>
+          </a:p>
+        </p:txBody>
+      </p:sp>
+      <p:sp>
+        <p:nvSpPr>
+          <p:cNvPr id="11" name="Rounded Rectangle 10"/>
+          <p:cNvSpPr/>
+          <p:nvPr/>
+        </p:nvSpPr>
+        <p:spPr>
+          <a:xfrm>
+            <a:off x="3701491" y="4856195"/>
+            <a:ext cx="3899001" cy="323331"/>
+          </a:xfrm>
+          <a:prstGeom prst="roundRect">
+            <a:avLst/>
+          </a:prstGeom>
+          <a:solidFill>
+            <a:srgbClr val="16303A"/>
+          </a:solidFill>
+          <a:ln>
+            <a:noFill/>
+          </a:ln>
+          <a:effectLst/>
+        </p:spPr>
+        <p:style>
+          <a:lnRef idx="1">
+            <a:schemeClr val="accent1"/>
+          </a:lnRef>
+          <a:fillRef idx="3">
+            <a:schemeClr val="accent1"/>
+          </a:fillRef>
+          <a:effectRef idx="2">
+            <a:schemeClr val="accent1"/>
+          </a:effectRef>
+          <a:fontRef idx="minor">
+            <a:schemeClr val="lt1"/>
+          </a:fontRef>
+        </p:style>
+        <p:txBody>
+          <a:bodyPr rtlCol="0" anchor="ctr"/>
+          <a:lstStyle/>
+          <a:p>
+            <a:pPr algn="ctr"/>
+          </a:p>
+        </p:txBody>
+      </p:sp>
+      <p:sp>
+        <p:nvSpPr>
+          <p:cNvPr id="12" name="Rounded Rectangle 11"/>
+          <p:cNvSpPr/>
+          <p:nvPr/>
+        </p:nvSpPr>
+        <p:spPr>
+          <a:xfrm>
+            <a:off x="7695590" y="4856195"/>
+            <a:ext cx="779800" cy="323331"/>
+          </a:xfrm>
+          <a:prstGeom prst="roundRect">
+            <a:avLst/>
+          </a:prstGeom>
+          <a:solidFill>
+            <a:srgbClr val="01AEFD"/>
+          </a:solidFill>
+          <a:ln>
+            <a:noFill/>
+          </a:ln>
+          <a:effectLst/>
+        </p:spPr>
+        <p:style>
+          <a:lnRef idx="1">
+            <a:schemeClr val="accent1"/>
+          </a:lnRef>
+          <a:fillRef idx="3">
+            <a:schemeClr val="accent1"/>
+          </a:fillRef>
+          <a:effectRef idx="2">
+            <a:schemeClr val="accent1"/>
+          </a:effectRef>
+          <a:fontRef idx="minor">
+            <a:schemeClr val="lt1"/>
+          </a:fontRef>
+        </p:style>
+        <p:txBody>
+          <a:bodyPr rtlCol="0" anchor="ctr"/>
+          <a:lstStyle/>
+          <a:p>
+            <a:pPr algn="ctr"/>
+          </a:p>
+        </p:txBody>
+      </p:sp>
+      <p:sp>
+        <p:nvSpPr>
+          <p:cNvPr id="13" name="Rounded Rectangle 12"/>
+          <p:cNvSpPr/>
+          <p:nvPr/>
+        </p:nvSpPr>
+        <p:spPr>
+          <a:xfrm>
+            <a:off x="3720510" y="5407761"/>
+            <a:ext cx="1616659" cy="95097"/>
+          </a:xfrm>
+          <a:prstGeom prst="roundRect">
+            <a:avLst/>
+          </a:prstGeom>
+          <a:solidFill>
+            <a:srgbClr val="2A4550"/>
+          </a:solidFill>
+          <a:ln>
+            <a:noFill/>
+          </a:ln>
+          <a:effectLst/>
+        </p:spPr>
+        <p:style>
+          <a:lnRef idx="1">
+            <a:schemeClr val="accent1"/>
+          </a:lnRef>
+          <a:fillRef idx="3">
+            <a:schemeClr val="accent1"/>
+          </a:fillRef>
+          <a:effectRef idx="2">
+            <a:schemeClr val="accent1"/>
+          </a:effectRef>
+          <a:fontRef idx="minor">
+            <a:schemeClr val="lt1"/>
+          </a:fontRef>
+        </p:style>
+        <p:txBody>
+          <a:bodyPr rtlCol="0" anchor="ctr"/>
+          <a:lstStyle/>
+          <a:p>
+            <a:pPr algn="ctr"/>
+          </a:p>
+        </p:txBody>
+      </p:sp>
+      <p:sp>
+        <p:nvSpPr>
+          <p:cNvPr id="14" name="Rounded Rectangle 13"/>
+          <p:cNvSpPr/>
+          <p:nvPr/>
+        </p:nvSpPr>
+        <p:spPr>
+          <a:xfrm>
+            <a:off x="3663452" y="4818156"/>
+            <a:ext cx="3975079" cy="399409"/>
+          </a:xfrm>
+          <a:prstGeom prst="roundRect">
+            <a:avLst/>
+          </a:prstGeom>
+          <a:noFill/>
+          <a:ln w="44450">
+            <a:solidFill>
+              <a:srgbClr val="FFD633"/>
+            </a:solidFill>
+          </a:ln>
+          <a:effectLst/>
+        </p:spPr>
+        <p:style>
+          <a:lnRef idx="1">
+            <a:schemeClr val="accent1"/>
+          </a:lnRef>
+          <a:fillRef idx="3">
+            <a:schemeClr val="accent1"/>
+          </a:fillRef>
+          <a:effectRef idx="2">
+            <a:schemeClr val="accent1"/>
+          </a:effectRef>
+          <a:fontRef idx="minor">
+            <a:schemeClr val="lt1"/>
+          </a:fontRef>
+        </p:style>
+        <p:txBody>
+          <a:bodyPr rtlCol="0" anchor="ctr"/>
+          <a:lstStyle/>
+          <a:p>
+            <a:pPr algn="ctr"/>
+          </a:p>
+        </p:txBody>
+      </p:sp>
+      <p:sp>
+        <p:nvSpPr>
+          <p:cNvPr id="15" name="TextBox 14"/>
+          <p:cNvSpPr txBox="1"/>
+          <p:nvPr/>
+        </p:nvSpPr>
+        <p:spPr>
+          <a:xfrm>
+            <a:off x="822960" y="6172200"/>
+            <a:ext cx="10515600" cy="548640"/>
+          </a:xfrm>
+          <a:prstGeom prst="rect">
+            <a:avLst/>
+          </a:prstGeom>
+          <a:noFill/>
+        </p:spPr>
+        <p:txBody>
+          <a:bodyPr wrap="square">
+            <a:spAutoFit/>
+          </a:bodyPr>
+          <a:lstStyle/>
+          <a:p>
+            <a:r>
+              <a:rPr sz="2000">
+                <a:solidFill>
+                  <a:srgbClr val="0A6299"/>
+                </a:solidFill>
+              </a:rPr>
+              <a:t>visibility can hide an element but keep its space.</a:t>
+            </a:r>
+          </a:p>
+        </p:txBody>
+      </p:sp>
+    </p:spTree>
+  </p:cSld>
+  <p:clrMapOvr>
+    <a:masterClrMapping/>
+  </p:clrMapOvr>
+</p:sld>
+</file>
+
+<file path=ppt/slides/slide55.xml><?xml version="1.0" encoding="utf-8"?>
+<p:sld xmlns:a="http://schemas.openxmlformats.org/drawingml/2006/main" xmlns:p="http://schemas.openxmlformats.org/presentationml/2006/main" xmlns:r="http://schemas.openxmlformats.org/officeDocument/2006/relationships">
+  <p:cSld>
+    <p:bg>
+      <p:bgPr>
+        <a:solidFill>
+          <a:srgbClr val="102127"/>
+        </a:solidFill>
+        <a:effectLst/>
+      </p:bgPr>
+    </p:bg>
+    <p:spTree>
+      <p:nvGrpSpPr>
+        <p:cNvPr id="1" name=""/>
+        <p:cNvGrpSpPr/>
+        <p:nvPr/>
+      </p:nvGrpSpPr>
+      <p:grpSpPr/>
+      <p:sp>
+        <p:nvSpPr>
+          <p:cNvPr id="2" name="TextBox 1"/>
+          <p:cNvSpPr txBox="1"/>
+          <p:nvPr/>
+        </p:nvSpPr>
+        <p:spPr>
+          <a:xfrm>
+            <a:off x="502920" y="274320"/>
+            <a:ext cx="11155680" cy="548640"/>
+          </a:xfrm>
+          <a:prstGeom prst="rect">
+            <a:avLst/>
+          </a:prstGeom>
+          <a:noFill/>
+        </p:spPr>
+        <p:txBody>
+          <a:bodyPr wrap="none">
+            <a:spAutoFit/>
+          </a:bodyPr>
+          <a:lstStyle/>
+          <a:p>
+            <a:r>
+              <a:rPr sz="2200" b="1">
+                <a:solidFill>
+                  <a:srgbClr val="01AEFD"/>
+                </a:solidFill>
+              </a:rPr>
+              <a:t>Type this into style.css   -   line 89</a:t>
+            </a:r>
+          </a:p>
+        </p:txBody>
+      </p:sp>
+      <p:sp>
+        <p:nvSpPr>
+          <p:cNvPr id="3" name="TextBox 2"/>
+          <p:cNvSpPr txBox="1"/>
+          <p:nvPr/>
+        </p:nvSpPr>
+        <p:spPr>
+          <a:xfrm>
+            <a:off x="502920" y="960120"/>
+            <a:ext cx="11155680" cy="4297680"/>
+          </a:xfrm>
+          <a:prstGeom prst="rect">
+            <a:avLst/>
+          </a:prstGeom>
+          <a:noFill/>
+        </p:spPr>
+        <p:txBody>
+          <a:bodyPr wrap="none">
+            <a:spAutoFit/>
+          </a:bodyPr>
+          <a:lstStyle/>
+          <a:p>
+            <a:pPr>
+              <a:spcAft>
+                <a:spcPts val="0"/>
+              </a:spcAft>
+            </a:pPr>
+            <a:r>
+              <a:rPr sz="1800">
+                <a:solidFill>
+                  <a:srgbClr val="6D8C97"/>
+                </a:solidFill>
+                <a:latin typeface="Consolas"/>
+              </a:rPr>
+              <a:t>  84  </a:t>
+            </a:r>
+            <a:r>
+              <a:rPr sz="1800">
+                <a:solidFill>
+                  <a:srgbClr val="6D8C97"/>
+                </a:solidFill>
+                <a:latin typeface="Consolas"/>
+              </a:rPr>
+              <a:t>.bubble.writing::after {</a:t>
+            </a:r>
+          </a:p>
+          <a:p>
+            <a:pPr>
+              <a:spcAft>
+                <a:spcPts val="0"/>
+              </a:spcAft>
+            </a:pPr>
+            <a:r>
+              <a:rPr sz="1800">
+                <a:solidFill>
+                  <a:srgbClr val="6D8C97"/>
+                </a:solidFill>
+                <a:latin typeface="Consolas"/>
+              </a:rPr>
+              <a:t>  85  </a:t>
+            </a:r>
+            <a:r>
+              <a:rPr sz="1800">
+                <a:solidFill>
+                  <a:srgbClr val="6D8C97"/>
+                </a:solidFill>
+                <a:latin typeface="Consolas"/>
+              </a:rPr>
+              <a:t>  content: "\258C";</a:t>
+            </a:r>
+          </a:p>
+          <a:p>
+            <a:pPr>
+              <a:spcAft>
+                <a:spcPts val="0"/>
+              </a:spcAft>
+            </a:pPr>
+            <a:r>
+              <a:rPr sz="1800">
+                <a:solidFill>
+                  <a:srgbClr val="6D8C97"/>
+                </a:solidFill>
+                <a:latin typeface="Consolas"/>
+              </a:rPr>
+              <a:t>  86  </a:t>
+            </a:r>
+            <a:r>
+              <a:rPr sz="1800">
+                <a:solidFill>
+                  <a:srgbClr val="6D8C97"/>
+                </a:solidFill>
+                <a:latin typeface="Consolas"/>
+              </a:rPr>
+              <a:t>  color: #01aefd;</a:t>
+            </a:r>
+          </a:p>
+          <a:p>
+            <a:pPr>
+              <a:spcAft>
+                <a:spcPts val="0"/>
+              </a:spcAft>
+            </a:pPr>
+            <a:r>
+              <a:rPr sz="1800">
+                <a:solidFill>
+                  <a:srgbClr val="6D8C97"/>
+                </a:solidFill>
+                <a:latin typeface="Consolas"/>
+              </a:rPr>
+              <a:t>  87  </a:t>
+            </a:r>
+            <a:r>
+              <a:rPr sz="1800">
+                <a:solidFill>
+                  <a:srgbClr val="6D8C97"/>
+                </a:solidFill>
+                <a:latin typeface="Consolas"/>
+              </a:rPr>
+              <a:t>  animation: blink 1s steps(2, start) infinite;</a:t>
+            </a:r>
+          </a:p>
+          <a:p>
+            <a:pPr>
+              <a:spcAft>
+                <a:spcPts val="0"/>
+              </a:spcAft>
+            </a:pPr>
+            <a:r>
+              <a:rPr sz="1800">
+                <a:solidFill>
+                  <a:srgbClr val="6D8C97"/>
+                </a:solidFill>
+                <a:latin typeface="Consolas"/>
+              </a:rPr>
+              <a:t>  88  </a:t>
+            </a:r>
+            <a:r>
+              <a:rPr sz="1800">
+                <a:solidFill>
+                  <a:srgbClr val="6D8C97"/>
+                </a:solidFill>
+                <a:latin typeface="Consolas"/>
+              </a:rPr>
+              <a:t>}</a:t>
+            </a:r>
+          </a:p>
+          <a:p>
+            <a:pPr>
+              <a:spcAft>
+                <a:spcPts val="0"/>
+              </a:spcAft>
+            </a:pPr>
+            <a:r>
+              <a:rPr sz="1800">
+                <a:solidFill>
+                  <a:srgbClr val="6D8C97"/>
+                </a:solidFill>
+                <a:latin typeface="Consolas"/>
+              </a:rPr>
+              <a:t>  89  </a:t>
+            </a:r>
+            <a:r>
+              <a:rPr sz="1800">
+                <a:solidFill>
+                  <a:srgbClr val="7FE0A0"/>
+                </a:solidFill>
+                <a:latin typeface="Consolas"/>
+              </a:rPr>
+              <a:t>@keyframes blink { to { visibility: hidden; } }</a:t>
+            </a:r>
+          </a:p>
+        </p:txBody>
+      </p:sp>
+      <p:sp>
+        <p:nvSpPr>
+          <p:cNvPr id="4" name="TextBox 3"/>
+          <p:cNvSpPr txBox="1"/>
+          <p:nvPr/>
+        </p:nvSpPr>
+        <p:spPr>
+          <a:xfrm>
+            <a:off x="548640" y="5623560"/>
+            <a:ext cx="11064240" cy="1051560"/>
+          </a:xfrm>
+          <a:prstGeom prst="rect">
+            <a:avLst/>
+          </a:prstGeom>
+          <a:noFill/>
+        </p:spPr>
+        <p:txBody>
+          <a:bodyPr wrap="square">
+            <a:spAutoFit/>
+          </a:bodyPr>
+          <a:lstStyle/>
+          <a:p>
+            <a:r>
+              <a:rPr sz="2000">
+                <a:solidFill>
+                  <a:srgbClr val="DCECEF"/>
+                </a:solidFill>
+              </a:rPr>
+              <a:t>@keyframes defines 'blink': fade the cursor to hidden and back, over and over.</a:t>
+            </a:r>
+          </a:p>
+        </p:txBody>
+      </p:sp>
+    </p:spTree>
+  </p:cSld>
+  <p:clrMapOvr>
+    <a:masterClrMapping/>
+  </p:clrMapOvr>
+</p:sld>
+</file>
+
+<file path=ppt/slides/slide56.xml><?xml version="1.0" encoding="utf-8"?>
+<p:sld xmlns:a="http://schemas.openxmlformats.org/drawingml/2006/main" xmlns:p="http://schemas.openxmlformats.org/presentationml/2006/main" xmlns:r="http://schemas.openxmlformats.org/officeDocument/2006/relationships">
+  <p:cSld>
+    <p:bg>
+      <p:bgPr>
+        <a:solidFill>
+          <a:srgbClr val="102127"/>
+        </a:solidFill>
+        <a:effectLst/>
+      </p:bgPr>
+    </p:bg>
+    <p:spTree>
+      <p:nvGrpSpPr>
+        <p:cNvPr id="1" name=""/>
+        <p:cNvGrpSpPr/>
+        <p:nvPr/>
+      </p:nvGrpSpPr>
+      <p:grpSpPr/>
+      <p:sp>
+        <p:nvSpPr>
+          <p:cNvPr id="2" name="TextBox 1"/>
+          <p:cNvSpPr txBox="1"/>
+          <p:nvPr/>
+        </p:nvSpPr>
+        <p:spPr>
+          <a:xfrm>
+            <a:off x="502920" y="274320"/>
+            <a:ext cx="11155680" cy="548640"/>
+          </a:xfrm>
+          <a:prstGeom prst="rect">
+            <a:avLst/>
+          </a:prstGeom>
+          <a:noFill/>
+        </p:spPr>
+        <p:txBody>
+          <a:bodyPr wrap="none">
+            <a:spAutoFit/>
+          </a:bodyPr>
+          <a:lstStyle/>
+          <a:p>
+            <a:r>
+              <a:rPr sz="2200" b="1">
+                <a:solidFill>
+                  <a:srgbClr val="01AEFD"/>
+                </a:solidFill>
+              </a:rPr>
+              <a:t>All together in style.css</a:t>
+            </a:r>
+          </a:p>
+        </p:txBody>
+      </p:sp>
+      <p:sp>
+        <p:nvSpPr>
+          <p:cNvPr id="3" name="TextBox 2"/>
+          <p:cNvSpPr txBox="1"/>
+          <p:nvPr/>
+        </p:nvSpPr>
+        <p:spPr>
+          <a:xfrm>
+            <a:off x="502920" y="960120"/>
+            <a:ext cx="11155680" cy="4297680"/>
+          </a:xfrm>
+          <a:prstGeom prst="rect">
+            <a:avLst/>
+          </a:prstGeom>
+          <a:noFill/>
+        </p:spPr>
+        <p:txBody>
+          <a:bodyPr wrap="none">
+            <a:spAutoFit/>
+          </a:bodyPr>
+          <a:lstStyle/>
+          <a:p>
+            <a:pPr>
+              <a:spcAft>
+                <a:spcPts val="0"/>
+              </a:spcAft>
+            </a:pPr>
+            <a:r>
+              <a:rPr sz="1800">
+                <a:solidFill>
+                  <a:srgbClr val="6D8C97"/>
+                </a:solidFill>
+                <a:latin typeface="Consolas"/>
+              </a:rPr>
+              <a:t>  84  </a:t>
+            </a:r>
+            <a:r>
+              <a:rPr sz="1800">
+                <a:solidFill>
+                  <a:srgbClr val="7FE0A0"/>
+                </a:solidFill>
+                <a:latin typeface="Consolas"/>
+              </a:rPr>
+              <a:t>.bubble.writing::after {</a:t>
+            </a:r>
+          </a:p>
+          <a:p>
+            <a:pPr>
+              <a:spcAft>
+                <a:spcPts val="0"/>
+              </a:spcAft>
+            </a:pPr>
+            <a:r>
+              <a:rPr sz="1800">
+                <a:solidFill>
+                  <a:srgbClr val="6D8C97"/>
+                </a:solidFill>
+                <a:latin typeface="Consolas"/>
+              </a:rPr>
+              <a:t>  85  </a:t>
+            </a:r>
+            <a:r>
+              <a:rPr sz="1800">
+                <a:solidFill>
+                  <a:srgbClr val="7FE0A0"/>
+                </a:solidFill>
+                <a:latin typeface="Consolas"/>
+              </a:rPr>
+              <a:t>  content: "\258C";</a:t>
+            </a:r>
+          </a:p>
+          <a:p>
+            <a:pPr>
+              <a:spcAft>
+                <a:spcPts val="0"/>
+              </a:spcAft>
+            </a:pPr>
+            <a:r>
+              <a:rPr sz="1800">
+                <a:solidFill>
+                  <a:srgbClr val="6D8C97"/>
+                </a:solidFill>
+                <a:latin typeface="Consolas"/>
+              </a:rPr>
+              <a:t>  86  </a:t>
+            </a:r>
+            <a:r>
+              <a:rPr sz="1800">
+                <a:solidFill>
+                  <a:srgbClr val="7FE0A0"/>
+                </a:solidFill>
+                <a:latin typeface="Consolas"/>
+              </a:rPr>
+              <a:t>  color: #01aefd;</a:t>
+            </a:r>
+          </a:p>
+          <a:p>
+            <a:pPr>
+              <a:spcAft>
+                <a:spcPts val="0"/>
+              </a:spcAft>
+            </a:pPr>
+            <a:r>
+              <a:rPr sz="1800">
+                <a:solidFill>
+                  <a:srgbClr val="6D8C97"/>
+                </a:solidFill>
+                <a:latin typeface="Consolas"/>
+              </a:rPr>
+              <a:t>  87  </a:t>
+            </a:r>
+            <a:r>
+              <a:rPr sz="1800">
+                <a:solidFill>
+                  <a:srgbClr val="7FE0A0"/>
+                </a:solidFill>
+                <a:latin typeface="Consolas"/>
+              </a:rPr>
+              <a:t>  animation: blink 1s steps(2, start) infinite;</a:t>
+            </a:r>
+          </a:p>
+          <a:p>
+            <a:pPr>
+              <a:spcAft>
+                <a:spcPts val="0"/>
+              </a:spcAft>
+            </a:pPr>
+            <a:r>
+              <a:rPr sz="1800">
+                <a:solidFill>
+                  <a:srgbClr val="6D8C97"/>
+                </a:solidFill>
+                <a:latin typeface="Consolas"/>
+              </a:rPr>
+              <a:t>  88  </a:t>
+            </a:r>
+            <a:r>
+              <a:rPr sz="1800">
+                <a:solidFill>
+                  <a:srgbClr val="7FE0A0"/>
+                </a:solidFill>
+                <a:latin typeface="Consolas"/>
+              </a:rPr>
+              <a:t>}</a:t>
+            </a:r>
+          </a:p>
+          <a:p>
+            <a:pPr>
+              <a:spcAft>
+                <a:spcPts val="0"/>
+              </a:spcAft>
+            </a:pPr>
+            <a:r>
+              <a:rPr sz="1800">
+                <a:solidFill>
+                  <a:srgbClr val="6D8C97"/>
+                </a:solidFill>
+                <a:latin typeface="Consolas"/>
+              </a:rPr>
+              <a:t>  89  </a:t>
+            </a:r>
+            <a:r>
+              <a:rPr sz="1800">
+                <a:solidFill>
+                  <a:srgbClr val="7FE0A0"/>
+                </a:solidFill>
+                <a:latin typeface="Consolas"/>
+              </a:rPr>
+              <a:t>@keyframes blink { to { visibility: hidden; } }</a:t>
+            </a:r>
+          </a:p>
+        </p:txBody>
+      </p:sp>
+      <p:sp>
+        <p:nvSpPr>
+          <p:cNvPr id="4" name="TextBox 3"/>
+          <p:cNvSpPr txBox="1"/>
+          <p:nvPr/>
+        </p:nvSpPr>
+        <p:spPr>
+          <a:xfrm>
+            <a:off x="548640" y="5623560"/>
+            <a:ext cx="11064240" cy="1051560"/>
+          </a:xfrm>
+          <a:prstGeom prst="rect">
+            <a:avLst/>
+          </a:prstGeom>
+          <a:noFill/>
+        </p:spPr>
+        <p:txBody>
+          <a:bodyPr wrap="square">
+            <a:spAutoFit/>
+          </a:bodyPr>
+          <a:lstStyle/>
+          <a:p>
+            <a:r>
+              <a:rPr sz="2000">
+                <a:solidFill>
+                  <a:srgbClr val="DCECEF"/>
+                </a:solidFill>
+              </a:rPr>
+              <a:t>That is the whole piece. Check yours looks the same before moving on.</a:t>
+            </a:r>
+          </a:p>
+        </p:txBody>
+      </p:sp>
+    </p:spTree>
+  </p:cSld>
+  <p:clrMapOvr>
+    <a:masterClrMapping/>
+  </p:clrMapOvr>
+</p:sld>
+</file>
+
+<file path=ppt/slides/slide57.xml><?xml version="1.0" encoding="utf-8"?>
+<p:sld xmlns:a="http://schemas.openxmlformats.org/drawingml/2006/main" xmlns:p="http://schemas.openxmlformats.org/presentationml/2006/main" xmlns:r="http://schemas.openxmlformats.org/officeDocument/2006/relationships">
+  <p:cSld>
+    <p:spTree>
+      <p:nvGrpSpPr>
+        <p:cNvPr id="1" name=""/>
+        <p:cNvGrpSpPr/>
+        <p:nvPr/>
+      </p:nvGrpSpPr>
+      <p:grpSpPr/>
+      <p:sp>
+        <p:nvSpPr>
+          <p:cNvPr id="2" name="Title 1"/>
+          <p:cNvSpPr>
+            <a:spLocks noGrp="1"/>
+          </p:cNvSpPr>
+          <p:nvPr>
+            <p:ph type="title"/>
+          </p:nvPr>
+        </p:nvSpPr>
+        <p:spPr/>
+        <p:txBody>
+          <a:bodyPr/>
+          <a:lstStyle/>
+          <a:p>
+            <a:r>
+              <a:rPr sz="3800" b="1">
+                <a:solidFill>
+                  <a:srgbClr val="1F2A37"/>
+                </a:solidFill>
+              </a:rPr>
+              <a:t>Checkpoint: watch it type</a:t>
+            </a:r>
+          </a:p>
+        </p:txBody>
+      </p:sp>
+      <p:sp>
+        <p:nvSpPr>
+          <p:cNvPr id="3" name="TextBox 2"/>
+          <p:cNvSpPr txBox="1"/>
+          <p:nvPr/>
+        </p:nvSpPr>
+        <p:spPr>
+          <a:xfrm>
+            <a:off x="868680" y="502920"/>
+            <a:ext cx="5486400" cy="457200"/>
+          </a:xfrm>
+          <a:prstGeom prst="rect">
+            <a:avLst/>
+          </a:prstGeom>
+          <a:noFill/>
+        </p:spPr>
+        <p:txBody>
+          <a:bodyPr wrap="none">
+            <a:spAutoFit/>
+          </a:bodyPr>
+          <a:lstStyle/>
+          <a:p>
+            <a:r>
+              <a:rPr sz="1500" b="1">
+                <a:solidFill>
+                  <a:srgbClr val="01AEFD"/>
+                </a:solidFill>
+              </a:rPr>
+              <a:t>CHECKPOINT - RUN IT</a:t>
+            </a:r>
+          </a:p>
+        </p:txBody>
+      </p:sp>
+      <p:sp>
+        <p:nvSpPr>
+          <p:cNvPr id="4" name="TextBox 3"/>
+          <p:cNvSpPr txBox="1"/>
+          <p:nvPr/>
+        </p:nvSpPr>
+        <p:spPr>
+          <a:xfrm>
+            <a:off x="822960" y="1828800"/>
+            <a:ext cx="10515600" cy="4206240"/>
+          </a:xfrm>
+          <a:prstGeom prst="rect">
+            <a:avLst/>
+          </a:prstGeom>
+          <a:noFill/>
+        </p:spPr>
+        <p:txBody>
+          <a:bodyPr wrap="square">
+            <a:spAutoFit/>
+          </a:bodyPr>
+          <a:lstStyle/>
+          <a:p>
+            <a:pPr>
+              <a:spcAft>
+                <a:spcPts val="1400"/>
+              </a:spcAft>
+            </a:pPr>
+            <a:r>
+              <a:rPr sz="2800">
+                <a:solidFill>
+                  <a:srgbClr val="01AEFD"/>
+                </a:solidFill>
+              </a:rPr>
+              <a:t>Press Run and send a question. Now the reply appears a few letters at a time, with a blinking cursor, instead of all at once. Same data as last week - you are just drawing each piece the moment it arrives.</a:t>
+            </a:r>
+          </a:p>
+          <a:p>
+            <a:pPr>
+              <a:spcAft>
+                <a:spcPts val="1400"/>
+              </a:spcAft>
+            </a:pPr>
+            <a:r>
+              <a:rPr sz="2400">
+                <a:solidFill>
+                  <a:srgbClr val="1F2A37"/>
+                </a:solidFill>
+              </a:rPr>
+              <a:t>• Run it in the classroom, or press Show the output in the web deck.</a:t>
+            </a:r>
+          </a:p>
+          <a:p>
+            <a:pPr>
+              <a:spcAft>
+                <a:spcPts val="1400"/>
+              </a:spcAft>
+            </a:pPr>
+            <a:r>
+              <a:rPr sz="2400">
+                <a:solidFill>
+                  <a:srgbClr val="1F2A37"/>
+                </a:solidFill>
+              </a:rPr>
+              <a:t>• Everyone's screen should match this.</a:t>
+            </a:r>
+          </a:p>
+        </p:txBody>
+      </p:sp>
+    </p:spTree>
+  </p:cSld>
+  <p:clrMapOvr>
+    <a:masterClrMapping/>
+  </p:clrMapOvr>
+</p:sld>
+</file>
+
+<file path=ppt/slides/slide58.xml><?xml version="1.0" encoding="utf-8"?>
 <p:sld xmlns:a="http://schemas.openxmlformats.org/drawingml/2006/main" xmlns:p="http://schemas.openxmlformats.org/presentationml/2006/main" xmlns:r="http://schemas.openxmlformats.org/officeDocument/2006/relationships">
   <p:cSld>
     <p:spTree>

--- a/ai101/slides/week-11.pptx
+++ b/ai101/slides/week-11.pptx
@@ -63,6 +63,14 @@
     <p:sldId id="311" r:id="rId62"/>
     <p:sldId id="312" r:id="rId63"/>
     <p:sldId id="313" r:id="rId64"/>
+    <p:sldId id="314" r:id="rId65"/>
+    <p:sldId id="315" r:id="rId66"/>
+    <p:sldId id="316" r:id="rId67"/>
+    <p:sldId id="317" r:id="rId68"/>
+    <p:sldId id="318" r:id="rId69"/>
+    <p:sldId id="319" r:id="rId70"/>
+    <p:sldId id="320" r:id="rId71"/>
+    <p:sldId id="321" r:id="rId72"/>
   </p:sldIdLst>
   <p:sldSz cx="12191695" cy="6858000" type="screen4x3"/>
   <p:notesSz cx="6858000" cy="9144000"/>
@@ -24702,14 +24710,6 @@
 <file path=ppt/slides/slide44.xml><?xml version="1.0" encoding="utf-8"?>
 <p:sld xmlns:a="http://schemas.openxmlformats.org/drawingml/2006/main" xmlns:p="http://schemas.openxmlformats.org/presentationml/2006/main" xmlns:r="http://schemas.openxmlformats.org/officeDocument/2006/relationships">
   <p:cSld>
-    <p:bg>
-      <p:bgPr>
-        <a:solidFill>
-          <a:srgbClr val="102127"/>
-        </a:solidFill>
-        <a:effectLst/>
-      </p:bgPr>
-    </p:bg>
     <p:spTree>
       <p:nvGrpSpPr>
         <p:cNvPr id="1" name=""/>
@@ -24719,14 +24719,40 @@
       <p:grpSpPr/>
       <p:sp>
         <p:nvSpPr>
-          <p:cNvPr id="2" name="TextBox 1"/>
+          <p:cNvPr id="2" name="Title 1"/>
+          <p:cNvSpPr>
+            <a:spLocks noGrp="1"/>
+          </p:cNvSpPr>
+          <p:nvPr>
+            <p:ph type="title"/>
+          </p:nvPr>
+        </p:nvSpPr>
+        <p:spPr/>
+        <p:txBody>
+          <a:bodyPr/>
+          <a:lstStyle/>
+          <a:p>
+            <a:r>
+              <a:rPr sz="3800" b="1">
+                <a:solidFill>
+                  <a:srgbClr val="1F2A37"/>
+                </a:solidFill>
+              </a:rPr>
+              <a:t>el.classList.add('typing')  does what?</a:t>
+            </a:r>
+          </a:p>
+        </p:txBody>
+      </p:sp>
+      <p:sp>
+        <p:nvSpPr>
+          <p:cNvPr id="3" name="TextBox 2"/>
           <p:cNvSpPr txBox="1"/>
           <p:nvPr/>
         </p:nvSpPr>
         <p:spPr>
           <a:xfrm>
-            <a:off x="502920" y="274320"/>
-            <a:ext cx="11155680" cy="548640"/>
+            <a:off x="868680" y="502920"/>
+            <a:ext cx="5486400" cy="457200"/>
           </a:xfrm>
           <a:prstGeom prst="rect">
             <a:avLst/>
@@ -24740,60 +24766,12 @@
           <a:lstStyle/>
           <a:p>
             <a:r>
-              <a:rPr sz="2200" b="1">
+              <a:rPr sz="1500" b="1">
                 <a:solidFill>
                   <a:srgbClr val="01AEFD"/>
                 </a:solidFill>
               </a:rPr>
-              <a:t>Type this into style.css   -   line 84</a:t>
-            </a:r>
-          </a:p>
-        </p:txBody>
-      </p:sp>
-      <p:sp>
-        <p:nvSpPr>
-          <p:cNvPr id="3" name="TextBox 2"/>
-          <p:cNvSpPr txBox="1"/>
-          <p:nvPr/>
-        </p:nvSpPr>
-        <p:spPr>
-          <a:xfrm>
-            <a:off x="502920" y="960120"/>
-            <a:ext cx="11155680" cy="4297680"/>
-          </a:xfrm>
-          <a:prstGeom prst="rect">
-            <a:avLst/>
-          </a:prstGeom>
-          <a:noFill/>
-        </p:spPr>
-        <p:txBody>
-          <a:bodyPr wrap="none">
-            <a:spAutoFit/>
-          </a:bodyPr>
-          <a:lstStyle/>
-          <a:p>
-            <a:pPr>
-              <a:spcAft>
-                <a:spcPts val="0"/>
-              </a:spcAft>
-            </a:pPr>
-            <a:r>
-              <a:rPr sz="1800">
-                <a:solidFill>
-                  <a:srgbClr val="6D8C97"/>
-                </a:solidFill>
-                <a:latin typeface="Consolas"/>
-              </a:rPr>
-              <a:t>  84  </a:t>
-            </a:r>
-            <a:r>
-              <a:rPr sz="1800">
-                <a:solidFill>
-                  <a:srgbClr val="7FE0A0"/>
-                </a:solidFill>
-                <a:latin typeface="Consolas"/>
-              </a:rPr>
-              <a:t>.bubble.writing::after {</a:t>
+              <a:t>QUICK CHECK</a:t>
             </a:r>
           </a:p>
         </p:txBody>
@@ -24806,8 +24784,8 @@
         </p:nvSpPr>
         <p:spPr>
           <a:xfrm>
-            <a:off x="548640" y="5623560"/>
-            <a:ext cx="11064240" cy="1051560"/>
+            <a:off x="822960" y="1828800"/>
+            <a:ext cx="10515600" cy="4206240"/>
           </a:xfrm>
           <a:prstGeom prst="rect">
             <a:avLst/>
@@ -24820,13 +24798,78 @@
           </a:bodyPr>
           <a:lstStyle/>
           <a:p>
-            <a:r>
-              <a:rPr sz="2000">
-                <a:solidFill>
-                  <a:srgbClr val="DCECEF"/>
-                </a:solidFill>
-              </a:rPr>
-              <a:t>Add a fake element AFTER a writing bubble - ::after is a spot CSS can fill, and that is where the cursor goes.</a:t>
+            <a:pPr>
+              <a:spcAft>
+                <a:spcPts val="1400"/>
+              </a:spcAft>
+            </a:pPr>
+            <a:r>
+              <a:rPr sz="2400">
+                <a:solidFill>
+                  <a:srgbClr val="1F2A37"/>
+                </a:solidFill>
+              </a:rPr>
+              <a:t>• A. Removes every class</a:t>
+            </a:r>
+          </a:p>
+          <a:p>
+            <a:pPr>
+              <a:spcAft>
+                <a:spcPts val="1400"/>
+              </a:spcAft>
+            </a:pPr>
+            <a:r>
+              <a:rPr sz="2400">
+                <a:solidFill>
+                  <a:srgbClr val="1F2A37"/>
+                </a:solidFill>
+              </a:rPr>
+              <a:t>• B. Sets the text</a:t>
+            </a:r>
+          </a:p>
+          <a:p>
+            <a:pPr>
+              <a:spcAft>
+                <a:spcPts val="1400"/>
+              </a:spcAft>
+            </a:pPr>
+            <a:r>
+              <a:rPr sz="2400">
+                <a:solidFill>
+                  <a:srgbClr val="1F2A37"/>
+                </a:solidFill>
+              </a:rPr>
+              <a:t>• C. Adds the 'typing' class to the element</a:t>
+            </a:r>
+          </a:p>
+          <a:p>
+            <a:pPr>
+              <a:spcAft>
+                <a:spcPts val="1400"/>
+              </a:spcAft>
+            </a:pPr>
+            <a:r>
+              <a:rPr sz="2400">
+                <a:solidFill>
+                  <a:srgbClr val="1F2A37"/>
+                </a:solidFill>
+              </a:rPr>
+              <a:t>• D. Deletes the element</a:t>
+            </a:r>
+          </a:p>
+          <a:p>
+            <a:pPr>
+              <a:spcAft>
+                <a:spcPts val="1400"/>
+              </a:spcAft>
+            </a:pPr>
+            <a:r>
+              <a:rPr sz="2400">
+                <a:solidFill>
+                  <a:srgbClr val="1F2A37"/>
+                </a:solidFill>
+              </a:rPr>
+              <a:t>• Pick one - the answer is on the next slide.</a:t>
             </a:r>
           </a:p>
         </p:txBody>
@@ -24870,7 +24913,7 @@
                   <a:srgbClr val="1F2A37"/>
                 </a:solidFill>
               </a:rPr>
-              <a:t>content</a:t>
+              <a:t>el.classList.add('typing')  does what?</a:t>
             </a:r>
           </a:p>
         </p:txBody>
@@ -24903,7 +24946,7 @@
                   <a:srgbClr val="01AEFD"/>
                 </a:solidFill>
               </a:rPr>
-              <a:t>CSS</a:t>
+              <a:t>ANSWER</a:t>
             </a:r>
           </a:p>
         </p:txBody>
@@ -24936,12 +24979,12 @@
               </a:spcAft>
             </a:pPr>
             <a:r>
-              <a:rPr sz="2800">
-                <a:solidFill>
-                  <a:srgbClr val="01AEFD"/>
-                </a:solidFill>
-              </a:rPr>
-              <a:t>content: "\258C";</a:t>
+              <a:rPr sz="2400">
+                <a:solidFill>
+                  <a:srgbClr val="1F2A37"/>
+                </a:solidFill>
+              </a:rPr>
+              <a:t>• A. Removes every class</a:t>
             </a:r>
           </a:p>
           <a:p>
@@ -24956,7 +24999,7 @@
                   <a:srgbClr val="1F2A37"/>
                 </a:solidFill>
               </a:rPr>
-              <a:t>• Fills a ::after with text - here a block character used as a cursor.</a:t>
+              <a:t>• B. Sets the text</a:t>
             </a:r>
           </a:p>
           <a:p>
@@ -24971,7 +25014,7 @@
                   <a:srgbClr val="1F2A37"/>
                 </a:solidFill>
               </a:rPr>
-              <a:t>• It is the one property that puts text on the page from CSS, not HTML.</a:t>
+              <a:t>• C. Adds the 'typing' class to the element (correct)</a:t>
             </a:r>
           </a:p>
           <a:p>
@@ -24986,7 +25029,22 @@
                   <a:srgbClr val="1F2A37"/>
                 </a:solidFill>
               </a:rPr>
-              <a:t>• Pairs with animation (next) to make that cursor blink.</a:t>
+              <a:t>• D. Deletes the element</a:t>
+            </a:r>
+          </a:p>
+          <a:p>
+            <a:pPr>
+              <a:spcAft>
+                <a:spcPts val="1400"/>
+              </a:spcAft>
+            </a:pPr>
+            <a:r>
+              <a:rPr sz="2400">
+                <a:solidFill>
+                  <a:srgbClr val="1F2A37"/>
+                </a:solidFill>
+              </a:rPr>
+              <a:t>• classList.add turns one CSS class on, leaving the others alone.</a:t>
             </a:r>
           </a:p>
         </p:txBody>
@@ -25002,14 +25060,6 @@
 <file path=ppt/slides/slide46.xml><?xml version="1.0" encoding="utf-8"?>
 <p:sld xmlns:a="http://schemas.openxmlformats.org/drawingml/2006/main" xmlns:p="http://schemas.openxmlformats.org/presentationml/2006/main" xmlns:r="http://schemas.openxmlformats.org/officeDocument/2006/relationships">
   <p:cSld>
-    <p:bg>
-      <p:bgPr>
-        <a:solidFill>
-          <a:srgbClr val="F4F8FB"/>
-        </a:solidFill>
-        <a:effectLst/>
-      </p:bgPr>
-    </p:bg>
     <p:spTree>
       <p:nvGrpSpPr>
         <p:cNvPr id="1" name=""/>
@@ -25019,14 +25069,40 @@
       <p:grpSpPr/>
       <p:sp>
         <p:nvSpPr>
-          <p:cNvPr id="2" name="TextBox 1"/>
+          <p:cNvPr id="2" name="Title 1"/>
+          <p:cNvSpPr>
+            <a:spLocks noGrp="1"/>
+          </p:cNvSpPr>
+          <p:nvPr>
+            <p:ph type="title"/>
+          </p:nvPr>
+        </p:nvSpPr>
+        <p:spPr/>
+        <p:txBody>
+          <a:bodyPr/>
+          <a:lstStyle/>
+          <a:p>
+            <a:r>
+              <a:rPr sz="3800" b="1">
+                <a:solidFill>
+                  <a:srgbClr val="1F2A37"/>
+                </a:solidFill>
+              </a:rPr>
+              <a:t>A CSS  animation  on the dots makes them...?</a:t>
+            </a:r>
+          </a:p>
+        </p:txBody>
+      </p:sp>
+      <p:sp>
+        <p:nvSpPr>
+          <p:cNvPr id="3" name="TextBox 2"/>
           <p:cNvSpPr txBox="1"/>
           <p:nvPr/>
         </p:nvSpPr>
         <p:spPr>
           <a:xfrm>
-            <a:off x="822960" y="365760"/>
-            <a:ext cx="7315200" cy="365760"/>
+            <a:off x="868680" y="502920"/>
+            <a:ext cx="5486400" cy="457200"/>
           </a:xfrm>
           <a:prstGeom prst="rect">
             <a:avLst/>
@@ -25040,543 +25116,26 @@
           <a:lstStyle/>
           <a:p>
             <a:r>
-              <a:rPr sz="1400" b="1">
+              <a:rPr sz="1500" b="1">
                 <a:solidFill>
                   <a:srgbClr val="01AEFD"/>
                 </a:solidFill>
               </a:rPr>
-              <a:t>ON THE PAGE</a:t>
+              <a:t>QUICK CHECK</a:t>
             </a:r>
           </a:p>
         </p:txBody>
       </p:sp>
       <p:sp>
         <p:nvSpPr>
-          <p:cNvPr id="3" name="TextBox 2"/>
+          <p:cNvPr id="4" name="TextBox 3"/>
           <p:cNvSpPr txBox="1"/>
           <p:nvPr/>
         </p:nvSpPr>
         <p:spPr>
           <a:xfrm>
-            <a:off x="822960" y="658368"/>
-            <a:ext cx="10515600" cy="731520"/>
-          </a:xfrm>
-          <a:prstGeom prst="rect">
-            <a:avLst/>
-          </a:prstGeom>
-          <a:noFill/>
-        </p:spPr>
-        <p:txBody>
-          <a:bodyPr wrap="none">
-            <a:spAutoFit/>
-          </a:bodyPr>
-          <a:lstStyle/>
-          <a:p>
-            <a:r>
-              <a:rPr sz="3200" b="1">
-                <a:solidFill>
-                  <a:srgbClr val="1F2A37"/>
-                </a:solidFill>
-              </a:rPr>
-              <a:t>content</a:t>
-            </a:r>
-          </a:p>
-        </p:txBody>
-      </p:sp>
-      <p:sp>
-        <p:nvSpPr>
-          <p:cNvPr id="4" name="Rounded Rectangle 3"/>
-          <p:cNvSpPr/>
-          <p:nvPr/>
-        </p:nvSpPr>
-        <p:spPr>
-          <a:xfrm>
-            <a:off x="3454237" y="1641896"/>
-            <a:ext cx="5249387" cy="3918021"/>
-          </a:xfrm>
-          <a:prstGeom prst="roundRect">
-            <a:avLst/>
-          </a:prstGeom>
-          <a:solidFill>
-            <a:srgbClr val="0F1F27"/>
-          </a:solidFill>
-          <a:ln>
-            <a:noFill/>
-          </a:ln>
-          <a:effectLst/>
-        </p:spPr>
-        <p:style>
-          <a:lnRef idx="1">
-            <a:schemeClr val="accent1"/>
-          </a:lnRef>
-          <a:fillRef idx="3">
-            <a:schemeClr val="accent1"/>
-          </a:fillRef>
-          <a:effectRef idx="2">
-            <a:schemeClr val="accent1"/>
-          </a:effectRef>
-          <a:fontRef idx="minor">
-            <a:schemeClr val="lt1"/>
-          </a:fontRef>
-        </p:style>
-        <p:txBody>
-          <a:bodyPr rtlCol="0" anchor="ctr"/>
-          <a:lstStyle/>
-          <a:p>
-            <a:pPr algn="ctr"/>
-          </a:p>
-        </p:txBody>
-      </p:sp>
-      <p:sp>
-        <p:nvSpPr>
-          <p:cNvPr id="5" name="Rounded Rectangle 4"/>
-          <p:cNvSpPr/>
-          <p:nvPr/>
-        </p:nvSpPr>
-        <p:spPr>
-          <a:xfrm>
-            <a:off x="3606393" y="2022287"/>
-            <a:ext cx="4945075" cy="437448"/>
-          </a:xfrm>
-          <a:prstGeom prst="roundRect">
-            <a:avLst/>
-          </a:prstGeom>
-          <a:solidFill>
-            <a:srgbClr val="16303A"/>
-          </a:solidFill>
-          <a:ln>
-            <a:noFill/>
-          </a:ln>
-          <a:effectLst/>
-        </p:spPr>
-        <p:style>
-          <a:lnRef idx="1">
-            <a:schemeClr val="accent1"/>
-          </a:lnRef>
-          <a:fillRef idx="3">
-            <a:schemeClr val="accent1"/>
-          </a:fillRef>
-          <a:effectRef idx="2">
-            <a:schemeClr val="accent1"/>
-          </a:effectRef>
-          <a:fontRef idx="minor">
-            <a:schemeClr val="lt1"/>
-          </a:fontRef>
-        </p:style>
-        <p:txBody>
-          <a:bodyPr rtlCol="0" anchor="ctr"/>
-          <a:lstStyle/>
-          <a:p>
-            <a:pPr algn="ctr"/>
-          </a:p>
-        </p:txBody>
-      </p:sp>
-      <p:sp>
-        <p:nvSpPr>
-          <p:cNvPr id="6" name="Rounded Rectangle 5"/>
-          <p:cNvSpPr/>
-          <p:nvPr/>
-        </p:nvSpPr>
-        <p:spPr>
-          <a:xfrm>
-            <a:off x="3720510" y="2155423"/>
-            <a:ext cx="1426463" cy="190195"/>
-          </a:xfrm>
-          <a:prstGeom prst="roundRect">
-            <a:avLst/>
-          </a:prstGeom>
-          <a:solidFill>
-            <a:srgbClr val="4A6B78"/>
-          </a:solidFill>
-          <a:ln>
-            <a:noFill/>
-          </a:ln>
-          <a:effectLst/>
-        </p:spPr>
-        <p:style>
-          <a:lnRef idx="1">
-            <a:schemeClr val="accent1"/>
-          </a:lnRef>
-          <a:fillRef idx="3">
-            <a:schemeClr val="accent1"/>
-          </a:fillRef>
-          <a:effectRef idx="2">
-            <a:schemeClr val="accent1"/>
-          </a:effectRef>
-          <a:fontRef idx="minor">
-            <a:schemeClr val="lt1"/>
-          </a:fontRef>
-        </p:style>
-        <p:txBody>
-          <a:bodyPr rtlCol="0" anchor="ctr"/>
-          <a:lstStyle/>
-          <a:p>
-            <a:pPr algn="ctr"/>
-          </a:p>
-        </p:txBody>
-      </p:sp>
-      <p:sp>
-        <p:nvSpPr>
-          <p:cNvPr id="7" name="Rounded Rectangle 6"/>
-          <p:cNvSpPr/>
-          <p:nvPr/>
-        </p:nvSpPr>
-        <p:spPr>
-          <a:xfrm>
-            <a:off x="3606393" y="2554833"/>
-            <a:ext cx="4945075" cy="1806854"/>
-          </a:xfrm>
-          <a:prstGeom prst="roundRect">
-            <a:avLst/>
-          </a:prstGeom>
-          <a:solidFill>
-            <a:srgbClr val="0B171D"/>
-          </a:solidFill>
-          <a:ln>
-            <a:noFill/>
-          </a:ln>
-          <a:effectLst/>
-        </p:spPr>
-        <p:style>
-          <a:lnRef idx="1">
-            <a:schemeClr val="accent1"/>
-          </a:lnRef>
-          <a:fillRef idx="3">
-            <a:schemeClr val="accent1"/>
-          </a:fillRef>
-          <a:effectRef idx="2">
-            <a:schemeClr val="accent1"/>
-          </a:effectRef>
-          <a:fontRef idx="minor">
-            <a:schemeClr val="lt1"/>
-          </a:fontRef>
-        </p:style>
-        <p:txBody>
-          <a:bodyPr rtlCol="0" anchor="ctr"/>
-          <a:lstStyle/>
-          <a:p>
-            <a:pPr algn="ctr"/>
-          </a:p>
-        </p:txBody>
-      </p:sp>
-      <p:sp>
-        <p:nvSpPr>
-          <p:cNvPr id="8" name="Rounded Rectangle 7"/>
-          <p:cNvSpPr/>
-          <p:nvPr/>
-        </p:nvSpPr>
-        <p:spPr>
-          <a:xfrm>
-            <a:off x="3720510" y="2668950"/>
-            <a:ext cx="2852927" cy="399409"/>
-          </a:xfrm>
-          <a:prstGeom prst="roundRect">
-            <a:avLst/>
-          </a:prstGeom>
-          <a:solidFill>
-            <a:srgbClr val="1B3540"/>
-          </a:solidFill>
-          <a:ln>
-            <a:noFill/>
-          </a:ln>
-          <a:effectLst/>
-        </p:spPr>
-        <p:style>
-          <a:lnRef idx="1">
-            <a:schemeClr val="accent1"/>
-          </a:lnRef>
-          <a:fillRef idx="3">
-            <a:schemeClr val="accent1"/>
-          </a:fillRef>
-          <a:effectRef idx="2">
-            <a:schemeClr val="accent1"/>
-          </a:effectRef>
-          <a:fontRef idx="minor">
-            <a:schemeClr val="lt1"/>
-          </a:fontRef>
-        </p:style>
-        <p:txBody>
-          <a:bodyPr rtlCol="0" anchor="ctr"/>
-          <a:lstStyle/>
-          <a:p>
-            <a:pPr algn="ctr"/>
-          </a:p>
-        </p:txBody>
-      </p:sp>
-      <p:sp>
-        <p:nvSpPr>
-          <p:cNvPr id="9" name="Rounded Rectangle 8"/>
-          <p:cNvSpPr/>
-          <p:nvPr/>
-        </p:nvSpPr>
-        <p:spPr>
-          <a:xfrm>
-            <a:off x="5584423" y="3182477"/>
-            <a:ext cx="2852927" cy="399409"/>
-          </a:xfrm>
-          <a:prstGeom prst="roundRect">
-            <a:avLst/>
-          </a:prstGeom>
-          <a:solidFill>
-            <a:srgbClr val="123A32"/>
-          </a:solidFill>
-          <a:ln>
-            <a:noFill/>
-          </a:ln>
-          <a:effectLst/>
-        </p:spPr>
-        <p:style>
-          <a:lnRef idx="1">
-            <a:schemeClr val="accent1"/>
-          </a:lnRef>
-          <a:fillRef idx="3">
-            <a:schemeClr val="accent1"/>
-          </a:fillRef>
-          <a:effectRef idx="2">
-            <a:schemeClr val="accent1"/>
-          </a:effectRef>
-          <a:fontRef idx="minor">
-            <a:schemeClr val="lt1"/>
-          </a:fontRef>
-        </p:style>
-        <p:txBody>
-          <a:bodyPr rtlCol="0" anchor="ctr"/>
-          <a:lstStyle/>
-          <a:p>
-            <a:pPr algn="ctr"/>
-          </a:p>
-        </p:txBody>
-      </p:sp>
-      <p:sp>
-        <p:nvSpPr>
-          <p:cNvPr id="10" name="Rounded Rectangle 9"/>
-          <p:cNvSpPr/>
-          <p:nvPr/>
-        </p:nvSpPr>
-        <p:spPr>
-          <a:xfrm>
-            <a:off x="3720510" y="3696004"/>
-            <a:ext cx="3138220" cy="399409"/>
-          </a:xfrm>
-          <a:prstGeom prst="roundRect">
-            <a:avLst/>
-          </a:prstGeom>
-          <a:solidFill>
-            <a:srgbClr val="1B3540"/>
-          </a:solidFill>
-          <a:ln>
-            <a:noFill/>
-          </a:ln>
-          <a:effectLst/>
-        </p:spPr>
-        <p:style>
-          <a:lnRef idx="1">
-            <a:schemeClr val="accent1"/>
-          </a:lnRef>
-          <a:fillRef idx="3">
-            <a:schemeClr val="accent1"/>
-          </a:fillRef>
-          <a:effectRef idx="2">
-            <a:schemeClr val="accent1"/>
-          </a:effectRef>
-          <a:fontRef idx="minor">
-            <a:schemeClr val="lt1"/>
-          </a:fontRef>
-        </p:style>
-        <p:txBody>
-          <a:bodyPr rtlCol="0" anchor="ctr"/>
-          <a:lstStyle/>
-          <a:p>
-            <a:pPr algn="ctr"/>
-          </a:p>
-        </p:txBody>
-      </p:sp>
-      <p:sp>
-        <p:nvSpPr>
-          <p:cNvPr id="11" name="Rounded Rectangle 10"/>
-          <p:cNvSpPr/>
-          <p:nvPr/>
-        </p:nvSpPr>
-        <p:spPr>
-          <a:xfrm>
-            <a:off x="3701491" y="4856195"/>
-            <a:ext cx="3899001" cy="323331"/>
-          </a:xfrm>
-          <a:prstGeom prst="roundRect">
-            <a:avLst/>
-          </a:prstGeom>
-          <a:solidFill>
-            <a:srgbClr val="16303A"/>
-          </a:solidFill>
-          <a:ln>
-            <a:noFill/>
-          </a:ln>
-          <a:effectLst/>
-        </p:spPr>
-        <p:style>
-          <a:lnRef idx="1">
-            <a:schemeClr val="accent1"/>
-          </a:lnRef>
-          <a:fillRef idx="3">
-            <a:schemeClr val="accent1"/>
-          </a:fillRef>
-          <a:effectRef idx="2">
-            <a:schemeClr val="accent1"/>
-          </a:effectRef>
-          <a:fontRef idx="minor">
-            <a:schemeClr val="lt1"/>
-          </a:fontRef>
-        </p:style>
-        <p:txBody>
-          <a:bodyPr rtlCol="0" anchor="ctr"/>
-          <a:lstStyle/>
-          <a:p>
-            <a:pPr algn="ctr"/>
-          </a:p>
-        </p:txBody>
-      </p:sp>
-      <p:sp>
-        <p:nvSpPr>
-          <p:cNvPr id="12" name="Rounded Rectangle 11"/>
-          <p:cNvSpPr/>
-          <p:nvPr/>
-        </p:nvSpPr>
-        <p:spPr>
-          <a:xfrm>
-            <a:off x="7695590" y="4856195"/>
-            <a:ext cx="779800" cy="323331"/>
-          </a:xfrm>
-          <a:prstGeom prst="roundRect">
-            <a:avLst/>
-          </a:prstGeom>
-          <a:solidFill>
-            <a:srgbClr val="01AEFD"/>
-          </a:solidFill>
-          <a:ln>
-            <a:noFill/>
-          </a:ln>
-          <a:effectLst/>
-        </p:spPr>
-        <p:style>
-          <a:lnRef idx="1">
-            <a:schemeClr val="accent1"/>
-          </a:lnRef>
-          <a:fillRef idx="3">
-            <a:schemeClr val="accent1"/>
-          </a:fillRef>
-          <a:effectRef idx="2">
-            <a:schemeClr val="accent1"/>
-          </a:effectRef>
-          <a:fontRef idx="minor">
-            <a:schemeClr val="lt1"/>
-          </a:fontRef>
-        </p:style>
-        <p:txBody>
-          <a:bodyPr rtlCol="0" anchor="ctr"/>
-          <a:lstStyle/>
-          <a:p>
-            <a:pPr algn="ctr"/>
-          </a:p>
-        </p:txBody>
-      </p:sp>
-      <p:sp>
-        <p:nvSpPr>
-          <p:cNvPr id="13" name="Rounded Rectangle 12"/>
-          <p:cNvSpPr/>
-          <p:nvPr/>
-        </p:nvSpPr>
-        <p:spPr>
-          <a:xfrm>
-            <a:off x="3720510" y="5407761"/>
-            <a:ext cx="1616659" cy="95097"/>
-          </a:xfrm>
-          <a:prstGeom prst="roundRect">
-            <a:avLst/>
-          </a:prstGeom>
-          <a:solidFill>
-            <a:srgbClr val="2A4550"/>
-          </a:solidFill>
-          <a:ln>
-            <a:noFill/>
-          </a:ln>
-          <a:effectLst/>
-        </p:spPr>
-        <p:style>
-          <a:lnRef idx="1">
-            <a:schemeClr val="accent1"/>
-          </a:lnRef>
-          <a:fillRef idx="3">
-            <a:schemeClr val="accent1"/>
-          </a:fillRef>
-          <a:effectRef idx="2">
-            <a:schemeClr val="accent1"/>
-          </a:effectRef>
-          <a:fontRef idx="minor">
-            <a:schemeClr val="lt1"/>
-          </a:fontRef>
-        </p:style>
-        <p:txBody>
-          <a:bodyPr rtlCol="0" anchor="ctr"/>
-          <a:lstStyle/>
-          <a:p>
-            <a:pPr algn="ctr"/>
-          </a:p>
-        </p:txBody>
-      </p:sp>
-      <p:sp>
-        <p:nvSpPr>
-          <p:cNvPr id="14" name="Rounded Rectangle 13"/>
-          <p:cNvSpPr/>
-          <p:nvPr/>
-        </p:nvSpPr>
-        <p:spPr>
-          <a:xfrm>
-            <a:off x="7657551" y="4818156"/>
-            <a:ext cx="855878" cy="399409"/>
-          </a:xfrm>
-          <a:prstGeom prst="roundRect">
-            <a:avLst/>
-          </a:prstGeom>
-          <a:noFill/>
-          <a:ln w="44450">
-            <a:solidFill>
-              <a:srgbClr val="FFD633"/>
-            </a:solidFill>
-          </a:ln>
-          <a:effectLst/>
-        </p:spPr>
-        <p:style>
-          <a:lnRef idx="1">
-            <a:schemeClr val="accent1"/>
-          </a:lnRef>
-          <a:fillRef idx="3">
-            <a:schemeClr val="accent1"/>
-          </a:fillRef>
-          <a:effectRef idx="2">
-            <a:schemeClr val="accent1"/>
-          </a:effectRef>
-          <a:fontRef idx="minor">
-            <a:schemeClr val="lt1"/>
-          </a:fontRef>
-        </p:style>
-        <p:txBody>
-          <a:bodyPr rtlCol="0" anchor="ctr"/>
-          <a:lstStyle/>
-          <a:p>
-            <a:pPr algn="ctr"/>
-          </a:p>
-        </p:txBody>
-      </p:sp>
-      <p:sp>
-        <p:nvSpPr>
-          <p:cNvPr id="15" name="TextBox 14"/>
-          <p:cNvSpPr txBox="1"/>
-          <p:nvPr/>
-        </p:nvSpPr>
-        <p:spPr>
-          <a:xfrm>
-            <a:off x="822960" y="6172200"/>
-            <a:ext cx="10515600" cy="548640"/>
+            <a:off x="822960" y="1828800"/>
+            <a:ext cx="10515600" cy="4206240"/>
           </a:xfrm>
           <a:prstGeom prst="rect">
             <a:avLst/>
@@ -25589,13 +25148,78 @@
           </a:bodyPr>
           <a:lstStyle/>
           <a:p>
-            <a:r>
-              <a:rPr sz="2000">
-                <a:solidFill>
-                  <a:srgbClr val="0A6299"/>
-                </a:solidFill>
-              </a:rPr>
-              <a:t>content can drop an icon into the button.</a:t>
+            <a:pPr>
+              <a:spcAft>
+                <a:spcPts val="1400"/>
+              </a:spcAft>
+            </a:pPr>
+            <a:r>
+              <a:rPr sz="2400">
+                <a:solidFill>
+                  <a:srgbClr val="1F2A37"/>
+                </a:solidFill>
+              </a:rPr>
+              <a:t>• A. move on their own over time</a:t>
+            </a:r>
+          </a:p>
+          <a:p>
+            <a:pPr>
+              <a:spcAft>
+                <a:spcPts val="1400"/>
+              </a:spcAft>
+            </a:pPr>
+            <a:r>
+              <a:rPr sz="2400">
+                <a:solidFill>
+                  <a:srgbClr val="1F2A37"/>
+                </a:solidFill>
+              </a:rPr>
+              <a:t>• B. vanish forever</a:t>
+            </a:r>
+          </a:p>
+          <a:p>
+            <a:pPr>
+              <a:spcAft>
+                <a:spcPts val="1400"/>
+              </a:spcAft>
+            </a:pPr>
+            <a:r>
+              <a:rPr sz="2400">
+                <a:solidFill>
+                  <a:srgbClr val="1F2A37"/>
+                </a:solidFill>
+              </a:rPr>
+              <a:t>• C. turn into text</a:t>
+            </a:r>
+          </a:p>
+          <a:p>
+            <a:pPr>
+              <a:spcAft>
+                <a:spcPts val="1400"/>
+              </a:spcAft>
+            </a:pPr>
+            <a:r>
+              <a:rPr sz="2400">
+                <a:solidFill>
+                  <a:srgbClr val="1F2A37"/>
+                </a:solidFill>
+              </a:rPr>
+              <a:t>• D. freeze the page</a:t>
+            </a:r>
+          </a:p>
+          <a:p>
+            <a:pPr>
+              <a:spcAft>
+                <a:spcPts val="1400"/>
+              </a:spcAft>
+            </a:pPr>
+            <a:r>
+              <a:rPr sz="2400">
+                <a:solidFill>
+                  <a:srgbClr val="1F2A37"/>
+                </a:solidFill>
+              </a:rPr>
+              <a:t>• Pick one - the answer is on the next slide.</a:t>
             </a:r>
           </a:p>
         </p:txBody>
@@ -25611,14 +25235,6 @@
 <file path=ppt/slides/slide47.xml><?xml version="1.0" encoding="utf-8"?>
 <p:sld xmlns:a="http://schemas.openxmlformats.org/drawingml/2006/main" xmlns:p="http://schemas.openxmlformats.org/presentationml/2006/main" xmlns:r="http://schemas.openxmlformats.org/officeDocument/2006/relationships">
   <p:cSld>
-    <p:bg>
-      <p:bgPr>
-        <a:solidFill>
-          <a:srgbClr val="102127"/>
-        </a:solidFill>
-        <a:effectLst/>
-      </p:bgPr>
-    </p:bg>
     <p:spTree>
       <p:nvGrpSpPr>
         <p:cNvPr id="1" name=""/>
@@ -25628,14 +25244,40 @@
       <p:grpSpPr/>
       <p:sp>
         <p:nvSpPr>
-          <p:cNvPr id="2" name="TextBox 1"/>
+          <p:cNvPr id="2" name="Title 1"/>
+          <p:cNvSpPr>
+            <a:spLocks noGrp="1"/>
+          </p:cNvSpPr>
+          <p:nvPr>
+            <p:ph type="title"/>
+          </p:nvPr>
+        </p:nvSpPr>
+        <p:spPr/>
+        <p:txBody>
+          <a:bodyPr/>
+          <a:lstStyle/>
+          <a:p>
+            <a:r>
+              <a:rPr sz="3800" b="1">
+                <a:solidFill>
+                  <a:srgbClr val="1F2A37"/>
+                </a:solidFill>
+              </a:rPr>
+              <a:t>A CSS  animation  on the dots makes them...?</a:t>
+            </a:r>
+          </a:p>
+        </p:txBody>
+      </p:sp>
+      <p:sp>
+        <p:nvSpPr>
+          <p:cNvPr id="3" name="TextBox 2"/>
           <p:cNvSpPr txBox="1"/>
           <p:nvPr/>
         </p:nvSpPr>
         <p:spPr>
           <a:xfrm>
-            <a:off x="502920" y="274320"/>
-            <a:ext cx="11155680" cy="548640"/>
+            <a:off x="868680" y="502920"/>
+            <a:ext cx="5486400" cy="457200"/>
           </a:xfrm>
           <a:prstGeom prst="rect">
             <a:avLst/>
@@ -25649,85 +25291,12 @@
           <a:lstStyle/>
           <a:p>
             <a:r>
-              <a:rPr sz="2200" b="1">
+              <a:rPr sz="1500" b="1">
                 <a:solidFill>
                   <a:srgbClr val="01AEFD"/>
                 </a:solidFill>
               </a:rPr>
-              <a:t>Type this into style.css   -   line 85</a:t>
-            </a:r>
-          </a:p>
-        </p:txBody>
-      </p:sp>
-      <p:sp>
-        <p:nvSpPr>
-          <p:cNvPr id="3" name="TextBox 2"/>
-          <p:cNvSpPr txBox="1"/>
-          <p:nvPr/>
-        </p:nvSpPr>
-        <p:spPr>
-          <a:xfrm>
-            <a:off x="502920" y="960120"/>
-            <a:ext cx="11155680" cy="4297680"/>
-          </a:xfrm>
-          <a:prstGeom prst="rect">
-            <a:avLst/>
-          </a:prstGeom>
-          <a:noFill/>
-        </p:spPr>
-        <p:txBody>
-          <a:bodyPr wrap="none">
-            <a:spAutoFit/>
-          </a:bodyPr>
-          <a:lstStyle/>
-          <a:p>
-            <a:pPr>
-              <a:spcAft>
-                <a:spcPts val="0"/>
-              </a:spcAft>
-            </a:pPr>
-            <a:r>
-              <a:rPr sz="1800">
-                <a:solidFill>
-                  <a:srgbClr val="6D8C97"/>
-                </a:solidFill>
-                <a:latin typeface="Consolas"/>
-              </a:rPr>
-              <a:t>  84  </a:t>
-            </a:r>
-            <a:r>
-              <a:rPr sz="1800">
-                <a:solidFill>
-                  <a:srgbClr val="6D8C97"/>
-                </a:solidFill>
-                <a:latin typeface="Consolas"/>
-              </a:rPr>
-              <a:t>.bubble.writing::after {</a:t>
-            </a:r>
-          </a:p>
-          <a:p>
-            <a:pPr>
-              <a:spcAft>
-                <a:spcPts val="0"/>
-              </a:spcAft>
-            </a:pPr>
-            <a:r>
-              <a:rPr sz="1800">
-                <a:solidFill>
-                  <a:srgbClr val="6D8C97"/>
-                </a:solidFill>
-                <a:latin typeface="Consolas"/>
-              </a:rPr>
-              <a:t>  85  </a:t>
-            </a:r>
-            <a:r>
-              <a:rPr sz="1800">
-                <a:solidFill>
-                  <a:srgbClr val="7FE0A0"/>
-                </a:solidFill>
-                <a:latin typeface="Consolas"/>
-              </a:rPr>
-              <a:t>  content: "\258C";</a:t>
+              <a:t>ANSWER</a:t>
             </a:r>
           </a:p>
         </p:txBody>
@@ -25740,8 +25309,8 @@
         </p:nvSpPr>
         <p:spPr>
           <a:xfrm>
-            <a:off x="548640" y="5623560"/>
-            <a:ext cx="11064240" cy="1051560"/>
+            <a:off x="822960" y="1828800"/>
+            <a:ext cx="10515600" cy="4206240"/>
           </a:xfrm>
           <a:prstGeom prst="rect">
             <a:avLst/>
@@ -25754,13 +25323,78 @@
           </a:bodyPr>
           <a:lstStyle/>
           <a:p>
-            <a:r>
-              <a:rPr sz="2000">
-                <a:solidFill>
-                  <a:srgbClr val="DCECEF"/>
-                </a:solidFill>
-              </a:rPr>
-              <a:t>content fills it with a block character "\258C" - our cursor.</a:t>
+            <a:pPr>
+              <a:spcAft>
+                <a:spcPts val="1400"/>
+              </a:spcAft>
+            </a:pPr>
+            <a:r>
+              <a:rPr sz="2400">
+                <a:solidFill>
+                  <a:srgbClr val="1F2A37"/>
+                </a:solidFill>
+              </a:rPr>
+              <a:t>• A. move on their own over time (correct)</a:t>
+            </a:r>
+          </a:p>
+          <a:p>
+            <a:pPr>
+              <a:spcAft>
+                <a:spcPts val="1400"/>
+              </a:spcAft>
+            </a:pPr>
+            <a:r>
+              <a:rPr sz="2400">
+                <a:solidFill>
+                  <a:srgbClr val="1F2A37"/>
+                </a:solidFill>
+              </a:rPr>
+              <a:t>• B. vanish forever</a:t>
+            </a:r>
+          </a:p>
+          <a:p>
+            <a:pPr>
+              <a:spcAft>
+                <a:spcPts val="1400"/>
+              </a:spcAft>
+            </a:pPr>
+            <a:r>
+              <a:rPr sz="2400">
+                <a:solidFill>
+                  <a:srgbClr val="1F2A37"/>
+                </a:solidFill>
+              </a:rPr>
+              <a:t>• C. turn into text</a:t>
+            </a:r>
+          </a:p>
+          <a:p>
+            <a:pPr>
+              <a:spcAft>
+                <a:spcPts val="1400"/>
+              </a:spcAft>
+            </a:pPr>
+            <a:r>
+              <a:rPr sz="2400">
+                <a:solidFill>
+                  <a:srgbClr val="1F2A37"/>
+                </a:solidFill>
+              </a:rPr>
+              <a:t>• D. freeze the page</a:t>
+            </a:r>
+          </a:p>
+          <a:p>
+            <a:pPr>
+              <a:spcAft>
+                <a:spcPts val="1400"/>
+              </a:spcAft>
+            </a:pPr>
+            <a:r>
+              <a:rPr sz="2400">
+                <a:solidFill>
+                  <a:srgbClr val="1F2A37"/>
+                </a:solidFill>
+              </a:rPr>
+              <a:t>• animation replays keyframes over time, so the dots keep moving.</a:t>
             </a:r>
           </a:p>
         </p:txBody>
@@ -25776,14 +25410,6 @@
 <file path=ppt/slides/slide48.xml><?xml version="1.0" encoding="utf-8"?>
 <p:sld xmlns:a="http://schemas.openxmlformats.org/drawingml/2006/main" xmlns:p="http://schemas.openxmlformats.org/presentationml/2006/main" xmlns:r="http://schemas.openxmlformats.org/officeDocument/2006/relationships">
   <p:cSld>
-    <p:bg>
-      <p:bgPr>
-        <a:solidFill>
-          <a:srgbClr val="102127"/>
-        </a:solidFill>
-        <a:effectLst/>
-      </p:bgPr>
-    </p:bg>
     <p:spTree>
       <p:nvGrpSpPr>
         <p:cNvPr id="1" name=""/>
@@ -25793,14 +25419,40 @@
       <p:grpSpPr/>
       <p:sp>
         <p:nvSpPr>
-          <p:cNvPr id="2" name="TextBox 1"/>
+          <p:cNvPr id="2" name="Title 1"/>
+          <p:cNvSpPr>
+            <a:spLocks noGrp="1"/>
+          </p:cNvSpPr>
+          <p:nvPr>
+            <p:ph type="title"/>
+          </p:nvPr>
+        </p:nvSpPr>
+        <p:spPr/>
+        <p:txBody>
+          <a:bodyPr/>
+          <a:lstStyle/>
+          <a:p>
+            <a:r>
+              <a:rPr sz="3800" b="1">
+                <a:solidFill>
+                  <a:srgbClr val="1F2A37"/>
+                </a:solidFill>
+              </a:rPr>
+              <a:t>visibility: hidden  hides an element but...?</a:t>
+            </a:r>
+          </a:p>
+        </p:txBody>
+      </p:sp>
+      <p:sp>
+        <p:nvSpPr>
+          <p:cNvPr id="3" name="TextBox 2"/>
           <p:cNvSpPr txBox="1"/>
           <p:nvPr/>
         </p:nvSpPr>
         <p:spPr>
           <a:xfrm>
-            <a:off x="502920" y="274320"/>
-            <a:ext cx="11155680" cy="548640"/>
+            <a:off x="868680" y="502920"/>
+            <a:ext cx="5486400" cy="457200"/>
           </a:xfrm>
           <a:prstGeom prst="rect">
             <a:avLst/>
@@ -25814,110 +25466,12 @@
           <a:lstStyle/>
           <a:p>
             <a:r>
-              <a:rPr sz="2200" b="1">
+              <a:rPr sz="1500" b="1">
                 <a:solidFill>
                   <a:srgbClr val="01AEFD"/>
                 </a:solidFill>
               </a:rPr>
-              <a:t>Type this into style.css   -   line 86</a:t>
-            </a:r>
-          </a:p>
-        </p:txBody>
-      </p:sp>
-      <p:sp>
-        <p:nvSpPr>
-          <p:cNvPr id="3" name="TextBox 2"/>
-          <p:cNvSpPr txBox="1"/>
-          <p:nvPr/>
-        </p:nvSpPr>
-        <p:spPr>
-          <a:xfrm>
-            <a:off x="502920" y="960120"/>
-            <a:ext cx="11155680" cy="4297680"/>
-          </a:xfrm>
-          <a:prstGeom prst="rect">
-            <a:avLst/>
-          </a:prstGeom>
-          <a:noFill/>
-        </p:spPr>
-        <p:txBody>
-          <a:bodyPr wrap="none">
-            <a:spAutoFit/>
-          </a:bodyPr>
-          <a:lstStyle/>
-          <a:p>
-            <a:pPr>
-              <a:spcAft>
-                <a:spcPts val="0"/>
-              </a:spcAft>
-            </a:pPr>
-            <a:r>
-              <a:rPr sz="1800">
-                <a:solidFill>
-                  <a:srgbClr val="6D8C97"/>
-                </a:solidFill>
-                <a:latin typeface="Consolas"/>
-              </a:rPr>
-              <a:t>  84  </a:t>
-            </a:r>
-            <a:r>
-              <a:rPr sz="1800">
-                <a:solidFill>
-                  <a:srgbClr val="6D8C97"/>
-                </a:solidFill>
-                <a:latin typeface="Consolas"/>
-              </a:rPr>
-              <a:t>.bubble.writing::after {</a:t>
-            </a:r>
-          </a:p>
-          <a:p>
-            <a:pPr>
-              <a:spcAft>
-                <a:spcPts val="0"/>
-              </a:spcAft>
-            </a:pPr>
-            <a:r>
-              <a:rPr sz="1800">
-                <a:solidFill>
-                  <a:srgbClr val="6D8C97"/>
-                </a:solidFill>
-                <a:latin typeface="Consolas"/>
-              </a:rPr>
-              <a:t>  85  </a:t>
-            </a:r>
-            <a:r>
-              <a:rPr sz="1800">
-                <a:solidFill>
-                  <a:srgbClr val="6D8C97"/>
-                </a:solidFill>
-                <a:latin typeface="Consolas"/>
-              </a:rPr>
-              <a:t>  content: "\258C";</a:t>
-            </a:r>
-          </a:p>
-          <a:p>
-            <a:pPr>
-              <a:spcAft>
-                <a:spcPts val="0"/>
-              </a:spcAft>
-            </a:pPr>
-            <a:r>
-              <a:rPr sz="1800">
-                <a:solidFill>
-                  <a:srgbClr val="6D8C97"/>
-                </a:solidFill>
-                <a:latin typeface="Consolas"/>
-              </a:rPr>
-              <a:t>  86  </a:t>
-            </a:r>
-            <a:r>
-              <a:rPr sz="1800">
-                <a:solidFill>
-                  <a:srgbClr val="7FE0A0"/>
-                </a:solidFill>
-                <a:latin typeface="Consolas"/>
-              </a:rPr>
-              <a:t>  color: #01aefd;</a:t>
+              <a:t>QUICK CHECK</a:t>
             </a:r>
           </a:p>
         </p:txBody>
@@ -25930,8 +25484,8 @@
         </p:nvSpPr>
         <p:spPr>
           <a:xfrm>
-            <a:off x="548640" y="5623560"/>
-            <a:ext cx="11064240" cy="1051560"/>
+            <a:off x="822960" y="1828800"/>
+            <a:ext cx="10515600" cy="4206240"/>
           </a:xfrm>
           <a:prstGeom prst="rect">
             <a:avLst/>
@@ -25944,13 +25498,78 @@
           </a:bodyPr>
           <a:lstStyle/>
           <a:p>
-            <a:r>
-              <a:rPr sz="2000">
-                <a:solidFill>
-                  <a:srgbClr val="DCECEF"/>
-                </a:solidFill>
-              </a:rPr>
-              <a:t>Make the cursor blue.</a:t>
+            <a:pPr>
+              <a:spcAft>
+                <a:spcPts val="1400"/>
+              </a:spcAft>
+            </a:pPr>
+            <a:r>
+              <a:rPr sz="2400">
+                <a:solidFill>
+                  <a:srgbClr val="1F2A37"/>
+                </a:solidFill>
+              </a:rPr>
+              <a:t>• A. removes its space</a:t>
+            </a:r>
+          </a:p>
+          <a:p>
+            <a:pPr>
+              <a:spcAft>
+                <a:spcPts val="1400"/>
+              </a:spcAft>
+            </a:pPr>
+            <a:r>
+              <a:rPr sz="2400">
+                <a:solidFill>
+                  <a:srgbClr val="1F2A37"/>
+                </a:solidFill>
+              </a:rPr>
+              <a:t>• B. keeps its space on the page</a:t>
+            </a:r>
+          </a:p>
+          <a:p>
+            <a:pPr>
+              <a:spcAft>
+                <a:spcPts val="1400"/>
+              </a:spcAft>
+            </a:pPr>
+            <a:r>
+              <a:rPr sz="2400">
+                <a:solidFill>
+                  <a:srgbClr val="1F2A37"/>
+                </a:solidFill>
+              </a:rPr>
+              <a:t>• C. deletes it for good</a:t>
+            </a:r>
+          </a:p>
+          <a:p>
+            <a:pPr>
+              <a:spcAft>
+                <a:spcPts val="1400"/>
+              </a:spcAft>
+            </a:pPr>
+            <a:r>
+              <a:rPr sz="2400">
+                <a:solidFill>
+                  <a:srgbClr val="1F2A37"/>
+                </a:solidFill>
+              </a:rPr>
+              <a:t>• D. makes it bold</a:t>
+            </a:r>
+          </a:p>
+          <a:p>
+            <a:pPr>
+              <a:spcAft>
+                <a:spcPts val="1400"/>
+              </a:spcAft>
+            </a:pPr>
+            <a:r>
+              <a:rPr sz="2400">
+                <a:solidFill>
+                  <a:srgbClr val="1F2A37"/>
+                </a:solidFill>
+              </a:rPr>
+              <a:t>• Pick one - the answer is on the next slide.</a:t>
             </a:r>
           </a:p>
         </p:txBody>
@@ -25994,7 +25613,7 @@
                   <a:srgbClr val="1F2A37"/>
                 </a:solidFill>
               </a:rPr>
-              <a:t>animation</a:t>
+              <a:t>visibility: hidden  hides an element but...?</a:t>
             </a:r>
           </a:p>
         </p:txBody>
@@ -26027,7 +25646,7 @@
                   <a:srgbClr val="01AEFD"/>
                 </a:solidFill>
               </a:rPr>
-              <a:t>CSS</a:t>
+              <a:t>ANSWER</a:t>
             </a:r>
           </a:p>
         </p:txBody>
@@ -26060,12 +25679,12 @@
               </a:spcAft>
             </a:pPr>
             <a:r>
-              <a:rPr sz="2800">
-                <a:solidFill>
-                  <a:srgbClr val="01AEFD"/>
-                </a:solidFill>
-              </a:rPr>
-              <a:t>animation: blink 1s steps(2, start) infinite;</a:t>
+              <a:rPr sz="2400">
+                <a:solidFill>
+                  <a:srgbClr val="1F2A37"/>
+                </a:solidFill>
+              </a:rPr>
+              <a:t>• A. removes its space</a:t>
             </a:r>
           </a:p>
           <a:p>
@@ -26080,7 +25699,7 @@
                   <a:srgbClr val="1F2A37"/>
                 </a:solidFill>
               </a:rPr>
-              <a:t>• Plays a keyframes animation: its name, how long, the timing, how often.</a:t>
+              <a:t>• B. keeps its space on the page (correct)</a:t>
             </a:r>
           </a:p>
           <a:p>
@@ -26095,7 +25714,7 @@
                   <a:srgbClr val="1F2A37"/>
                 </a:solidFill>
               </a:rPr>
-              <a:t>• The keyframes say WHAT changes; animation says how to play it.</a:t>
+              <a:t>• C. deletes it for good</a:t>
             </a:r>
           </a:p>
           <a:p>
@@ -26110,7 +25729,22 @@
                   <a:srgbClr val="1F2A37"/>
                 </a:solidFill>
               </a:rPr>
-              <a:t>• 'blink 1s ... infinite' fades the cursor over and over.</a:t>
+              <a:t>• D. makes it bold</a:t>
+            </a:r>
+          </a:p>
+          <a:p>
+            <a:pPr>
+              <a:spcAft>
+                <a:spcPts val="1400"/>
+              </a:spcAft>
+            </a:pPr>
+            <a:r>
+              <a:rPr sz="2400">
+                <a:solidFill>
+                  <a:srgbClr val="1F2A37"/>
+                </a:solidFill>
+              </a:rPr>
+              <a:t>• Unlike display:none, visibility:hidden leaves the gap where it was.</a:t>
             </a:r>
           </a:p>
         </p:txBody>
@@ -26253,14 +25887,6 @@
 <file path=ppt/slides/slide50.xml><?xml version="1.0" encoding="utf-8"?>
 <p:sld xmlns:a="http://schemas.openxmlformats.org/drawingml/2006/main" xmlns:p="http://schemas.openxmlformats.org/presentationml/2006/main" xmlns:r="http://schemas.openxmlformats.org/officeDocument/2006/relationships">
   <p:cSld>
-    <p:bg>
-      <p:bgPr>
-        <a:solidFill>
-          <a:srgbClr val="F4F8FB"/>
-        </a:solidFill>
-        <a:effectLst/>
-      </p:bgPr>
-    </p:bg>
     <p:spTree>
       <p:nvGrpSpPr>
         <p:cNvPr id="1" name=""/>
@@ -26270,14 +25896,40 @@
       <p:grpSpPr/>
       <p:sp>
         <p:nvSpPr>
-          <p:cNvPr id="2" name="TextBox 1"/>
+          <p:cNvPr id="2" name="Title 1"/>
+          <p:cNvSpPr>
+            <a:spLocks noGrp="1"/>
+          </p:cNvSpPr>
+          <p:nvPr>
+            <p:ph type="title"/>
+          </p:nvPr>
+        </p:nvSpPr>
+        <p:spPr/>
+        <p:txBody>
+          <a:bodyPr/>
+          <a:lstStyle/>
+          <a:p>
+            <a:r>
+              <a:rPr sz="3800" b="1">
+                <a:solidFill>
+                  <a:srgbClr val="1F2A37"/>
+                </a:solidFill>
+              </a:rPr>
+              <a:t>JSON.parse(text)  gives you...? (from week 10)</a:t>
+            </a:r>
+          </a:p>
+        </p:txBody>
+      </p:sp>
+      <p:sp>
+        <p:nvSpPr>
+          <p:cNvPr id="3" name="TextBox 2"/>
           <p:cNvSpPr txBox="1"/>
           <p:nvPr/>
         </p:nvSpPr>
         <p:spPr>
           <a:xfrm>
-            <a:off x="822960" y="365760"/>
-            <a:ext cx="7315200" cy="365760"/>
+            <a:off x="868680" y="502920"/>
+            <a:ext cx="5486400" cy="457200"/>
           </a:xfrm>
           <a:prstGeom prst="rect">
             <a:avLst/>
@@ -26291,543 +25943,26 @@
           <a:lstStyle/>
           <a:p>
             <a:r>
-              <a:rPr sz="1400" b="1">
+              <a:rPr sz="1500" b="1">
                 <a:solidFill>
                   <a:srgbClr val="01AEFD"/>
                 </a:solidFill>
               </a:rPr>
-              <a:t>ON THE PAGE</a:t>
+              <a:t>QUICK CHECK</a:t>
             </a:r>
           </a:p>
         </p:txBody>
       </p:sp>
       <p:sp>
         <p:nvSpPr>
-          <p:cNvPr id="3" name="TextBox 2"/>
+          <p:cNvPr id="4" name="TextBox 3"/>
           <p:cNvSpPr txBox="1"/>
           <p:nvPr/>
         </p:nvSpPr>
         <p:spPr>
           <a:xfrm>
-            <a:off x="822960" y="658368"/>
-            <a:ext cx="10515600" cy="731520"/>
-          </a:xfrm>
-          <a:prstGeom prst="rect">
-            <a:avLst/>
-          </a:prstGeom>
-          <a:noFill/>
-        </p:spPr>
-        <p:txBody>
-          <a:bodyPr wrap="none">
-            <a:spAutoFit/>
-          </a:bodyPr>
-          <a:lstStyle/>
-          <a:p>
-            <a:r>
-              <a:rPr sz="3200" b="1">
-                <a:solidFill>
-                  <a:srgbClr val="1F2A37"/>
-                </a:solidFill>
-              </a:rPr>
-              <a:t>animation</a:t>
-            </a:r>
-          </a:p>
-        </p:txBody>
-      </p:sp>
-      <p:sp>
-        <p:nvSpPr>
-          <p:cNvPr id="4" name="Rounded Rectangle 3"/>
-          <p:cNvSpPr/>
-          <p:nvPr/>
-        </p:nvSpPr>
-        <p:spPr>
-          <a:xfrm>
-            <a:off x="3454237" y="1641896"/>
-            <a:ext cx="5249387" cy="3918021"/>
-          </a:xfrm>
-          <a:prstGeom prst="roundRect">
-            <a:avLst/>
-          </a:prstGeom>
-          <a:solidFill>
-            <a:srgbClr val="0F1F27"/>
-          </a:solidFill>
-          <a:ln>
-            <a:noFill/>
-          </a:ln>
-          <a:effectLst/>
-        </p:spPr>
-        <p:style>
-          <a:lnRef idx="1">
-            <a:schemeClr val="accent1"/>
-          </a:lnRef>
-          <a:fillRef idx="3">
-            <a:schemeClr val="accent1"/>
-          </a:fillRef>
-          <a:effectRef idx="2">
-            <a:schemeClr val="accent1"/>
-          </a:effectRef>
-          <a:fontRef idx="minor">
-            <a:schemeClr val="lt1"/>
-          </a:fontRef>
-        </p:style>
-        <p:txBody>
-          <a:bodyPr rtlCol="0" anchor="ctr"/>
-          <a:lstStyle/>
-          <a:p>
-            <a:pPr algn="ctr"/>
-          </a:p>
-        </p:txBody>
-      </p:sp>
-      <p:sp>
-        <p:nvSpPr>
-          <p:cNvPr id="5" name="Rounded Rectangle 4"/>
-          <p:cNvSpPr/>
-          <p:nvPr/>
-        </p:nvSpPr>
-        <p:spPr>
-          <a:xfrm>
-            <a:off x="3606393" y="2022287"/>
-            <a:ext cx="4945075" cy="437448"/>
-          </a:xfrm>
-          <a:prstGeom prst="roundRect">
-            <a:avLst/>
-          </a:prstGeom>
-          <a:solidFill>
-            <a:srgbClr val="16303A"/>
-          </a:solidFill>
-          <a:ln>
-            <a:noFill/>
-          </a:ln>
-          <a:effectLst/>
-        </p:spPr>
-        <p:style>
-          <a:lnRef idx="1">
-            <a:schemeClr val="accent1"/>
-          </a:lnRef>
-          <a:fillRef idx="3">
-            <a:schemeClr val="accent1"/>
-          </a:fillRef>
-          <a:effectRef idx="2">
-            <a:schemeClr val="accent1"/>
-          </a:effectRef>
-          <a:fontRef idx="minor">
-            <a:schemeClr val="lt1"/>
-          </a:fontRef>
-        </p:style>
-        <p:txBody>
-          <a:bodyPr rtlCol="0" anchor="ctr"/>
-          <a:lstStyle/>
-          <a:p>
-            <a:pPr algn="ctr"/>
-          </a:p>
-        </p:txBody>
-      </p:sp>
-      <p:sp>
-        <p:nvSpPr>
-          <p:cNvPr id="6" name="Rounded Rectangle 5"/>
-          <p:cNvSpPr/>
-          <p:nvPr/>
-        </p:nvSpPr>
-        <p:spPr>
-          <a:xfrm>
-            <a:off x="3720510" y="2155423"/>
-            <a:ext cx="1426463" cy="190195"/>
-          </a:xfrm>
-          <a:prstGeom prst="roundRect">
-            <a:avLst/>
-          </a:prstGeom>
-          <a:solidFill>
-            <a:srgbClr val="4A6B78"/>
-          </a:solidFill>
-          <a:ln>
-            <a:noFill/>
-          </a:ln>
-          <a:effectLst/>
-        </p:spPr>
-        <p:style>
-          <a:lnRef idx="1">
-            <a:schemeClr val="accent1"/>
-          </a:lnRef>
-          <a:fillRef idx="3">
-            <a:schemeClr val="accent1"/>
-          </a:fillRef>
-          <a:effectRef idx="2">
-            <a:schemeClr val="accent1"/>
-          </a:effectRef>
-          <a:fontRef idx="minor">
-            <a:schemeClr val="lt1"/>
-          </a:fontRef>
-        </p:style>
-        <p:txBody>
-          <a:bodyPr rtlCol="0" anchor="ctr"/>
-          <a:lstStyle/>
-          <a:p>
-            <a:pPr algn="ctr"/>
-          </a:p>
-        </p:txBody>
-      </p:sp>
-      <p:sp>
-        <p:nvSpPr>
-          <p:cNvPr id="7" name="Rounded Rectangle 6"/>
-          <p:cNvSpPr/>
-          <p:nvPr/>
-        </p:nvSpPr>
-        <p:spPr>
-          <a:xfrm>
-            <a:off x="3606393" y="2554833"/>
-            <a:ext cx="4945075" cy="1806854"/>
-          </a:xfrm>
-          <a:prstGeom prst="roundRect">
-            <a:avLst/>
-          </a:prstGeom>
-          <a:solidFill>
-            <a:srgbClr val="0B171D"/>
-          </a:solidFill>
-          <a:ln>
-            <a:noFill/>
-          </a:ln>
-          <a:effectLst/>
-        </p:spPr>
-        <p:style>
-          <a:lnRef idx="1">
-            <a:schemeClr val="accent1"/>
-          </a:lnRef>
-          <a:fillRef idx="3">
-            <a:schemeClr val="accent1"/>
-          </a:fillRef>
-          <a:effectRef idx="2">
-            <a:schemeClr val="accent1"/>
-          </a:effectRef>
-          <a:fontRef idx="minor">
-            <a:schemeClr val="lt1"/>
-          </a:fontRef>
-        </p:style>
-        <p:txBody>
-          <a:bodyPr rtlCol="0" anchor="ctr"/>
-          <a:lstStyle/>
-          <a:p>
-            <a:pPr algn="ctr"/>
-          </a:p>
-        </p:txBody>
-      </p:sp>
-      <p:sp>
-        <p:nvSpPr>
-          <p:cNvPr id="8" name="Rounded Rectangle 7"/>
-          <p:cNvSpPr/>
-          <p:nvPr/>
-        </p:nvSpPr>
-        <p:spPr>
-          <a:xfrm>
-            <a:off x="3720510" y="2668950"/>
-            <a:ext cx="2852927" cy="399409"/>
-          </a:xfrm>
-          <a:prstGeom prst="roundRect">
-            <a:avLst/>
-          </a:prstGeom>
-          <a:solidFill>
-            <a:srgbClr val="1B3540"/>
-          </a:solidFill>
-          <a:ln>
-            <a:noFill/>
-          </a:ln>
-          <a:effectLst/>
-        </p:spPr>
-        <p:style>
-          <a:lnRef idx="1">
-            <a:schemeClr val="accent1"/>
-          </a:lnRef>
-          <a:fillRef idx="3">
-            <a:schemeClr val="accent1"/>
-          </a:fillRef>
-          <a:effectRef idx="2">
-            <a:schemeClr val="accent1"/>
-          </a:effectRef>
-          <a:fontRef idx="minor">
-            <a:schemeClr val="lt1"/>
-          </a:fontRef>
-        </p:style>
-        <p:txBody>
-          <a:bodyPr rtlCol="0" anchor="ctr"/>
-          <a:lstStyle/>
-          <a:p>
-            <a:pPr algn="ctr"/>
-          </a:p>
-        </p:txBody>
-      </p:sp>
-      <p:sp>
-        <p:nvSpPr>
-          <p:cNvPr id="9" name="Rounded Rectangle 8"/>
-          <p:cNvSpPr/>
-          <p:nvPr/>
-        </p:nvSpPr>
-        <p:spPr>
-          <a:xfrm>
-            <a:off x="5584423" y="3182477"/>
-            <a:ext cx="2852927" cy="399409"/>
-          </a:xfrm>
-          <a:prstGeom prst="roundRect">
-            <a:avLst/>
-          </a:prstGeom>
-          <a:solidFill>
-            <a:srgbClr val="123A32"/>
-          </a:solidFill>
-          <a:ln>
-            <a:noFill/>
-          </a:ln>
-          <a:effectLst/>
-        </p:spPr>
-        <p:style>
-          <a:lnRef idx="1">
-            <a:schemeClr val="accent1"/>
-          </a:lnRef>
-          <a:fillRef idx="3">
-            <a:schemeClr val="accent1"/>
-          </a:fillRef>
-          <a:effectRef idx="2">
-            <a:schemeClr val="accent1"/>
-          </a:effectRef>
-          <a:fontRef idx="minor">
-            <a:schemeClr val="lt1"/>
-          </a:fontRef>
-        </p:style>
-        <p:txBody>
-          <a:bodyPr rtlCol="0" anchor="ctr"/>
-          <a:lstStyle/>
-          <a:p>
-            <a:pPr algn="ctr"/>
-          </a:p>
-        </p:txBody>
-      </p:sp>
-      <p:sp>
-        <p:nvSpPr>
-          <p:cNvPr id="10" name="Rounded Rectangle 9"/>
-          <p:cNvSpPr/>
-          <p:nvPr/>
-        </p:nvSpPr>
-        <p:spPr>
-          <a:xfrm>
-            <a:off x="3720510" y="3696004"/>
-            <a:ext cx="3138220" cy="399409"/>
-          </a:xfrm>
-          <a:prstGeom prst="roundRect">
-            <a:avLst/>
-          </a:prstGeom>
-          <a:solidFill>
-            <a:srgbClr val="1B3540"/>
-          </a:solidFill>
-          <a:ln>
-            <a:noFill/>
-          </a:ln>
-          <a:effectLst/>
-        </p:spPr>
-        <p:style>
-          <a:lnRef idx="1">
-            <a:schemeClr val="accent1"/>
-          </a:lnRef>
-          <a:fillRef idx="3">
-            <a:schemeClr val="accent1"/>
-          </a:fillRef>
-          <a:effectRef idx="2">
-            <a:schemeClr val="accent1"/>
-          </a:effectRef>
-          <a:fontRef idx="minor">
-            <a:schemeClr val="lt1"/>
-          </a:fontRef>
-        </p:style>
-        <p:txBody>
-          <a:bodyPr rtlCol="0" anchor="ctr"/>
-          <a:lstStyle/>
-          <a:p>
-            <a:pPr algn="ctr"/>
-          </a:p>
-        </p:txBody>
-      </p:sp>
-      <p:sp>
-        <p:nvSpPr>
-          <p:cNvPr id="11" name="Rounded Rectangle 10"/>
-          <p:cNvSpPr/>
-          <p:nvPr/>
-        </p:nvSpPr>
-        <p:spPr>
-          <a:xfrm>
-            <a:off x="3701491" y="4856195"/>
-            <a:ext cx="3899001" cy="323331"/>
-          </a:xfrm>
-          <a:prstGeom prst="roundRect">
-            <a:avLst/>
-          </a:prstGeom>
-          <a:solidFill>
-            <a:srgbClr val="16303A"/>
-          </a:solidFill>
-          <a:ln>
-            <a:noFill/>
-          </a:ln>
-          <a:effectLst/>
-        </p:spPr>
-        <p:style>
-          <a:lnRef idx="1">
-            <a:schemeClr val="accent1"/>
-          </a:lnRef>
-          <a:fillRef idx="3">
-            <a:schemeClr val="accent1"/>
-          </a:fillRef>
-          <a:effectRef idx="2">
-            <a:schemeClr val="accent1"/>
-          </a:effectRef>
-          <a:fontRef idx="minor">
-            <a:schemeClr val="lt1"/>
-          </a:fontRef>
-        </p:style>
-        <p:txBody>
-          <a:bodyPr rtlCol="0" anchor="ctr"/>
-          <a:lstStyle/>
-          <a:p>
-            <a:pPr algn="ctr"/>
-          </a:p>
-        </p:txBody>
-      </p:sp>
-      <p:sp>
-        <p:nvSpPr>
-          <p:cNvPr id="12" name="Rounded Rectangle 11"/>
-          <p:cNvSpPr/>
-          <p:nvPr/>
-        </p:nvSpPr>
-        <p:spPr>
-          <a:xfrm>
-            <a:off x="7695590" y="4856195"/>
-            <a:ext cx="779800" cy="323331"/>
-          </a:xfrm>
-          <a:prstGeom prst="roundRect">
-            <a:avLst/>
-          </a:prstGeom>
-          <a:solidFill>
-            <a:srgbClr val="01AEFD"/>
-          </a:solidFill>
-          <a:ln>
-            <a:noFill/>
-          </a:ln>
-          <a:effectLst/>
-        </p:spPr>
-        <p:style>
-          <a:lnRef idx="1">
-            <a:schemeClr val="accent1"/>
-          </a:lnRef>
-          <a:fillRef idx="3">
-            <a:schemeClr val="accent1"/>
-          </a:fillRef>
-          <a:effectRef idx="2">
-            <a:schemeClr val="accent1"/>
-          </a:effectRef>
-          <a:fontRef idx="minor">
-            <a:schemeClr val="lt1"/>
-          </a:fontRef>
-        </p:style>
-        <p:txBody>
-          <a:bodyPr rtlCol="0" anchor="ctr"/>
-          <a:lstStyle/>
-          <a:p>
-            <a:pPr algn="ctr"/>
-          </a:p>
-        </p:txBody>
-      </p:sp>
-      <p:sp>
-        <p:nvSpPr>
-          <p:cNvPr id="13" name="Rounded Rectangle 12"/>
-          <p:cNvSpPr/>
-          <p:nvPr/>
-        </p:nvSpPr>
-        <p:spPr>
-          <a:xfrm>
-            <a:off x="3720510" y="5407761"/>
-            <a:ext cx="1616659" cy="95097"/>
-          </a:xfrm>
-          <a:prstGeom prst="roundRect">
-            <a:avLst/>
-          </a:prstGeom>
-          <a:solidFill>
-            <a:srgbClr val="2A4550"/>
-          </a:solidFill>
-          <a:ln>
-            <a:noFill/>
-          </a:ln>
-          <a:effectLst/>
-        </p:spPr>
-        <p:style>
-          <a:lnRef idx="1">
-            <a:schemeClr val="accent1"/>
-          </a:lnRef>
-          <a:fillRef idx="3">
-            <a:schemeClr val="accent1"/>
-          </a:fillRef>
-          <a:effectRef idx="2">
-            <a:schemeClr val="accent1"/>
-          </a:effectRef>
-          <a:fontRef idx="minor">
-            <a:schemeClr val="lt1"/>
-          </a:fontRef>
-        </p:style>
-        <p:txBody>
-          <a:bodyPr rtlCol="0" anchor="ctr"/>
-          <a:lstStyle/>
-          <a:p>
-            <a:pPr algn="ctr"/>
-          </a:p>
-        </p:txBody>
-      </p:sp>
-      <p:sp>
-        <p:nvSpPr>
-          <p:cNvPr id="14" name="Rounded Rectangle 13"/>
-          <p:cNvSpPr/>
-          <p:nvPr/>
-        </p:nvSpPr>
-        <p:spPr>
-          <a:xfrm>
-            <a:off x="3682471" y="2630911"/>
-            <a:ext cx="2929006" cy="475488"/>
-          </a:xfrm>
-          <a:prstGeom prst="roundRect">
-            <a:avLst/>
-          </a:prstGeom>
-          <a:noFill/>
-          <a:ln w="44450">
-            <a:solidFill>
-              <a:srgbClr val="FFD633"/>
-            </a:solidFill>
-          </a:ln>
-          <a:effectLst/>
-        </p:spPr>
-        <p:style>
-          <a:lnRef idx="1">
-            <a:schemeClr val="accent1"/>
-          </a:lnRef>
-          <a:fillRef idx="3">
-            <a:schemeClr val="accent1"/>
-          </a:fillRef>
-          <a:effectRef idx="2">
-            <a:schemeClr val="accent1"/>
-          </a:effectRef>
-          <a:fontRef idx="minor">
-            <a:schemeClr val="lt1"/>
-          </a:fontRef>
-        </p:style>
-        <p:txBody>
-          <a:bodyPr rtlCol="0" anchor="ctr"/>
-          <a:lstStyle/>
-          <a:p>
-            <a:pPr algn="ctr"/>
-          </a:p>
-        </p:txBody>
-      </p:sp>
-      <p:sp>
-        <p:nvSpPr>
-          <p:cNvPr id="15" name="TextBox 14"/>
-          <p:cNvSpPr txBox="1"/>
-          <p:nvPr/>
-        </p:nvSpPr>
-        <p:spPr>
-          <a:xfrm>
-            <a:off x="822960" y="6172200"/>
-            <a:ext cx="10515600" cy="548640"/>
+            <a:off x="822960" y="1828800"/>
+            <a:ext cx="10515600" cy="4206240"/>
           </a:xfrm>
           <a:prstGeom prst="rect">
             <a:avLst/>
@@ -26840,13 +25975,78 @@
           </a:bodyPr>
           <a:lstStyle/>
           <a:p>
-            <a:r>
-              <a:rPr sz="2000">
-                <a:solidFill>
-                  <a:srgbClr val="0A6299"/>
-                </a:solidFill>
-              </a:rPr>
-              <a:t>animation drives the little typing dots in a bubble.</a:t>
+            <a:pPr>
+              <a:spcAft>
+                <a:spcPts val="1400"/>
+              </a:spcAft>
+            </a:pPr>
+            <a:r>
+              <a:rPr sz="2400">
+                <a:solidFill>
+                  <a:srgbClr val="1F2A37"/>
+                </a:solidFill>
+              </a:rPr>
+              <a:t>• A. a string</a:t>
+            </a:r>
+          </a:p>
+          <a:p>
+            <a:pPr>
+              <a:spcAft>
+                <a:spcPts val="1400"/>
+              </a:spcAft>
+            </a:pPr>
+            <a:r>
+              <a:rPr sz="2400">
+                <a:solidFill>
+                  <a:srgbClr val="1F2A37"/>
+                </a:solidFill>
+              </a:rPr>
+              <a:t>• B. a number</a:t>
+            </a:r>
+          </a:p>
+          <a:p>
+            <a:pPr>
+              <a:spcAft>
+                <a:spcPts val="1400"/>
+              </a:spcAft>
+            </a:pPr>
+            <a:r>
+              <a:rPr sz="2400">
+                <a:solidFill>
+                  <a:srgbClr val="1F2A37"/>
+                </a:solidFill>
+              </a:rPr>
+              <a:t>• C. an object</a:t>
+            </a:r>
+          </a:p>
+          <a:p>
+            <a:pPr>
+              <a:spcAft>
+                <a:spcPts val="1400"/>
+              </a:spcAft>
+            </a:pPr>
+            <a:r>
+              <a:rPr sz="2400">
+                <a:solidFill>
+                  <a:srgbClr val="1F2A37"/>
+                </a:solidFill>
+              </a:rPr>
+              <a:t>• D. an HTML element</a:t>
+            </a:r>
+          </a:p>
+          <a:p>
+            <a:pPr>
+              <a:spcAft>
+                <a:spcPts val="1400"/>
+              </a:spcAft>
+            </a:pPr>
+            <a:r>
+              <a:rPr sz="2400">
+                <a:solidFill>
+                  <a:srgbClr val="1F2A37"/>
+                </a:solidFill>
+              </a:rPr>
+              <a:t>• Pick one - the answer is on the next slide.</a:t>
             </a:r>
           </a:p>
         </p:txBody>
@@ -26862,14 +26062,6 @@
 <file path=ppt/slides/slide51.xml><?xml version="1.0" encoding="utf-8"?>
 <p:sld xmlns:a="http://schemas.openxmlformats.org/drawingml/2006/main" xmlns:p="http://schemas.openxmlformats.org/presentationml/2006/main" xmlns:r="http://schemas.openxmlformats.org/officeDocument/2006/relationships">
   <p:cSld>
-    <p:bg>
-      <p:bgPr>
-        <a:solidFill>
-          <a:srgbClr val="102127"/>
-        </a:solidFill>
-        <a:effectLst/>
-      </p:bgPr>
-    </p:bg>
     <p:spTree>
       <p:nvGrpSpPr>
         <p:cNvPr id="1" name=""/>
@@ -26879,14 +26071,40 @@
       <p:grpSpPr/>
       <p:sp>
         <p:nvSpPr>
-          <p:cNvPr id="2" name="TextBox 1"/>
+          <p:cNvPr id="2" name="Title 1"/>
+          <p:cNvSpPr>
+            <a:spLocks noGrp="1"/>
+          </p:cNvSpPr>
+          <p:nvPr>
+            <p:ph type="title"/>
+          </p:nvPr>
+        </p:nvSpPr>
+        <p:spPr/>
+        <p:txBody>
+          <a:bodyPr/>
+          <a:lstStyle/>
+          <a:p>
+            <a:r>
+              <a:rPr sz="3800" b="1">
+                <a:solidFill>
+                  <a:srgbClr val="1F2A37"/>
+                </a:solidFill>
+              </a:rPr>
+              <a:t>JSON.parse(text)  gives you...? (from week 10)</a:t>
+            </a:r>
+          </a:p>
+        </p:txBody>
+      </p:sp>
+      <p:sp>
+        <p:nvSpPr>
+          <p:cNvPr id="3" name="TextBox 2"/>
           <p:cNvSpPr txBox="1"/>
           <p:nvPr/>
         </p:nvSpPr>
         <p:spPr>
           <a:xfrm>
-            <a:off x="502920" y="274320"/>
-            <a:ext cx="11155680" cy="548640"/>
+            <a:off x="868680" y="502920"/>
+            <a:ext cx="5486400" cy="457200"/>
           </a:xfrm>
           <a:prstGeom prst="rect">
             <a:avLst/>
@@ -26900,135 +26118,12 @@
           <a:lstStyle/>
           <a:p>
             <a:r>
-              <a:rPr sz="2200" b="1">
+              <a:rPr sz="1500" b="1">
                 <a:solidFill>
                   <a:srgbClr val="01AEFD"/>
                 </a:solidFill>
               </a:rPr>
-              <a:t>Type this into style.css   -   line 87</a:t>
-            </a:r>
-          </a:p>
-        </p:txBody>
-      </p:sp>
-      <p:sp>
-        <p:nvSpPr>
-          <p:cNvPr id="3" name="TextBox 2"/>
-          <p:cNvSpPr txBox="1"/>
-          <p:nvPr/>
-        </p:nvSpPr>
-        <p:spPr>
-          <a:xfrm>
-            <a:off x="502920" y="960120"/>
-            <a:ext cx="11155680" cy="4297680"/>
-          </a:xfrm>
-          <a:prstGeom prst="rect">
-            <a:avLst/>
-          </a:prstGeom>
-          <a:noFill/>
-        </p:spPr>
-        <p:txBody>
-          <a:bodyPr wrap="none">
-            <a:spAutoFit/>
-          </a:bodyPr>
-          <a:lstStyle/>
-          <a:p>
-            <a:pPr>
-              <a:spcAft>
-                <a:spcPts val="0"/>
-              </a:spcAft>
-            </a:pPr>
-            <a:r>
-              <a:rPr sz="1800">
-                <a:solidFill>
-                  <a:srgbClr val="6D8C97"/>
-                </a:solidFill>
-                <a:latin typeface="Consolas"/>
-              </a:rPr>
-              <a:t>  84  </a:t>
-            </a:r>
-            <a:r>
-              <a:rPr sz="1800">
-                <a:solidFill>
-                  <a:srgbClr val="6D8C97"/>
-                </a:solidFill>
-                <a:latin typeface="Consolas"/>
-              </a:rPr>
-              <a:t>.bubble.writing::after {</a:t>
-            </a:r>
-          </a:p>
-          <a:p>
-            <a:pPr>
-              <a:spcAft>
-                <a:spcPts val="0"/>
-              </a:spcAft>
-            </a:pPr>
-            <a:r>
-              <a:rPr sz="1800">
-                <a:solidFill>
-                  <a:srgbClr val="6D8C97"/>
-                </a:solidFill>
-                <a:latin typeface="Consolas"/>
-              </a:rPr>
-              <a:t>  85  </a:t>
-            </a:r>
-            <a:r>
-              <a:rPr sz="1800">
-                <a:solidFill>
-                  <a:srgbClr val="6D8C97"/>
-                </a:solidFill>
-                <a:latin typeface="Consolas"/>
-              </a:rPr>
-              <a:t>  content: "\258C";</a:t>
-            </a:r>
-          </a:p>
-          <a:p>
-            <a:pPr>
-              <a:spcAft>
-                <a:spcPts val="0"/>
-              </a:spcAft>
-            </a:pPr>
-            <a:r>
-              <a:rPr sz="1800">
-                <a:solidFill>
-                  <a:srgbClr val="6D8C97"/>
-                </a:solidFill>
-                <a:latin typeface="Consolas"/>
-              </a:rPr>
-              <a:t>  86  </a:t>
-            </a:r>
-            <a:r>
-              <a:rPr sz="1800">
-                <a:solidFill>
-                  <a:srgbClr val="6D8C97"/>
-                </a:solidFill>
-                <a:latin typeface="Consolas"/>
-              </a:rPr>
-              <a:t>  color: #01aefd;</a:t>
-            </a:r>
-          </a:p>
-          <a:p>
-            <a:pPr>
-              <a:spcAft>
-                <a:spcPts val="0"/>
-              </a:spcAft>
-            </a:pPr>
-            <a:r>
-              <a:rPr sz="1800">
-                <a:solidFill>
-                  <a:srgbClr val="6D8C97"/>
-                </a:solidFill>
-                <a:latin typeface="Consolas"/>
-              </a:rPr>
-              <a:t>  87  </a:t>
-            </a:r>
-            <a:r>
-              <a:rPr sz="1800">
-                <a:solidFill>
-                  <a:srgbClr val="7FE0A0"/>
-                </a:solidFill>
-                <a:latin typeface="Consolas"/>
-              </a:rPr>
-              <a:t>  animation: blink 1s steps(2, start) infinite;</a:t>
+              <a:t>ANSWER</a:t>
             </a:r>
           </a:p>
         </p:txBody>
@@ -27041,8 +26136,8 @@
         </p:nvSpPr>
         <p:spPr>
           <a:xfrm>
-            <a:off x="548640" y="5623560"/>
-            <a:ext cx="11064240" cy="1051560"/>
+            <a:off x="822960" y="1828800"/>
+            <a:ext cx="10515600" cy="4206240"/>
           </a:xfrm>
           <a:prstGeom prst="rect">
             <a:avLst/>
@@ -27055,13 +26150,78 @@
           </a:bodyPr>
           <a:lstStyle/>
           <a:p>
-            <a:r>
-              <a:rPr sz="2000">
-                <a:solidFill>
-                  <a:srgbClr val="DCECEF"/>
-                </a:solidFill>
-              </a:rPr>
-              <a:t>Run the 'blink' animation: 1 second, 2 hard steps, forever.</a:t>
+            <a:pPr>
+              <a:spcAft>
+                <a:spcPts val="1400"/>
+              </a:spcAft>
+            </a:pPr>
+            <a:r>
+              <a:rPr sz="2400">
+                <a:solidFill>
+                  <a:srgbClr val="1F2A37"/>
+                </a:solidFill>
+              </a:rPr>
+              <a:t>• A. a string</a:t>
+            </a:r>
+          </a:p>
+          <a:p>
+            <a:pPr>
+              <a:spcAft>
+                <a:spcPts val="1400"/>
+              </a:spcAft>
+            </a:pPr>
+            <a:r>
+              <a:rPr sz="2400">
+                <a:solidFill>
+                  <a:srgbClr val="1F2A37"/>
+                </a:solidFill>
+              </a:rPr>
+              <a:t>• B. a number</a:t>
+            </a:r>
+          </a:p>
+          <a:p>
+            <a:pPr>
+              <a:spcAft>
+                <a:spcPts val="1400"/>
+              </a:spcAft>
+            </a:pPr>
+            <a:r>
+              <a:rPr sz="2400">
+                <a:solidFill>
+                  <a:srgbClr val="1F2A37"/>
+                </a:solidFill>
+              </a:rPr>
+              <a:t>• C. an object (correct)</a:t>
+            </a:r>
+          </a:p>
+          <a:p>
+            <a:pPr>
+              <a:spcAft>
+                <a:spcPts val="1400"/>
+              </a:spcAft>
+            </a:pPr>
+            <a:r>
+              <a:rPr sz="2400">
+                <a:solidFill>
+                  <a:srgbClr val="1F2A37"/>
+                </a:solidFill>
+              </a:rPr>
+              <a:t>• D. an HTML element</a:t>
+            </a:r>
+          </a:p>
+          <a:p>
+            <a:pPr>
+              <a:spcAft>
+                <a:spcPts val="1400"/>
+              </a:spcAft>
+            </a:pPr>
+            <a:r>
+              <a:rPr sz="2400">
+                <a:solidFill>
+                  <a:srgbClr val="1F2A37"/>
+                </a:solidFill>
+              </a:rPr>
+              <a:t>• JSON.parse turns text into a usable object.</a:t>
             </a:r>
           </a:p>
         </p:txBody>
@@ -27120,7 +26280,7 @@
                   <a:srgbClr val="01AEFD"/>
                 </a:solidFill>
               </a:rPr>
-              <a:t>Type this into style.css   -   line 88</a:t>
+              <a:t>Type this into style.css   -   line 84</a:t>
             </a:r>
           </a:p>
         </p:txBody>
@@ -27164,111 +26324,11 @@
             <a:r>
               <a:rPr sz="1800">
                 <a:solidFill>
-                  <a:srgbClr val="6D8C97"/>
+                  <a:srgbClr val="7FE0A0"/>
                 </a:solidFill>
                 <a:latin typeface="Consolas"/>
               </a:rPr>
               <a:t>.bubble.writing::after {</a:t>
-            </a:r>
-          </a:p>
-          <a:p>
-            <a:pPr>
-              <a:spcAft>
-                <a:spcPts val="0"/>
-              </a:spcAft>
-            </a:pPr>
-            <a:r>
-              <a:rPr sz="1800">
-                <a:solidFill>
-                  <a:srgbClr val="6D8C97"/>
-                </a:solidFill>
-                <a:latin typeface="Consolas"/>
-              </a:rPr>
-              <a:t>  85  </a:t>
-            </a:r>
-            <a:r>
-              <a:rPr sz="1800">
-                <a:solidFill>
-                  <a:srgbClr val="6D8C97"/>
-                </a:solidFill>
-                <a:latin typeface="Consolas"/>
-              </a:rPr>
-              <a:t>  content: "\258C";</a:t>
-            </a:r>
-          </a:p>
-          <a:p>
-            <a:pPr>
-              <a:spcAft>
-                <a:spcPts val="0"/>
-              </a:spcAft>
-            </a:pPr>
-            <a:r>
-              <a:rPr sz="1800">
-                <a:solidFill>
-                  <a:srgbClr val="6D8C97"/>
-                </a:solidFill>
-                <a:latin typeface="Consolas"/>
-              </a:rPr>
-              <a:t>  86  </a:t>
-            </a:r>
-            <a:r>
-              <a:rPr sz="1800">
-                <a:solidFill>
-                  <a:srgbClr val="6D8C97"/>
-                </a:solidFill>
-                <a:latin typeface="Consolas"/>
-              </a:rPr>
-              <a:t>  color: #01aefd;</a:t>
-            </a:r>
-          </a:p>
-          <a:p>
-            <a:pPr>
-              <a:spcAft>
-                <a:spcPts val="0"/>
-              </a:spcAft>
-            </a:pPr>
-            <a:r>
-              <a:rPr sz="1800">
-                <a:solidFill>
-                  <a:srgbClr val="6D8C97"/>
-                </a:solidFill>
-                <a:latin typeface="Consolas"/>
-              </a:rPr>
-              <a:t>  87  </a:t>
-            </a:r>
-            <a:r>
-              <a:rPr sz="1800">
-                <a:solidFill>
-                  <a:srgbClr val="6D8C97"/>
-                </a:solidFill>
-                <a:latin typeface="Consolas"/>
-              </a:rPr>
-              <a:t>  animation: blink 1s steps(2, start) infinite;</a:t>
-            </a:r>
-          </a:p>
-          <a:p>
-            <a:pPr>
-              <a:spcAft>
-                <a:spcPts val="0"/>
-              </a:spcAft>
-            </a:pPr>
-            <a:r>
-              <a:rPr sz="1800">
-                <a:solidFill>
-                  <a:srgbClr val="6D8C97"/>
-                </a:solidFill>
-                <a:latin typeface="Consolas"/>
-              </a:rPr>
-              <a:t>  88  </a:t>
-            </a:r>
-            <a:r>
-              <a:rPr sz="1800">
-                <a:solidFill>
-                  <a:srgbClr val="7FE0A0"/>
-                </a:solidFill>
-                <a:latin typeface="Consolas"/>
-              </a:rPr>
-              <a:t>}</a:t>
             </a:r>
           </a:p>
         </p:txBody>
@@ -27301,7 +26361,7 @@
                   <a:srgbClr val="DCECEF"/>
                 </a:solidFill>
               </a:rPr>
-              <a:t>Close the rule.</a:t>
+              <a:t>Add a fake element AFTER a writing bubble - ::after is a spot CSS can fill, and that is where the cursor goes.</a:t>
             </a:r>
           </a:p>
         </p:txBody>
@@ -27345,7 +26405,7 @@
                   <a:srgbClr val="1F2A37"/>
                 </a:solidFill>
               </a:rPr>
-              <a:t>visibility</a:t>
+              <a:t>content</a:t>
             </a:r>
           </a:p>
         </p:txBody>
@@ -27416,7 +26476,7 @@
                   <a:srgbClr val="01AEFD"/>
                 </a:solidFill>
               </a:rPr>
-              <a:t>to { visibility: hidden; }</a:t>
+              <a:t>content: "\258C";</a:t>
             </a:r>
           </a:p>
           <a:p>
@@ -27431,7 +26491,7 @@
                   <a:srgbClr val="1F2A37"/>
                 </a:solidFill>
               </a:rPr>
-              <a:t>• Hides the element but KEEPS its space.</a:t>
+              <a:t>• Fills a ::after with text - here a block character used as a cursor.</a:t>
             </a:r>
           </a:p>
           <a:p>
@@ -27446,7 +26506,7 @@
                   <a:srgbClr val="1F2A37"/>
                 </a:solidFill>
               </a:rPr>
-              <a:t>• So the blinking cursor vanishes without the text jumping around.</a:t>
+              <a:t>• It is the one property that puts text on the page from CSS, not HTML.</a:t>
             </a:r>
           </a:p>
           <a:p>
@@ -27461,7 +26521,7 @@
                   <a:srgbClr val="1F2A37"/>
                 </a:solidFill>
               </a:rPr>
-              <a:t>• Different from removing it (.remove, week 5), which collapses the gap.</a:t>
+              <a:t>• Pairs with animation (next) to make that cursor blink.</a:t>
             </a:r>
           </a:p>
         </p:txBody>
@@ -27553,7 +26613,7 @@
                   <a:srgbClr val="1F2A37"/>
                 </a:solidFill>
               </a:rPr>
-              <a:t>visibility</a:t>
+              <a:t>content</a:t>
             </a:r>
           </a:p>
         </p:txBody>
@@ -28006,8 +27066,8 @@
         </p:nvSpPr>
         <p:spPr>
           <a:xfrm>
-            <a:off x="3663452" y="4818156"/>
-            <a:ext cx="3975079" cy="399409"/>
+            <a:off x="7657551" y="4818156"/>
+            <a:ext cx="855878" cy="399409"/>
           </a:xfrm>
           <a:prstGeom prst="roundRect">
             <a:avLst/>
@@ -28070,7 +27130,7 @@
                   <a:srgbClr val="0A6299"/>
                 </a:solidFill>
               </a:rPr>
-              <a:t>visibility can hide an element but keep its space.</a:t>
+              <a:t>content can drop an icon into the button.</a:t>
             </a:r>
           </a:p>
         </p:txBody>
@@ -28129,7 +27189,7 @@
                   <a:srgbClr val="01AEFD"/>
                 </a:solidFill>
               </a:rPr>
-              <a:t>Type this into style.css   -   line 89</a:t>
+              <a:t>Type this into style.css   -   line 85</a:t>
             </a:r>
           </a:p>
         </p:txBody>
@@ -28198,111 +27258,11 @@
             <a:r>
               <a:rPr sz="1800">
                 <a:solidFill>
-                  <a:srgbClr val="6D8C97"/>
+                  <a:srgbClr val="7FE0A0"/>
                 </a:solidFill>
                 <a:latin typeface="Consolas"/>
               </a:rPr>
               <a:t>  content: "\258C";</a:t>
-            </a:r>
-          </a:p>
-          <a:p>
-            <a:pPr>
-              <a:spcAft>
-                <a:spcPts val="0"/>
-              </a:spcAft>
-            </a:pPr>
-            <a:r>
-              <a:rPr sz="1800">
-                <a:solidFill>
-                  <a:srgbClr val="6D8C97"/>
-                </a:solidFill>
-                <a:latin typeface="Consolas"/>
-              </a:rPr>
-              <a:t>  86  </a:t>
-            </a:r>
-            <a:r>
-              <a:rPr sz="1800">
-                <a:solidFill>
-                  <a:srgbClr val="6D8C97"/>
-                </a:solidFill>
-                <a:latin typeface="Consolas"/>
-              </a:rPr>
-              <a:t>  color: #01aefd;</a:t>
-            </a:r>
-          </a:p>
-          <a:p>
-            <a:pPr>
-              <a:spcAft>
-                <a:spcPts val="0"/>
-              </a:spcAft>
-            </a:pPr>
-            <a:r>
-              <a:rPr sz="1800">
-                <a:solidFill>
-                  <a:srgbClr val="6D8C97"/>
-                </a:solidFill>
-                <a:latin typeface="Consolas"/>
-              </a:rPr>
-              <a:t>  87  </a:t>
-            </a:r>
-            <a:r>
-              <a:rPr sz="1800">
-                <a:solidFill>
-                  <a:srgbClr val="6D8C97"/>
-                </a:solidFill>
-                <a:latin typeface="Consolas"/>
-              </a:rPr>
-              <a:t>  animation: blink 1s steps(2, start) infinite;</a:t>
-            </a:r>
-          </a:p>
-          <a:p>
-            <a:pPr>
-              <a:spcAft>
-                <a:spcPts val="0"/>
-              </a:spcAft>
-            </a:pPr>
-            <a:r>
-              <a:rPr sz="1800">
-                <a:solidFill>
-                  <a:srgbClr val="6D8C97"/>
-                </a:solidFill>
-                <a:latin typeface="Consolas"/>
-              </a:rPr>
-              <a:t>  88  </a:t>
-            </a:r>
-            <a:r>
-              <a:rPr sz="1800">
-                <a:solidFill>
-                  <a:srgbClr val="6D8C97"/>
-                </a:solidFill>
-                <a:latin typeface="Consolas"/>
-              </a:rPr>
-              <a:t>}</a:t>
-            </a:r>
-          </a:p>
-          <a:p>
-            <a:pPr>
-              <a:spcAft>
-                <a:spcPts val="0"/>
-              </a:spcAft>
-            </a:pPr>
-            <a:r>
-              <a:rPr sz="1800">
-                <a:solidFill>
-                  <a:srgbClr val="6D8C97"/>
-                </a:solidFill>
-                <a:latin typeface="Consolas"/>
-              </a:rPr>
-              <a:t>  89  </a:t>
-            </a:r>
-            <a:r>
-              <a:rPr sz="1800">
-                <a:solidFill>
-                  <a:srgbClr val="7FE0A0"/>
-                </a:solidFill>
-                <a:latin typeface="Consolas"/>
-              </a:rPr>
-              <a:t>@keyframes blink { to { visibility: hidden; } }</a:t>
             </a:r>
           </a:p>
         </p:txBody>
@@ -28335,7 +27295,7 @@
                   <a:srgbClr val="DCECEF"/>
                 </a:solidFill>
               </a:rPr>
-              <a:t>@keyframes defines 'blink': fade the cursor to hidden and back, over and over.</a:t>
+              <a:t>content fills it with a block character "\258C" - our cursor.</a:t>
             </a:r>
           </a:p>
         </p:txBody>
@@ -28394,7 +27354,7 @@
                   <a:srgbClr val="01AEFD"/>
                 </a:solidFill>
               </a:rPr>
-              <a:t>All together in style.css</a:t>
+              <a:t>Type this into style.css   -   line 86</a:t>
             </a:r>
           </a:p>
         </p:txBody>
@@ -28438,136 +27398,61 @@
             <a:r>
               <a:rPr sz="1800">
                 <a:solidFill>
+                  <a:srgbClr val="6D8C97"/>
+                </a:solidFill>
+                <a:latin typeface="Consolas"/>
+              </a:rPr>
+              <a:t>.bubble.writing::after {</a:t>
+            </a:r>
+          </a:p>
+          <a:p>
+            <a:pPr>
+              <a:spcAft>
+                <a:spcPts val="0"/>
+              </a:spcAft>
+            </a:pPr>
+            <a:r>
+              <a:rPr sz="1800">
+                <a:solidFill>
+                  <a:srgbClr val="6D8C97"/>
+                </a:solidFill>
+                <a:latin typeface="Consolas"/>
+              </a:rPr>
+              <a:t>  85  </a:t>
+            </a:r>
+            <a:r>
+              <a:rPr sz="1800">
+                <a:solidFill>
+                  <a:srgbClr val="6D8C97"/>
+                </a:solidFill>
+                <a:latin typeface="Consolas"/>
+              </a:rPr>
+              <a:t>  content: "\258C";</a:t>
+            </a:r>
+          </a:p>
+          <a:p>
+            <a:pPr>
+              <a:spcAft>
+                <a:spcPts val="0"/>
+              </a:spcAft>
+            </a:pPr>
+            <a:r>
+              <a:rPr sz="1800">
+                <a:solidFill>
+                  <a:srgbClr val="6D8C97"/>
+                </a:solidFill>
+                <a:latin typeface="Consolas"/>
+              </a:rPr>
+              <a:t>  86  </a:t>
+            </a:r>
+            <a:r>
+              <a:rPr sz="1800">
+                <a:solidFill>
                   <a:srgbClr val="7FE0A0"/>
                 </a:solidFill>
                 <a:latin typeface="Consolas"/>
               </a:rPr>
-              <a:t>.bubble.writing::after {</a:t>
-            </a:r>
-          </a:p>
-          <a:p>
-            <a:pPr>
-              <a:spcAft>
-                <a:spcPts val="0"/>
-              </a:spcAft>
-            </a:pPr>
-            <a:r>
-              <a:rPr sz="1800">
-                <a:solidFill>
-                  <a:srgbClr val="6D8C97"/>
-                </a:solidFill>
-                <a:latin typeface="Consolas"/>
-              </a:rPr>
-              <a:t>  85  </a:t>
-            </a:r>
-            <a:r>
-              <a:rPr sz="1800">
-                <a:solidFill>
-                  <a:srgbClr val="7FE0A0"/>
-                </a:solidFill>
-                <a:latin typeface="Consolas"/>
-              </a:rPr>
-              <a:t>  content: "\258C";</a:t>
-            </a:r>
-          </a:p>
-          <a:p>
-            <a:pPr>
-              <a:spcAft>
-                <a:spcPts val="0"/>
-              </a:spcAft>
-            </a:pPr>
-            <a:r>
-              <a:rPr sz="1800">
-                <a:solidFill>
-                  <a:srgbClr val="6D8C97"/>
-                </a:solidFill>
-                <a:latin typeface="Consolas"/>
-              </a:rPr>
-              <a:t>  86  </a:t>
-            </a:r>
-            <a:r>
-              <a:rPr sz="1800">
-                <a:solidFill>
-                  <a:srgbClr val="7FE0A0"/>
-                </a:solidFill>
-                <a:latin typeface="Consolas"/>
-              </a:rPr>
               <a:t>  color: #01aefd;</a:t>
-            </a:r>
-          </a:p>
-          <a:p>
-            <a:pPr>
-              <a:spcAft>
-                <a:spcPts val="0"/>
-              </a:spcAft>
-            </a:pPr>
-            <a:r>
-              <a:rPr sz="1800">
-                <a:solidFill>
-                  <a:srgbClr val="6D8C97"/>
-                </a:solidFill>
-                <a:latin typeface="Consolas"/>
-              </a:rPr>
-              <a:t>  87  </a:t>
-            </a:r>
-            <a:r>
-              <a:rPr sz="1800">
-                <a:solidFill>
-                  <a:srgbClr val="7FE0A0"/>
-                </a:solidFill>
-                <a:latin typeface="Consolas"/>
-              </a:rPr>
-              <a:t>  animation: blink 1s steps(2, start) infinite;</a:t>
-            </a:r>
-          </a:p>
-          <a:p>
-            <a:pPr>
-              <a:spcAft>
-                <a:spcPts val="0"/>
-              </a:spcAft>
-            </a:pPr>
-            <a:r>
-              <a:rPr sz="1800">
-                <a:solidFill>
-                  <a:srgbClr val="6D8C97"/>
-                </a:solidFill>
-                <a:latin typeface="Consolas"/>
-              </a:rPr>
-              <a:t>  88  </a:t>
-            </a:r>
-            <a:r>
-              <a:rPr sz="1800">
-                <a:solidFill>
-                  <a:srgbClr val="7FE0A0"/>
-                </a:solidFill>
-                <a:latin typeface="Consolas"/>
-              </a:rPr>
-              <a:t>}</a:t>
-            </a:r>
-          </a:p>
-          <a:p>
-            <a:pPr>
-              <a:spcAft>
-                <a:spcPts val="0"/>
-              </a:spcAft>
-            </a:pPr>
-            <a:r>
-              <a:rPr sz="1800">
-                <a:solidFill>
-                  <a:srgbClr val="6D8C97"/>
-                </a:solidFill>
-                <a:latin typeface="Consolas"/>
-              </a:rPr>
-              <a:t>  89  </a:t>
-            </a:r>
-            <a:r>
-              <a:rPr sz="1800">
-                <a:solidFill>
-                  <a:srgbClr val="7FE0A0"/>
-                </a:solidFill>
-                <a:latin typeface="Consolas"/>
-              </a:rPr>
-              <a:t>@keyframes blink { to { visibility: hidden; } }</a:t>
             </a:r>
           </a:p>
         </p:txBody>
@@ -28600,7 +27485,7 @@
                   <a:srgbClr val="DCECEF"/>
                 </a:solidFill>
               </a:rPr>
-              <a:t>That is the whole piece. Check yours looks the same before moving on.</a:t>
+              <a:t>Make the cursor blue.</a:t>
             </a:r>
           </a:p>
         </p:txBody>
@@ -28644,7 +27529,7 @@
                   <a:srgbClr val="1F2A37"/>
                 </a:solidFill>
               </a:rPr>
-              <a:t>Checkpoint: watch it type</a:t>
+              <a:t>animation</a:t>
             </a:r>
           </a:p>
         </p:txBody>
@@ -28677,7 +27562,7 @@
                   <a:srgbClr val="01AEFD"/>
                 </a:solidFill>
               </a:rPr>
-              <a:t>CHECKPOINT - RUN IT</a:t>
+              <a:t>CSS</a:t>
             </a:r>
           </a:p>
         </p:txBody>
@@ -28715,7 +27600,7 @@
                   <a:srgbClr val="01AEFD"/>
                 </a:solidFill>
               </a:rPr>
-              <a:t>Press Run and send a question. Now the reply appears a few letters at a time, with a blinking cursor, instead of all at once. Same data as last week - you are just drawing each piece the moment it arrives.</a:t>
+              <a:t>animation: blink 1s steps(2, start) infinite;</a:t>
             </a:r>
           </a:p>
           <a:p>
@@ -28730,7 +27615,7 @@
                   <a:srgbClr val="1F2A37"/>
                 </a:solidFill>
               </a:rPr>
-              <a:t>• Run it in the classroom, or press Show the output in the web deck.</a:t>
+              <a:t>• Plays a keyframes animation: its name, how long, the timing, how often.</a:t>
             </a:r>
           </a:p>
           <a:p>
@@ -28745,7 +27630,22 @@
                   <a:srgbClr val="1F2A37"/>
                 </a:solidFill>
               </a:rPr>
-              <a:t>• Everyone's screen should match this.</a:t>
+              <a:t>• The keyframes say WHAT changes; animation says how to play it.</a:t>
+            </a:r>
+          </a:p>
+          <a:p>
+            <a:pPr>
+              <a:spcAft>
+                <a:spcPts val="1400"/>
+              </a:spcAft>
+            </a:pPr>
+            <a:r>
+              <a:rPr sz="2400">
+                <a:solidFill>
+                  <a:srgbClr val="1F2A37"/>
+                </a:solidFill>
+              </a:rPr>
+              <a:t>• 'blink 1s ... infinite' fades the cursor over and over.</a:t>
             </a:r>
           </a:p>
         </p:txBody>
@@ -28761,6 +27661,14 @@
 <file path=ppt/slides/slide58.xml><?xml version="1.0" encoding="utf-8"?>
 <p:sld xmlns:a="http://schemas.openxmlformats.org/drawingml/2006/main" xmlns:p="http://schemas.openxmlformats.org/presentationml/2006/main" xmlns:r="http://schemas.openxmlformats.org/officeDocument/2006/relationships">
   <p:cSld>
+    <p:bg>
+      <p:bgPr>
+        <a:solidFill>
+          <a:srgbClr val="F4F8FB"/>
+        </a:solidFill>
+        <a:effectLst/>
+      </p:bgPr>
+    </p:bg>
     <p:spTree>
       <p:nvGrpSpPr>
         <p:cNvPr id="1" name=""/>
@@ -28770,26 +27678,33 @@
       <p:grpSpPr/>
       <p:sp>
         <p:nvSpPr>
-          <p:cNvPr id="2" name="Title 1"/>
-          <p:cNvSpPr>
-            <a:spLocks noGrp="1"/>
-          </p:cNvSpPr>
-          <p:nvPr>
-            <p:ph type="title"/>
-          </p:nvPr>
+          <p:cNvPr id="2" name="TextBox 1"/>
+          <p:cNvSpPr txBox="1"/>
+          <p:nvPr/>
         </p:nvSpPr>
-        <p:spPr/>
+        <p:spPr>
+          <a:xfrm>
+            <a:off x="822960" y="365760"/>
+            <a:ext cx="7315200" cy="365760"/>
+          </a:xfrm>
+          <a:prstGeom prst="rect">
+            <a:avLst/>
+          </a:prstGeom>
+          <a:noFill/>
+        </p:spPr>
         <p:txBody>
-          <a:bodyPr/>
+          <a:bodyPr wrap="none">
+            <a:spAutoFit/>
+          </a:bodyPr>
           <a:lstStyle/>
           <a:p>
             <a:r>
-              <a:rPr sz="3800" b="1">
-                <a:solidFill>
-                  <a:srgbClr val="1F2A37"/>
-                </a:solidFill>
-              </a:rPr>
-              <a:t>Test the sad path</a:t>
+              <a:rPr sz="1400" b="1">
+                <a:solidFill>
+                  <a:srgbClr val="01AEFD"/>
+                </a:solidFill>
+              </a:rPr>
+              <a:t>ON THE PAGE</a:t>
             </a:r>
           </a:p>
         </p:txBody>
@@ -28802,8 +27717,525 @@
         </p:nvSpPr>
         <p:spPr>
           <a:xfrm>
-            <a:off x="822960" y="1828800"/>
-            <a:ext cx="10515600" cy="4206240"/>
+            <a:off x="822960" y="658368"/>
+            <a:ext cx="10515600" cy="731520"/>
+          </a:xfrm>
+          <a:prstGeom prst="rect">
+            <a:avLst/>
+          </a:prstGeom>
+          <a:noFill/>
+        </p:spPr>
+        <p:txBody>
+          <a:bodyPr wrap="none">
+            <a:spAutoFit/>
+          </a:bodyPr>
+          <a:lstStyle/>
+          <a:p>
+            <a:r>
+              <a:rPr sz="3200" b="1">
+                <a:solidFill>
+                  <a:srgbClr val="1F2A37"/>
+                </a:solidFill>
+              </a:rPr>
+              <a:t>animation</a:t>
+            </a:r>
+          </a:p>
+        </p:txBody>
+      </p:sp>
+      <p:sp>
+        <p:nvSpPr>
+          <p:cNvPr id="4" name="Rounded Rectangle 3"/>
+          <p:cNvSpPr/>
+          <p:nvPr/>
+        </p:nvSpPr>
+        <p:spPr>
+          <a:xfrm>
+            <a:off x="3454237" y="1641896"/>
+            <a:ext cx="5249387" cy="3918021"/>
+          </a:xfrm>
+          <a:prstGeom prst="roundRect">
+            <a:avLst/>
+          </a:prstGeom>
+          <a:solidFill>
+            <a:srgbClr val="0F1F27"/>
+          </a:solidFill>
+          <a:ln>
+            <a:noFill/>
+          </a:ln>
+          <a:effectLst/>
+        </p:spPr>
+        <p:style>
+          <a:lnRef idx="1">
+            <a:schemeClr val="accent1"/>
+          </a:lnRef>
+          <a:fillRef idx="3">
+            <a:schemeClr val="accent1"/>
+          </a:fillRef>
+          <a:effectRef idx="2">
+            <a:schemeClr val="accent1"/>
+          </a:effectRef>
+          <a:fontRef idx="minor">
+            <a:schemeClr val="lt1"/>
+          </a:fontRef>
+        </p:style>
+        <p:txBody>
+          <a:bodyPr rtlCol="0" anchor="ctr"/>
+          <a:lstStyle/>
+          <a:p>
+            <a:pPr algn="ctr"/>
+          </a:p>
+        </p:txBody>
+      </p:sp>
+      <p:sp>
+        <p:nvSpPr>
+          <p:cNvPr id="5" name="Rounded Rectangle 4"/>
+          <p:cNvSpPr/>
+          <p:nvPr/>
+        </p:nvSpPr>
+        <p:spPr>
+          <a:xfrm>
+            <a:off x="3606393" y="2022287"/>
+            <a:ext cx="4945075" cy="437448"/>
+          </a:xfrm>
+          <a:prstGeom prst="roundRect">
+            <a:avLst/>
+          </a:prstGeom>
+          <a:solidFill>
+            <a:srgbClr val="16303A"/>
+          </a:solidFill>
+          <a:ln>
+            <a:noFill/>
+          </a:ln>
+          <a:effectLst/>
+        </p:spPr>
+        <p:style>
+          <a:lnRef idx="1">
+            <a:schemeClr val="accent1"/>
+          </a:lnRef>
+          <a:fillRef idx="3">
+            <a:schemeClr val="accent1"/>
+          </a:fillRef>
+          <a:effectRef idx="2">
+            <a:schemeClr val="accent1"/>
+          </a:effectRef>
+          <a:fontRef idx="minor">
+            <a:schemeClr val="lt1"/>
+          </a:fontRef>
+        </p:style>
+        <p:txBody>
+          <a:bodyPr rtlCol="0" anchor="ctr"/>
+          <a:lstStyle/>
+          <a:p>
+            <a:pPr algn="ctr"/>
+          </a:p>
+        </p:txBody>
+      </p:sp>
+      <p:sp>
+        <p:nvSpPr>
+          <p:cNvPr id="6" name="Rounded Rectangle 5"/>
+          <p:cNvSpPr/>
+          <p:nvPr/>
+        </p:nvSpPr>
+        <p:spPr>
+          <a:xfrm>
+            <a:off x="3720510" y="2155423"/>
+            <a:ext cx="1426463" cy="190195"/>
+          </a:xfrm>
+          <a:prstGeom prst="roundRect">
+            <a:avLst/>
+          </a:prstGeom>
+          <a:solidFill>
+            <a:srgbClr val="4A6B78"/>
+          </a:solidFill>
+          <a:ln>
+            <a:noFill/>
+          </a:ln>
+          <a:effectLst/>
+        </p:spPr>
+        <p:style>
+          <a:lnRef idx="1">
+            <a:schemeClr val="accent1"/>
+          </a:lnRef>
+          <a:fillRef idx="3">
+            <a:schemeClr val="accent1"/>
+          </a:fillRef>
+          <a:effectRef idx="2">
+            <a:schemeClr val="accent1"/>
+          </a:effectRef>
+          <a:fontRef idx="minor">
+            <a:schemeClr val="lt1"/>
+          </a:fontRef>
+        </p:style>
+        <p:txBody>
+          <a:bodyPr rtlCol="0" anchor="ctr"/>
+          <a:lstStyle/>
+          <a:p>
+            <a:pPr algn="ctr"/>
+          </a:p>
+        </p:txBody>
+      </p:sp>
+      <p:sp>
+        <p:nvSpPr>
+          <p:cNvPr id="7" name="Rounded Rectangle 6"/>
+          <p:cNvSpPr/>
+          <p:nvPr/>
+        </p:nvSpPr>
+        <p:spPr>
+          <a:xfrm>
+            <a:off x="3606393" y="2554833"/>
+            <a:ext cx="4945075" cy="1806854"/>
+          </a:xfrm>
+          <a:prstGeom prst="roundRect">
+            <a:avLst/>
+          </a:prstGeom>
+          <a:solidFill>
+            <a:srgbClr val="0B171D"/>
+          </a:solidFill>
+          <a:ln>
+            <a:noFill/>
+          </a:ln>
+          <a:effectLst/>
+        </p:spPr>
+        <p:style>
+          <a:lnRef idx="1">
+            <a:schemeClr val="accent1"/>
+          </a:lnRef>
+          <a:fillRef idx="3">
+            <a:schemeClr val="accent1"/>
+          </a:fillRef>
+          <a:effectRef idx="2">
+            <a:schemeClr val="accent1"/>
+          </a:effectRef>
+          <a:fontRef idx="minor">
+            <a:schemeClr val="lt1"/>
+          </a:fontRef>
+        </p:style>
+        <p:txBody>
+          <a:bodyPr rtlCol="0" anchor="ctr"/>
+          <a:lstStyle/>
+          <a:p>
+            <a:pPr algn="ctr"/>
+          </a:p>
+        </p:txBody>
+      </p:sp>
+      <p:sp>
+        <p:nvSpPr>
+          <p:cNvPr id="8" name="Rounded Rectangle 7"/>
+          <p:cNvSpPr/>
+          <p:nvPr/>
+        </p:nvSpPr>
+        <p:spPr>
+          <a:xfrm>
+            <a:off x="3720510" y="2668950"/>
+            <a:ext cx="2852927" cy="399409"/>
+          </a:xfrm>
+          <a:prstGeom prst="roundRect">
+            <a:avLst/>
+          </a:prstGeom>
+          <a:solidFill>
+            <a:srgbClr val="1B3540"/>
+          </a:solidFill>
+          <a:ln>
+            <a:noFill/>
+          </a:ln>
+          <a:effectLst/>
+        </p:spPr>
+        <p:style>
+          <a:lnRef idx="1">
+            <a:schemeClr val="accent1"/>
+          </a:lnRef>
+          <a:fillRef idx="3">
+            <a:schemeClr val="accent1"/>
+          </a:fillRef>
+          <a:effectRef idx="2">
+            <a:schemeClr val="accent1"/>
+          </a:effectRef>
+          <a:fontRef idx="minor">
+            <a:schemeClr val="lt1"/>
+          </a:fontRef>
+        </p:style>
+        <p:txBody>
+          <a:bodyPr rtlCol="0" anchor="ctr"/>
+          <a:lstStyle/>
+          <a:p>
+            <a:pPr algn="ctr"/>
+          </a:p>
+        </p:txBody>
+      </p:sp>
+      <p:sp>
+        <p:nvSpPr>
+          <p:cNvPr id="9" name="Rounded Rectangle 8"/>
+          <p:cNvSpPr/>
+          <p:nvPr/>
+        </p:nvSpPr>
+        <p:spPr>
+          <a:xfrm>
+            <a:off x="5584423" y="3182477"/>
+            <a:ext cx="2852927" cy="399409"/>
+          </a:xfrm>
+          <a:prstGeom prst="roundRect">
+            <a:avLst/>
+          </a:prstGeom>
+          <a:solidFill>
+            <a:srgbClr val="123A32"/>
+          </a:solidFill>
+          <a:ln>
+            <a:noFill/>
+          </a:ln>
+          <a:effectLst/>
+        </p:spPr>
+        <p:style>
+          <a:lnRef idx="1">
+            <a:schemeClr val="accent1"/>
+          </a:lnRef>
+          <a:fillRef idx="3">
+            <a:schemeClr val="accent1"/>
+          </a:fillRef>
+          <a:effectRef idx="2">
+            <a:schemeClr val="accent1"/>
+          </a:effectRef>
+          <a:fontRef idx="minor">
+            <a:schemeClr val="lt1"/>
+          </a:fontRef>
+        </p:style>
+        <p:txBody>
+          <a:bodyPr rtlCol="0" anchor="ctr"/>
+          <a:lstStyle/>
+          <a:p>
+            <a:pPr algn="ctr"/>
+          </a:p>
+        </p:txBody>
+      </p:sp>
+      <p:sp>
+        <p:nvSpPr>
+          <p:cNvPr id="10" name="Rounded Rectangle 9"/>
+          <p:cNvSpPr/>
+          <p:nvPr/>
+        </p:nvSpPr>
+        <p:spPr>
+          <a:xfrm>
+            <a:off x="3720510" y="3696004"/>
+            <a:ext cx="3138220" cy="399409"/>
+          </a:xfrm>
+          <a:prstGeom prst="roundRect">
+            <a:avLst/>
+          </a:prstGeom>
+          <a:solidFill>
+            <a:srgbClr val="1B3540"/>
+          </a:solidFill>
+          <a:ln>
+            <a:noFill/>
+          </a:ln>
+          <a:effectLst/>
+        </p:spPr>
+        <p:style>
+          <a:lnRef idx="1">
+            <a:schemeClr val="accent1"/>
+          </a:lnRef>
+          <a:fillRef idx="3">
+            <a:schemeClr val="accent1"/>
+          </a:fillRef>
+          <a:effectRef idx="2">
+            <a:schemeClr val="accent1"/>
+          </a:effectRef>
+          <a:fontRef idx="minor">
+            <a:schemeClr val="lt1"/>
+          </a:fontRef>
+        </p:style>
+        <p:txBody>
+          <a:bodyPr rtlCol="0" anchor="ctr"/>
+          <a:lstStyle/>
+          <a:p>
+            <a:pPr algn="ctr"/>
+          </a:p>
+        </p:txBody>
+      </p:sp>
+      <p:sp>
+        <p:nvSpPr>
+          <p:cNvPr id="11" name="Rounded Rectangle 10"/>
+          <p:cNvSpPr/>
+          <p:nvPr/>
+        </p:nvSpPr>
+        <p:spPr>
+          <a:xfrm>
+            <a:off x="3701491" y="4856195"/>
+            <a:ext cx="3899001" cy="323331"/>
+          </a:xfrm>
+          <a:prstGeom prst="roundRect">
+            <a:avLst/>
+          </a:prstGeom>
+          <a:solidFill>
+            <a:srgbClr val="16303A"/>
+          </a:solidFill>
+          <a:ln>
+            <a:noFill/>
+          </a:ln>
+          <a:effectLst/>
+        </p:spPr>
+        <p:style>
+          <a:lnRef idx="1">
+            <a:schemeClr val="accent1"/>
+          </a:lnRef>
+          <a:fillRef idx="3">
+            <a:schemeClr val="accent1"/>
+          </a:fillRef>
+          <a:effectRef idx="2">
+            <a:schemeClr val="accent1"/>
+          </a:effectRef>
+          <a:fontRef idx="minor">
+            <a:schemeClr val="lt1"/>
+          </a:fontRef>
+        </p:style>
+        <p:txBody>
+          <a:bodyPr rtlCol="0" anchor="ctr"/>
+          <a:lstStyle/>
+          <a:p>
+            <a:pPr algn="ctr"/>
+          </a:p>
+        </p:txBody>
+      </p:sp>
+      <p:sp>
+        <p:nvSpPr>
+          <p:cNvPr id="12" name="Rounded Rectangle 11"/>
+          <p:cNvSpPr/>
+          <p:nvPr/>
+        </p:nvSpPr>
+        <p:spPr>
+          <a:xfrm>
+            <a:off x="7695590" y="4856195"/>
+            <a:ext cx="779800" cy="323331"/>
+          </a:xfrm>
+          <a:prstGeom prst="roundRect">
+            <a:avLst/>
+          </a:prstGeom>
+          <a:solidFill>
+            <a:srgbClr val="01AEFD"/>
+          </a:solidFill>
+          <a:ln>
+            <a:noFill/>
+          </a:ln>
+          <a:effectLst/>
+        </p:spPr>
+        <p:style>
+          <a:lnRef idx="1">
+            <a:schemeClr val="accent1"/>
+          </a:lnRef>
+          <a:fillRef idx="3">
+            <a:schemeClr val="accent1"/>
+          </a:fillRef>
+          <a:effectRef idx="2">
+            <a:schemeClr val="accent1"/>
+          </a:effectRef>
+          <a:fontRef idx="minor">
+            <a:schemeClr val="lt1"/>
+          </a:fontRef>
+        </p:style>
+        <p:txBody>
+          <a:bodyPr rtlCol="0" anchor="ctr"/>
+          <a:lstStyle/>
+          <a:p>
+            <a:pPr algn="ctr"/>
+          </a:p>
+        </p:txBody>
+      </p:sp>
+      <p:sp>
+        <p:nvSpPr>
+          <p:cNvPr id="13" name="Rounded Rectangle 12"/>
+          <p:cNvSpPr/>
+          <p:nvPr/>
+        </p:nvSpPr>
+        <p:spPr>
+          <a:xfrm>
+            <a:off x="3720510" y="5407761"/>
+            <a:ext cx="1616659" cy="95097"/>
+          </a:xfrm>
+          <a:prstGeom prst="roundRect">
+            <a:avLst/>
+          </a:prstGeom>
+          <a:solidFill>
+            <a:srgbClr val="2A4550"/>
+          </a:solidFill>
+          <a:ln>
+            <a:noFill/>
+          </a:ln>
+          <a:effectLst/>
+        </p:spPr>
+        <p:style>
+          <a:lnRef idx="1">
+            <a:schemeClr val="accent1"/>
+          </a:lnRef>
+          <a:fillRef idx="3">
+            <a:schemeClr val="accent1"/>
+          </a:fillRef>
+          <a:effectRef idx="2">
+            <a:schemeClr val="accent1"/>
+          </a:effectRef>
+          <a:fontRef idx="minor">
+            <a:schemeClr val="lt1"/>
+          </a:fontRef>
+        </p:style>
+        <p:txBody>
+          <a:bodyPr rtlCol="0" anchor="ctr"/>
+          <a:lstStyle/>
+          <a:p>
+            <a:pPr algn="ctr"/>
+          </a:p>
+        </p:txBody>
+      </p:sp>
+      <p:sp>
+        <p:nvSpPr>
+          <p:cNvPr id="14" name="Rounded Rectangle 13"/>
+          <p:cNvSpPr/>
+          <p:nvPr/>
+        </p:nvSpPr>
+        <p:spPr>
+          <a:xfrm>
+            <a:off x="3682471" y="2630911"/>
+            <a:ext cx="2929006" cy="475488"/>
+          </a:xfrm>
+          <a:prstGeom prst="roundRect">
+            <a:avLst/>
+          </a:prstGeom>
+          <a:noFill/>
+          <a:ln w="44450">
+            <a:solidFill>
+              <a:srgbClr val="FFD633"/>
+            </a:solidFill>
+          </a:ln>
+          <a:effectLst/>
+        </p:spPr>
+        <p:style>
+          <a:lnRef idx="1">
+            <a:schemeClr val="accent1"/>
+          </a:lnRef>
+          <a:fillRef idx="3">
+            <a:schemeClr val="accent1"/>
+          </a:fillRef>
+          <a:effectRef idx="2">
+            <a:schemeClr val="accent1"/>
+          </a:effectRef>
+          <a:fontRef idx="minor">
+            <a:schemeClr val="lt1"/>
+          </a:fontRef>
+        </p:style>
+        <p:txBody>
+          <a:bodyPr rtlCol="0" anchor="ctr"/>
+          <a:lstStyle/>
+          <a:p>
+            <a:pPr algn="ctr"/>
+          </a:p>
+        </p:txBody>
+      </p:sp>
+      <p:sp>
+        <p:nvSpPr>
+          <p:cNvPr id="15" name="TextBox 14"/>
+          <p:cNvSpPr txBox="1"/>
+          <p:nvPr/>
+        </p:nvSpPr>
+        <p:spPr>
+          <a:xfrm>
+            <a:off x="822960" y="6172200"/>
+            <a:ext cx="10515600" cy="548640"/>
           </a:xfrm>
           <a:prstGeom prst="rect">
             <a:avLst/>
@@ -28816,48 +28248,228 @@
           </a:bodyPr>
           <a:lstStyle/>
           <a:p>
-            <a:pPr>
-              <a:spcAft>
-                <a:spcPts val="1400"/>
-              </a:spcAft>
-            </a:pPr>
-            <a:r>
-              <a:rPr sz="2800">
+            <a:r>
+              <a:rPr sz="2000">
+                <a:solidFill>
+                  <a:srgbClr val="0A6299"/>
+                </a:solidFill>
+              </a:rPr>
+              <a:t>animation drives the little typing dots in a bubble.</a:t>
+            </a:r>
+          </a:p>
+        </p:txBody>
+      </p:sp>
+    </p:spTree>
+  </p:cSld>
+  <p:clrMapOvr>
+    <a:masterClrMapping/>
+  </p:clrMapOvr>
+</p:sld>
+</file>
+
+<file path=ppt/slides/slide59.xml><?xml version="1.0" encoding="utf-8"?>
+<p:sld xmlns:a="http://schemas.openxmlformats.org/drawingml/2006/main" xmlns:p="http://schemas.openxmlformats.org/presentationml/2006/main" xmlns:r="http://schemas.openxmlformats.org/officeDocument/2006/relationships">
+  <p:cSld>
+    <p:bg>
+      <p:bgPr>
+        <a:solidFill>
+          <a:srgbClr val="102127"/>
+        </a:solidFill>
+        <a:effectLst/>
+      </p:bgPr>
+    </p:bg>
+    <p:spTree>
+      <p:nvGrpSpPr>
+        <p:cNvPr id="1" name=""/>
+        <p:cNvGrpSpPr/>
+        <p:nvPr/>
+      </p:nvGrpSpPr>
+      <p:grpSpPr/>
+      <p:sp>
+        <p:nvSpPr>
+          <p:cNvPr id="2" name="TextBox 1"/>
+          <p:cNvSpPr txBox="1"/>
+          <p:nvPr/>
+        </p:nvSpPr>
+        <p:spPr>
+          <a:xfrm>
+            <a:off x="502920" y="274320"/>
+            <a:ext cx="11155680" cy="548640"/>
+          </a:xfrm>
+          <a:prstGeom prst="rect">
+            <a:avLst/>
+          </a:prstGeom>
+          <a:noFill/>
+        </p:spPr>
+        <p:txBody>
+          <a:bodyPr wrap="none">
+            <a:spAutoFit/>
+          </a:bodyPr>
+          <a:lstStyle/>
+          <a:p>
+            <a:r>
+              <a:rPr sz="2200" b="1">
                 <a:solidFill>
                   <a:srgbClr val="01AEFD"/>
                 </a:solidFill>
               </a:rPr>
-              <a:t>Break your key and send</a:t>
-            </a:r>
-          </a:p>
-          <a:p>
-            <a:pPr>
-              <a:spcAft>
-                <a:spcPts val="1400"/>
-              </a:spcAft>
-            </a:pPr>
-            <a:r>
-              <a:rPr sz="2400">
-                <a:solidFill>
-                  <a:srgbClr val="1F2A37"/>
-                </a:solidFill>
-              </a:rPr>
-              <a:t>• Does the empty bubble get cleaned up?</a:t>
-            </a:r>
-          </a:p>
-          <a:p>
-            <a:pPr>
-              <a:spcAft>
-                <a:spcPts val="1400"/>
-              </a:spcAft>
-            </a:pPr>
-            <a:r>
-              <a:rPr sz="2400">
-                <a:solidFill>
-                  <a:srgbClr val="1F2A37"/>
-                </a:solidFill>
-              </a:rPr>
-              <a:t>• Always check what happens when it fails</a:t>
+              <a:t>Type this into style.css   -   line 87</a:t>
+            </a:r>
+          </a:p>
+        </p:txBody>
+      </p:sp>
+      <p:sp>
+        <p:nvSpPr>
+          <p:cNvPr id="3" name="TextBox 2"/>
+          <p:cNvSpPr txBox="1"/>
+          <p:nvPr/>
+        </p:nvSpPr>
+        <p:spPr>
+          <a:xfrm>
+            <a:off x="502920" y="960120"/>
+            <a:ext cx="11155680" cy="4297680"/>
+          </a:xfrm>
+          <a:prstGeom prst="rect">
+            <a:avLst/>
+          </a:prstGeom>
+          <a:noFill/>
+        </p:spPr>
+        <p:txBody>
+          <a:bodyPr wrap="none">
+            <a:spAutoFit/>
+          </a:bodyPr>
+          <a:lstStyle/>
+          <a:p>
+            <a:pPr>
+              <a:spcAft>
+                <a:spcPts val="0"/>
+              </a:spcAft>
+            </a:pPr>
+            <a:r>
+              <a:rPr sz="1800">
+                <a:solidFill>
+                  <a:srgbClr val="6D8C97"/>
+                </a:solidFill>
+                <a:latin typeface="Consolas"/>
+              </a:rPr>
+              <a:t>  84  </a:t>
+            </a:r>
+            <a:r>
+              <a:rPr sz="1800">
+                <a:solidFill>
+                  <a:srgbClr val="6D8C97"/>
+                </a:solidFill>
+                <a:latin typeface="Consolas"/>
+              </a:rPr>
+              <a:t>.bubble.writing::after {</a:t>
+            </a:r>
+          </a:p>
+          <a:p>
+            <a:pPr>
+              <a:spcAft>
+                <a:spcPts val="0"/>
+              </a:spcAft>
+            </a:pPr>
+            <a:r>
+              <a:rPr sz="1800">
+                <a:solidFill>
+                  <a:srgbClr val="6D8C97"/>
+                </a:solidFill>
+                <a:latin typeface="Consolas"/>
+              </a:rPr>
+              <a:t>  85  </a:t>
+            </a:r>
+            <a:r>
+              <a:rPr sz="1800">
+                <a:solidFill>
+                  <a:srgbClr val="6D8C97"/>
+                </a:solidFill>
+                <a:latin typeface="Consolas"/>
+              </a:rPr>
+              <a:t>  content: "\258C";</a:t>
+            </a:r>
+          </a:p>
+          <a:p>
+            <a:pPr>
+              <a:spcAft>
+                <a:spcPts val="0"/>
+              </a:spcAft>
+            </a:pPr>
+            <a:r>
+              <a:rPr sz="1800">
+                <a:solidFill>
+                  <a:srgbClr val="6D8C97"/>
+                </a:solidFill>
+                <a:latin typeface="Consolas"/>
+              </a:rPr>
+              <a:t>  86  </a:t>
+            </a:r>
+            <a:r>
+              <a:rPr sz="1800">
+                <a:solidFill>
+                  <a:srgbClr val="6D8C97"/>
+                </a:solidFill>
+                <a:latin typeface="Consolas"/>
+              </a:rPr>
+              <a:t>  color: #01aefd;</a:t>
+            </a:r>
+          </a:p>
+          <a:p>
+            <a:pPr>
+              <a:spcAft>
+                <a:spcPts val="0"/>
+              </a:spcAft>
+            </a:pPr>
+            <a:r>
+              <a:rPr sz="1800">
+                <a:solidFill>
+                  <a:srgbClr val="6D8C97"/>
+                </a:solidFill>
+                <a:latin typeface="Consolas"/>
+              </a:rPr>
+              <a:t>  87  </a:t>
+            </a:r>
+            <a:r>
+              <a:rPr sz="1800">
+                <a:solidFill>
+                  <a:srgbClr val="7FE0A0"/>
+                </a:solidFill>
+                <a:latin typeface="Consolas"/>
+              </a:rPr>
+              <a:t>  animation: blink 1s steps(2, start) infinite;</a:t>
+            </a:r>
+          </a:p>
+        </p:txBody>
+      </p:sp>
+      <p:sp>
+        <p:nvSpPr>
+          <p:cNvPr id="4" name="TextBox 3"/>
+          <p:cNvSpPr txBox="1"/>
+          <p:nvPr/>
+        </p:nvSpPr>
+        <p:spPr>
+          <a:xfrm>
+            <a:off x="548640" y="5623560"/>
+            <a:ext cx="11064240" cy="1051560"/>
+          </a:xfrm>
+          <a:prstGeom prst="rect">
+            <a:avLst/>
+          </a:prstGeom>
+          <a:noFill/>
+        </p:spPr>
+        <p:txBody>
+          <a:bodyPr wrap="square">
+            <a:spAutoFit/>
+          </a:bodyPr>
+          <a:lstStyle/>
+          <a:p>
+            <a:r>
+              <a:rPr sz="2000">
+                <a:solidFill>
+                  <a:srgbClr val="DCECEF"/>
+                </a:solidFill>
+              </a:rPr>
+              <a:t>Run the 'blink' animation: 1 second, 2 hard steps, forever.</a:t>
             </a:r>
           </a:p>
         </p:txBody>
@@ -29098,6 +28710,1802 @@
                 </a:solidFill>
               </a:rPr>
               <a:t>This line changes - take the old one out; the new version is next.</a:t>
+            </a:r>
+          </a:p>
+        </p:txBody>
+      </p:sp>
+    </p:spTree>
+  </p:cSld>
+  <p:clrMapOvr>
+    <a:masterClrMapping/>
+  </p:clrMapOvr>
+</p:sld>
+</file>
+
+<file path=ppt/slides/slide60.xml><?xml version="1.0" encoding="utf-8"?>
+<p:sld xmlns:a="http://schemas.openxmlformats.org/drawingml/2006/main" xmlns:p="http://schemas.openxmlformats.org/presentationml/2006/main" xmlns:r="http://schemas.openxmlformats.org/officeDocument/2006/relationships">
+  <p:cSld>
+    <p:bg>
+      <p:bgPr>
+        <a:solidFill>
+          <a:srgbClr val="102127"/>
+        </a:solidFill>
+        <a:effectLst/>
+      </p:bgPr>
+    </p:bg>
+    <p:spTree>
+      <p:nvGrpSpPr>
+        <p:cNvPr id="1" name=""/>
+        <p:cNvGrpSpPr/>
+        <p:nvPr/>
+      </p:nvGrpSpPr>
+      <p:grpSpPr/>
+      <p:sp>
+        <p:nvSpPr>
+          <p:cNvPr id="2" name="TextBox 1"/>
+          <p:cNvSpPr txBox="1"/>
+          <p:nvPr/>
+        </p:nvSpPr>
+        <p:spPr>
+          <a:xfrm>
+            <a:off x="502920" y="274320"/>
+            <a:ext cx="11155680" cy="548640"/>
+          </a:xfrm>
+          <a:prstGeom prst="rect">
+            <a:avLst/>
+          </a:prstGeom>
+          <a:noFill/>
+        </p:spPr>
+        <p:txBody>
+          <a:bodyPr wrap="none">
+            <a:spAutoFit/>
+          </a:bodyPr>
+          <a:lstStyle/>
+          <a:p>
+            <a:r>
+              <a:rPr sz="2200" b="1">
+                <a:solidFill>
+                  <a:srgbClr val="01AEFD"/>
+                </a:solidFill>
+              </a:rPr>
+              <a:t>Type this into style.css   -   line 88</a:t>
+            </a:r>
+          </a:p>
+        </p:txBody>
+      </p:sp>
+      <p:sp>
+        <p:nvSpPr>
+          <p:cNvPr id="3" name="TextBox 2"/>
+          <p:cNvSpPr txBox="1"/>
+          <p:nvPr/>
+        </p:nvSpPr>
+        <p:spPr>
+          <a:xfrm>
+            <a:off x="502920" y="960120"/>
+            <a:ext cx="11155680" cy="4297680"/>
+          </a:xfrm>
+          <a:prstGeom prst="rect">
+            <a:avLst/>
+          </a:prstGeom>
+          <a:noFill/>
+        </p:spPr>
+        <p:txBody>
+          <a:bodyPr wrap="none">
+            <a:spAutoFit/>
+          </a:bodyPr>
+          <a:lstStyle/>
+          <a:p>
+            <a:pPr>
+              <a:spcAft>
+                <a:spcPts val="0"/>
+              </a:spcAft>
+            </a:pPr>
+            <a:r>
+              <a:rPr sz="1800">
+                <a:solidFill>
+                  <a:srgbClr val="6D8C97"/>
+                </a:solidFill>
+                <a:latin typeface="Consolas"/>
+              </a:rPr>
+              <a:t>  84  </a:t>
+            </a:r>
+            <a:r>
+              <a:rPr sz="1800">
+                <a:solidFill>
+                  <a:srgbClr val="6D8C97"/>
+                </a:solidFill>
+                <a:latin typeface="Consolas"/>
+              </a:rPr>
+              <a:t>.bubble.writing::after {</a:t>
+            </a:r>
+          </a:p>
+          <a:p>
+            <a:pPr>
+              <a:spcAft>
+                <a:spcPts val="0"/>
+              </a:spcAft>
+            </a:pPr>
+            <a:r>
+              <a:rPr sz="1800">
+                <a:solidFill>
+                  <a:srgbClr val="6D8C97"/>
+                </a:solidFill>
+                <a:latin typeface="Consolas"/>
+              </a:rPr>
+              <a:t>  85  </a:t>
+            </a:r>
+            <a:r>
+              <a:rPr sz="1800">
+                <a:solidFill>
+                  <a:srgbClr val="6D8C97"/>
+                </a:solidFill>
+                <a:latin typeface="Consolas"/>
+              </a:rPr>
+              <a:t>  content: "\258C";</a:t>
+            </a:r>
+          </a:p>
+          <a:p>
+            <a:pPr>
+              <a:spcAft>
+                <a:spcPts val="0"/>
+              </a:spcAft>
+            </a:pPr>
+            <a:r>
+              <a:rPr sz="1800">
+                <a:solidFill>
+                  <a:srgbClr val="6D8C97"/>
+                </a:solidFill>
+                <a:latin typeface="Consolas"/>
+              </a:rPr>
+              <a:t>  86  </a:t>
+            </a:r>
+            <a:r>
+              <a:rPr sz="1800">
+                <a:solidFill>
+                  <a:srgbClr val="6D8C97"/>
+                </a:solidFill>
+                <a:latin typeface="Consolas"/>
+              </a:rPr>
+              <a:t>  color: #01aefd;</a:t>
+            </a:r>
+          </a:p>
+          <a:p>
+            <a:pPr>
+              <a:spcAft>
+                <a:spcPts val="0"/>
+              </a:spcAft>
+            </a:pPr>
+            <a:r>
+              <a:rPr sz="1800">
+                <a:solidFill>
+                  <a:srgbClr val="6D8C97"/>
+                </a:solidFill>
+                <a:latin typeface="Consolas"/>
+              </a:rPr>
+              <a:t>  87  </a:t>
+            </a:r>
+            <a:r>
+              <a:rPr sz="1800">
+                <a:solidFill>
+                  <a:srgbClr val="6D8C97"/>
+                </a:solidFill>
+                <a:latin typeface="Consolas"/>
+              </a:rPr>
+              <a:t>  animation: blink 1s steps(2, start) infinite;</a:t>
+            </a:r>
+          </a:p>
+          <a:p>
+            <a:pPr>
+              <a:spcAft>
+                <a:spcPts val="0"/>
+              </a:spcAft>
+            </a:pPr>
+            <a:r>
+              <a:rPr sz="1800">
+                <a:solidFill>
+                  <a:srgbClr val="6D8C97"/>
+                </a:solidFill>
+                <a:latin typeface="Consolas"/>
+              </a:rPr>
+              <a:t>  88  </a:t>
+            </a:r>
+            <a:r>
+              <a:rPr sz="1800">
+                <a:solidFill>
+                  <a:srgbClr val="7FE0A0"/>
+                </a:solidFill>
+                <a:latin typeface="Consolas"/>
+              </a:rPr>
+              <a:t>}</a:t>
+            </a:r>
+          </a:p>
+        </p:txBody>
+      </p:sp>
+      <p:sp>
+        <p:nvSpPr>
+          <p:cNvPr id="4" name="TextBox 3"/>
+          <p:cNvSpPr txBox="1"/>
+          <p:nvPr/>
+        </p:nvSpPr>
+        <p:spPr>
+          <a:xfrm>
+            <a:off x="548640" y="5623560"/>
+            <a:ext cx="11064240" cy="1051560"/>
+          </a:xfrm>
+          <a:prstGeom prst="rect">
+            <a:avLst/>
+          </a:prstGeom>
+          <a:noFill/>
+        </p:spPr>
+        <p:txBody>
+          <a:bodyPr wrap="square">
+            <a:spAutoFit/>
+          </a:bodyPr>
+          <a:lstStyle/>
+          <a:p>
+            <a:r>
+              <a:rPr sz="2000">
+                <a:solidFill>
+                  <a:srgbClr val="DCECEF"/>
+                </a:solidFill>
+              </a:rPr>
+              <a:t>Close the rule.</a:t>
+            </a:r>
+          </a:p>
+        </p:txBody>
+      </p:sp>
+    </p:spTree>
+  </p:cSld>
+  <p:clrMapOvr>
+    <a:masterClrMapping/>
+  </p:clrMapOvr>
+</p:sld>
+</file>
+
+<file path=ppt/slides/slide61.xml><?xml version="1.0" encoding="utf-8"?>
+<p:sld xmlns:a="http://schemas.openxmlformats.org/drawingml/2006/main" xmlns:p="http://schemas.openxmlformats.org/presentationml/2006/main" xmlns:r="http://schemas.openxmlformats.org/officeDocument/2006/relationships">
+  <p:cSld>
+    <p:spTree>
+      <p:nvGrpSpPr>
+        <p:cNvPr id="1" name=""/>
+        <p:cNvGrpSpPr/>
+        <p:nvPr/>
+      </p:nvGrpSpPr>
+      <p:grpSpPr/>
+      <p:sp>
+        <p:nvSpPr>
+          <p:cNvPr id="2" name="Title 1"/>
+          <p:cNvSpPr>
+            <a:spLocks noGrp="1"/>
+          </p:cNvSpPr>
+          <p:nvPr>
+            <p:ph type="title"/>
+          </p:nvPr>
+        </p:nvSpPr>
+        <p:spPr/>
+        <p:txBody>
+          <a:bodyPr/>
+          <a:lstStyle/>
+          <a:p>
+            <a:r>
+              <a:rPr sz="3800" b="1">
+                <a:solidFill>
+                  <a:srgbClr val="1F2A37"/>
+                </a:solidFill>
+              </a:rPr>
+              <a:t>visibility</a:t>
+            </a:r>
+          </a:p>
+        </p:txBody>
+      </p:sp>
+      <p:sp>
+        <p:nvSpPr>
+          <p:cNvPr id="3" name="TextBox 2"/>
+          <p:cNvSpPr txBox="1"/>
+          <p:nvPr/>
+        </p:nvSpPr>
+        <p:spPr>
+          <a:xfrm>
+            <a:off x="868680" y="502920"/>
+            <a:ext cx="5486400" cy="457200"/>
+          </a:xfrm>
+          <a:prstGeom prst="rect">
+            <a:avLst/>
+          </a:prstGeom>
+          <a:noFill/>
+        </p:spPr>
+        <p:txBody>
+          <a:bodyPr wrap="none">
+            <a:spAutoFit/>
+          </a:bodyPr>
+          <a:lstStyle/>
+          <a:p>
+            <a:r>
+              <a:rPr sz="1500" b="1">
+                <a:solidFill>
+                  <a:srgbClr val="01AEFD"/>
+                </a:solidFill>
+              </a:rPr>
+              <a:t>CSS</a:t>
+            </a:r>
+          </a:p>
+        </p:txBody>
+      </p:sp>
+      <p:sp>
+        <p:nvSpPr>
+          <p:cNvPr id="4" name="TextBox 3"/>
+          <p:cNvSpPr txBox="1"/>
+          <p:nvPr/>
+        </p:nvSpPr>
+        <p:spPr>
+          <a:xfrm>
+            <a:off x="822960" y="1828800"/>
+            <a:ext cx="10515600" cy="4206240"/>
+          </a:xfrm>
+          <a:prstGeom prst="rect">
+            <a:avLst/>
+          </a:prstGeom>
+          <a:noFill/>
+        </p:spPr>
+        <p:txBody>
+          <a:bodyPr wrap="square">
+            <a:spAutoFit/>
+          </a:bodyPr>
+          <a:lstStyle/>
+          <a:p>
+            <a:pPr>
+              <a:spcAft>
+                <a:spcPts val="1400"/>
+              </a:spcAft>
+            </a:pPr>
+            <a:r>
+              <a:rPr sz="2800">
+                <a:solidFill>
+                  <a:srgbClr val="01AEFD"/>
+                </a:solidFill>
+              </a:rPr>
+              <a:t>to { visibility: hidden; }</a:t>
+            </a:r>
+          </a:p>
+          <a:p>
+            <a:pPr>
+              <a:spcAft>
+                <a:spcPts val="1400"/>
+              </a:spcAft>
+            </a:pPr>
+            <a:r>
+              <a:rPr sz="2400">
+                <a:solidFill>
+                  <a:srgbClr val="1F2A37"/>
+                </a:solidFill>
+              </a:rPr>
+              <a:t>• Hides the element but KEEPS its space.</a:t>
+            </a:r>
+          </a:p>
+          <a:p>
+            <a:pPr>
+              <a:spcAft>
+                <a:spcPts val="1400"/>
+              </a:spcAft>
+            </a:pPr>
+            <a:r>
+              <a:rPr sz="2400">
+                <a:solidFill>
+                  <a:srgbClr val="1F2A37"/>
+                </a:solidFill>
+              </a:rPr>
+              <a:t>• So the blinking cursor vanishes without the text jumping around.</a:t>
+            </a:r>
+          </a:p>
+          <a:p>
+            <a:pPr>
+              <a:spcAft>
+                <a:spcPts val="1400"/>
+              </a:spcAft>
+            </a:pPr>
+            <a:r>
+              <a:rPr sz="2400">
+                <a:solidFill>
+                  <a:srgbClr val="1F2A37"/>
+                </a:solidFill>
+              </a:rPr>
+              <a:t>• Different from removing it (.remove, week 5), which collapses the gap.</a:t>
+            </a:r>
+          </a:p>
+        </p:txBody>
+      </p:sp>
+    </p:spTree>
+  </p:cSld>
+  <p:clrMapOvr>
+    <a:masterClrMapping/>
+  </p:clrMapOvr>
+</p:sld>
+</file>
+
+<file path=ppt/slides/slide62.xml><?xml version="1.0" encoding="utf-8"?>
+<p:sld xmlns:a="http://schemas.openxmlformats.org/drawingml/2006/main" xmlns:p="http://schemas.openxmlformats.org/presentationml/2006/main" xmlns:r="http://schemas.openxmlformats.org/officeDocument/2006/relationships">
+  <p:cSld>
+    <p:bg>
+      <p:bgPr>
+        <a:solidFill>
+          <a:srgbClr val="F4F8FB"/>
+        </a:solidFill>
+        <a:effectLst/>
+      </p:bgPr>
+    </p:bg>
+    <p:spTree>
+      <p:nvGrpSpPr>
+        <p:cNvPr id="1" name=""/>
+        <p:cNvGrpSpPr/>
+        <p:nvPr/>
+      </p:nvGrpSpPr>
+      <p:grpSpPr/>
+      <p:sp>
+        <p:nvSpPr>
+          <p:cNvPr id="2" name="TextBox 1"/>
+          <p:cNvSpPr txBox="1"/>
+          <p:nvPr/>
+        </p:nvSpPr>
+        <p:spPr>
+          <a:xfrm>
+            <a:off x="822960" y="365760"/>
+            <a:ext cx="7315200" cy="365760"/>
+          </a:xfrm>
+          <a:prstGeom prst="rect">
+            <a:avLst/>
+          </a:prstGeom>
+          <a:noFill/>
+        </p:spPr>
+        <p:txBody>
+          <a:bodyPr wrap="none">
+            <a:spAutoFit/>
+          </a:bodyPr>
+          <a:lstStyle/>
+          <a:p>
+            <a:r>
+              <a:rPr sz="1400" b="1">
+                <a:solidFill>
+                  <a:srgbClr val="01AEFD"/>
+                </a:solidFill>
+              </a:rPr>
+              <a:t>ON THE PAGE</a:t>
+            </a:r>
+          </a:p>
+        </p:txBody>
+      </p:sp>
+      <p:sp>
+        <p:nvSpPr>
+          <p:cNvPr id="3" name="TextBox 2"/>
+          <p:cNvSpPr txBox="1"/>
+          <p:nvPr/>
+        </p:nvSpPr>
+        <p:spPr>
+          <a:xfrm>
+            <a:off x="822960" y="658368"/>
+            <a:ext cx="10515600" cy="731520"/>
+          </a:xfrm>
+          <a:prstGeom prst="rect">
+            <a:avLst/>
+          </a:prstGeom>
+          <a:noFill/>
+        </p:spPr>
+        <p:txBody>
+          <a:bodyPr wrap="none">
+            <a:spAutoFit/>
+          </a:bodyPr>
+          <a:lstStyle/>
+          <a:p>
+            <a:r>
+              <a:rPr sz="3200" b="1">
+                <a:solidFill>
+                  <a:srgbClr val="1F2A37"/>
+                </a:solidFill>
+              </a:rPr>
+              <a:t>visibility</a:t>
+            </a:r>
+          </a:p>
+        </p:txBody>
+      </p:sp>
+      <p:sp>
+        <p:nvSpPr>
+          <p:cNvPr id="4" name="Rounded Rectangle 3"/>
+          <p:cNvSpPr/>
+          <p:nvPr/>
+        </p:nvSpPr>
+        <p:spPr>
+          <a:xfrm>
+            <a:off x="3454237" y="1641896"/>
+            <a:ext cx="5249387" cy="3918021"/>
+          </a:xfrm>
+          <a:prstGeom prst="roundRect">
+            <a:avLst/>
+          </a:prstGeom>
+          <a:solidFill>
+            <a:srgbClr val="0F1F27"/>
+          </a:solidFill>
+          <a:ln>
+            <a:noFill/>
+          </a:ln>
+          <a:effectLst/>
+        </p:spPr>
+        <p:style>
+          <a:lnRef idx="1">
+            <a:schemeClr val="accent1"/>
+          </a:lnRef>
+          <a:fillRef idx="3">
+            <a:schemeClr val="accent1"/>
+          </a:fillRef>
+          <a:effectRef idx="2">
+            <a:schemeClr val="accent1"/>
+          </a:effectRef>
+          <a:fontRef idx="minor">
+            <a:schemeClr val="lt1"/>
+          </a:fontRef>
+        </p:style>
+        <p:txBody>
+          <a:bodyPr rtlCol="0" anchor="ctr"/>
+          <a:lstStyle/>
+          <a:p>
+            <a:pPr algn="ctr"/>
+          </a:p>
+        </p:txBody>
+      </p:sp>
+      <p:sp>
+        <p:nvSpPr>
+          <p:cNvPr id="5" name="Rounded Rectangle 4"/>
+          <p:cNvSpPr/>
+          <p:nvPr/>
+        </p:nvSpPr>
+        <p:spPr>
+          <a:xfrm>
+            <a:off x="3606393" y="2022287"/>
+            <a:ext cx="4945075" cy="437448"/>
+          </a:xfrm>
+          <a:prstGeom prst="roundRect">
+            <a:avLst/>
+          </a:prstGeom>
+          <a:solidFill>
+            <a:srgbClr val="16303A"/>
+          </a:solidFill>
+          <a:ln>
+            <a:noFill/>
+          </a:ln>
+          <a:effectLst/>
+        </p:spPr>
+        <p:style>
+          <a:lnRef idx="1">
+            <a:schemeClr val="accent1"/>
+          </a:lnRef>
+          <a:fillRef idx="3">
+            <a:schemeClr val="accent1"/>
+          </a:fillRef>
+          <a:effectRef idx="2">
+            <a:schemeClr val="accent1"/>
+          </a:effectRef>
+          <a:fontRef idx="minor">
+            <a:schemeClr val="lt1"/>
+          </a:fontRef>
+        </p:style>
+        <p:txBody>
+          <a:bodyPr rtlCol="0" anchor="ctr"/>
+          <a:lstStyle/>
+          <a:p>
+            <a:pPr algn="ctr"/>
+          </a:p>
+        </p:txBody>
+      </p:sp>
+      <p:sp>
+        <p:nvSpPr>
+          <p:cNvPr id="6" name="Rounded Rectangle 5"/>
+          <p:cNvSpPr/>
+          <p:nvPr/>
+        </p:nvSpPr>
+        <p:spPr>
+          <a:xfrm>
+            <a:off x="3720510" y="2155423"/>
+            <a:ext cx="1426463" cy="190195"/>
+          </a:xfrm>
+          <a:prstGeom prst="roundRect">
+            <a:avLst/>
+          </a:prstGeom>
+          <a:solidFill>
+            <a:srgbClr val="4A6B78"/>
+          </a:solidFill>
+          <a:ln>
+            <a:noFill/>
+          </a:ln>
+          <a:effectLst/>
+        </p:spPr>
+        <p:style>
+          <a:lnRef idx="1">
+            <a:schemeClr val="accent1"/>
+          </a:lnRef>
+          <a:fillRef idx="3">
+            <a:schemeClr val="accent1"/>
+          </a:fillRef>
+          <a:effectRef idx="2">
+            <a:schemeClr val="accent1"/>
+          </a:effectRef>
+          <a:fontRef idx="minor">
+            <a:schemeClr val="lt1"/>
+          </a:fontRef>
+        </p:style>
+        <p:txBody>
+          <a:bodyPr rtlCol="0" anchor="ctr"/>
+          <a:lstStyle/>
+          <a:p>
+            <a:pPr algn="ctr"/>
+          </a:p>
+        </p:txBody>
+      </p:sp>
+      <p:sp>
+        <p:nvSpPr>
+          <p:cNvPr id="7" name="Rounded Rectangle 6"/>
+          <p:cNvSpPr/>
+          <p:nvPr/>
+        </p:nvSpPr>
+        <p:spPr>
+          <a:xfrm>
+            <a:off x="3606393" y="2554833"/>
+            <a:ext cx="4945075" cy="1806854"/>
+          </a:xfrm>
+          <a:prstGeom prst="roundRect">
+            <a:avLst/>
+          </a:prstGeom>
+          <a:solidFill>
+            <a:srgbClr val="0B171D"/>
+          </a:solidFill>
+          <a:ln>
+            <a:noFill/>
+          </a:ln>
+          <a:effectLst/>
+        </p:spPr>
+        <p:style>
+          <a:lnRef idx="1">
+            <a:schemeClr val="accent1"/>
+          </a:lnRef>
+          <a:fillRef idx="3">
+            <a:schemeClr val="accent1"/>
+          </a:fillRef>
+          <a:effectRef idx="2">
+            <a:schemeClr val="accent1"/>
+          </a:effectRef>
+          <a:fontRef idx="minor">
+            <a:schemeClr val="lt1"/>
+          </a:fontRef>
+        </p:style>
+        <p:txBody>
+          <a:bodyPr rtlCol="0" anchor="ctr"/>
+          <a:lstStyle/>
+          <a:p>
+            <a:pPr algn="ctr"/>
+          </a:p>
+        </p:txBody>
+      </p:sp>
+      <p:sp>
+        <p:nvSpPr>
+          <p:cNvPr id="8" name="Rounded Rectangle 7"/>
+          <p:cNvSpPr/>
+          <p:nvPr/>
+        </p:nvSpPr>
+        <p:spPr>
+          <a:xfrm>
+            <a:off x="3720510" y="2668950"/>
+            <a:ext cx="2852927" cy="399409"/>
+          </a:xfrm>
+          <a:prstGeom prst="roundRect">
+            <a:avLst/>
+          </a:prstGeom>
+          <a:solidFill>
+            <a:srgbClr val="1B3540"/>
+          </a:solidFill>
+          <a:ln>
+            <a:noFill/>
+          </a:ln>
+          <a:effectLst/>
+        </p:spPr>
+        <p:style>
+          <a:lnRef idx="1">
+            <a:schemeClr val="accent1"/>
+          </a:lnRef>
+          <a:fillRef idx="3">
+            <a:schemeClr val="accent1"/>
+          </a:fillRef>
+          <a:effectRef idx="2">
+            <a:schemeClr val="accent1"/>
+          </a:effectRef>
+          <a:fontRef idx="minor">
+            <a:schemeClr val="lt1"/>
+          </a:fontRef>
+        </p:style>
+        <p:txBody>
+          <a:bodyPr rtlCol="0" anchor="ctr"/>
+          <a:lstStyle/>
+          <a:p>
+            <a:pPr algn="ctr"/>
+          </a:p>
+        </p:txBody>
+      </p:sp>
+      <p:sp>
+        <p:nvSpPr>
+          <p:cNvPr id="9" name="Rounded Rectangle 8"/>
+          <p:cNvSpPr/>
+          <p:nvPr/>
+        </p:nvSpPr>
+        <p:spPr>
+          <a:xfrm>
+            <a:off x="5584423" y="3182477"/>
+            <a:ext cx="2852927" cy="399409"/>
+          </a:xfrm>
+          <a:prstGeom prst="roundRect">
+            <a:avLst/>
+          </a:prstGeom>
+          <a:solidFill>
+            <a:srgbClr val="123A32"/>
+          </a:solidFill>
+          <a:ln>
+            <a:noFill/>
+          </a:ln>
+          <a:effectLst/>
+        </p:spPr>
+        <p:style>
+          <a:lnRef idx="1">
+            <a:schemeClr val="accent1"/>
+          </a:lnRef>
+          <a:fillRef idx="3">
+            <a:schemeClr val="accent1"/>
+          </a:fillRef>
+          <a:effectRef idx="2">
+            <a:schemeClr val="accent1"/>
+          </a:effectRef>
+          <a:fontRef idx="minor">
+            <a:schemeClr val="lt1"/>
+          </a:fontRef>
+        </p:style>
+        <p:txBody>
+          <a:bodyPr rtlCol="0" anchor="ctr"/>
+          <a:lstStyle/>
+          <a:p>
+            <a:pPr algn="ctr"/>
+          </a:p>
+        </p:txBody>
+      </p:sp>
+      <p:sp>
+        <p:nvSpPr>
+          <p:cNvPr id="10" name="Rounded Rectangle 9"/>
+          <p:cNvSpPr/>
+          <p:nvPr/>
+        </p:nvSpPr>
+        <p:spPr>
+          <a:xfrm>
+            <a:off x="3720510" y="3696004"/>
+            <a:ext cx="3138220" cy="399409"/>
+          </a:xfrm>
+          <a:prstGeom prst="roundRect">
+            <a:avLst/>
+          </a:prstGeom>
+          <a:solidFill>
+            <a:srgbClr val="1B3540"/>
+          </a:solidFill>
+          <a:ln>
+            <a:noFill/>
+          </a:ln>
+          <a:effectLst/>
+        </p:spPr>
+        <p:style>
+          <a:lnRef idx="1">
+            <a:schemeClr val="accent1"/>
+          </a:lnRef>
+          <a:fillRef idx="3">
+            <a:schemeClr val="accent1"/>
+          </a:fillRef>
+          <a:effectRef idx="2">
+            <a:schemeClr val="accent1"/>
+          </a:effectRef>
+          <a:fontRef idx="minor">
+            <a:schemeClr val="lt1"/>
+          </a:fontRef>
+        </p:style>
+        <p:txBody>
+          <a:bodyPr rtlCol="0" anchor="ctr"/>
+          <a:lstStyle/>
+          <a:p>
+            <a:pPr algn="ctr"/>
+          </a:p>
+        </p:txBody>
+      </p:sp>
+      <p:sp>
+        <p:nvSpPr>
+          <p:cNvPr id="11" name="Rounded Rectangle 10"/>
+          <p:cNvSpPr/>
+          <p:nvPr/>
+        </p:nvSpPr>
+        <p:spPr>
+          <a:xfrm>
+            <a:off x="3701491" y="4856195"/>
+            <a:ext cx="3899001" cy="323331"/>
+          </a:xfrm>
+          <a:prstGeom prst="roundRect">
+            <a:avLst/>
+          </a:prstGeom>
+          <a:solidFill>
+            <a:srgbClr val="16303A"/>
+          </a:solidFill>
+          <a:ln>
+            <a:noFill/>
+          </a:ln>
+          <a:effectLst/>
+        </p:spPr>
+        <p:style>
+          <a:lnRef idx="1">
+            <a:schemeClr val="accent1"/>
+          </a:lnRef>
+          <a:fillRef idx="3">
+            <a:schemeClr val="accent1"/>
+          </a:fillRef>
+          <a:effectRef idx="2">
+            <a:schemeClr val="accent1"/>
+          </a:effectRef>
+          <a:fontRef idx="minor">
+            <a:schemeClr val="lt1"/>
+          </a:fontRef>
+        </p:style>
+        <p:txBody>
+          <a:bodyPr rtlCol="0" anchor="ctr"/>
+          <a:lstStyle/>
+          <a:p>
+            <a:pPr algn="ctr"/>
+          </a:p>
+        </p:txBody>
+      </p:sp>
+      <p:sp>
+        <p:nvSpPr>
+          <p:cNvPr id="12" name="Rounded Rectangle 11"/>
+          <p:cNvSpPr/>
+          <p:nvPr/>
+        </p:nvSpPr>
+        <p:spPr>
+          <a:xfrm>
+            <a:off x="7695590" y="4856195"/>
+            <a:ext cx="779800" cy="323331"/>
+          </a:xfrm>
+          <a:prstGeom prst="roundRect">
+            <a:avLst/>
+          </a:prstGeom>
+          <a:solidFill>
+            <a:srgbClr val="01AEFD"/>
+          </a:solidFill>
+          <a:ln>
+            <a:noFill/>
+          </a:ln>
+          <a:effectLst/>
+        </p:spPr>
+        <p:style>
+          <a:lnRef idx="1">
+            <a:schemeClr val="accent1"/>
+          </a:lnRef>
+          <a:fillRef idx="3">
+            <a:schemeClr val="accent1"/>
+          </a:fillRef>
+          <a:effectRef idx="2">
+            <a:schemeClr val="accent1"/>
+          </a:effectRef>
+          <a:fontRef idx="minor">
+            <a:schemeClr val="lt1"/>
+          </a:fontRef>
+        </p:style>
+        <p:txBody>
+          <a:bodyPr rtlCol="0" anchor="ctr"/>
+          <a:lstStyle/>
+          <a:p>
+            <a:pPr algn="ctr"/>
+          </a:p>
+        </p:txBody>
+      </p:sp>
+      <p:sp>
+        <p:nvSpPr>
+          <p:cNvPr id="13" name="Rounded Rectangle 12"/>
+          <p:cNvSpPr/>
+          <p:nvPr/>
+        </p:nvSpPr>
+        <p:spPr>
+          <a:xfrm>
+            <a:off x="3720510" y="5407761"/>
+            <a:ext cx="1616659" cy="95097"/>
+          </a:xfrm>
+          <a:prstGeom prst="roundRect">
+            <a:avLst/>
+          </a:prstGeom>
+          <a:solidFill>
+            <a:srgbClr val="2A4550"/>
+          </a:solidFill>
+          <a:ln>
+            <a:noFill/>
+          </a:ln>
+          <a:effectLst/>
+        </p:spPr>
+        <p:style>
+          <a:lnRef idx="1">
+            <a:schemeClr val="accent1"/>
+          </a:lnRef>
+          <a:fillRef idx="3">
+            <a:schemeClr val="accent1"/>
+          </a:fillRef>
+          <a:effectRef idx="2">
+            <a:schemeClr val="accent1"/>
+          </a:effectRef>
+          <a:fontRef idx="minor">
+            <a:schemeClr val="lt1"/>
+          </a:fontRef>
+        </p:style>
+        <p:txBody>
+          <a:bodyPr rtlCol="0" anchor="ctr"/>
+          <a:lstStyle/>
+          <a:p>
+            <a:pPr algn="ctr"/>
+          </a:p>
+        </p:txBody>
+      </p:sp>
+      <p:sp>
+        <p:nvSpPr>
+          <p:cNvPr id="14" name="Rounded Rectangle 13"/>
+          <p:cNvSpPr/>
+          <p:nvPr/>
+        </p:nvSpPr>
+        <p:spPr>
+          <a:xfrm>
+            <a:off x="3663452" y="4818156"/>
+            <a:ext cx="3975079" cy="399409"/>
+          </a:xfrm>
+          <a:prstGeom prst="roundRect">
+            <a:avLst/>
+          </a:prstGeom>
+          <a:noFill/>
+          <a:ln w="44450">
+            <a:solidFill>
+              <a:srgbClr val="FFD633"/>
+            </a:solidFill>
+          </a:ln>
+          <a:effectLst/>
+        </p:spPr>
+        <p:style>
+          <a:lnRef idx="1">
+            <a:schemeClr val="accent1"/>
+          </a:lnRef>
+          <a:fillRef idx="3">
+            <a:schemeClr val="accent1"/>
+          </a:fillRef>
+          <a:effectRef idx="2">
+            <a:schemeClr val="accent1"/>
+          </a:effectRef>
+          <a:fontRef idx="minor">
+            <a:schemeClr val="lt1"/>
+          </a:fontRef>
+        </p:style>
+        <p:txBody>
+          <a:bodyPr rtlCol="0" anchor="ctr"/>
+          <a:lstStyle/>
+          <a:p>
+            <a:pPr algn="ctr"/>
+          </a:p>
+        </p:txBody>
+      </p:sp>
+      <p:sp>
+        <p:nvSpPr>
+          <p:cNvPr id="15" name="TextBox 14"/>
+          <p:cNvSpPr txBox="1"/>
+          <p:nvPr/>
+        </p:nvSpPr>
+        <p:spPr>
+          <a:xfrm>
+            <a:off x="822960" y="6172200"/>
+            <a:ext cx="10515600" cy="548640"/>
+          </a:xfrm>
+          <a:prstGeom prst="rect">
+            <a:avLst/>
+          </a:prstGeom>
+          <a:noFill/>
+        </p:spPr>
+        <p:txBody>
+          <a:bodyPr wrap="square">
+            <a:spAutoFit/>
+          </a:bodyPr>
+          <a:lstStyle/>
+          <a:p>
+            <a:r>
+              <a:rPr sz="2000">
+                <a:solidFill>
+                  <a:srgbClr val="0A6299"/>
+                </a:solidFill>
+              </a:rPr>
+              <a:t>visibility can hide an element but keep its space.</a:t>
+            </a:r>
+          </a:p>
+        </p:txBody>
+      </p:sp>
+    </p:spTree>
+  </p:cSld>
+  <p:clrMapOvr>
+    <a:masterClrMapping/>
+  </p:clrMapOvr>
+</p:sld>
+</file>
+
+<file path=ppt/slides/slide63.xml><?xml version="1.0" encoding="utf-8"?>
+<p:sld xmlns:a="http://schemas.openxmlformats.org/drawingml/2006/main" xmlns:p="http://schemas.openxmlformats.org/presentationml/2006/main" xmlns:r="http://schemas.openxmlformats.org/officeDocument/2006/relationships">
+  <p:cSld>
+    <p:bg>
+      <p:bgPr>
+        <a:solidFill>
+          <a:srgbClr val="102127"/>
+        </a:solidFill>
+        <a:effectLst/>
+      </p:bgPr>
+    </p:bg>
+    <p:spTree>
+      <p:nvGrpSpPr>
+        <p:cNvPr id="1" name=""/>
+        <p:cNvGrpSpPr/>
+        <p:nvPr/>
+      </p:nvGrpSpPr>
+      <p:grpSpPr/>
+      <p:sp>
+        <p:nvSpPr>
+          <p:cNvPr id="2" name="TextBox 1"/>
+          <p:cNvSpPr txBox="1"/>
+          <p:nvPr/>
+        </p:nvSpPr>
+        <p:spPr>
+          <a:xfrm>
+            <a:off x="502920" y="274320"/>
+            <a:ext cx="11155680" cy="548640"/>
+          </a:xfrm>
+          <a:prstGeom prst="rect">
+            <a:avLst/>
+          </a:prstGeom>
+          <a:noFill/>
+        </p:spPr>
+        <p:txBody>
+          <a:bodyPr wrap="none">
+            <a:spAutoFit/>
+          </a:bodyPr>
+          <a:lstStyle/>
+          <a:p>
+            <a:r>
+              <a:rPr sz="2200" b="1">
+                <a:solidFill>
+                  <a:srgbClr val="01AEFD"/>
+                </a:solidFill>
+              </a:rPr>
+              <a:t>Type this into style.css   -   line 89</a:t>
+            </a:r>
+          </a:p>
+        </p:txBody>
+      </p:sp>
+      <p:sp>
+        <p:nvSpPr>
+          <p:cNvPr id="3" name="TextBox 2"/>
+          <p:cNvSpPr txBox="1"/>
+          <p:nvPr/>
+        </p:nvSpPr>
+        <p:spPr>
+          <a:xfrm>
+            <a:off x="502920" y="960120"/>
+            <a:ext cx="11155680" cy="4297680"/>
+          </a:xfrm>
+          <a:prstGeom prst="rect">
+            <a:avLst/>
+          </a:prstGeom>
+          <a:noFill/>
+        </p:spPr>
+        <p:txBody>
+          <a:bodyPr wrap="none">
+            <a:spAutoFit/>
+          </a:bodyPr>
+          <a:lstStyle/>
+          <a:p>
+            <a:pPr>
+              <a:spcAft>
+                <a:spcPts val="0"/>
+              </a:spcAft>
+            </a:pPr>
+            <a:r>
+              <a:rPr sz="1800">
+                <a:solidFill>
+                  <a:srgbClr val="6D8C97"/>
+                </a:solidFill>
+                <a:latin typeface="Consolas"/>
+              </a:rPr>
+              <a:t>  84  </a:t>
+            </a:r>
+            <a:r>
+              <a:rPr sz="1800">
+                <a:solidFill>
+                  <a:srgbClr val="6D8C97"/>
+                </a:solidFill>
+                <a:latin typeface="Consolas"/>
+              </a:rPr>
+              <a:t>.bubble.writing::after {</a:t>
+            </a:r>
+          </a:p>
+          <a:p>
+            <a:pPr>
+              <a:spcAft>
+                <a:spcPts val="0"/>
+              </a:spcAft>
+            </a:pPr>
+            <a:r>
+              <a:rPr sz="1800">
+                <a:solidFill>
+                  <a:srgbClr val="6D8C97"/>
+                </a:solidFill>
+                <a:latin typeface="Consolas"/>
+              </a:rPr>
+              <a:t>  85  </a:t>
+            </a:r>
+            <a:r>
+              <a:rPr sz="1800">
+                <a:solidFill>
+                  <a:srgbClr val="6D8C97"/>
+                </a:solidFill>
+                <a:latin typeface="Consolas"/>
+              </a:rPr>
+              <a:t>  content: "\258C";</a:t>
+            </a:r>
+          </a:p>
+          <a:p>
+            <a:pPr>
+              <a:spcAft>
+                <a:spcPts val="0"/>
+              </a:spcAft>
+            </a:pPr>
+            <a:r>
+              <a:rPr sz="1800">
+                <a:solidFill>
+                  <a:srgbClr val="6D8C97"/>
+                </a:solidFill>
+                <a:latin typeface="Consolas"/>
+              </a:rPr>
+              <a:t>  86  </a:t>
+            </a:r>
+            <a:r>
+              <a:rPr sz="1800">
+                <a:solidFill>
+                  <a:srgbClr val="6D8C97"/>
+                </a:solidFill>
+                <a:latin typeface="Consolas"/>
+              </a:rPr>
+              <a:t>  color: #01aefd;</a:t>
+            </a:r>
+          </a:p>
+          <a:p>
+            <a:pPr>
+              <a:spcAft>
+                <a:spcPts val="0"/>
+              </a:spcAft>
+            </a:pPr>
+            <a:r>
+              <a:rPr sz="1800">
+                <a:solidFill>
+                  <a:srgbClr val="6D8C97"/>
+                </a:solidFill>
+                <a:latin typeface="Consolas"/>
+              </a:rPr>
+              <a:t>  87  </a:t>
+            </a:r>
+            <a:r>
+              <a:rPr sz="1800">
+                <a:solidFill>
+                  <a:srgbClr val="6D8C97"/>
+                </a:solidFill>
+                <a:latin typeface="Consolas"/>
+              </a:rPr>
+              <a:t>  animation: blink 1s steps(2, start) infinite;</a:t>
+            </a:r>
+          </a:p>
+          <a:p>
+            <a:pPr>
+              <a:spcAft>
+                <a:spcPts val="0"/>
+              </a:spcAft>
+            </a:pPr>
+            <a:r>
+              <a:rPr sz="1800">
+                <a:solidFill>
+                  <a:srgbClr val="6D8C97"/>
+                </a:solidFill>
+                <a:latin typeface="Consolas"/>
+              </a:rPr>
+              <a:t>  88  </a:t>
+            </a:r>
+            <a:r>
+              <a:rPr sz="1800">
+                <a:solidFill>
+                  <a:srgbClr val="6D8C97"/>
+                </a:solidFill>
+                <a:latin typeface="Consolas"/>
+              </a:rPr>
+              <a:t>}</a:t>
+            </a:r>
+          </a:p>
+          <a:p>
+            <a:pPr>
+              <a:spcAft>
+                <a:spcPts val="0"/>
+              </a:spcAft>
+            </a:pPr>
+            <a:r>
+              <a:rPr sz="1800">
+                <a:solidFill>
+                  <a:srgbClr val="6D8C97"/>
+                </a:solidFill>
+                <a:latin typeface="Consolas"/>
+              </a:rPr>
+              <a:t>  89  </a:t>
+            </a:r>
+            <a:r>
+              <a:rPr sz="1800">
+                <a:solidFill>
+                  <a:srgbClr val="7FE0A0"/>
+                </a:solidFill>
+                <a:latin typeface="Consolas"/>
+              </a:rPr>
+              <a:t>@keyframes blink { to { visibility: hidden; } }</a:t>
+            </a:r>
+          </a:p>
+        </p:txBody>
+      </p:sp>
+      <p:sp>
+        <p:nvSpPr>
+          <p:cNvPr id="4" name="TextBox 3"/>
+          <p:cNvSpPr txBox="1"/>
+          <p:nvPr/>
+        </p:nvSpPr>
+        <p:spPr>
+          <a:xfrm>
+            <a:off x="548640" y="5623560"/>
+            <a:ext cx="11064240" cy="1051560"/>
+          </a:xfrm>
+          <a:prstGeom prst="rect">
+            <a:avLst/>
+          </a:prstGeom>
+          <a:noFill/>
+        </p:spPr>
+        <p:txBody>
+          <a:bodyPr wrap="square">
+            <a:spAutoFit/>
+          </a:bodyPr>
+          <a:lstStyle/>
+          <a:p>
+            <a:r>
+              <a:rPr sz="2000">
+                <a:solidFill>
+                  <a:srgbClr val="DCECEF"/>
+                </a:solidFill>
+              </a:rPr>
+              <a:t>@keyframes defines 'blink': fade the cursor to hidden and back, over and over.</a:t>
+            </a:r>
+          </a:p>
+        </p:txBody>
+      </p:sp>
+    </p:spTree>
+  </p:cSld>
+  <p:clrMapOvr>
+    <a:masterClrMapping/>
+  </p:clrMapOvr>
+</p:sld>
+</file>
+
+<file path=ppt/slides/slide64.xml><?xml version="1.0" encoding="utf-8"?>
+<p:sld xmlns:a="http://schemas.openxmlformats.org/drawingml/2006/main" xmlns:p="http://schemas.openxmlformats.org/presentationml/2006/main" xmlns:r="http://schemas.openxmlformats.org/officeDocument/2006/relationships">
+  <p:cSld>
+    <p:bg>
+      <p:bgPr>
+        <a:solidFill>
+          <a:srgbClr val="102127"/>
+        </a:solidFill>
+        <a:effectLst/>
+      </p:bgPr>
+    </p:bg>
+    <p:spTree>
+      <p:nvGrpSpPr>
+        <p:cNvPr id="1" name=""/>
+        <p:cNvGrpSpPr/>
+        <p:nvPr/>
+      </p:nvGrpSpPr>
+      <p:grpSpPr/>
+      <p:sp>
+        <p:nvSpPr>
+          <p:cNvPr id="2" name="TextBox 1"/>
+          <p:cNvSpPr txBox="1"/>
+          <p:nvPr/>
+        </p:nvSpPr>
+        <p:spPr>
+          <a:xfrm>
+            <a:off x="502920" y="274320"/>
+            <a:ext cx="11155680" cy="548640"/>
+          </a:xfrm>
+          <a:prstGeom prst="rect">
+            <a:avLst/>
+          </a:prstGeom>
+          <a:noFill/>
+        </p:spPr>
+        <p:txBody>
+          <a:bodyPr wrap="none">
+            <a:spAutoFit/>
+          </a:bodyPr>
+          <a:lstStyle/>
+          <a:p>
+            <a:r>
+              <a:rPr sz="2200" b="1">
+                <a:solidFill>
+                  <a:srgbClr val="01AEFD"/>
+                </a:solidFill>
+              </a:rPr>
+              <a:t>All together in style.css</a:t>
+            </a:r>
+          </a:p>
+        </p:txBody>
+      </p:sp>
+      <p:sp>
+        <p:nvSpPr>
+          <p:cNvPr id="3" name="TextBox 2"/>
+          <p:cNvSpPr txBox="1"/>
+          <p:nvPr/>
+        </p:nvSpPr>
+        <p:spPr>
+          <a:xfrm>
+            <a:off x="502920" y="960120"/>
+            <a:ext cx="11155680" cy="4297680"/>
+          </a:xfrm>
+          <a:prstGeom prst="rect">
+            <a:avLst/>
+          </a:prstGeom>
+          <a:noFill/>
+        </p:spPr>
+        <p:txBody>
+          <a:bodyPr wrap="none">
+            <a:spAutoFit/>
+          </a:bodyPr>
+          <a:lstStyle/>
+          <a:p>
+            <a:pPr>
+              <a:spcAft>
+                <a:spcPts val="0"/>
+              </a:spcAft>
+            </a:pPr>
+            <a:r>
+              <a:rPr sz="1800">
+                <a:solidFill>
+                  <a:srgbClr val="6D8C97"/>
+                </a:solidFill>
+                <a:latin typeface="Consolas"/>
+              </a:rPr>
+              <a:t>  84  </a:t>
+            </a:r>
+            <a:r>
+              <a:rPr sz="1800">
+                <a:solidFill>
+                  <a:srgbClr val="7FE0A0"/>
+                </a:solidFill>
+                <a:latin typeface="Consolas"/>
+              </a:rPr>
+              <a:t>.bubble.writing::after {</a:t>
+            </a:r>
+          </a:p>
+          <a:p>
+            <a:pPr>
+              <a:spcAft>
+                <a:spcPts val="0"/>
+              </a:spcAft>
+            </a:pPr>
+            <a:r>
+              <a:rPr sz="1800">
+                <a:solidFill>
+                  <a:srgbClr val="6D8C97"/>
+                </a:solidFill>
+                <a:latin typeface="Consolas"/>
+              </a:rPr>
+              <a:t>  85  </a:t>
+            </a:r>
+            <a:r>
+              <a:rPr sz="1800">
+                <a:solidFill>
+                  <a:srgbClr val="7FE0A0"/>
+                </a:solidFill>
+                <a:latin typeface="Consolas"/>
+              </a:rPr>
+              <a:t>  content: "\258C";</a:t>
+            </a:r>
+          </a:p>
+          <a:p>
+            <a:pPr>
+              <a:spcAft>
+                <a:spcPts val="0"/>
+              </a:spcAft>
+            </a:pPr>
+            <a:r>
+              <a:rPr sz="1800">
+                <a:solidFill>
+                  <a:srgbClr val="6D8C97"/>
+                </a:solidFill>
+                <a:latin typeface="Consolas"/>
+              </a:rPr>
+              <a:t>  86  </a:t>
+            </a:r>
+            <a:r>
+              <a:rPr sz="1800">
+                <a:solidFill>
+                  <a:srgbClr val="7FE0A0"/>
+                </a:solidFill>
+                <a:latin typeface="Consolas"/>
+              </a:rPr>
+              <a:t>  color: #01aefd;</a:t>
+            </a:r>
+          </a:p>
+          <a:p>
+            <a:pPr>
+              <a:spcAft>
+                <a:spcPts val="0"/>
+              </a:spcAft>
+            </a:pPr>
+            <a:r>
+              <a:rPr sz="1800">
+                <a:solidFill>
+                  <a:srgbClr val="6D8C97"/>
+                </a:solidFill>
+                <a:latin typeface="Consolas"/>
+              </a:rPr>
+              <a:t>  87  </a:t>
+            </a:r>
+            <a:r>
+              <a:rPr sz="1800">
+                <a:solidFill>
+                  <a:srgbClr val="7FE0A0"/>
+                </a:solidFill>
+                <a:latin typeface="Consolas"/>
+              </a:rPr>
+              <a:t>  animation: blink 1s steps(2, start) infinite;</a:t>
+            </a:r>
+          </a:p>
+          <a:p>
+            <a:pPr>
+              <a:spcAft>
+                <a:spcPts val="0"/>
+              </a:spcAft>
+            </a:pPr>
+            <a:r>
+              <a:rPr sz="1800">
+                <a:solidFill>
+                  <a:srgbClr val="6D8C97"/>
+                </a:solidFill>
+                <a:latin typeface="Consolas"/>
+              </a:rPr>
+              <a:t>  88  </a:t>
+            </a:r>
+            <a:r>
+              <a:rPr sz="1800">
+                <a:solidFill>
+                  <a:srgbClr val="7FE0A0"/>
+                </a:solidFill>
+                <a:latin typeface="Consolas"/>
+              </a:rPr>
+              <a:t>}</a:t>
+            </a:r>
+          </a:p>
+          <a:p>
+            <a:pPr>
+              <a:spcAft>
+                <a:spcPts val="0"/>
+              </a:spcAft>
+            </a:pPr>
+            <a:r>
+              <a:rPr sz="1800">
+                <a:solidFill>
+                  <a:srgbClr val="6D8C97"/>
+                </a:solidFill>
+                <a:latin typeface="Consolas"/>
+              </a:rPr>
+              <a:t>  89  </a:t>
+            </a:r>
+            <a:r>
+              <a:rPr sz="1800">
+                <a:solidFill>
+                  <a:srgbClr val="7FE0A0"/>
+                </a:solidFill>
+                <a:latin typeface="Consolas"/>
+              </a:rPr>
+              <a:t>@keyframes blink { to { visibility: hidden; } }</a:t>
+            </a:r>
+          </a:p>
+        </p:txBody>
+      </p:sp>
+      <p:sp>
+        <p:nvSpPr>
+          <p:cNvPr id="4" name="TextBox 3"/>
+          <p:cNvSpPr txBox="1"/>
+          <p:nvPr/>
+        </p:nvSpPr>
+        <p:spPr>
+          <a:xfrm>
+            <a:off x="548640" y="5623560"/>
+            <a:ext cx="11064240" cy="1051560"/>
+          </a:xfrm>
+          <a:prstGeom prst="rect">
+            <a:avLst/>
+          </a:prstGeom>
+          <a:noFill/>
+        </p:spPr>
+        <p:txBody>
+          <a:bodyPr wrap="square">
+            <a:spAutoFit/>
+          </a:bodyPr>
+          <a:lstStyle/>
+          <a:p>
+            <a:r>
+              <a:rPr sz="2000">
+                <a:solidFill>
+                  <a:srgbClr val="DCECEF"/>
+                </a:solidFill>
+              </a:rPr>
+              <a:t>That is the whole piece. Check yours looks the same before moving on.</a:t>
+            </a:r>
+          </a:p>
+        </p:txBody>
+      </p:sp>
+    </p:spTree>
+  </p:cSld>
+  <p:clrMapOvr>
+    <a:masterClrMapping/>
+  </p:clrMapOvr>
+</p:sld>
+</file>
+
+<file path=ppt/slides/slide65.xml><?xml version="1.0" encoding="utf-8"?>
+<p:sld xmlns:a="http://schemas.openxmlformats.org/drawingml/2006/main" xmlns:p="http://schemas.openxmlformats.org/presentationml/2006/main" xmlns:r="http://schemas.openxmlformats.org/officeDocument/2006/relationships">
+  <p:cSld>
+    <p:spTree>
+      <p:nvGrpSpPr>
+        <p:cNvPr id="1" name=""/>
+        <p:cNvGrpSpPr/>
+        <p:nvPr/>
+      </p:nvGrpSpPr>
+      <p:grpSpPr/>
+      <p:sp>
+        <p:nvSpPr>
+          <p:cNvPr id="2" name="Title 1"/>
+          <p:cNvSpPr>
+            <a:spLocks noGrp="1"/>
+          </p:cNvSpPr>
+          <p:nvPr>
+            <p:ph type="title"/>
+          </p:nvPr>
+        </p:nvSpPr>
+        <p:spPr/>
+        <p:txBody>
+          <a:bodyPr/>
+          <a:lstStyle/>
+          <a:p>
+            <a:r>
+              <a:rPr sz="3800" b="1">
+                <a:solidFill>
+                  <a:srgbClr val="1F2A37"/>
+                </a:solidFill>
+              </a:rPr>
+              <a:t>Checkpoint: watch it type</a:t>
+            </a:r>
+          </a:p>
+        </p:txBody>
+      </p:sp>
+      <p:sp>
+        <p:nvSpPr>
+          <p:cNvPr id="3" name="TextBox 2"/>
+          <p:cNvSpPr txBox="1"/>
+          <p:nvPr/>
+        </p:nvSpPr>
+        <p:spPr>
+          <a:xfrm>
+            <a:off x="868680" y="502920"/>
+            <a:ext cx="5486400" cy="457200"/>
+          </a:xfrm>
+          <a:prstGeom prst="rect">
+            <a:avLst/>
+          </a:prstGeom>
+          <a:noFill/>
+        </p:spPr>
+        <p:txBody>
+          <a:bodyPr wrap="none">
+            <a:spAutoFit/>
+          </a:bodyPr>
+          <a:lstStyle/>
+          <a:p>
+            <a:r>
+              <a:rPr sz="1500" b="1">
+                <a:solidFill>
+                  <a:srgbClr val="01AEFD"/>
+                </a:solidFill>
+              </a:rPr>
+              <a:t>CHECKPOINT - RUN IT</a:t>
+            </a:r>
+          </a:p>
+        </p:txBody>
+      </p:sp>
+      <p:sp>
+        <p:nvSpPr>
+          <p:cNvPr id="4" name="TextBox 3"/>
+          <p:cNvSpPr txBox="1"/>
+          <p:nvPr/>
+        </p:nvSpPr>
+        <p:spPr>
+          <a:xfrm>
+            <a:off x="822960" y="1828800"/>
+            <a:ext cx="10515600" cy="4206240"/>
+          </a:xfrm>
+          <a:prstGeom prst="rect">
+            <a:avLst/>
+          </a:prstGeom>
+          <a:noFill/>
+        </p:spPr>
+        <p:txBody>
+          <a:bodyPr wrap="square">
+            <a:spAutoFit/>
+          </a:bodyPr>
+          <a:lstStyle/>
+          <a:p>
+            <a:pPr>
+              <a:spcAft>
+                <a:spcPts val="1400"/>
+              </a:spcAft>
+            </a:pPr>
+            <a:r>
+              <a:rPr sz="2800">
+                <a:solidFill>
+                  <a:srgbClr val="01AEFD"/>
+                </a:solidFill>
+              </a:rPr>
+              <a:t>Press Run and send a question. Now the reply appears a few letters at a time, with a blinking cursor, instead of all at once. Same data as last week - you are just drawing each piece the moment it arrives.</a:t>
+            </a:r>
+          </a:p>
+          <a:p>
+            <a:pPr>
+              <a:spcAft>
+                <a:spcPts val="1400"/>
+              </a:spcAft>
+            </a:pPr>
+            <a:r>
+              <a:rPr sz="2400">
+                <a:solidFill>
+                  <a:srgbClr val="1F2A37"/>
+                </a:solidFill>
+              </a:rPr>
+              <a:t>• Run it in the classroom, or press Show the output in the web deck.</a:t>
+            </a:r>
+          </a:p>
+          <a:p>
+            <a:pPr>
+              <a:spcAft>
+                <a:spcPts val="1400"/>
+              </a:spcAft>
+            </a:pPr>
+            <a:r>
+              <a:rPr sz="2400">
+                <a:solidFill>
+                  <a:srgbClr val="1F2A37"/>
+                </a:solidFill>
+              </a:rPr>
+              <a:t>• Everyone's screen should match this.</a:t>
+            </a:r>
+          </a:p>
+        </p:txBody>
+      </p:sp>
+    </p:spTree>
+  </p:cSld>
+  <p:clrMapOvr>
+    <a:masterClrMapping/>
+  </p:clrMapOvr>
+</p:sld>
+</file>
+
+<file path=ppt/slides/slide66.xml><?xml version="1.0" encoding="utf-8"?>
+<p:sld xmlns:a="http://schemas.openxmlformats.org/drawingml/2006/main" xmlns:p="http://schemas.openxmlformats.org/presentationml/2006/main" xmlns:r="http://schemas.openxmlformats.org/officeDocument/2006/relationships">
+  <p:cSld>
+    <p:spTree>
+      <p:nvGrpSpPr>
+        <p:cNvPr id="1" name=""/>
+        <p:cNvGrpSpPr/>
+        <p:nvPr/>
+      </p:nvGrpSpPr>
+      <p:grpSpPr/>
+      <p:sp>
+        <p:nvSpPr>
+          <p:cNvPr id="2" name="Title 1"/>
+          <p:cNvSpPr>
+            <a:spLocks noGrp="1"/>
+          </p:cNvSpPr>
+          <p:nvPr>
+            <p:ph type="title"/>
+          </p:nvPr>
+        </p:nvSpPr>
+        <p:spPr/>
+        <p:txBody>
+          <a:bodyPr/>
+          <a:lstStyle/>
+          <a:p>
+            <a:r>
+              <a:rPr sz="3800" b="1">
+                <a:solidFill>
+                  <a:srgbClr val="1F2A37"/>
+                </a:solidFill>
+              </a:rPr>
+              <a:t>Test the sad path</a:t>
+            </a:r>
+          </a:p>
+        </p:txBody>
+      </p:sp>
+      <p:sp>
+        <p:nvSpPr>
+          <p:cNvPr id="3" name="TextBox 2"/>
+          <p:cNvSpPr txBox="1"/>
+          <p:nvPr/>
+        </p:nvSpPr>
+        <p:spPr>
+          <a:xfrm>
+            <a:off x="822960" y="1828800"/>
+            <a:ext cx="10515600" cy="4206240"/>
+          </a:xfrm>
+          <a:prstGeom prst="rect">
+            <a:avLst/>
+          </a:prstGeom>
+          <a:noFill/>
+        </p:spPr>
+        <p:txBody>
+          <a:bodyPr wrap="square">
+            <a:spAutoFit/>
+          </a:bodyPr>
+          <a:lstStyle/>
+          <a:p>
+            <a:pPr>
+              <a:spcAft>
+                <a:spcPts val="1400"/>
+              </a:spcAft>
+            </a:pPr>
+            <a:r>
+              <a:rPr sz="2800">
+                <a:solidFill>
+                  <a:srgbClr val="01AEFD"/>
+                </a:solidFill>
+              </a:rPr>
+              <a:t>Break your key and send</a:t>
+            </a:r>
+          </a:p>
+          <a:p>
+            <a:pPr>
+              <a:spcAft>
+                <a:spcPts val="1400"/>
+              </a:spcAft>
+            </a:pPr>
+            <a:r>
+              <a:rPr sz="2400">
+                <a:solidFill>
+                  <a:srgbClr val="1F2A37"/>
+                </a:solidFill>
+              </a:rPr>
+              <a:t>• Does the empty bubble get cleaned up?</a:t>
+            </a:r>
+          </a:p>
+          <a:p>
+            <a:pPr>
+              <a:spcAft>
+                <a:spcPts val="1400"/>
+              </a:spcAft>
+            </a:pPr>
+            <a:r>
+              <a:rPr sz="2400">
+                <a:solidFill>
+                  <a:srgbClr val="1F2A37"/>
+                </a:solidFill>
+              </a:rPr>
+              <a:t>• Always check what happens when it fails</a:t>
             </a:r>
           </a:p>
         </p:txBody>

--- a/ai101/slides/week-11.pptx
+++ b/ai101/slides/week-11.pptx
@@ -13594,7 +13594,7 @@
         <p:spPr>
           <a:xfrm>
             <a:off x="3606393" y="2554833"/>
-            <a:ext cx="4945075" cy="1806854"/>
+            <a:ext cx="4945075" cy="1730776"/>
           </a:xfrm>
           <a:prstGeom prst="roundRect">
             <a:avLst/>
@@ -13769,6 +13769,94 @@
         </p:nvSpPr>
         <p:spPr>
           <a:xfrm>
+            <a:off x="3701491" y="4409236"/>
+            <a:ext cx="1426463" cy="228234"/>
+          </a:xfrm>
+          <a:prstGeom prst="roundRect">
+            <a:avLst/>
+          </a:prstGeom>
+          <a:solidFill>
+            <a:srgbClr val="16303A"/>
+          </a:solidFill>
+          <a:ln>
+            <a:noFill/>
+          </a:ln>
+          <a:effectLst/>
+        </p:spPr>
+        <p:style>
+          <a:lnRef idx="1">
+            <a:schemeClr val="accent1"/>
+          </a:lnRef>
+          <a:fillRef idx="3">
+            <a:schemeClr val="accent1"/>
+          </a:fillRef>
+          <a:effectRef idx="2">
+            <a:schemeClr val="accent1"/>
+          </a:effectRef>
+          <a:fontRef idx="minor">
+            <a:schemeClr val="lt1"/>
+          </a:fontRef>
+        </p:style>
+        <p:txBody>
+          <a:bodyPr rtlCol="0" anchor="ctr"/>
+          <a:lstStyle/>
+          <a:p>
+            <a:pPr algn="ctr"/>
+          </a:p>
+        </p:txBody>
+      </p:sp>
+      <p:sp>
+        <p:nvSpPr>
+          <p:cNvPr id="12" name="Rounded Rectangle 11"/>
+          <p:cNvSpPr/>
+          <p:nvPr/>
+        </p:nvSpPr>
+        <p:spPr>
+          <a:xfrm>
+            <a:off x="5223052" y="4409236"/>
+            <a:ext cx="1426463" cy="228234"/>
+          </a:xfrm>
+          <a:prstGeom prst="roundRect">
+            <a:avLst/>
+          </a:prstGeom>
+          <a:solidFill>
+            <a:srgbClr val="16303A"/>
+          </a:solidFill>
+          <a:ln>
+            <a:noFill/>
+          </a:ln>
+          <a:effectLst/>
+        </p:spPr>
+        <p:style>
+          <a:lnRef idx="1">
+            <a:schemeClr val="accent1"/>
+          </a:lnRef>
+          <a:fillRef idx="3">
+            <a:schemeClr val="accent1"/>
+          </a:fillRef>
+          <a:effectRef idx="2">
+            <a:schemeClr val="accent1"/>
+          </a:effectRef>
+          <a:fontRef idx="minor">
+            <a:schemeClr val="lt1"/>
+          </a:fontRef>
+        </p:style>
+        <p:txBody>
+          <a:bodyPr rtlCol="0" anchor="ctr"/>
+          <a:lstStyle/>
+          <a:p>
+            <a:pPr algn="ctr"/>
+          </a:p>
+        </p:txBody>
+      </p:sp>
+      <p:sp>
+        <p:nvSpPr>
+          <p:cNvPr id="13" name="Rounded Rectangle 12"/>
+          <p:cNvSpPr/>
+          <p:nvPr/>
+        </p:nvSpPr>
+        <p:spPr>
+          <a:xfrm>
             <a:off x="3701491" y="4856195"/>
             <a:ext cx="3899001" cy="323331"/>
           </a:xfrm>
@@ -13807,7 +13895,7 @@
       </p:sp>
       <p:sp>
         <p:nvSpPr>
-          <p:cNvPr id="12" name="Rounded Rectangle 11"/>
+          <p:cNvPr id="14" name="Rounded Rectangle 13"/>
           <p:cNvSpPr/>
           <p:nvPr/>
         </p:nvSpPr>
@@ -13851,7 +13939,7 @@
       </p:sp>
       <p:sp>
         <p:nvSpPr>
-          <p:cNvPr id="13" name="Rounded Rectangle 12"/>
+          <p:cNvPr id="15" name="Rounded Rectangle 14"/>
           <p:cNvSpPr/>
           <p:nvPr/>
         </p:nvSpPr>
@@ -13895,7 +13983,7 @@
       </p:sp>
       <p:sp>
         <p:nvSpPr>
-          <p:cNvPr id="14" name="Rounded Rectangle 13"/>
+          <p:cNvPr id="16" name="Rounded Rectangle 15"/>
           <p:cNvSpPr/>
           <p:nvPr/>
         </p:nvSpPr>
@@ -13939,7 +14027,7 @@
       </p:sp>
       <p:sp>
         <p:nvSpPr>
-          <p:cNvPr id="15" name="TextBox 14"/>
+          <p:cNvPr id="17" name="TextBox 16"/>
           <p:cNvSpPr txBox="1"/>
           <p:nvPr/>
         </p:nvSpPr>
@@ -26759,7 +26847,7 @@
         <p:spPr>
           <a:xfrm>
             <a:off x="3606393" y="2554833"/>
-            <a:ext cx="4945075" cy="1806854"/>
+            <a:ext cx="4945075" cy="1730776"/>
           </a:xfrm>
           <a:prstGeom prst="roundRect">
             <a:avLst/>
@@ -26934,6 +27022,94 @@
         </p:nvSpPr>
         <p:spPr>
           <a:xfrm>
+            <a:off x="3701491" y="4409236"/>
+            <a:ext cx="1426463" cy="228234"/>
+          </a:xfrm>
+          <a:prstGeom prst="roundRect">
+            <a:avLst/>
+          </a:prstGeom>
+          <a:solidFill>
+            <a:srgbClr val="16303A"/>
+          </a:solidFill>
+          <a:ln>
+            <a:noFill/>
+          </a:ln>
+          <a:effectLst/>
+        </p:spPr>
+        <p:style>
+          <a:lnRef idx="1">
+            <a:schemeClr val="accent1"/>
+          </a:lnRef>
+          <a:fillRef idx="3">
+            <a:schemeClr val="accent1"/>
+          </a:fillRef>
+          <a:effectRef idx="2">
+            <a:schemeClr val="accent1"/>
+          </a:effectRef>
+          <a:fontRef idx="minor">
+            <a:schemeClr val="lt1"/>
+          </a:fontRef>
+        </p:style>
+        <p:txBody>
+          <a:bodyPr rtlCol="0" anchor="ctr"/>
+          <a:lstStyle/>
+          <a:p>
+            <a:pPr algn="ctr"/>
+          </a:p>
+        </p:txBody>
+      </p:sp>
+      <p:sp>
+        <p:nvSpPr>
+          <p:cNvPr id="12" name="Rounded Rectangle 11"/>
+          <p:cNvSpPr/>
+          <p:nvPr/>
+        </p:nvSpPr>
+        <p:spPr>
+          <a:xfrm>
+            <a:off x="5223052" y="4409236"/>
+            <a:ext cx="1426463" cy="228234"/>
+          </a:xfrm>
+          <a:prstGeom prst="roundRect">
+            <a:avLst/>
+          </a:prstGeom>
+          <a:solidFill>
+            <a:srgbClr val="16303A"/>
+          </a:solidFill>
+          <a:ln>
+            <a:noFill/>
+          </a:ln>
+          <a:effectLst/>
+        </p:spPr>
+        <p:style>
+          <a:lnRef idx="1">
+            <a:schemeClr val="accent1"/>
+          </a:lnRef>
+          <a:fillRef idx="3">
+            <a:schemeClr val="accent1"/>
+          </a:fillRef>
+          <a:effectRef idx="2">
+            <a:schemeClr val="accent1"/>
+          </a:effectRef>
+          <a:fontRef idx="minor">
+            <a:schemeClr val="lt1"/>
+          </a:fontRef>
+        </p:style>
+        <p:txBody>
+          <a:bodyPr rtlCol="0" anchor="ctr"/>
+          <a:lstStyle/>
+          <a:p>
+            <a:pPr algn="ctr"/>
+          </a:p>
+        </p:txBody>
+      </p:sp>
+      <p:sp>
+        <p:nvSpPr>
+          <p:cNvPr id="13" name="Rounded Rectangle 12"/>
+          <p:cNvSpPr/>
+          <p:nvPr/>
+        </p:nvSpPr>
+        <p:spPr>
+          <a:xfrm>
             <a:off x="3701491" y="4856195"/>
             <a:ext cx="3899001" cy="323331"/>
           </a:xfrm>
@@ -26972,7 +27148,7 @@
       </p:sp>
       <p:sp>
         <p:nvSpPr>
-          <p:cNvPr id="12" name="Rounded Rectangle 11"/>
+          <p:cNvPr id="14" name="Rounded Rectangle 13"/>
           <p:cNvSpPr/>
           <p:nvPr/>
         </p:nvSpPr>
@@ -27016,7 +27192,7 @@
       </p:sp>
       <p:sp>
         <p:nvSpPr>
-          <p:cNvPr id="13" name="Rounded Rectangle 12"/>
+          <p:cNvPr id="15" name="Rounded Rectangle 14"/>
           <p:cNvSpPr/>
           <p:nvPr/>
         </p:nvSpPr>
@@ -27060,7 +27236,7 @@
       </p:sp>
       <p:sp>
         <p:nvSpPr>
-          <p:cNvPr id="14" name="Rounded Rectangle 13"/>
+          <p:cNvPr id="16" name="Rounded Rectangle 15"/>
           <p:cNvSpPr/>
           <p:nvPr/>
         </p:nvSpPr>
@@ -27104,7 +27280,7 @@
       </p:sp>
       <p:sp>
         <p:nvSpPr>
-          <p:cNvPr id="15" name="TextBox 14"/>
+          <p:cNvPr id="17" name="TextBox 16"/>
           <p:cNvSpPr txBox="1"/>
           <p:nvPr/>
         </p:nvSpPr>
@@ -27883,7 +28059,7 @@
         <p:spPr>
           <a:xfrm>
             <a:off x="3606393" y="2554833"/>
-            <a:ext cx="4945075" cy="1806854"/>
+            <a:ext cx="4945075" cy="1730776"/>
           </a:xfrm>
           <a:prstGeom prst="roundRect">
             <a:avLst/>
@@ -28058,6 +28234,94 @@
         </p:nvSpPr>
         <p:spPr>
           <a:xfrm>
+            <a:off x="3701491" y="4409236"/>
+            <a:ext cx="1426463" cy="228234"/>
+          </a:xfrm>
+          <a:prstGeom prst="roundRect">
+            <a:avLst/>
+          </a:prstGeom>
+          <a:solidFill>
+            <a:srgbClr val="16303A"/>
+          </a:solidFill>
+          <a:ln>
+            <a:noFill/>
+          </a:ln>
+          <a:effectLst/>
+        </p:spPr>
+        <p:style>
+          <a:lnRef idx="1">
+            <a:schemeClr val="accent1"/>
+          </a:lnRef>
+          <a:fillRef idx="3">
+            <a:schemeClr val="accent1"/>
+          </a:fillRef>
+          <a:effectRef idx="2">
+            <a:schemeClr val="accent1"/>
+          </a:effectRef>
+          <a:fontRef idx="minor">
+            <a:schemeClr val="lt1"/>
+          </a:fontRef>
+        </p:style>
+        <p:txBody>
+          <a:bodyPr rtlCol="0" anchor="ctr"/>
+          <a:lstStyle/>
+          <a:p>
+            <a:pPr algn="ctr"/>
+          </a:p>
+        </p:txBody>
+      </p:sp>
+      <p:sp>
+        <p:nvSpPr>
+          <p:cNvPr id="12" name="Rounded Rectangle 11"/>
+          <p:cNvSpPr/>
+          <p:nvPr/>
+        </p:nvSpPr>
+        <p:spPr>
+          <a:xfrm>
+            <a:off x="5223052" y="4409236"/>
+            <a:ext cx="1426463" cy="228234"/>
+          </a:xfrm>
+          <a:prstGeom prst="roundRect">
+            <a:avLst/>
+          </a:prstGeom>
+          <a:solidFill>
+            <a:srgbClr val="16303A"/>
+          </a:solidFill>
+          <a:ln>
+            <a:noFill/>
+          </a:ln>
+          <a:effectLst/>
+        </p:spPr>
+        <p:style>
+          <a:lnRef idx="1">
+            <a:schemeClr val="accent1"/>
+          </a:lnRef>
+          <a:fillRef idx="3">
+            <a:schemeClr val="accent1"/>
+          </a:fillRef>
+          <a:effectRef idx="2">
+            <a:schemeClr val="accent1"/>
+          </a:effectRef>
+          <a:fontRef idx="minor">
+            <a:schemeClr val="lt1"/>
+          </a:fontRef>
+        </p:style>
+        <p:txBody>
+          <a:bodyPr rtlCol="0" anchor="ctr"/>
+          <a:lstStyle/>
+          <a:p>
+            <a:pPr algn="ctr"/>
+          </a:p>
+        </p:txBody>
+      </p:sp>
+      <p:sp>
+        <p:nvSpPr>
+          <p:cNvPr id="13" name="Rounded Rectangle 12"/>
+          <p:cNvSpPr/>
+          <p:nvPr/>
+        </p:nvSpPr>
+        <p:spPr>
+          <a:xfrm>
             <a:off x="3701491" y="4856195"/>
             <a:ext cx="3899001" cy="323331"/>
           </a:xfrm>
@@ -28096,7 +28360,7 @@
       </p:sp>
       <p:sp>
         <p:nvSpPr>
-          <p:cNvPr id="12" name="Rounded Rectangle 11"/>
+          <p:cNvPr id="14" name="Rounded Rectangle 13"/>
           <p:cNvSpPr/>
           <p:nvPr/>
         </p:nvSpPr>
@@ -28140,7 +28404,7 @@
       </p:sp>
       <p:sp>
         <p:nvSpPr>
-          <p:cNvPr id="13" name="Rounded Rectangle 12"/>
+          <p:cNvPr id="15" name="Rounded Rectangle 14"/>
           <p:cNvSpPr/>
           <p:nvPr/>
         </p:nvSpPr>
@@ -28184,7 +28448,7 @@
       </p:sp>
       <p:sp>
         <p:nvSpPr>
-          <p:cNvPr id="14" name="Rounded Rectangle 13"/>
+          <p:cNvPr id="16" name="Rounded Rectangle 15"/>
           <p:cNvSpPr/>
           <p:nvPr/>
         </p:nvSpPr>
@@ -28228,7 +28492,7 @@
       </p:sp>
       <p:sp>
         <p:nvSpPr>
-          <p:cNvPr id="15" name="TextBox 14"/>
+          <p:cNvPr id="17" name="TextBox 16"/>
           <p:cNvSpPr txBox="1"/>
           <p:nvPr/>
         </p:nvSpPr>
@@ -29347,7 +29611,7 @@
         <p:spPr>
           <a:xfrm>
             <a:off x="3606393" y="2554833"/>
-            <a:ext cx="4945075" cy="1806854"/>
+            <a:ext cx="4945075" cy="1730776"/>
           </a:xfrm>
           <a:prstGeom prst="roundRect">
             <a:avLst/>
@@ -29522,6 +29786,94 @@
         </p:nvSpPr>
         <p:spPr>
           <a:xfrm>
+            <a:off x="3701491" y="4409236"/>
+            <a:ext cx="1426463" cy="228234"/>
+          </a:xfrm>
+          <a:prstGeom prst="roundRect">
+            <a:avLst/>
+          </a:prstGeom>
+          <a:solidFill>
+            <a:srgbClr val="16303A"/>
+          </a:solidFill>
+          <a:ln>
+            <a:noFill/>
+          </a:ln>
+          <a:effectLst/>
+        </p:spPr>
+        <p:style>
+          <a:lnRef idx="1">
+            <a:schemeClr val="accent1"/>
+          </a:lnRef>
+          <a:fillRef idx="3">
+            <a:schemeClr val="accent1"/>
+          </a:fillRef>
+          <a:effectRef idx="2">
+            <a:schemeClr val="accent1"/>
+          </a:effectRef>
+          <a:fontRef idx="minor">
+            <a:schemeClr val="lt1"/>
+          </a:fontRef>
+        </p:style>
+        <p:txBody>
+          <a:bodyPr rtlCol="0" anchor="ctr"/>
+          <a:lstStyle/>
+          <a:p>
+            <a:pPr algn="ctr"/>
+          </a:p>
+        </p:txBody>
+      </p:sp>
+      <p:sp>
+        <p:nvSpPr>
+          <p:cNvPr id="12" name="Rounded Rectangle 11"/>
+          <p:cNvSpPr/>
+          <p:nvPr/>
+        </p:nvSpPr>
+        <p:spPr>
+          <a:xfrm>
+            <a:off x="5223052" y="4409236"/>
+            <a:ext cx="1426463" cy="228234"/>
+          </a:xfrm>
+          <a:prstGeom prst="roundRect">
+            <a:avLst/>
+          </a:prstGeom>
+          <a:solidFill>
+            <a:srgbClr val="16303A"/>
+          </a:solidFill>
+          <a:ln>
+            <a:noFill/>
+          </a:ln>
+          <a:effectLst/>
+        </p:spPr>
+        <p:style>
+          <a:lnRef idx="1">
+            <a:schemeClr val="accent1"/>
+          </a:lnRef>
+          <a:fillRef idx="3">
+            <a:schemeClr val="accent1"/>
+          </a:fillRef>
+          <a:effectRef idx="2">
+            <a:schemeClr val="accent1"/>
+          </a:effectRef>
+          <a:fontRef idx="minor">
+            <a:schemeClr val="lt1"/>
+          </a:fontRef>
+        </p:style>
+        <p:txBody>
+          <a:bodyPr rtlCol="0" anchor="ctr"/>
+          <a:lstStyle/>
+          <a:p>
+            <a:pPr algn="ctr"/>
+          </a:p>
+        </p:txBody>
+      </p:sp>
+      <p:sp>
+        <p:nvSpPr>
+          <p:cNvPr id="13" name="Rounded Rectangle 12"/>
+          <p:cNvSpPr/>
+          <p:nvPr/>
+        </p:nvSpPr>
+        <p:spPr>
+          <a:xfrm>
             <a:off x="3701491" y="4856195"/>
             <a:ext cx="3899001" cy="323331"/>
           </a:xfrm>
@@ -29560,7 +29912,7 @@
       </p:sp>
       <p:sp>
         <p:nvSpPr>
-          <p:cNvPr id="12" name="Rounded Rectangle 11"/>
+          <p:cNvPr id="14" name="Rounded Rectangle 13"/>
           <p:cNvSpPr/>
           <p:nvPr/>
         </p:nvSpPr>
@@ -29604,7 +29956,7 @@
       </p:sp>
       <p:sp>
         <p:nvSpPr>
-          <p:cNvPr id="13" name="Rounded Rectangle 12"/>
+          <p:cNvPr id="15" name="Rounded Rectangle 14"/>
           <p:cNvSpPr/>
           <p:nvPr/>
         </p:nvSpPr>
@@ -29648,7 +30000,7 @@
       </p:sp>
       <p:sp>
         <p:nvSpPr>
-          <p:cNvPr id="14" name="Rounded Rectangle 13"/>
+          <p:cNvPr id="16" name="Rounded Rectangle 15"/>
           <p:cNvSpPr/>
           <p:nvPr/>
         </p:nvSpPr>
@@ -29692,7 +30044,7 @@
       </p:sp>
       <p:sp>
         <p:nvSpPr>
-          <p:cNvPr id="15" name="TextBox 14"/>
+          <p:cNvPr id="17" name="TextBox 16"/>
           <p:cNvSpPr txBox="1"/>
           <p:nvPr/>
         </p:nvSpPr>
